--- a/V6a_8_6_20_slides.pptx
+++ b/V6a_8_6_20_slides.pptx
@@ -19,6 +19,8 @@
     <p:sldId id="267" r:id="rId18"/>
     <p:sldId id="268" r:id="rId19"/>
     <p:sldId id="269" r:id="rId20"/>
+    <p:sldId id="270" r:id="rId21"/>
+    <p:sldId id="271" r:id="rId22"/>
   </p:sldIdLst>
   <p:sldSz cx="12191695" cy="6858000" type="screen4x3"/>
   <p:notesSz cx="6858000" cy="9144000"/>
@@ -7438,6 +7440,2041 @@
 </p:sld>
 </file>
 
+<file path=ppt/slides/slide15.xml><?xml version="1.0" encoding="utf-8"?>
+<p:sld xmlns:a="http://schemas.openxmlformats.org/drawingml/2006/main" xmlns:p="http://schemas.openxmlformats.org/presentationml/2006/main" xmlns:r="http://schemas.openxmlformats.org/officeDocument/2006/relationships">
+  <p:cSld>
+    <p:spTree>
+      <p:nvGrpSpPr>
+        <p:cNvPr id="1" name=""/>
+        <p:cNvGrpSpPr/>
+        <p:nvPr/>
+      </p:nvGrpSpPr>
+      <p:grpSpPr/>
+      <p:sp>
+        <p:nvSpPr>
+          <p:cNvPr id="2" name="TextBox 1"/>
+          <p:cNvSpPr txBox="1"/>
+          <p:nvPr/>
+        </p:nvSpPr>
+        <p:spPr>
+          <a:xfrm>
+            <a:off x="11155680" y="274320"/>
+            <a:ext cx="914400" cy="274320"/>
+          </a:xfrm>
+          <a:prstGeom prst="rect">
+            <a:avLst/>
+          </a:prstGeom>
+          <a:noFill/>
+        </p:spPr>
+        <p:txBody>
+          <a:bodyPr wrap="square" lIns="45720" rIns="45720" tIns="18288" bIns="18288" anchor="t">
+            <a:spAutoFit/>
+          </a:bodyPr>
+          <a:lstStyle/>
+          <a:p>
+            <a:pPr algn="r"/>
+            <a:r>
+              <a:rPr sz="800" b="1" i="0">
+                <a:solidFill>
+                  <a:srgbClr val="707070"/>
+                </a:solidFill>
+                <a:latin typeface="Calibri"/>
+              </a:rPr>
+              <a:t>JÖNKÖPING UNIVERSITY</a:t>
+            </a:r>
+          </a:p>
+        </p:txBody>
+      </p:sp>
+      <p:sp>
+        <p:nvSpPr>
+          <p:cNvPr id="3" name="Rectangle 2"/>
+          <p:cNvSpPr/>
+          <p:nvPr/>
+        </p:nvSpPr>
+        <p:spPr>
+          <a:xfrm>
+            <a:off x="457200" y="411480"/>
+            <a:ext cx="457200" cy="73152"/>
+          </a:xfrm>
+          <a:prstGeom prst="rect">
+            <a:avLst/>
+          </a:prstGeom>
+          <a:solidFill>
+            <a:srgbClr val="A9D6EF"/>
+          </a:solidFill>
+          <a:ln>
+            <a:noFill/>
+          </a:ln>
+        </p:spPr>
+        <p:style>
+          <a:lnRef idx="1">
+            <a:schemeClr val="accent1"/>
+          </a:lnRef>
+          <a:fillRef idx="3">
+            <a:schemeClr val="accent1"/>
+          </a:fillRef>
+          <a:effectRef idx="2">
+            <a:schemeClr val="accent1"/>
+          </a:effectRef>
+          <a:fontRef idx="minor">
+            <a:schemeClr val="lt1"/>
+          </a:fontRef>
+        </p:style>
+        <p:txBody>
+          <a:bodyPr rtlCol="0" anchor="ctr"/>
+          <a:lstStyle/>
+          <a:p>
+            <a:pPr algn="ctr"/>
+          </a:p>
+        </p:txBody>
+      </p:sp>
+      <p:sp>
+        <p:nvSpPr>
+          <p:cNvPr id="4" name="TextBox 3"/>
+          <p:cNvSpPr txBox="1"/>
+          <p:nvPr/>
+        </p:nvSpPr>
+        <p:spPr>
+          <a:xfrm>
+            <a:off x="457200" y="502920"/>
+            <a:ext cx="11430000" cy="822960"/>
+          </a:xfrm>
+          <a:prstGeom prst="rect">
+            <a:avLst/>
+          </a:prstGeom>
+          <a:noFill/>
+        </p:spPr>
+        <p:txBody>
+          <a:bodyPr wrap="square" lIns="45720" rIns="45720" tIns="18288" bIns="18288" anchor="t">
+            <a:spAutoFit/>
+          </a:bodyPr>
+          <a:lstStyle/>
+          <a:p>
+            <a:pPr algn="l"/>
+            <a:r>
+              <a:rPr sz="3000" b="0" i="0">
+                <a:solidFill>
+                  <a:srgbClr val="000000"/>
+                </a:solidFill>
+                <a:latin typeface="Calibri Light"/>
+              </a:rPr>
+              <a:t>V6a: A SINGLE COMMON OFFSET FACTOR?</a:t>
+            </a:r>
+          </a:p>
+        </p:txBody>
+      </p:sp>
+      <p:pic>
+        <p:nvPicPr>
+          <p:cNvPr id="5" name="Picture 4" descr="V6a_offset_window.png"/>
+          <p:cNvPicPr>
+            <a:picLocks noChangeAspect="1"/>
+          </p:cNvPicPr>
+          <p:nvPr/>
+        </p:nvPicPr>
+        <p:blipFill>
+          <a:blip r:embed="rId2"/>
+          <a:stretch>
+            <a:fillRect/>
+          </a:stretch>
+        </p:blipFill>
+        <p:spPr>
+          <a:xfrm>
+            <a:off x="320040" y="1508760"/>
+            <a:ext cx="6858000" cy="3086291"/>
+          </a:xfrm>
+          <a:prstGeom prst="rect">
+            <a:avLst/>
+          </a:prstGeom>
+        </p:spPr>
+      </p:pic>
+      <p:sp>
+        <p:nvSpPr>
+          <p:cNvPr id="6" name="TextBox 5"/>
+          <p:cNvSpPr txBox="1"/>
+          <p:nvPr/>
+        </p:nvSpPr>
+        <p:spPr>
+          <a:xfrm>
+            <a:off x="7315200" y="1261872"/>
+            <a:ext cx="4572000" cy="365760"/>
+          </a:xfrm>
+          <a:prstGeom prst="rect">
+            <a:avLst/>
+          </a:prstGeom>
+          <a:noFill/>
+        </p:spPr>
+        <p:txBody>
+          <a:bodyPr wrap="square" lIns="45720" rIns="45720" tIns="18288" bIns="18288" anchor="t">
+            <a:spAutoFit/>
+          </a:bodyPr>
+          <a:lstStyle/>
+          <a:p>
+            <a:pPr algn="l"/>
+            <a:r>
+              <a:rPr sz="1600" b="0" i="0">
+                <a:solidFill>
+                  <a:srgbClr val="707070"/>
+                </a:solidFill>
+                <a:latin typeface="Calibri"/>
+              </a:rPr>
+              <a:t>Same interval method as V5</a:t>
+            </a:r>
+          </a:p>
+        </p:txBody>
+      </p:sp>
+      <p:graphicFrame>
+        <p:nvGraphicFramePr>
+          <p:cNvPr id="7" name="Table 6"/>
+          <p:cNvGraphicFramePr>
+            <a:graphicFrameLocks noGrp="1"/>
+          </p:cNvGraphicFramePr>
+          <p:nvPr/>
+        </p:nvGraphicFramePr>
+        <p:xfrm>
+          <a:off x="7315200" y="1645920"/>
+          <a:ext cx="4572000" cy="2057400"/>
+        </p:xfrm>
+        <a:graphic>
+          <a:graphicData uri="http://schemas.openxmlformats.org/drawingml/2006/table">
+            <a:tbl>
+              <a:tblPr firstRow="1" bandRow="1">
+                <a:tableStyleId>{5C22544A-7EE6-4342-B048-85BDC9FD1C3A}</a:tableStyleId>
+              </a:tblPr>
+              <a:tblGrid>
+                <a:gridCol w="2428875"/>
+                <a:gridCol w="2143125"/>
+              </a:tblGrid>
+              <a:tr h="342900">
+                <a:tc>
+                  <a:txBody>
+                    <a:bodyPr lIns="54864" rIns="54864" tIns="18288" bIns="18288" wrap="square" anchor="ctr"/>
+                    <a:lstStyle/>
+                    <a:p>
+                      <a:pPr algn="l"/>
+                      <a:r>
+                        <a:rPr sz="1100" b="1">
+                          <a:solidFill>
+                            <a:srgbClr val="FFFFFF"/>
+                          </a:solidFill>
+                          <a:latin typeface="Calibri"/>
+                        </a:rPr>
+                        <a:t>Property</a:t>
+                      </a:r>
+                    </a:p>
+                  </a:txBody>
+                  <a:tcPr>
+                    <a:solidFill>
+                      <a:srgbClr val="143D2F"/>
+                    </a:solidFill>
+                  </a:tcPr>
+                </a:tc>
+                <a:tc>
+                  <a:txBody>
+                    <a:bodyPr lIns="54864" rIns="54864" tIns="18288" bIns="18288" wrap="square" anchor="ctr"/>
+                    <a:lstStyle/>
+                    <a:p>
+                      <a:pPr algn="l"/>
+                      <a:r>
+                        <a:rPr sz="1100" b="1">
+                          <a:solidFill>
+                            <a:srgbClr val="FFFFFF"/>
+                          </a:solidFill>
+                          <a:latin typeface="Calibri"/>
+                        </a:rPr>
+                        <a:t>feasible k window</a:t>
+                      </a:r>
+                    </a:p>
+                  </a:txBody>
+                  <a:tcPr>
+                    <a:solidFill>
+                      <a:srgbClr val="143D2F"/>
+                    </a:solidFill>
+                  </a:tcPr>
+                </a:tc>
+              </a:tr>
+              <a:tr h="342900">
+                <a:tc>
+                  <a:txBody>
+                    <a:bodyPr lIns="54864" rIns="54864" tIns="18288" bIns="18288" wrap="square" anchor="ctr"/>
+                    <a:lstStyle/>
+                    <a:p>
+                      <a:pPr algn="l"/>
+                      <a:r>
+                        <a:rPr sz="1150" b="0">
+                          <a:solidFill>
+                            <a:srgbClr val="000000"/>
+                          </a:solidFill>
+                          <a:latin typeface="Calibri"/>
+                        </a:rPr>
+                        <a:t>E</a:t>
+                      </a:r>
+                    </a:p>
+                  </a:txBody>
+                  <a:tcPr/>
+                </a:tc>
+                <a:tc>
+                  <a:txBody>
+                    <a:bodyPr lIns="54864" rIns="54864" tIns="18288" bIns="18288" wrap="square" anchor="ctr"/>
+                    <a:lstStyle/>
+                    <a:p>
+                      <a:pPr algn="l"/>
+                      <a:r>
+                        <a:rPr sz="1150" b="0">
+                          <a:solidFill>
+                            <a:srgbClr val="000000"/>
+                          </a:solidFill>
+                          <a:latin typeface="Calibri"/>
+                        </a:rPr>
+                        <a:t>[1.24, 2.28]</a:t>
+                      </a:r>
+                    </a:p>
+                  </a:txBody>
+                  <a:tcPr/>
+                </a:tc>
+              </a:tr>
+              <a:tr h="342900">
+                <a:tc>
+                  <a:txBody>
+                    <a:bodyPr lIns="54864" rIns="54864" tIns="18288" bIns="18288" wrap="square" anchor="ctr"/>
+                    <a:lstStyle/>
+                    <a:p>
+                      <a:pPr algn="l"/>
+                      <a:r>
+                        <a:rPr sz="1150" b="0">
+                          <a:solidFill>
+                            <a:srgbClr val="000000"/>
+                          </a:solidFill>
+                          <a:latin typeface="Calibri"/>
+                        </a:rPr>
+                        <a:t>σ_y</a:t>
+                      </a:r>
+                    </a:p>
+                  </a:txBody>
+                  <a:tcPr/>
+                </a:tc>
+                <a:tc>
+                  <a:txBody>
+                    <a:bodyPr lIns="54864" rIns="54864" tIns="18288" bIns="18288" wrap="square" anchor="ctr"/>
+                    <a:lstStyle/>
+                    <a:p>
+                      <a:pPr algn="l"/>
+                      <a:r>
+                        <a:rPr sz="1150" b="0">
+                          <a:solidFill>
+                            <a:srgbClr val="000000"/>
+                          </a:solidFill>
+                          <a:latin typeface="Calibri"/>
+                        </a:rPr>
+                        <a:t>[0.63, 1.05]</a:t>
+                      </a:r>
+                    </a:p>
+                  </a:txBody>
+                  <a:tcPr/>
+                </a:tc>
+              </a:tr>
+              <a:tr h="342900">
+                <a:tc>
+                  <a:txBody>
+                    <a:bodyPr lIns="54864" rIns="54864" tIns="18288" bIns="18288" wrap="square" anchor="ctr"/>
+                    <a:lstStyle/>
+                    <a:p>
+                      <a:pPr algn="l"/>
+                      <a:r>
+                        <a:rPr sz="1150" b="0">
+                          <a:solidFill>
+                            <a:srgbClr val="000000"/>
+                          </a:solidFill>
+                          <a:latin typeface="Calibri"/>
+                        </a:rPr>
+                        <a:t>UTS</a:t>
+                      </a:r>
+                    </a:p>
+                  </a:txBody>
+                  <a:tcPr/>
+                </a:tc>
+                <a:tc>
+                  <a:txBody>
+                    <a:bodyPr lIns="54864" rIns="54864" tIns="18288" bIns="18288" wrap="square" anchor="ctr"/>
+                    <a:lstStyle/>
+                    <a:p>
+                      <a:pPr algn="l"/>
+                      <a:r>
+                        <a:rPr sz="1150" b="0">
+                          <a:solidFill>
+                            <a:srgbClr val="000000"/>
+                          </a:solidFill>
+                          <a:latin typeface="Calibri"/>
+                        </a:rPr>
+                        <a:t>[0.67, 1.25]</a:t>
+                      </a:r>
+                    </a:p>
+                  </a:txBody>
+                  <a:tcPr/>
+                </a:tc>
+              </a:tr>
+              <a:tr h="342900">
+                <a:tc>
+                  <a:txBody>
+                    <a:bodyPr lIns="54864" rIns="54864" tIns="18288" bIns="18288" wrap="square" anchor="ctr"/>
+                    <a:lstStyle/>
+                    <a:p>
+                      <a:pPr algn="l"/>
+                      <a:r>
+                        <a:rPr sz="1150" b="1">
+                          <a:solidFill>
+                            <a:srgbClr val="000000"/>
+                          </a:solidFill>
+                          <a:latin typeface="Calibri"/>
+                        </a:rPr>
+                        <a:t>ALL three</a:t>
+                      </a:r>
+                    </a:p>
+                  </a:txBody>
+                  <a:tcPr>
+                    <a:solidFill>
+                      <a:srgbClr val="FFCDD2"/>
+                    </a:solidFill>
+                  </a:tcPr>
+                </a:tc>
+                <a:tc>
+                  <a:txBody>
+                    <a:bodyPr lIns="54864" rIns="54864" tIns="18288" bIns="18288" wrap="square" anchor="ctr"/>
+                    <a:lstStyle/>
+                    <a:p>
+                      <a:pPr algn="l"/>
+                      <a:r>
+                        <a:rPr sz="1150" b="1">
+                          <a:solidFill>
+                            <a:srgbClr val="000000"/>
+                          </a:solidFill>
+                          <a:latin typeface="Calibri"/>
+                        </a:rPr>
+                        <a:t>∅  empty</a:t>
+                      </a:r>
+                    </a:p>
+                  </a:txBody>
+                  <a:tcPr>
+                    <a:solidFill>
+                      <a:srgbClr val="FFCDD2"/>
+                    </a:solidFill>
+                  </a:tcPr>
+                </a:tc>
+              </a:tr>
+              <a:tr h="342900">
+                <a:tc>
+                  <a:txBody>
+                    <a:bodyPr lIns="54864" rIns="54864" tIns="18288" bIns="18288" wrap="square" anchor="ctr"/>
+                    <a:lstStyle/>
+                    <a:p>
+                      <a:pPr algn="l"/>
+                      <a:r>
+                        <a:rPr sz="1150" b="1">
+                          <a:solidFill>
+                            <a:srgbClr val="000000"/>
+                          </a:solidFill>
+                          <a:latin typeface="Calibri"/>
+                        </a:rPr>
+                        <a:t>Strength σ_y + UTS</a:t>
+                      </a:r>
+                    </a:p>
+                  </a:txBody>
+                  <a:tcPr>
+                    <a:solidFill>
+                      <a:srgbClr val="C8E6C9"/>
+                    </a:solidFill>
+                  </a:tcPr>
+                </a:tc>
+                <a:tc>
+                  <a:txBody>
+                    <a:bodyPr lIns="54864" rIns="54864" tIns="18288" bIns="18288" wrap="square" anchor="ctr"/>
+                    <a:lstStyle/>
+                    <a:p>
+                      <a:pPr algn="l"/>
+                      <a:r>
+                        <a:rPr sz="1150" b="1">
+                          <a:solidFill>
+                            <a:srgbClr val="000000"/>
+                          </a:solidFill>
+                          <a:latin typeface="Calibri"/>
+                        </a:rPr>
+                        <a:t>[0.67, 1.05]</a:t>
+                      </a:r>
+                    </a:p>
+                  </a:txBody>
+                  <a:tcPr>
+                    <a:solidFill>
+                      <a:srgbClr val="C8E6C9"/>
+                    </a:solidFill>
+                  </a:tcPr>
+                </a:tc>
+              </a:tr>
+            </a:tbl>
+          </a:graphicData>
+        </a:graphic>
+      </p:graphicFrame>
+      <p:sp>
+        <p:nvSpPr>
+          <p:cNvPr id="8" name="TextBox 7"/>
+          <p:cNvSpPr txBox="1"/>
+          <p:nvPr/>
+        </p:nvSpPr>
+        <p:spPr>
+          <a:xfrm>
+            <a:off x="7315200" y="3886200"/>
+            <a:ext cx="4572000" cy="1005840"/>
+          </a:xfrm>
+          <a:prstGeom prst="rect">
+            <a:avLst/>
+          </a:prstGeom>
+          <a:noFill/>
+        </p:spPr>
+        <p:txBody>
+          <a:bodyPr wrap="square" lIns="45720" rIns="45720" tIns="18288" bIns="18288" anchor="t">
+            <a:spAutoFit/>
+          </a:bodyPr>
+          <a:lstStyle/>
+          <a:p>
+            <a:pPr algn="l"/>
+            <a:r>
+              <a:rPr sz="1150" b="0" i="1">
+                <a:solidFill>
+                  <a:srgbClr val="707070"/>
+                </a:solidFill>
+                <a:latin typeface="Calibri"/>
+              </a:rPr>
+              <a:t>k window per property = [Chacón_lo / measured, Chacón_hi / measured]; a single uniform k must lie in the intersection of all three.</a:t>
+            </a:r>
+          </a:p>
+        </p:txBody>
+      </p:sp>
+      <p:sp>
+        <p:nvSpPr>
+          <p:cNvPr id="9" name="Rectangle 8"/>
+          <p:cNvSpPr/>
+          <p:nvPr/>
+        </p:nvSpPr>
+        <p:spPr>
+          <a:xfrm>
+            <a:off x="457200" y="5074920"/>
+            <a:ext cx="11338560" cy="548640"/>
+          </a:xfrm>
+          <a:prstGeom prst="rect">
+            <a:avLst/>
+          </a:prstGeom>
+          <a:solidFill>
+            <a:srgbClr val="C8E6C9"/>
+          </a:solidFill>
+          <a:ln>
+            <a:noFill/>
+          </a:ln>
+        </p:spPr>
+        <p:style>
+          <a:lnRef idx="1">
+            <a:schemeClr val="accent1"/>
+          </a:lnRef>
+          <a:fillRef idx="3">
+            <a:schemeClr val="accent1"/>
+          </a:fillRef>
+          <a:effectRef idx="2">
+            <a:schemeClr val="accent1"/>
+          </a:effectRef>
+          <a:fontRef idx="minor">
+            <a:schemeClr val="lt1"/>
+          </a:fontRef>
+        </p:style>
+        <p:txBody>
+          <a:bodyPr rtlCol="0" anchor="ctr" wrap="square" lIns="109728" rIns="109728"/>
+          <a:lstStyle/>
+          <a:p>
+            <a:pPr algn="ctr"/>
+            <a:r>
+              <a:rPr sz="1300" b="1">
+                <a:solidFill>
+                  <a:srgbClr val="1F3F2F"/>
+                </a:solidFill>
+                <a:latin typeface="Calibri"/>
+              </a:rPr>
+              <a:t>STRENGTH: a single uniform factor works — k ∈ [0.67, 1.05] and k = 1 sits inside it ⇒ apply k = 1.0 (no knock-down) to σ_y and UTS at 100 % infill.</a:t>
+            </a:r>
+          </a:p>
+        </p:txBody>
+      </p:sp>
+      <p:sp>
+        <p:nvSpPr>
+          <p:cNvPr id="10" name="Rectangle 9"/>
+          <p:cNvSpPr/>
+          <p:nvPr/>
+        </p:nvSpPr>
+        <p:spPr>
+          <a:xfrm>
+            <a:off x="457200" y="5760720"/>
+            <a:ext cx="11338560" cy="566928"/>
+          </a:xfrm>
+          <a:prstGeom prst="rect">
+            <a:avLst/>
+          </a:prstGeom>
+          <a:solidFill>
+            <a:srgbClr val="FFF3CD"/>
+          </a:solidFill>
+          <a:ln>
+            <a:noFill/>
+          </a:ln>
+        </p:spPr>
+        <p:style>
+          <a:lnRef idx="1">
+            <a:schemeClr val="accent1"/>
+          </a:lnRef>
+          <a:fillRef idx="3">
+            <a:schemeClr val="accent1"/>
+          </a:fillRef>
+          <a:effectRef idx="2">
+            <a:schemeClr val="accent1"/>
+          </a:effectRef>
+          <a:fontRef idx="minor">
+            <a:schemeClr val="lt1"/>
+          </a:fontRef>
+        </p:style>
+        <p:txBody>
+          <a:bodyPr rtlCol="0" anchor="ctr" wrap="square" lIns="109728" rIns="109728"/>
+          <a:lstStyle/>
+          <a:p>
+            <a:pPr algn="ctr"/>
+            <a:r>
+              <a:rPr sz="1200" b="1">
+                <a:solidFill>
+                  <a:srgbClr val="000000"/>
+                </a:solidFill>
+                <a:latin typeface="Calibri"/>
+              </a:rPr>
+              <a:t>No single ALL-property k: E reads low (needs ≥1.24 — rig-compliance-limited) while in-range σ_y caps k ≤ 1.05 → they pull opposite ways. Treat E separately.   (Contrast V5: a common k ≈ 2.4 existed.)</a:t>
+            </a:r>
+          </a:p>
+        </p:txBody>
+      </p:sp>
+      <p:sp>
+        <p:nvSpPr>
+          <p:cNvPr id="11" name="TextBox 10"/>
+          <p:cNvSpPr txBox="1"/>
+          <p:nvPr/>
+        </p:nvSpPr>
+        <p:spPr>
+          <a:xfrm>
+            <a:off x="457200" y="6446520"/>
+            <a:ext cx="640080" cy="274320"/>
+          </a:xfrm>
+          <a:prstGeom prst="rect">
+            <a:avLst/>
+          </a:prstGeom>
+          <a:noFill/>
+        </p:spPr>
+        <p:txBody>
+          <a:bodyPr wrap="square" lIns="45720" rIns="45720" tIns="18288" bIns="18288" anchor="t">
+            <a:spAutoFit/>
+          </a:bodyPr>
+          <a:lstStyle/>
+          <a:p>
+            <a:pPr algn="l"/>
+            <a:r>
+              <a:rPr sz="1000" b="0" i="0">
+                <a:solidFill>
+                  <a:srgbClr val="707070"/>
+                </a:solidFill>
+                <a:latin typeface="Calibri"/>
+              </a:rPr>
+              <a:t>155</a:t>
+            </a:r>
+          </a:p>
+        </p:txBody>
+      </p:sp>
+    </p:spTree>
+  </p:cSld>
+  <p:clrMapOvr>
+    <a:masterClrMapping/>
+  </p:clrMapOvr>
+</p:sld>
+</file>
+
+<file path=ppt/slides/slide16.xml><?xml version="1.0" encoding="utf-8"?>
+<p:sld xmlns:a="http://schemas.openxmlformats.org/drawingml/2006/main" xmlns:p="http://schemas.openxmlformats.org/presentationml/2006/main" xmlns:r="http://schemas.openxmlformats.org/officeDocument/2006/relationships">
+  <p:cSld>
+    <p:spTree>
+      <p:nvGrpSpPr>
+        <p:cNvPr id="1" name=""/>
+        <p:cNvGrpSpPr/>
+        <p:nvPr/>
+      </p:nvGrpSpPr>
+      <p:grpSpPr/>
+      <p:sp>
+        <p:nvSpPr>
+          <p:cNvPr id="2" name="TextBox 1"/>
+          <p:cNvSpPr txBox="1"/>
+          <p:nvPr/>
+        </p:nvSpPr>
+        <p:spPr>
+          <a:xfrm>
+            <a:off x="11155680" y="274320"/>
+            <a:ext cx="914400" cy="274320"/>
+          </a:xfrm>
+          <a:prstGeom prst="rect">
+            <a:avLst/>
+          </a:prstGeom>
+          <a:noFill/>
+        </p:spPr>
+        <p:txBody>
+          <a:bodyPr wrap="square" lIns="45720" rIns="45720" tIns="18288" bIns="18288" anchor="t">
+            <a:spAutoFit/>
+          </a:bodyPr>
+          <a:lstStyle/>
+          <a:p>
+            <a:pPr algn="r"/>
+            <a:r>
+              <a:rPr sz="800" b="1" i="0">
+                <a:solidFill>
+                  <a:srgbClr val="707070"/>
+                </a:solidFill>
+                <a:latin typeface="Calibri"/>
+              </a:rPr>
+              <a:t>JÖNKÖPING UNIVERSITY</a:t>
+            </a:r>
+          </a:p>
+        </p:txBody>
+      </p:sp>
+      <p:sp>
+        <p:nvSpPr>
+          <p:cNvPr id="3" name="Rectangle 2"/>
+          <p:cNvSpPr/>
+          <p:nvPr/>
+        </p:nvSpPr>
+        <p:spPr>
+          <a:xfrm>
+            <a:off x="457200" y="411480"/>
+            <a:ext cx="457200" cy="73152"/>
+          </a:xfrm>
+          <a:prstGeom prst="rect">
+            <a:avLst/>
+          </a:prstGeom>
+          <a:solidFill>
+            <a:srgbClr val="A9D6EF"/>
+          </a:solidFill>
+          <a:ln>
+            <a:noFill/>
+          </a:ln>
+        </p:spPr>
+        <p:style>
+          <a:lnRef idx="1">
+            <a:schemeClr val="accent1"/>
+          </a:lnRef>
+          <a:fillRef idx="3">
+            <a:schemeClr val="accent1"/>
+          </a:fillRef>
+          <a:effectRef idx="2">
+            <a:schemeClr val="accent1"/>
+          </a:effectRef>
+          <a:fontRef idx="minor">
+            <a:schemeClr val="lt1"/>
+          </a:fontRef>
+        </p:style>
+        <p:txBody>
+          <a:bodyPr rtlCol="0" anchor="ctr"/>
+          <a:lstStyle/>
+          <a:p>
+            <a:pPr algn="ctr"/>
+          </a:p>
+        </p:txBody>
+      </p:sp>
+      <p:sp>
+        <p:nvSpPr>
+          <p:cNvPr id="4" name="TextBox 3"/>
+          <p:cNvSpPr txBox="1"/>
+          <p:nvPr/>
+        </p:nvSpPr>
+        <p:spPr>
+          <a:xfrm>
+            <a:off x="457200" y="502920"/>
+            <a:ext cx="11430000" cy="822960"/>
+          </a:xfrm>
+          <a:prstGeom prst="rect">
+            <a:avLst/>
+          </a:prstGeom>
+          <a:noFill/>
+        </p:spPr>
+        <p:txBody>
+          <a:bodyPr wrap="square" lIns="45720" rIns="45720" tIns="18288" bIns="18288" anchor="t">
+            <a:spAutoFit/>
+          </a:bodyPr>
+          <a:lstStyle/>
+          <a:p>
+            <a:pPr algn="l"/>
+            <a:r>
+              <a:rPr sz="3000" b="0" i="0">
+                <a:solidFill>
+                  <a:srgbClr val="000000"/>
+                </a:solidFill>
+                <a:latin typeface="Calibri Light"/>
+              </a:rPr>
+              <a:t>PHASE 8.6.20 V6a: VALIDATION — add:north PLA REFERENCE</a:t>
+            </a:r>
+          </a:p>
+        </p:txBody>
+      </p:sp>
+      <p:sp>
+        <p:nvSpPr>
+          <p:cNvPr id="5" name="TextBox 4"/>
+          <p:cNvSpPr txBox="1"/>
+          <p:nvPr/>
+        </p:nvSpPr>
+        <p:spPr>
+          <a:xfrm>
+            <a:off x="365760" y="1188720"/>
+            <a:ext cx="6949440" cy="365760"/>
+          </a:xfrm>
+          <a:prstGeom prst="rect">
+            <a:avLst/>
+          </a:prstGeom>
+          <a:noFill/>
+        </p:spPr>
+        <p:txBody>
+          <a:bodyPr wrap="square" lIns="45720" rIns="45720" tIns="18288" bIns="18288" anchor="t">
+            <a:spAutoFit/>
+          </a:bodyPr>
+          <a:lstStyle/>
+          <a:p>
+            <a:pPr algn="l"/>
+            <a:r>
+              <a:rPr sz="1600" b="0" i="0">
+                <a:solidFill>
+                  <a:srgbClr val="707070"/>
+                </a:solidFill>
+                <a:latin typeface="Calibri"/>
+              </a:rPr>
+              <a:t>add:north E-PLA datasheet (ISO 527 / 178) vs measured — k = spec / measured</a:t>
+            </a:r>
+          </a:p>
+        </p:txBody>
+      </p:sp>
+      <p:graphicFrame>
+        <p:nvGraphicFramePr>
+          <p:cNvPr id="6" name="Table 5"/>
+          <p:cNvGraphicFramePr>
+            <a:graphicFrameLocks noGrp="1"/>
+          </p:cNvGraphicFramePr>
+          <p:nvPr/>
+        </p:nvGraphicFramePr>
+        <p:xfrm>
+          <a:off x="365760" y="1572768"/>
+          <a:ext cx="6949436" cy="2240280"/>
+        </p:xfrm>
+        <a:graphic>
+          <a:graphicData uri="http://schemas.openxmlformats.org/drawingml/2006/table">
+            <a:tbl>
+              <a:tblPr firstRow="1" bandRow="1">
+                <a:tableStyleId>{5C22544A-7EE6-4342-B048-85BDC9FD1C3A}</a:tableStyleId>
+              </a:tblPr>
+              <a:tblGrid>
+                <a:gridCol w="2203480"/>
+                <a:gridCol w="621494"/>
+                <a:gridCol w="1412487"/>
+                <a:gridCol w="1355988"/>
+                <a:gridCol w="621494"/>
+                <a:gridCol w="734493"/>
+              </a:tblGrid>
+              <a:tr h="320040">
+                <a:tc>
+                  <a:txBody>
+                    <a:bodyPr lIns="54864" rIns="54864" tIns="18288" bIns="18288" wrap="square" anchor="ctr"/>
+                    <a:lstStyle/>
+                    <a:p>
+                      <a:pPr algn="l"/>
+                      <a:r>
+                        <a:rPr sz="1000" b="1">
+                          <a:solidFill>
+                            <a:srgbClr val="FFFFFF"/>
+                          </a:solidFill>
+                          <a:latin typeface="Calibri"/>
+                        </a:rPr>
+                        <a:t>Property</a:t>
+                      </a:r>
+                    </a:p>
+                  </a:txBody>
+                  <a:tcPr>
+                    <a:solidFill>
+                      <a:srgbClr val="143D2F"/>
+                    </a:solidFill>
+                  </a:tcPr>
+                </a:tc>
+                <a:tc>
+                  <a:txBody>
+                    <a:bodyPr lIns="54864" rIns="54864" tIns="18288" bIns="18288" wrap="square" anchor="ctr"/>
+                    <a:lstStyle/>
+                    <a:p>
+                      <a:pPr algn="l"/>
+                      <a:r>
+                        <a:rPr sz="1000" b="1">
+                          <a:solidFill>
+                            <a:srgbClr val="FFFFFF"/>
+                          </a:solidFill>
+                          <a:latin typeface="Calibri"/>
+                        </a:rPr>
+                        <a:t>ISO</a:t>
+                      </a:r>
+                    </a:p>
+                  </a:txBody>
+                  <a:tcPr>
+                    <a:solidFill>
+                      <a:srgbClr val="143D2F"/>
+                    </a:solidFill>
+                  </a:tcPr>
+                </a:tc>
+                <a:tc>
+                  <a:txBody>
+                    <a:bodyPr lIns="54864" rIns="54864" tIns="18288" bIns="18288" wrap="square" anchor="ctr"/>
+                    <a:lstStyle/>
+                    <a:p>
+                      <a:pPr algn="l"/>
+                      <a:r>
+                        <a:rPr sz="1000" b="1">
+                          <a:solidFill>
+                            <a:srgbClr val="FFFFFF"/>
+                          </a:solidFill>
+                          <a:latin typeface="Calibri"/>
+                        </a:rPr>
+                        <a:t>E-PLA spec</a:t>
+                      </a:r>
+                    </a:p>
+                  </a:txBody>
+                  <a:tcPr>
+                    <a:solidFill>
+                      <a:srgbClr val="143D2F"/>
+                    </a:solidFill>
+                  </a:tcPr>
+                </a:tc>
+                <a:tc>
+                  <a:txBody>
+                    <a:bodyPr lIns="54864" rIns="54864" tIns="18288" bIns="18288" wrap="square" anchor="ctr"/>
+                    <a:lstStyle/>
+                    <a:p>
+                      <a:pPr algn="l"/>
+                      <a:r>
+                        <a:rPr sz="1000" b="1">
+                          <a:solidFill>
+                            <a:srgbClr val="FFFFFF"/>
+                          </a:solidFill>
+                          <a:latin typeface="Calibri"/>
+                        </a:rPr>
+                        <a:t>V6a 100 %</a:t>
+                      </a:r>
+                    </a:p>
+                  </a:txBody>
+                  <a:tcPr>
+                    <a:solidFill>
+                      <a:srgbClr val="143D2F"/>
+                    </a:solidFill>
+                  </a:tcPr>
+                </a:tc>
+                <a:tc>
+                  <a:txBody>
+                    <a:bodyPr lIns="54864" rIns="54864" tIns="18288" bIns="18288" wrap="square" anchor="ctr"/>
+                    <a:lstStyle/>
+                    <a:p>
+                      <a:pPr algn="l"/>
+                      <a:r>
+                        <a:rPr sz="1000" b="1">
+                          <a:solidFill>
+                            <a:srgbClr val="FFFFFF"/>
+                          </a:solidFill>
+                          <a:latin typeface="Calibri"/>
+                        </a:rPr>
+                        <a:t>k</a:t>
+                      </a:r>
+                    </a:p>
+                  </a:txBody>
+                  <a:tcPr>
+                    <a:solidFill>
+                      <a:srgbClr val="143D2F"/>
+                    </a:solidFill>
+                  </a:tcPr>
+                </a:tc>
+                <a:tc>
+                  <a:txBody>
+                    <a:bodyPr lIns="54864" rIns="54864" tIns="18288" bIns="18288" wrap="square" anchor="ctr"/>
+                    <a:lstStyle/>
+                    <a:p>
+                      <a:pPr algn="l"/>
+                      <a:r>
+                        <a:rPr sz="1000" b="1">
+                          <a:solidFill>
+                            <a:srgbClr val="FFFFFF"/>
+                          </a:solidFill>
+                          <a:latin typeface="Calibri"/>
+                        </a:rPr>
+                        <a:t>retain</a:t>
+                      </a:r>
+                    </a:p>
+                  </a:txBody>
+                  <a:tcPr>
+                    <a:solidFill>
+                      <a:srgbClr val="143D2F"/>
+                    </a:solidFill>
+                  </a:tcPr>
+                </a:tc>
+              </a:tr>
+              <a:tr h="320040">
+                <a:tc>
+                  <a:txBody>
+                    <a:bodyPr lIns="54864" rIns="54864" tIns="18288" bIns="18288" wrap="square" anchor="ctr"/>
+                    <a:lstStyle/>
+                    <a:p>
+                      <a:pPr algn="l"/>
+                      <a:r>
+                        <a:rPr sz="1000" b="1">
+                          <a:solidFill>
+                            <a:srgbClr val="000000"/>
+                          </a:solidFill>
+                          <a:latin typeface="Calibri"/>
+                        </a:rPr>
+                        <a:t>Yield strength σ_y</a:t>
+                      </a:r>
+                    </a:p>
+                  </a:txBody>
+                  <a:tcPr>
+                    <a:solidFill>
+                      <a:srgbClr val="C8E6C9"/>
+                    </a:solidFill>
+                  </a:tcPr>
+                </a:tc>
+                <a:tc>
+                  <a:txBody>
+                    <a:bodyPr lIns="54864" rIns="54864" tIns="18288" bIns="18288" wrap="square" anchor="ctr"/>
+                    <a:lstStyle/>
+                    <a:p>
+                      <a:pPr algn="l"/>
+                      <a:r>
+                        <a:rPr sz="1000" b="0">
+                          <a:solidFill>
+                            <a:srgbClr val="000000"/>
+                          </a:solidFill>
+                          <a:latin typeface="Calibri"/>
+                        </a:rPr>
+                        <a:t>527</a:t>
+                      </a:r>
+                    </a:p>
+                  </a:txBody>
+                  <a:tcPr>
+                    <a:solidFill>
+                      <a:srgbClr val="C8E6C9"/>
+                    </a:solidFill>
+                  </a:tcPr>
+                </a:tc>
+                <a:tc>
+                  <a:txBody>
+                    <a:bodyPr lIns="54864" rIns="54864" tIns="18288" bIns="18288" wrap="square" anchor="ctr"/>
+                    <a:lstStyle/>
+                    <a:p>
+                      <a:pPr algn="l"/>
+                      <a:r>
+                        <a:rPr sz="1000" b="0">
+                          <a:solidFill>
+                            <a:srgbClr val="000000"/>
+                          </a:solidFill>
+                          <a:latin typeface="Calibri"/>
+                        </a:rPr>
+                        <a:t>58 MPa †</a:t>
+                      </a:r>
+                    </a:p>
+                  </a:txBody>
+                  <a:tcPr>
+                    <a:solidFill>
+                      <a:srgbClr val="C8E6C9"/>
+                    </a:solidFill>
+                  </a:tcPr>
+                </a:tc>
+                <a:tc>
+                  <a:txBody>
+                    <a:bodyPr lIns="54864" rIns="54864" tIns="18288" bIns="18288" wrap="square" anchor="ctr"/>
+                    <a:lstStyle/>
+                    <a:p>
+                      <a:pPr algn="l"/>
+                      <a:r>
+                        <a:rPr sz="1000" b="0">
+                          <a:solidFill>
+                            <a:srgbClr val="000000"/>
+                          </a:solidFill>
+                          <a:latin typeface="Calibri"/>
+                        </a:rPr>
+                        <a:t>47.8 MPa</a:t>
+                      </a:r>
+                    </a:p>
+                  </a:txBody>
+                  <a:tcPr>
+                    <a:solidFill>
+                      <a:srgbClr val="C8E6C9"/>
+                    </a:solidFill>
+                  </a:tcPr>
+                </a:tc>
+                <a:tc>
+                  <a:txBody>
+                    <a:bodyPr lIns="54864" rIns="54864" tIns="18288" bIns="18288" wrap="square" anchor="ctr"/>
+                    <a:lstStyle/>
+                    <a:p>
+                      <a:pPr algn="l"/>
+                      <a:r>
+                        <a:rPr sz="1000" b="1">
+                          <a:solidFill>
+                            <a:srgbClr val="000000"/>
+                          </a:solidFill>
+                          <a:latin typeface="Calibri"/>
+                        </a:rPr>
+                        <a:t>1.21</a:t>
+                      </a:r>
+                    </a:p>
+                  </a:txBody>
+                  <a:tcPr>
+                    <a:solidFill>
+                      <a:srgbClr val="C8E6C9"/>
+                    </a:solidFill>
+                  </a:tcPr>
+                </a:tc>
+                <a:tc>
+                  <a:txBody>
+                    <a:bodyPr lIns="54864" rIns="54864" tIns="18288" bIns="18288" wrap="square" anchor="ctr"/>
+                    <a:lstStyle/>
+                    <a:p>
+                      <a:pPr algn="l"/>
+                      <a:r>
+                        <a:rPr sz="1000" b="0">
+                          <a:solidFill>
+                            <a:srgbClr val="000000"/>
+                          </a:solidFill>
+                          <a:latin typeface="Calibri"/>
+                        </a:rPr>
+                        <a:t>82 %</a:t>
+                      </a:r>
+                    </a:p>
+                  </a:txBody>
+                  <a:tcPr>
+                    <a:solidFill>
+                      <a:srgbClr val="C8E6C9"/>
+                    </a:solidFill>
+                  </a:tcPr>
+                </a:tc>
+              </a:tr>
+              <a:tr h="320040">
+                <a:tc>
+                  <a:txBody>
+                    <a:bodyPr lIns="54864" rIns="54864" tIns="18288" bIns="18288" wrap="square" anchor="ctr"/>
+                    <a:lstStyle/>
+                    <a:p>
+                      <a:pPr algn="l"/>
+                      <a:r>
+                        <a:rPr sz="1000" b="1">
+                          <a:solidFill>
+                            <a:srgbClr val="000000"/>
+                          </a:solidFill>
+                          <a:latin typeface="Calibri"/>
+                        </a:rPr>
+                        <a:t>Tensile strength (UTS)</a:t>
+                      </a:r>
+                    </a:p>
+                  </a:txBody>
+                  <a:tcPr>
+                    <a:solidFill>
+                      <a:srgbClr val="C8E6C9"/>
+                    </a:solidFill>
+                  </a:tcPr>
+                </a:tc>
+                <a:tc>
+                  <a:txBody>
+                    <a:bodyPr lIns="54864" rIns="54864" tIns="18288" bIns="18288" wrap="square" anchor="ctr"/>
+                    <a:lstStyle/>
+                    <a:p>
+                      <a:pPr algn="l"/>
+                      <a:r>
+                        <a:rPr sz="1000" b="0">
+                          <a:solidFill>
+                            <a:srgbClr val="000000"/>
+                          </a:solidFill>
+                          <a:latin typeface="Calibri"/>
+                        </a:rPr>
+                        <a:t>527</a:t>
+                      </a:r>
+                    </a:p>
+                  </a:txBody>
+                  <a:tcPr>
+                    <a:solidFill>
+                      <a:srgbClr val="C8E6C9"/>
+                    </a:solidFill>
+                  </a:tcPr>
+                </a:tc>
+                <a:tc>
+                  <a:txBody>
+                    <a:bodyPr lIns="54864" rIns="54864" tIns="18288" bIns="18288" wrap="square" anchor="ctr"/>
+                    <a:lstStyle/>
+                    <a:p>
+                      <a:pPr algn="l"/>
+                      <a:r>
+                        <a:rPr sz="1000" b="0">
+                          <a:solidFill>
+                            <a:srgbClr val="000000"/>
+                          </a:solidFill>
+                          <a:latin typeface="Calibri"/>
+                        </a:rPr>
+                        <a:t>58 MPa</a:t>
+                      </a:r>
+                    </a:p>
+                  </a:txBody>
+                  <a:tcPr>
+                    <a:solidFill>
+                      <a:srgbClr val="C8E6C9"/>
+                    </a:solidFill>
+                  </a:tcPr>
+                </a:tc>
+                <a:tc>
+                  <a:txBody>
+                    <a:bodyPr lIns="54864" rIns="54864" tIns="18288" bIns="18288" wrap="square" anchor="ctr"/>
+                    <a:lstStyle/>
+                    <a:p>
+                      <a:pPr algn="l"/>
+                      <a:r>
+                        <a:rPr sz="1000" b="0">
+                          <a:solidFill>
+                            <a:srgbClr val="000000"/>
+                          </a:solidFill>
+                          <a:latin typeface="Calibri"/>
+                        </a:rPr>
+                        <a:t>47.8 MPa</a:t>
+                      </a:r>
+                    </a:p>
+                  </a:txBody>
+                  <a:tcPr>
+                    <a:solidFill>
+                      <a:srgbClr val="C8E6C9"/>
+                    </a:solidFill>
+                  </a:tcPr>
+                </a:tc>
+                <a:tc>
+                  <a:txBody>
+                    <a:bodyPr lIns="54864" rIns="54864" tIns="18288" bIns="18288" wrap="square" anchor="ctr"/>
+                    <a:lstStyle/>
+                    <a:p>
+                      <a:pPr algn="l"/>
+                      <a:r>
+                        <a:rPr sz="1000" b="1">
+                          <a:solidFill>
+                            <a:srgbClr val="000000"/>
+                          </a:solidFill>
+                          <a:latin typeface="Calibri"/>
+                        </a:rPr>
+                        <a:t>1.21</a:t>
+                      </a:r>
+                    </a:p>
+                  </a:txBody>
+                  <a:tcPr>
+                    <a:solidFill>
+                      <a:srgbClr val="C8E6C9"/>
+                    </a:solidFill>
+                  </a:tcPr>
+                </a:tc>
+                <a:tc>
+                  <a:txBody>
+                    <a:bodyPr lIns="54864" rIns="54864" tIns="18288" bIns="18288" wrap="square" anchor="ctr"/>
+                    <a:lstStyle/>
+                    <a:p>
+                      <a:pPr algn="l"/>
+                      <a:r>
+                        <a:rPr sz="1000" b="0">
+                          <a:solidFill>
+                            <a:srgbClr val="000000"/>
+                          </a:solidFill>
+                          <a:latin typeface="Calibri"/>
+                        </a:rPr>
+                        <a:t>82 %</a:t>
+                      </a:r>
+                    </a:p>
+                  </a:txBody>
+                  <a:tcPr>
+                    <a:solidFill>
+                      <a:srgbClr val="C8E6C9"/>
+                    </a:solidFill>
+                  </a:tcPr>
+                </a:tc>
+              </a:tr>
+              <a:tr h="320040">
+                <a:tc>
+                  <a:txBody>
+                    <a:bodyPr lIns="54864" rIns="54864" tIns="18288" bIns="18288" wrap="square" anchor="ctr"/>
+                    <a:lstStyle/>
+                    <a:p>
+                      <a:pPr algn="l"/>
+                      <a:r>
+                        <a:rPr sz="1000" b="1">
+                          <a:solidFill>
+                            <a:srgbClr val="000000"/>
+                          </a:solidFill>
+                          <a:latin typeface="Calibri"/>
+                        </a:rPr>
+                        <a:t>Tensile modulus E</a:t>
+                      </a:r>
+                    </a:p>
+                  </a:txBody>
+                  <a:tcPr>
+                    <a:solidFill>
+                      <a:srgbClr val="C8E6C9"/>
+                    </a:solidFill>
+                  </a:tcPr>
+                </a:tc>
+                <a:tc>
+                  <a:txBody>
+                    <a:bodyPr lIns="54864" rIns="54864" tIns="18288" bIns="18288" wrap="square" anchor="ctr"/>
+                    <a:lstStyle/>
+                    <a:p>
+                      <a:pPr algn="l"/>
+                      <a:r>
+                        <a:rPr sz="1000" b="0">
+                          <a:solidFill>
+                            <a:srgbClr val="000000"/>
+                          </a:solidFill>
+                          <a:latin typeface="Calibri"/>
+                        </a:rPr>
+                        <a:t>527</a:t>
+                      </a:r>
+                    </a:p>
+                  </a:txBody>
+                  <a:tcPr>
+                    <a:solidFill>
+                      <a:srgbClr val="C8E6C9"/>
+                    </a:solidFill>
+                  </a:tcPr>
+                </a:tc>
+                <a:tc>
+                  <a:txBody>
+                    <a:bodyPr lIns="54864" rIns="54864" tIns="18288" bIns="18288" wrap="square" anchor="ctr"/>
+                    <a:lstStyle/>
+                    <a:p>
+                      <a:pPr algn="l"/>
+                      <a:r>
+                        <a:rPr sz="1000" b="0">
+                          <a:solidFill>
+                            <a:srgbClr val="000000"/>
+                          </a:solidFill>
+                          <a:latin typeface="Calibri"/>
+                        </a:rPr>
+                        <a:t>2.87 GPa</a:t>
+                      </a:r>
+                    </a:p>
+                  </a:txBody>
+                  <a:tcPr>
+                    <a:solidFill>
+                      <a:srgbClr val="C8E6C9"/>
+                    </a:solidFill>
+                  </a:tcPr>
+                </a:tc>
+                <a:tc>
+                  <a:txBody>
+                    <a:bodyPr lIns="54864" rIns="54864" tIns="18288" bIns="18288" wrap="square" anchor="ctr"/>
+                    <a:lstStyle/>
+                    <a:p>
+                      <a:pPr algn="l"/>
+                      <a:r>
+                        <a:rPr sz="1000" b="0">
+                          <a:solidFill>
+                            <a:srgbClr val="000000"/>
+                          </a:solidFill>
+                          <a:latin typeface="Calibri"/>
+                        </a:rPr>
+                        <a:t>2.41 GPa</a:t>
+                      </a:r>
+                    </a:p>
+                  </a:txBody>
+                  <a:tcPr>
+                    <a:solidFill>
+                      <a:srgbClr val="C8E6C9"/>
+                    </a:solidFill>
+                  </a:tcPr>
+                </a:tc>
+                <a:tc>
+                  <a:txBody>
+                    <a:bodyPr lIns="54864" rIns="54864" tIns="18288" bIns="18288" wrap="square" anchor="ctr"/>
+                    <a:lstStyle/>
+                    <a:p>
+                      <a:pPr algn="l"/>
+                      <a:r>
+                        <a:rPr sz="1000" b="1">
+                          <a:solidFill>
+                            <a:srgbClr val="000000"/>
+                          </a:solidFill>
+                          <a:latin typeface="Calibri"/>
+                        </a:rPr>
+                        <a:t>1.19</a:t>
+                      </a:r>
+                    </a:p>
+                  </a:txBody>
+                  <a:tcPr>
+                    <a:solidFill>
+                      <a:srgbClr val="C8E6C9"/>
+                    </a:solidFill>
+                  </a:tcPr>
+                </a:tc>
+                <a:tc>
+                  <a:txBody>
+                    <a:bodyPr lIns="54864" rIns="54864" tIns="18288" bIns="18288" wrap="square" anchor="ctr"/>
+                    <a:lstStyle/>
+                    <a:p>
+                      <a:pPr algn="l"/>
+                      <a:r>
+                        <a:rPr sz="1000" b="0">
+                          <a:solidFill>
+                            <a:srgbClr val="000000"/>
+                          </a:solidFill>
+                          <a:latin typeface="Calibri"/>
+                        </a:rPr>
+                        <a:t>84 %</a:t>
+                      </a:r>
+                    </a:p>
+                  </a:txBody>
+                  <a:tcPr>
+                    <a:solidFill>
+                      <a:srgbClr val="C8E6C9"/>
+                    </a:solidFill>
+                  </a:tcPr>
+                </a:tc>
+              </a:tr>
+              <a:tr h="320040">
+                <a:tc>
+                  <a:txBody>
+                    <a:bodyPr lIns="54864" rIns="54864" tIns="18288" bIns="18288" wrap="square" anchor="ctr"/>
+                    <a:lstStyle/>
+                    <a:p>
+                      <a:pPr algn="l"/>
+                      <a:r>
+                        <a:rPr sz="1000" b="1">
+                          <a:solidFill>
+                            <a:srgbClr val="000000"/>
+                          </a:solidFill>
+                          <a:latin typeface="Calibri"/>
+                        </a:rPr>
+                        <a:t>Elongation @ break</a:t>
+                      </a:r>
+                    </a:p>
+                  </a:txBody>
+                  <a:tcPr>
+                    <a:solidFill>
+                      <a:srgbClr val="FFF3CD"/>
+                    </a:solidFill>
+                  </a:tcPr>
+                </a:tc>
+                <a:tc>
+                  <a:txBody>
+                    <a:bodyPr lIns="54864" rIns="54864" tIns="18288" bIns="18288" wrap="square" anchor="ctr"/>
+                    <a:lstStyle/>
+                    <a:p>
+                      <a:pPr algn="l"/>
+                      <a:r>
+                        <a:rPr sz="1000" b="0">
+                          <a:solidFill>
+                            <a:srgbClr val="000000"/>
+                          </a:solidFill>
+                          <a:latin typeface="Calibri"/>
+                        </a:rPr>
+                        <a:t>527</a:t>
+                      </a:r>
+                    </a:p>
+                  </a:txBody>
+                  <a:tcPr>
+                    <a:solidFill>
+                      <a:srgbClr val="FFF3CD"/>
+                    </a:solidFill>
+                  </a:tcPr>
+                </a:tc>
+                <a:tc>
+                  <a:txBody>
+                    <a:bodyPr lIns="54864" rIns="54864" tIns="18288" bIns="18288" wrap="square" anchor="ctr"/>
+                    <a:lstStyle/>
+                    <a:p>
+                      <a:pPr algn="l"/>
+                      <a:r>
+                        <a:rPr sz="1000" b="0">
+                          <a:solidFill>
+                            <a:srgbClr val="000000"/>
+                          </a:solidFill>
+                          <a:latin typeface="Calibri"/>
+                        </a:rPr>
+                        <a:t>8 %</a:t>
+                      </a:r>
+                    </a:p>
+                  </a:txBody>
+                  <a:tcPr>
+                    <a:solidFill>
+                      <a:srgbClr val="FFF3CD"/>
+                    </a:solidFill>
+                  </a:tcPr>
+                </a:tc>
+                <a:tc>
+                  <a:txBody>
+                    <a:bodyPr lIns="54864" rIns="54864" tIns="18288" bIns="18288" wrap="square" anchor="ctr"/>
+                    <a:lstStyle/>
+                    <a:p>
+                      <a:pPr algn="l"/>
+                      <a:r>
+                        <a:rPr sz="1000" b="0">
+                          <a:solidFill>
+                            <a:srgbClr val="000000"/>
+                          </a:solidFill>
+                          <a:latin typeface="Calibri"/>
+                        </a:rPr>
+                        <a:t>3.0 %</a:t>
+                      </a:r>
+                    </a:p>
+                  </a:txBody>
+                  <a:tcPr>
+                    <a:solidFill>
+                      <a:srgbClr val="FFF3CD"/>
+                    </a:solidFill>
+                  </a:tcPr>
+                </a:tc>
+                <a:tc>
+                  <a:txBody>
+                    <a:bodyPr lIns="54864" rIns="54864" tIns="18288" bIns="18288" wrap="square" anchor="ctr"/>
+                    <a:lstStyle/>
+                    <a:p>
+                      <a:pPr algn="l"/>
+                      <a:r>
+                        <a:rPr sz="1000" b="1">
+                          <a:solidFill>
+                            <a:srgbClr val="000000"/>
+                          </a:solidFill>
+                          <a:latin typeface="Calibri"/>
+                        </a:rPr>
+                        <a:t>2.68</a:t>
+                      </a:r>
+                    </a:p>
+                  </a:txBody>
+                  <a:tcPr>
+                    <a:solidFill>
+                      <a:srgbClr val="FFF3CD"/>
+                    </a:solidFill>
+                  </a:tcPr>
+                </a:tc>
+                <a:tc>
+                  <a:txBody>
+                    <a:bodyPr lIns="54864" rIns="54864" tIns="18288" bIns="18288" wrap="square" anchor="ctr"/>
+                    <a:lstStyle/>
+                    <a:p>
+                      <a:pPr algn="l"/>
+                      <a:r>
+                        <a:rPr sz="1000" b="0">
+                          <a:solidFill>
+                            <a:srgbClr val="000000"/>
+                          </a:solidFill>
+                          <a:latin typeface="Calibri"/>
+                        </a:rPr>
+                        <a:t>37 %</a:t>
+                      </a:r>
+                    </a:p>
+                  </a:txBody>
+                  <a:tcPr>
+                    <a:solidFill>
+                      <a:srgbClr val="FFF3CD"/>
+                    </a:solidFill>
+                  </a:tcPr>
+                </a:tc>
+              </a:tr>
+              <a:tr h="320040">
+                <a:tc>
+                  <a:txBody>
+                    <a:bodyPr lIns="54864" rIns="54864" tIns="18288" bIns="18288" wrap="square" anchor="ctr"/>
+                    <a:lstStyle/>
+                    <a:p>
+                      <a:pPr algn="l"/>
+                      <a:r>
+                        <a:rPr sz="1000" b="0">
+                          <a:solidFill>
+                            <a:srgbClr val="000000"/>
+                          </a:solidFill>
+                          <a:latin typeface="Calibri"/>
+                        </a:rPr>
+                        <a:t>Flexural strength</a:t>
+                      </a:r>
+                    </a:p>
+                  </a:txBody>
+                  <a:tcPr/>
+                </a:tc>
+                <a:tc>
+                  <a:txBody>
+                    <a:bodyPr lIns="54864" rIns="54864" tIns="18288" bIns="18288" wrap="square" anchor="ctr"/>
+                    <a:lstStyle/>
+                    <a:p>
+                      <a:pPr algn="l"/>
+                      <a:r>
+                        <a:rPr sz="1000" b="0">
+                          <a:solidFill>
+                            <a:srgbClr val="000000"/>
+                          </a:solidFill>
+                          <a:latin typeface="Calibri"/>
+                        </a:rPr>
+                        <a:t>178</a:t>
+                      </a:r>
+                    </a:p>
+                  </a:txBody>
+                  <a:tcPr/>
+                </a:tc>
+                <a:tc>
+                  <a:txBody>
+                    <a:bodyPr lIns="54864" rIns="54864" tIns="18288" bIns="18288" wrap="square" anchor="ctr"/>
+                    <a:lstStyle/>
+                    <a:p>
+                      <a:pPr algn="l"/>
+                      <a:r>
+                        <a:rPr sz="1000" b="0">
+                          <a:solidFill>
+                            <a:srgbClr val="000000"/>
+                          </a:solidFill>
+                          <a:latin typeface="Calibri"/>
+                        </a:rPr>
+                        <a:t>120 MPa</a:t>
+                      </a:r>
+                    </a:p>
+                  </a:txBody>
+                  <a:tcPr/>
+                </a:tc>
+                <a:tc>
+                  <a:txBody>
+                    <a:bodyPr lIns="54864" rIns="54864" tIns="18288" bIns="18288" wrap="square" anchor="ctr"/>
+                    <a:lstStyle/>
+                    <a:p>
+                      <a:pPr algn="l"/>
+                      <a:r>
+                        <a:rPr sz="1000" b="0">
+                          <a:solidFill>
+                            <a:srgbClr val="000000"/>
+                          </a:solidFill>
+                          <a:latin typeface="Calibri"/>
+                        </a:rPr>
+                        <a:t>not tested</a:t>
+                      </a:r>
+                    </a:p>
+                  </a:txBody>
+                  <a:tcPr/>
+                </a:tc>
+                <a:tc>
+                  <a:txBody>
+                    <a:bodyPr lIns="54864" rIns="54864" tIns="18288" bIns="18288" wrap="square" anchor="ctr"/>
+                    <a:lstStyle/>
+                    <a:p>
+                      <a:pPr algn="l"/>
+                      <a:r>
+                        <a:rPr sz="1000" b="0">
+                          <a:solidFill>
+                            <a:srgbClr val="000000"/>
+                          </a:solidFill>
+                          <a:latin typeface="Calibri"/>
+                        </a:rPr>
+                        <a:t>—</a:t>
+                      </a:r>
+                    </a:p>
+                  </a:txBody>
+                  <a:tcPr/>
+                </a:tc>
+                <a:tc>
+                  <a:txBody>
+                    <a:bodyPr lIns="54864" rIns="54864" tIns="18288" bIns="18288" wrap="square" anchor="ctr"/>
+                    <a:lstStyle/>
+                    <a:p>
+                      <a:pPr algn="l"/>
+                      <a:r>
+                        <a:rPr sz="1000" b="0">
+                          <a:solidFill>
+                            <a:srgbClr val="000000"/>
+                          </a:solidFill>
+                          <a:latin typeface="Calibri"/>
+                        </a:rPr>
+                        <a:t>—</a:t>
+                      </a:r>
+                    </a:p>
+                  </a:txBody>
+                  <a:tcPr/>
+                </a:tc>
+              </a:tr>
+              <a:tr h="320040">
+                <a:tc>
+                  <a:txBody>
+                    <a:bodyPr lIns="54864" rIns="54864" tIns="18288" bIns="18288" wrap="square" anchor="ctr"/>
+                    <a:lstStyle/>
+                    <a:p>
+                      <a:pPr algn="l"/>
+                      <a:r>
+                        <a:rPr sz="1000" b="0">
+                          <a:solidFill>
+                            <a:srgbClr val="000000"/>
+                          </a:solidFill>
+                          <a:latin typeface="Calibri"/>
+                        </a:rPr>
+                        <a:t>Density / HDT</a:t>
+                      </a:r>
+                    </a:p>
+                  </a:txBody>
+                  <a:tcPr/>
+                </a:tc>
+                <a:tc>
+                  <a:txBody>
+                    <a:bodyPr lIns="54864" rIns="54864" tIns="18288" bIns="18288" wrap="square" anchor="ctr"/>
+                    <a:lstStyle/>
+                    <a:p>
+                      <a:pPr algn="l"/>
+                      <a:r>
+                        <a:rPr sz="1000" b="0">
+                          <a:solidFill>
+                            <a:srgbClr val="000000"/>
+                          </a:solidFill>
+                          <a:latin typeface="Calibri"/>
+                        </a:rPr>
+                        <a:t>527/75</a:t>
+                      </a:r>
+                    </a:p>
+                  </a:txBody>
+                  <a:tcPr/>
+                </a:tc>
+                <a:tc>
+                  <a:txBody>
+                    <a:bodyPr lIns="54864" rIns="54864" tIns="18288" bIns="18288" wrap="square" anchor="ctr"/>
+                    <a:lstStyle/>
+                    <a:p>
+                      <a:pPr algn="l"/>
+                      <a:r>
+                        <a:rPr sz="1000" b="0">
+                          <a:solidFill>
+                            <a:srgbClr val="000000"/>
+                          </a:solidFill>
+                          <a:latin typeface="Calibri"/>
+                        </a:rPr>
+                        <a:t>1.24 / 55 °C</a:t>
+                      </a:r>
+                    </a:p>
+                  </a:txBody>
+                  <a:tcPr/>
+                </a:tc>
+                <a:tc>
+                  <a:txBody>
+                    <a:bodyPr lIns="54864" rIns="54864" tIns="18288" bIns="18288" wrap="square" anchor="ctr"/>
+                    <a:lstStyle/>
+                    <a:p>
+                      <a:pPr algn="l"/>
+                      <a:r>
+                        <a:rPr sz="1000" b="0">
+                          <a:solidFill>
+                            <a:srgbClr val="000000"/>
+                          </a:solidFill>
+                          <a:latin typeface="Calibri"/>
+                        </a:rPr>
+                        <a:t>—</a:t>
+                      </a:r>
+                    </a:p>
+                  </a:txBody>
+                  <a:tcPr/>
+                </a:tc>
+                <a:tc>
+                  <a:txBody>
+                    <a:bodyPr lIns="54864" rIns="54864" tIns="18288" bIns="18288" wrap="square" anchor="ctr"/>
+                    <a:lstStyle/>
+                    <a:p>
+                      <a:pPr algn="l"/>
+                      <a:r>
+                        <a:rPr sz="1000" b="0">
+                          <a:solidFill>
+                            <a:srgbClr val="000000"/>
+                          </a:solidFill>
+                          <a:latin typeface="Calibri"/>
+                        </a:rPr>
+                        <a:t>—</a:t>
+                      </a:r>
+                    </a:p>
+                  </a:txBody>
+                  <a:tcPr/>
+                </a:tc>
+                <a:tc>
+                  <a:txBody>
+                    <a:bodyPr lIns="54864" rIns="54864" tIns="18288" bIns="18288" wrap="square" anchor="ctr"/>
+                    <a:lstStyle/>
+                    <a:p>
+                      <a:pPr algn="l"/>
+                      <a:r>
+                        <a:rPr sz="1000" b="0">
+                          <a:solidFill>
+                            <a:srgbClr val="000000"/>
+                          </a:solidFill>
+                          <a:latin typeface="Calibri"/>
+                        </a:rPr>
+                        <a:t>—</a:t>
+                      </a:r>
+                    </a:p>
+                  </a:txBody>
+                  <a:tcPr/>
+                </a:tc>
+              </a:tr>
+            </a:tbl>
+          </a:graphicData>
+        </a:graphic>
+      </p:graphicFrame>
+      <p:pic>
+        <p:nvPicPr>
+          <p:cNvPr id="7" name="Picture 6" descr="V6a_epla_offset.png"/>
+          <p:cNvPicPr>
+            <a:picLocks noChangeAspect="1"/>
+          </p:cNvPicPr>
+          <p:nvPr/>
+        </p:nvPicPr>
+        <p:blipFill>
+          <a:blip r:embed="rId2"/>
+          <a:stretch>
+            <a:fillRect/>
+          </a:stretch>
+        </p:blipFill>
+        <p:spPr>
+          <a:xfrm>
+            <a:off x="7360920" y="1280160"/>
+            <a:ext cx="4617720" cy="3171803"/>
+          </a:xfrm>
+          <a:prstGeom prst="rect">
+            <a:avLst/>
+          </a:prstGeom>
+        </p:spPr>
+      </p:pic>
+      <p:sp>
+        <p:nvSpPr>
+          <p:cNvPr id="8" name="TextBox 7"/>
+          <p:cNvSpPr txBox="1"/>
+          <p:nvPr/>
+        </p:nvSpPr>
+        <p:spPr>
+          <a:xfrm>
+            <a:off x="7360920" y="4572000"/>
+            <a:ext cx="4617720" cy="274320"/>
+          </a:xfrm>
+          <a:prstGeom prst="rect">
+            <a:avLst/>
+          </a:prstGeom>
+          <a:noFill/>
+        </p:spPr>
+        <p:txBody>
+          <a:bodyPr wrap="square">
+            <a:spAutoFit/>
+          </a:bodyPr>
+          <a:lstStyle/>
+          <a:p>
+            <a:r>
+              <a:rPr sz="1100" u="sng">
+                <a:solidFill>
+                  <a:srgbClr val="1A5FB4"/>
+                </a:solidFill>
+                <a:latin typeface="Calibri"/>
+                <a:hlinkClick r:id="rId3"/>
+              </a:rPr>
+              <a:t>Spec sheet — add:north E-PLA TDS (PDF, ISO 527 / 178)</a:t>
+            </a:r>
+          </a:p>
+        </p:txBody>
+      </p:sp>
+      <p:sp>
+        <p:nvSpPr>
+          <p:cNvPr id="9" name="TextBox 8"/>
+          <p:cNvSpPr txBox="1"/>
+          <p:nvPr/>
+        </p:nvSpPr>
+        <p:spPr>
+          <a:xfrm>
+            <a:off x="7360920" y="4864608"/>
+            <a:ext cx="4617720" cy="274320"/>
+          </a:xfrm>
+          <a:prstGeom prst="rect">
+            <a:avLst/>
+          </a:prstGeom>
+          <a:noFill/>
+        </p:spPr>
+        <p:txBody>
+          <a:bodyPr wrap="square">
+            <a:spAutoFit/>
+          </a:bodyPr>
+          <a:lstStyle/>
+          <a:p>
+            <a:r>
+              <a:rPr sz="1100" u="sng">
+                <a:solidFill>
+                  <a:srgbClr val="1A5FB4"/>
+                </a:solidFill>
+                <a:latin typeface="Calibri"/>
+                <a:hlinkClick r:id="rId4"/>
+              </a:rPr>
+              <a:t>add:north PLA Economy — product page</a:t>
+            </a:r>
+          </a:p>
+        </p:txBody>
+      </p:sp>
+      <p:sp>
+        <p:nvSpPr>
+          <p:cNvPr id="10" name="TextBox 9"/>
+          <p:cNvSpPr txBox="1"/>
+          <p:nvPr/>
+        </p:nvSpPr>
+        <p:spPr>
+          <a:xfrm>
+            <a:off x="365760" y="3931920"/>
+            <a:ext cx="6949440" cy="1417320"/>
+          </a:xfrm>
+          <a:prstGeom prst="rect">
+            <a:avLst/>
+          </a:prstGeom>
+          <a:noFill/>
+        </p:spPr>
+        <p:txBody>
+          <a:bodyPr wrap="square" lIns="45720" rIns="45720" tIns="18288" bIns="18288" anchor="t">
+            <a:spAutoFit/>
+          </a:bodyPr>
+          <a:lstStyle/>
+          <a:p>
+            <a:pPr algn="l"/>
+            <a:r>
+              <a:rPr sz="1150" b="0" i="0">
+                <a:solidFill>
+                  <a:srgbClr val="000000"/>
+                </a:solidFill>
+                <a:latin typeface="Calibri"/>
+              </a:rPr>
+              <a:t>Validated against TWO references:
+• Journal (Chacón 2017): V6a σ_y &amp; UTS land INSIDE the range (pass); modulus just below floor.
+• add:north E-PLA datasheet: σ_y, UTS and E share ONE factor k ≈ 1.20 → printed 100 % ≈ 83 % of solid-rated. Coherent and actionable.</a:t>
+            </a:r>
+          </a:p>
+        </p:txBody>
+      </p:sp>
+      <p:sp>
+        <p:nvSpPr>
+          <p:cNvPr id="11" name="Rectangle 10"/>
+          <p:cNvSpPr/>
+          <p:nvPr/>
+        </p:nvSpPr>
+        <p:spPr>
+          <a:xfrm>
+            <a:off x="365760" y="5486400"/>
+            <a:ext cx="11612880" cy="548640"/>
+          </a:xfrm>
+          <a:prstGeom prst="rect">
+            <a:avLst/>
+          </a:prstGeom>
+          <a:solidFill>
+            <a:srgbClr val="C8E6C9"/>
+          </a:solidFill>
+          <a:ln>
+            <a:noFill/>
+          </a:ln>
+        </p:spPr>
+        <p:style>
+          <a:lnRef idx="1">
+            <a:schemeClr val="accent1"/>
+          </a:lnRef>
+          <a:fillRef idx="3">
+            <a:schemeClr val="accent1"/>
+          </a:fillRef>
+          <a:effectRef idx="2">
+            <a:schemeClr val="accent1"/>
+          </a:effectRef>
+          <a:fontRef idx="minor">
+            <a:schemeClr val="lt1"/>
+          </a:fontRef>
+        </p:style>
+        <p:txBody>
+          <a:bodyPr rtlCol="0" anchor="ctr" wrap="square" lIns="109728" rIns="109728"/>
+          <a:lstStyle/>
+          <a:p>
+            <a:pPr algn="ctr"/>
+            <a:r>
+              <a:rPr sz="1300" b="1">
+                <a:solidFill>
+                  <a:srgbClr val="1F3F2F"/>
+                </a:solidFill>
+                <a:latin typeface="Calibri"/>
+              </a:rPr>
+              <a:t>Closest match = add:north E-PLA datasheet: one coherent FFF knock-down k ≈ 1.2 on strength &amp; stiffness. Predict printed strength ≈ spec ÷ 1.2.</a:t>
+            </a:r>
+          </a:p>
+        </p:txBody>
+      </p:sp>
+      <p:sp>
+        <p:nvSpPr>
+          <p:cNvPr id="12" name="TextBox 11"/>
+          <p:cNvSpPr txBox="1"/>
+          <p:nvPr/>
+        </p:nvSpPr>
+        <p:spPr>
+          <a:xfrm>
+            <a:off x="548640" y="6400800"/>
+            <a:ext cx="11064240" cy="365760"/>
+          </a:xfrm>
+          <a:prstGeom prst="rect">
+            <a:avLst/>
+          </a:prstGeom>
+          <a:noFill/>
+        </p:spPr>
+        <p:txBody>
+          <a:bodyPr wrap="square" lIns="45720" rIns="45720" tIns="18288" bIns="18288" anchor="t">
+            <a:spAutoFit/>
+          </a:bodyPr>
+          <a:lstStyle/>
+          <a:p>
+            <a:pPr algn="l"/>
+            <a:r>
+              <a:rPr sz="1200" b="0" i="1">
+                <a:solidFill>
+                  <a:srgbClr val="707070"/>
+                </a:solidFill>
+                <a:latin typeface="Calibri"/>
+              </a:rPr>
+              <a:t>† E-PLA reports one tensile strength (at break); PLA σ_y ≈ UTS, so both are compared to 58 MPa. E-PLA = closest published add:north PLA (no PLA Economy TDS); ISO 527 moulded vs printed 80 mm² bar.</a:t>
+            </a:r>
+          </a:p>
+        </p:txBody>
+      </p:sp>
+      <p:sp>
+        <p:nvSpPr>
+          <p:cNvPr id="13" name="TextBox 12"/>
+          <p:cNvSpPr txBox="1"/>
+          <p:nvPr/>
+        </p:nvSpPr>
+        <p:spPr>
+          <a:xfrm>
+            <a:off x="457200" y="6446520"/>
+            <a:ext cx="640080" cy="274320"/>
+          </a:xfrm>
+          <a:prstGeom prst="rect">
+            <a:avLst/>
+          </a:prstGeom>
+          <a:noFill/>
+        </p:spPr>
+        <p:txBody>
+          <a:bodyPr wrap="square" lIns="45720" rIns="45720" tIns="18288" bIns="18288" anchor="t">
+            <a:spAutoFit/>
+          </a:bodyPr>
+          <a:lstStyle/>
+          <a:p>
+            <a:pPr algn="l"/>
+            <a:r>
+              <a:rPr sz="1000" b="0" i="0">
+                <a:solidFill>
+                  <a:srgbClr val="707070"/>
+                </a:solidFill>
+                <a:latin typeface="Calibri"/>
+              </a:rPr>
+              <a:t>156</a:t>
+            </a:r>
+          </a:p>
+        </p:txBody>
+      </p:sp>
+    </p:spTree>
+  </p:cSld>
+  <p:clrMapOvr>
+    <a:masterClrMapping/>
+  </p:clrMapOvr>
+</p:sld>
+</file>
+
 <file path=ppt/slides/slide2.xml><?xml version="1.0" encoding="utf-8"?>
 <p:sld xmlns:a="http://schemas.openxmlformats.org/drawingml/2006/main" xmlns:p="http://schemas.openxmlformats.org/presentationml/2006/main" xmlns:r="http://schemas.openxmlformats.org/officeDocument/2006/relationships">
   <p:cSld>
@@ -9583,7 +11620,7 @@
                 </a:solidFill>
                 <a:latin typeface="Calibri Light"/>
               </a:rPr>
-              <a:t>PHASE 8.6.20 V6a: VERDICT — OFFSET ≈ 1 AT 100 %</a:t>
+              <a:t>PHASE 8.6.20 V6a: VALIDATION — JOURNAL REFERENCE</a:t>
             </a:r>
           </a:p>
         </p:txBody>
@@ -9618,7 +11655,7 @@
                 </a:solidFill>
                 <a:latin typeface="Calibri"/>
               </a:rPr>
-              <a:t>V6a measured vs Chacón range  (and offset k = Chacón_min / measured)</a:t>
+              <a:t>Chacón (2017) journal — measured vs range, offset k = Chacón_min / measured</a:t>
             </a:r>
           </a:p>
         </p:txBody>
@@ -10471,6 +12508,41 @@
       <p:sp>
         <p:nvSpPr>
           <p:cNvPr id="14" name="TextBox 13"/>
+          <p:cNvSpPr txBox="1"/>
+          <p:nvPr/>
+        </p:nvSpPr>
+        <p:spPr>
+          <a:xfrm>
+            <a:off x="548640" y="6400800"/>
+            <a:ext cx="11064240" cy="365760"/>
+          </a:xfrm>
+          <a:prstGeom prst="rect">
+            <a:avLst/>
+          </a:prstGeom>
+          <a:noFill/>
+        </p:spPr>
+        <p:txBody>
+          <a:bodyPr wrap="square" lIns="45720" rIns="45720" tIns="18288" bIns="18288" anchor="t">
+            <a:spAutoFit/>
+          </a:bodyPr>
+          <a:lstStyle/>
+          <a:p>
+            <a:pPr algn="l"/>
+            <a:r>
+              <a:rPr sz="1200" b="0" i="1">
+                <a:solidFill>
+                  <a:srgbClr val="707070"/>
+                </a:solidFill>
+                <a:latin typeface="Calibri"/>
+              </a:rPr>
+              <a:t>Journal reference (Chacón 2017). Also validated against the add:north E-PLA datasheet — see the 'add:north PLA reference' slide (p. 156).</a:t>
+            </a:r>
+          </a:p>
+        </p:txBody>
+      </p:sp>
+      <p:sp>
+        <p:nvSpPr>
+          <p:cNvPr id="15" name="TextBox 14"/>
           <p:cNvSpPr txBox="1"/>
           <p:nvPr/>
         </p:nvSpPr>

--- a/V6a_8_6_20_slides.pptx
+++ b/V6a_8_6_20_slides.pptx
@@ -21,6 +21,11 @@
     <p:sldId id="269" r:id="rId20"/>
     <p:sldId id="270" r:id="rId21"/>
     <p:sldId id="271" r:id="rId22"/>
+    <p:sldId id="272" r:id="rId23"/>
+    <p:sldId id="273" r:id="rId24"/>
+    <p:sldId id="274" r:id="rId25"/>
+    <p:sldId id="275" r:id="rId26"/>
+    <p:sldId id="276" r:id="rId27"/>
   </p:sldIdLst>
   <p:sldSz cx="12191695" cy="6858000" type="screen4x3"/>
   <p:notesSz cx="6858000" cy="9144000"/>
@@ -3211,7 +3216,7 @@
                 </a:solidFill>
                 <a:latin typeface="Calibri Light"/>
               </a:rPr>
-              <a:t>PHASE 8.6.20 V6a: TENSILE TO FAILURE — 100 % INFILL</a:t>
+              <a:t>PHASE 8.6.20 V6a: TENSILE TO FAILURE — 100 % INFILL (PILOT)</a:t>
             </a:r>
           </a:p>
         </p:txBody>
@@ -4531,6 +4536,41 @@
       <p:sp>
         <p:nvSpPr>
           <p:cNvPr id="25" name="TextBox 24"/>
+          <p:cNvSpPr txBox="1"/>
+          <p:nvPr/>
+        </p:nvSpPr>
+        <p:spPr>
+          <a:xfrm>
+            <a:off x="548640" y="6400800"/>
+            <a:ext cx="11064240" cy="365760"/>
+          </a:xfrm>
+          <a:prstGeom prst="rect">
+            <a:avLst/>
+          </a:prstGeom>
+          <a:noFill/>
+        </p:spPr>
+        <p:txBody>
+          <a:bodyPr wrap="square" lIns="45720" rIns="45720" tIns="18288" bIns="18288" anchor="t">
+            <a:spAutoFit/>
+          </a:bodyPr>
+          <a:lstStyle/>
+          <a:p>
+            <a:pPr algn="l"/>
+            <a:r>
+              <a:rPr sz="1200" b="0" i="1">
+                <a:solidFill>
+                  <a:srgbClr val="707070"/>
+                </a:solidFill>
+                <a:latin typeface="Calibri"/>
+              </a:rPr>
+              <a:t>V6a (S7) = the PILOT (first) 100 % specimen, shown here in detail. It is the batch's strength / modulus EDGE point — representative n = 5 result on pp. 157–160; the V5 comparison uses V6d (≈ mean).</a:t>
+            </a:r>
+          </a:p>
+        </p:txBody>
+      </p:sp>
+      <p:sp>
+        <p:nvSpPr>
+          <p:cNvPr id="26" name="TextBox 25"/>
           <p:cNvSpPr txBox="1"/>
           <p:nvPr/>
         </p:nvSpPr>
@@ -4689,7 +4729,7 @@
                 </a:solidFill>
                 <a:latin typeface="Calibri Light"/>
               </a:rPr>
-              <a:t>V6a vs V5: LOAD vs TIME</a:t>
+              <a:t>V6 (100 % INFILL) vs V5 (50 % INFILL): LOAD vs TIME</a:t>
             </a:r>
           </a:p>
         </p:txBody>
@@ -4748,7 +4788,7 @@
                 </a:solidFill>
                 <a:latin typeface="Calibri"/>
               </a:rPr>
-              <a:t>Both at 0.1 mm/s (rate-matched). 100 % infill carries 2.17× the peak force (3826 vs 1767 N) and sustains a longer pull to fracture.</a:t>
+              <a:t>Both at 0.1 mm/s (rate-matched). 100 % infill carries ≈2.1× the peak force (batch mean 3697 vs 1767 N) and sustains a longer pull. Uses representative specimen V6d (≈ n = 5 mean), not the pilot V6a.</a:t>
             </a:r>
           </a:p>
         </p:txBody>
@@ -4914,7 +4954,7 @@
                 </a:solidFill>
                 <a:latin typeface="Calibri Light"/>
               </a:rPr>
-              <a:t>V6a vs V5: STRESS vs STRAIN</a:t>
+              <a:t>V6 (100 % INFILL) vs V5 (50 % INFILL): STRESS vs STRAIN</a:t>
             </a:r>
           </a:p>
         </p:txBody>
@@ -4973,7 +5013,7 @@
                 </a:solidFill>
                 <a:latin typeface="Calibri"/>
               </a:rPr>
-              <a:t>Same nominal 80 mm². 100 % infill is ~2.2× stiffer and stronger (UTS 47.8 vs 22.1 MPa) with a similar failure strain — the difference is load-bearing cross-section, i.e. the infill knock-down.</a:t>
+              <a:t>Same nominal 80 mm². 100 % infill is ~2× stronger (UTS 46.1 vs 22.1 MPa) and ~1.7× stiffer; the 100 % batch is also more extensible (ε_f 3–7 % vs ~2.5 %) — the difference is the infill load-bearing knock-down.</a:t>
             </a:r>
           </a:p>
         </p:txBody>
@@ -5139,7 +5179,7 @@
                 </a:solidFill>
                 <a:latin typeface="Calibri Light"/>
               </a:rPr>
-              <a:t>V6a vs V5: STRESS vs DISPLACEMENT</a:t>
+              <a:t>V6 (100 % INFILL) vs V5 (50 % INFILL): STRESS vs DISPLACEMENT</a:t>
             </a:r>
           </a:p>
         </p:txBody>
@@ -5198,7 +5238,7 @@
                 </a:solidFill>
                 <a:latin typeface="Calibri"/>
               </a:rPr>
-              <a:t>V6a needs more travel (7.3 vs 3.8 mm) to fracture: higher force ⇒ more rig/grip take-up, so the gauge share of travel drops to 33 % (vs 52 % at 50 %).</a:t>
+              <a:t>100 % infill needs ~2× the travel (7.3 vs 3.8 mm) to fracture — higher force and ~2× the gauge stretch — but reaches a SIMILAR gauge share (55 % vs 52 %). (The pilot V6a's low 33 % was its own outlier.)</a:t>
             </a:r>
           </a:p>
         </p:txBody>
@@ -5364,7 +5404,7 @@
                 </a:solidFill>
                 <a:latin typeface="Calibri Light"/>
               </a:rPr>
-              <a:t>V6a vs V5: GAUGE STRAIN vs DISPLACEMENT</a:t>
+              <a:t>V6 (100 % INFILL) vs V5 (50 % INFILL): GAUGE STRAIN vs DISPLACEMENT</a:t>
             </a:r>
           </a:p>
         </p:txBody>
@@ -5423,7 +5463,7 @@
                 </a:solidFill>
                 <a:latin typeface="Calibri"/>
               </a:rPr>
-              <a:t>Both curves sit below the ideal ‘all-travel-to-gauge’ line (rig compliance). V6a's shallower slope = a smaller share of travel reaches the gauge (stiffer specimen, higher force, more machine take-up).</a:t>
+              <a:t>Both curves sit below the ideal ‘all-travel-to-gauge’ line (rig compliance) with SIMILAR slopes — about half the travel reaches the gauge in both; 100 % just travels further (stronger and more extensible).</a:t>
             </a:r>
           </a:p>
         </p:txBody>
@@ -5624,7 +5664,7 @@
                 </a:solidFill>
                 <a:latin typeface="Calibri"/>
               </a:rPr>
-              <a:t>All measured values, ratio (100 % / 50 %) and % change</a:t>
+              <a:t>All measured values — V6 = representative V6d (≈ n=5 mean); ratio (100 %/50 %), % change</a:t>
             </a:r>
           </a:p>
         </p:txBody>
@@ -5648,11 +5688,11 @@
                 <a:tableStyleId>{5C22544A-7EE6-4342-B048-85BDC9FD1C3A}</a:tableStyleId>
               </a:tblPr>
               <a:tblGrid>
-                <a:gridCol w="3278981"/>
-                <a:gridCol w="1153715"/>
-                <a:gridCol w="1214437"/>
-                <a:gridCol w="1032271"/>
-                <a:gridCol w="1092993"/>
+                <a:gridCol w="3228535"/>
+                <a:gridCol w="1195753"/>
+                <a:gridCol w="1255541"/>
+                <a:gridCol w="1016390"/>
+                <a:gridCol w="1076178"/>
               </a:tblGrid>
               <a:tr h="297180">
                 <a:tc>
@@ -5691,7 +5731,7 @@
                           </a:solidFill>
                           <a:latin typeface="Calibri"/>
                         </a:rPr>
-                        <a:t>V5 50 %</a:t>
+                        <a:t>V5 50 % infill</a:t>
                       </a:r>
                     </a:p>
                   </a:txBody>
@@ -5714,7 +5754,7 @@
                           </a:solidFill>
                           <a:latin typeface="Calibri"/>
                         </a:rPr>
-                        <a:t>V6a 100 %</a:t>
+                        <a:t>V6 100 % infill</a:t>
                       </a:r>
                     </a:p>
                   </a:txBody>
@@ -5831,7 +5871,7 @@
                           </a:solidFill>
                           <a:latin typeface="Calibri"/>
                         </a:rPr>
-                        <a:t>3826</a:t>
+                        <a:t>3688</a:t>
                       </a:r>
                     </a:p>
                   </a:txBody>
@@ -5854,7 +5894,7 @@
                           </a:solidFill>
                           <a:latin typeface="Calibri"/>
                         </a:rPr>
-                        <a:t>2.17×</a:t>
+                        <a:t>2.09×</a:t>
                       </a:r>
                     </a:p>
                   </a:txBody>
@@ -5877,7 +5917,7 @@
                           </a:solidFill>
                           <a:latin typeface="Calibri"/>
                         </a:rPr>
-                        <a:t>+117</a:t>
+                        <a:t>+109</a:t>
                       </a:r>
                     </a:p>
                   </a:txBody>
@@ -5948,7 +5988,7 @@
                           </a:solidFill>
                           <a:latin typeface="Calibri"/>
                         </a:rPr>
-                        <a:t>47.82</a:t>
+                        <a:t>46.10</a:t>
                       </a:r>
                     </a:p>
                   </a:txBody>
@@ -5971,7 +6011,7 @@
                           </a:solidFill>
                           <a:latin typeface="Calibri"/>
                         </a:rPr>
-                        <a:t>2.17×</a:t>
+                        <a:t>2.09×</a:t>
                       </a:r>
                     </a:p>
                   </a:txBody>
@@ -5994,7 +6034,7 @@
                           </a:solidFill>
                           <a:latin typeface="Calibri"/>
                         </a:rPr>
-                        <a:t>+117</a:t>
+                        <a:t>+109</a:t>
                       </a:r>
                     </a:p>
                   </a:txBody>
@@ -6057,7 +6097,7 @@
                           </a:solidFill>
                           <a:latin typeface="Calibri"/>
                         </a:rPr>
-                        <a:t>47.80</a:t>
+                        <a:t>44.73</a:t>
                       </a:r>
                     </a:p>
                   </a:txBody>
@@ -6076,7 +6116,7 @@
                           </a:solidFill>
                           <a:latin typeface="Calibri"/>
                         </a:rPr>
-                        <a:t>2.51×</a:t>
+                        <a:t>2.35×</a:t>
                       </a:r>
                     </a:p>
                   </a:txBody>
@@ -6095,7 +6135,7 @@
                           </a:solidFill>
                           <a:latin typeface="Calibri"/>
                         </a:rPr>
-                        <a:t>+151</a:t>
+                        <a:t>+135</a:t>
                       </a:r>
                     </a:p>
                   </a:txBody>
@@ -6154,7 +6194,7 @@
                           </a:solidFill>
                           <a:latin typeface="Calibri"/>
                         </a:rPr>
-                        <a:t>2.41</a:t>
+                        <a:t>2.63</a:t>
                       </a:r>
                     </a:p>
                   </a:txBody>
@@ -6173,7 +6213,7 @@
                           </a:solidFill>
                           <a:latin typeface="Calibri"/>
                         </a:rPr>
-                        <a:t>1.57×</a:t>
+                        <a:t>1.71×</a:t>
                       </a:r>
                     </a:p>
                   </a:txBody>
@@ -6192,7 +6232,7 @@
                           </a:solidFill>
                           <a:latin typeface="Calibri"/>
                         </a:rPr>
-                        <a:t>+57</a:t>
+                        <a:t>+71</a:t>
                       </a:r>
                     </a:p>
                   </a:txBody>
@@ -6251,7 +6291,7 @@
                           </a:solidFill>
                           <a:latin typeface="Calibri"/>
                         </a:rPr>
-                        <a:t>44.48</a:t>
+                        <a:t>42.55</a:t>
                       </a:r>
                     </a:p>
                   </a:txBody>
@@ -6270,7 +6310,7 @@
                           </a:solidFill>
                           <a:latin typeface="Calibri"/>
                         </a:rPr>
-                        <a:t>2.05×</a:t>
+                        <a:t>1.96×</a:t>
                       </a:r>
                     </a:p>
                   </a:txBody>
@@ -6289,7 +6329,7 @@
                           </a:solidFill>
                           <a:latin typeface="Calibri"/>
                         </a:rPr>
-                        <a:t>+104</a:t>
+                        <a:t>+96</a:t>
                       </a:r>
                     </a:p>
                   </a:txBody>
@@ -6348,7 +6388,7 @@
                           </a:solidFill>
                           <a:latin typeface="Calibri"/>
                         </a:rPr>
-                        <a:t>0.0298</a:t>
+                        <a:t>0.0500</a:t>
                       </a:r>
                     </a:p>
                   </a:txBody>
@@ -6367,7 +6407,7 @@
                           </a:solidFill>
                           <a:latin typeface="Calibri"/>
                         </a:rPr>
-                        <a:t>1.21×</a:t>
+                        <a:t>2.02×</a:t>
                       </a:r>
                     </a:p>
                   </a:txBody>
@@ -6386,7 +6426,7 @@
                           </a:solidFill>
                           <a:latin typeface="Calibri"/>
                         </a:rPr>
-                        <a:t>+21</a:t>
+                        <a:t>+102</a:t>
                       </a:r>
                     </a:p>
                   </a:txBody>
@@ -6445,7 +6485,7 @@
                           </a:solidFill>
                           <a:latin typeface="Calibri"/>
                         </a:rPr>
-                        <a:t>1310</a:t>
+                        <a:t>2131</a:t>
                       </a:r>
                     </a:p>
                   </a:txBody>
@@ -6464,7 +6504,7 @@
                           </a:solidFill>
                           <a:latin typeface="Calibri"/>
                         </a:rPr>
-                        <a:t>2.83×</a:t>
+                        <a:t>4.61×</a:t>
                       </a:r>
                     </a:p>
                   </a:txBody>
@@ -6483,7 +6523,7 @@
                           </a:solidFill>
                           <a:latin typeface="Calibri"/>
                         </a:rPr>
-                        <a:t>+184</a:t>
+                        <a:t>+361</a:t>
                       </a:r>
                     </a:p>
                   </a:txBody>
@@ -6542,7 +6582,7 @@
                           </a:solidFill>
                           <a:latin typeface="Calibri"/>
                         </a:rPr>
-                        <a:t>7.0</a:t>
+                        <a:t>7.7</a:t>
                       </a:r>
                     </a:p>
                   </a:txBody>
@@ -6561,7 +6601,7 @@
                           </a:solidFill>
                           <a:latin typeface="Calibri"/>
                         </a:rPr>
-                        <a:t>4.7×</a:t>
+                        <a:t>5.1×</a:t>
                       </a:r>
                     </a:p>
                   </a:txBody>
@@ -6580,7 +6620,7 @@
                           </a:solidFill>
                           <a:latin typeface="Calibri"/>
                         </a:rPr>
-                        <a:t>+367</a:t>
+                        <a:t>+413</a:t>
                       </a:r>
                     </a:p>
                   </a:txBody>
@@ -6639,7 +6679,7 @@
                           </a:solidFill>
                           <a:latin typeface="Calibri"/>
                         </a:rPr>
-                        <a:t>7.33</a:t>
+                        <a:t>7.32</a:t>
                       </a:r>
                     </a:p>
                   </a:txBody>
@@ -6736,7 +6776,7 @@
                           </a:solidFill>
                           <a:latin typeface="Calibri"/>
                         </a:rPr>
-                        <a:t>2.39</a:t>
+                        <a:t>4.00</a:t>
                       </a:r>
                     </a:p>
                   </a:txBody>
@@ -6755,7 +6795,7 @@
                           </a:solidFill>
                           <a:latin typeface="Calibri"/>
                         </a:rPr>
-                        <a:t>1.21×</a:t>
+                        <a:t>2.03×</a:t>
                       </a:r>
                     </a:p>
                   </a:txBody>
@@ -6774,7 +6814,7 @@
                           </a:solidFill>
                           <a:latin typeface="Calibri"/>
                         </a:rPr>
-                        <a:t>+21</a:t>
+                        <a:t>+103</a:t>
                       </a:r>
                     </a:p>
                   </a:txBody>
@@ -6833,7 +6873,7 @@
                           </a:solidFill>
                           <a:latin typeface="Calibri"/>
                         </a:rPr>
-                        <a:t>4.94</a:t>
+                        <a:t>3.32</a:t>
                       </a:r>
                     </a:p>
                   </a:txBody>
@@ -6852,7 +6892,7 @@
                           </a:solidFill>
                           <a:latin typeface="Calibri"/>
                         </a:rPr>
-                        <a:t>2.69×</a:t>
+                        <a:t>1.80×</a:t>
                       </a:r>
                     </a:p>
                   </a:txBody>
@@ -6871,7 +6911,7 @@
                           </a:solidFill>
                           <a:latin typeface="Calibri"/>
                         </a:rPr>
-                        <a:t>+169</a:t>
+                        <a:t>+80</a:t>
                       </a:r>
                     </a:p>
                   </a:txBody>
@@ -6930,7 +6970,7 @@
                           </a:solidFill>
                           <a:latin typeface="Calibri"/>
                         </a:rPr>
-                        <a:t>32.6</a:t>
+                        <a:t>54.7</a:t>
                       </a:r>
                     </a:p>
                   </a:txBody>
@@ -6949,7 +6989,7 @@
                           </a:solidFill>
                           <a:latin typeface="Calibri"/>
                         </a:rPr>
-                        <a:t>0.63×</a:t>
+                        <a:t>1.06×</a:t>
                       </a:r>
                     </a:p>
                   </a:txBody>
@@ -6968,7 +7008,7 @@
                           </a:solidFill>
                           <a:latin typeface="Calibri"/>
                         </a:rPr>
-                        <a:t>−37</a:t>
+                        <a:t>+6</a:t>
                       </a:r>
                     </a:p>
                   </a:txBody>
@@ -7027,7 +7067,7 @@
                           </a:solidFill>
                           <a:latin typeface="Calibri"/>
                         </a:rPr>
-                        <a:t>774</a:t>
+                        <a:t>1111</a:t>
                       </a:r>
                     </a:p>
                   </a:txBody>
@@ -7046,7 +7086,7 @@
                           </a:solidFill>
                           <a:latin typeface="Calibri"/>
                         </a:rPr>
-                        <a:t>0.81×</a:t>
+                        <a:t>1.16×</a:t>
                       </a:r>
                     </a:p>
                   </a:txBody>
@@ -7065,7 +7105,7 @@
                           </a:solidFill>
                           <a:latin typeface="Calibri"/>
                         </a:rPr>
-                        <a:t>−19</a:t>
+                        <a:t>+16</a:t>
                       </a:r>
                     </a:p>
                   </a:txBody>
@@ -7124,7 +7164,7 @@
                           </a:solidFill>
                           <a:latin typeface="Calibri"/>
                         </a:rPr>
-                        <a:t>73.4</a:t>
+                        <a:t>73.3</a:t>
                       </a:r>
                     </a:p>
                   </a:txBody>
@@ -7221,7 +7261,7 @@
                           </a:solidFill>
                           <a:latin typeface="Calibri"/>
                         </a:rPr>
-                        <a:t>99.9</a:t>
+                        <a:t>99</a:t>
                       </a:r>
                     </a:p>
                   </a:txBody>
@@ -7240,7 +7280,7 @@
                           </a:solidFill>
                           <a:latin typeface="Calibri"/>
                         </a:rPr>
-                        <a:t>1.00×</a:t>
+                        <a:t>0.99×</a:t>
                       </a:r>
                     </a:p>
                   </a:txBody>
@@ -7335,11 +7375,10 @@
                 </a:solidFill>
                 <a:latin typeface="Calibri"/>
               </a:rPr>
-              <a:t>Strength scales ~2.2× — MORE than 2× for a 2× infill jump. The 50 % knock-down is NONLINEAR: 50 % infill bears &lt; 50 % of the solid load path.
-• σ_y rises the most (2.5×) — 100 % yields right at its UTS.
-• ε_f similar (1.2×): both fracture at ~0.025–0.030 strain.
-• Toughness 2.8× — stronger AND slightly more extensible.
-• Higher force ⇒ rig take-up 2.7× → gauge share falls 52 → 33 % (strain still from DIC).
+              <a:t>Strength scales ~2.1× — MORE than 2× for a 2× infill jump. The 50 % knock-down is NONLINEAR: 50 % infill bears &lt; 50 % of the solid load path.
+• σ_y rises the most (2.35×) — 100 % yields near its UTS.
+• 100 % is also ~2× MORE extensible (ε_f 0.050 vs 0.025) — tougher (4.6×), not only stronger.
+• Gauge share ≈ the same (55 % vs 52 %) — 100 % just travels ~2× further (more force + more stretch).
 • Rate, area, markers, preload all matched — the only variable is infill.</a:t>
             </a:r>
           </a:p>
@@ -7353,8 +7392,8 @@
         </p:nvSpPr>
         <p:spPr>
           <a:xfrm>
-            <a:off x="8321040" y="5760720"/>
-            <a:ext cx="3611880" cy="548640"/>
+            <a:off x="8321040" y="5532120"/>
+            <a:ext cx="3611880" cy="777240"/>
           </a:xfrm>
           <a:prstGeom prst="rect">
             <a:avLst/>
@@ -7386,13 +7425,14 @@
           <a:p>
             <a:pPr algn="ctr"/>
             <a:r>
-              <a:rPr sz="1300" b="1">
+              <a:rPr sz="1200" b="1">
                 <a:solidFill>
                   <a:srgbClr val="1F3F2F"/>
                 </a:solidFill>
                 <a:latin typeface="Calibri"/>
               </a:rPr>
-              <a:t>≈ 2.2× strength, k: 1.45 → 1.0</a:t>
+              <a:t>≈ 2.1× strength, k: 1.45 → 1.0
+(V6 = representative V6d)</a:t>
             </a:r>
           </a:p>
         </p:txBody>
@@ -9427,7 +9467,7 @@
                 </a:solidFill>
                 <a:latin typeface="Calibri"/>
               </a:rPr>
-              <a:t>† E-PLA reports one tensile strength (at break); PLA σ_y ≈ UTS, so both are compared to 58 MPa. E-PLA = closest published add:north PLA (no PLA Economy TDS); ISO 527 moulded vs printed 80 mm² bar.</a:t>
+              <a:t>Pilot V6a values (batch edge); representative n = 5 offset on p. 160. † E-PLA reports one tensile strength (at break), PLA σ_y ≈ UTS → both vs 58 MPa. E-PLA = closest add:north PLA; ISO 527 moulded vs printed.</a:t>
             </a:r>
           </a:p>
         </p:txBody>
@@ -9463,6 +9503,2655 @@
                 <a:latin typeface="Calibri"/>
               </a:rPr>
               <a:t>156</a:t>
+            </a:r>
+          </a:p>
+        </p:txBody>
+      </p:sp>
+    </p:spTree>
+  </p:cSld>
+  <p:clrMapOvr>
+    <a:masterClrMapping/>
+  </p:clrMapOvr>
+</p:sld>
+</file>
+
+<file path=ppt/slides/slide17.xml><?xml version="1.0" encoding="utf-8"?>
+<p:sld xmlns:a="http://schemas.openxmlformats.org/drawingml/2006/main" xmlns:p="http://schemas.openxmlformats.org/presentationml/2006/main" xmlns:r="http://schemas.openxmlformats.org/officeDocument/2006/relationships">
+  <p:cSld>
+    <p:spTree>
+      <p:nvGrpSpPr>
+        <p:cNvPr id="1" name=""/>
+        <p:cNvGrpSpPr/>
+        <p:nvPr/>
+      </p:nvGrpSpPr>
+      <p:grpSpPr/>
+      <p:sp>
+        <p:nvSpPr>
+          <p:cNvPr id="2" name="TextBox 1"/>
+          <p:cNvSpPr txBox="1"/>
+          <p:nvPr/>
+        </p:nvSpPr>
+        <p:spPr>
+          <a:xfrm>
+            <a:off x="11155680" y="274320"/>
+            <a:ext cx="914400" cy="274320"/>
+          </a:xfrm>
+          <a:prstGeom prst="rect">
+            <a:avLst/>
+          </a:prstGeom>
+          <a:noFill/>
+        </p:spPr>
+        <p:txBody>
+          <a:bodyPr wrap="square" lIns="45720" rIns="45720" tIns="18288" bIns="18288" anchor="t">
+            <a:spAutoFit/>
+          </a:bodyPr>
+          <a:lstStyle/>
+          <a:p>
+            <a:pPr algn="r"/>
+            <a:r>
+              <a:rPr sz="800" b="1" i="0">
+                <a:solidFill>
+                  <a:srgbClr val="707070"/>
+                </a:solidFill>
+                <a:latin typeface="Calibri"/>
+              </a:rPr>
+              <a:t>JÖNKÖPING UNIVERSITY</a:t>
+            </a:r>
+          </a:p>
+        </p:txBody>
+      </p:sp>
+      <p:sp>
+        <p:nvSpPr>
+          <p:cNvPr id="3" name="Rectangle 2"/>
+          <p:cNvSpPr/>
+          <p:nvPr/>
+        </p:nvSpPr>
+        <p:spPr>
+          <a:xfrm>
+            <a:off x="457200" y="411480"/>
+            <a:ext cx="457200" cy="73152"/>
+          </a:xfrm>
+          <a:prstGeom prst="rect">
+            <a:avLst/>
+          </a:prstGeom>
+          <a:solidFill>
+            <a:srgbClr val="A9D6EF"/>
+          </a:solidFill>
+          <a:ln>
+            <a:noFill/>
+          </a:ln>
+        </p:spPr>
+        <p:style>
+          <a:lnRef idx="1">
+            <a:schemeClr val="accent1"/>
+          </a:lnRef>
+          <a:fillRef idx="3">
+            <a:schemeClr val="accent1"/>
+          </a:fillRef>
+          <a:effectRef idx="2">
+            <a:schemeClr val="accent1"/>
+          </a:effectRef>
+          <a:fontRef idx="minor">
+            <a:schemeClr val="lt1"/>
+          </a:fontRef>
+        </p:style>
+        <p:txBody>
+          <a:bodyPr rtlCol="0" anchor="ctr"/>
+          <a:lstStyle/>
+          <a:p>
+            <a:pPr algn="ctr"/>
+          </a:p>
+        </p:txBody>
+      </p:sp>
+      <p:sp>
+        <p:nvSpPr>
+          <p:cNvPr id="4" name="TextBox 3"/>
+          <p:cNvSpPr txBox="1"/>
+          <p:nvPr/>
+        </p:nvSpPr>
+        <p:spPr>
+          <a:xfrm>
+            <a:off x="457200" y="502920"/>
+            <a:ext cx="11430000" cy="822960"/>
+          </a:xfrm>
+          <a:prstGeom prst="rect">
+            <a:avLst/>
+          </a:prstGeom>
+          <a:noFill/>
+        </p:spPr>
+        <p:txBody>
+          <a:bodyPr wrap="square" lIns="45720" rIns="45720" tIns="18288" bIns="18288" anchor="t">
+            <a:spAutoFit/>
+          </a:bodyPr>
+          <a:lstStyle/>
+          <a:p>
+            <a:pPr algn="l"/>
+            <a:r>
+              <a:rPr sz="3000" b="0" i="0">
+                <a:solidFill>
+                  <a:srgbClr val="000000"/>
+                </a:solidFill>
+                <a:latin typeface="Calibri Light"/>
+              </a:rPr>
+              <a:t>PHASE 8.6.20 V6: REPEATABILITY STUDY (n = 5, 100 % INFILL)</a:t>
+            </a:r>
+          </a:p>
+        </p:txBody>
+      </p:sp>
+      <p:pic>
+        <p:nvPicPr>
+          <p:cNvPr id="5" name="Picture 4" descr="V6_quintet_curves.png"/>
+          <p:cNvPicPr>
+            <a:picLocks noChangeAspect="1"/>
+          </p:cNvPicPr>
+          <p:nvPr/>
+        </p:nvPicPr>
+        <p:blipFill>
+          <a:blip r:embed="rId2"/>
+          <a:stretch>
+            <a:fillRect/>
+          </a:stretch>
+        </p:blipFill>
+        <p:spPr>
+          <a:xfrm>
+            <a:off x="292608" y="1463040"/>
+            <a:ext cx="5943600" cy="4342380"/>
+          </a:xfrm>
+          <a:prstGeom prst="rect">
+            <a:avLst/>
+          </a:prstGeom>
+        </p:spPr>
+      </p:pic>
+      <p:sp>
+        <p:nvSpPr>
+          <p:cNvPr id="6" name="TextBox 5"/>
+          <p:cNvSpPr txBox="1"/>
+          <p:nvPr/>
+        </p:nvSpPr>
+        <p:spPr>
+          <a:xfrm>
+            <a:off x="6400800" y="1207008"/>
+            <a:ext cx="5486400" cy="365760"/>
+          </a:xfrm>
+          <a:prstGeom prst="rect">
+            <a:avLst/>
+          </a:prstGeom>
+          <a:noFill/>
+        </p:spPr>
+        <p:txBody>
+          <a:bodyPr wrap="square" lIns="45720" rIns="45720" tIns="18288" bIns="18288" anchor="t">
+            <a:spAutoFit/>
+          </a:bodyPr>
+          <a:lstStyle/>
+          <a:p>
+            <a:pPr algn="l"/>
+            <a:r>
+              <a:rPr sz="1600" b="0" i="0">
+                <a:solidFill>
+                  <a:srgbClr val="707070"/>
+                </a:solidFill>
+                <a:latin typeface="Calibri"/>
+              </a:rPr>
+              <a:t>Per-specimen values  (UTS/σ_y MPa · E GPa · ε_f –)</a:t>
+            </a:r>
+          </a:p>
+        </p:txBody>
+      </p:sp>
+      <p:graphicFrame>
+        <p:nvGraphicFramePr>
+          <p:cNvPr id="7" name="Table 6"/>
+          <p:cNvGraphicFramePr>
+            <a:graphicFrameLocks noGrp="1"/>
+          </p:cNvGraphicFramePr>
+          <p:nvPr/>
+        </p:nvGraphicFramePr>
+        <p:xfrm>
+          <a:off x="6400800" y="1572768"/>
+          <a:ext cx="5486398" cy="2331720"/>
+        </p:xfrm>
+        <a:graphic>
+          <a:graphicData uri="http://schemas.openxmlformats.org/drawingml/2006/table">
+            <a:tbl>
+              <a:tblPr firstRow="1" bandRow="1">
+                <a:tableStyleId>{5C22544A-7EE6-4342-B048-85BDC9FD1C3A}</a:tableStyleId>
+              </a:tblPr>
+              <a:tblGrid>
+                <a:gridCol w="1443789"/>
+                <a:gridCol w="1039528"/>
+                <a:gridCol w="1039528"/>
+                <a:gridCol w="924025"/>
+                <a:gridCol w="1039528"/>
+              </a:tblGrid>
+              <a:tr h="291465">
+                <a:tc>
+                  <a:txBody>
+                    <a:bodyPr lIns="54864" rIns="54864" tIns="18288" bIns="18288" wrap="square" anchor="ctr"/>
+                    <a:lstStyle/>
+                    <a:p>
+                      <a:pPr algn="l"/>
+                      <a:r>
+                        <a:rPr sz="1050" b="1">
+                          <a:solidFill>
+                            <a:srgbClr val="FFFFFF"/>
+                          </a:solidFill>
+                          <a:latin typeface="Calibri"/>
+                        </a:rPr>
+                        <a:t>Specimen</a:t>
+                      </a:r>
+                    </a:p>
+                  </a:txBody>
+                  <a:tcPr>
+                    <a:solidFill>
+                      <a:srgbClr val="143D2F"/>
+                    </a:solidFill>
+                  </a:tcPr>
+                </a:tc>
+                <a:tc>
+                  <a:txBody>
+                    <a:bodyPr lIns="54864" rIns="54864" tIns="18288" bIns="18288" wrap="square" anchor="ctr"/>
+                    <a:lstStyle/>
+                    <a:p>
+                      <a:pPr algn="l"/>
+                      <a:r>
+                        <a:rPr sz="1050" b="1">
+                          <a:solidFill>
+                            <a:srgbClr val="FFFFFF"/>
+                          </a:solidFill>
+                          <a:latin typeface="Calibri"/>
+                        </a:rPr>
+                        <a:t>UTS</a:t>
+                      </a:r>
+                    </a:p>
+                  </a:txBody>
+                  <a:tcPr>
+                    <a:solidFill>
+                      <a:srgbClr val="143D2F"/>
+                    </a:solidFill>
+                  </a:tcPr>
+                </a:tc>
+                <a:tc>
+                  <a:txBody>
+                    <a:bodyPr lIns="54864" rIns="54864" tIns="18288" bIns="18288" wrap="square" anchor="ctr"/>
+                    <a:lstStyle/>
+                    <a:p>
+                      <a:pPr algn="l"/>
+                      <a:r>
+                        <a:rPr sz="1050" b="1">
+                          <a:solidFill>
+                            <a:srgbClr val="FFFFFF"/>
+                          </a:solidFill>
+                          <a:latin typeface="Calibri"/>
+                        </a:rPr>
+                        <a:t>σ_y</a:t>
+                      </a:r>
+                    </a:p>
+                  </a:txBody>
+                  <a:tcPr>
+                    <a:solidFill>
+                      <a:srgbClr val="143D2F"/>
+                    </a:solidFill>
+                  </a:tcPr>
+                </a:tc>
+                <a:tc>
+                  <a:txBody>
+                    <a:bodyPr lIns="54864" rIns="54864" tIns="18288" bIns="18288" wrap="square" anchor="ctr"/>
+                    <a:lstStyle/>
+                    <a:p>
+                      <a:pPr algn="l"/>
+                      <a:r>
+                        <a:rPr sz="1050" b="1">
+                          <a:solidFill>
+                            <a:srgbClr val="FFFFFF"/>
+                          </a:solidFill>
+                          <a:latin typeface="Calibri"/>
+                        </a:rPr>
+                        <a:t>E</a:t>
+                      </a:r>
+                    </a:p>
+                  </a:txBody>
+                  <a:tcPr>
+                    <a:solidFill>
+                      <a:srgbClr val="143D2F"/>
+                    </a:solidFill>
+                  </a:tcPr>
+                </a:tc>
+                <a:tc>
+                  <a:txBody>
+                    <a:bodyPr lIns="54864" rIns="54864" tIns="18288" bIns="18288" wrap="square" anchor="ctr"/>
+                    <a:lstStyle/>
+                    <a:p>
+                      <a:pPr algn="l"/>
+                      <a:r>
+                        <a:rPr sz="1050" b="1">
+                          <a:solidFill>
+                            <a:srgbClr val="FFFFFF"/>
+                          </a:solidFill>
+                          <a:latin typeface="Calibri"/>
+                        </a:rPr>
+                        <a:t>ε_f</a:t>
+                      </a:r>
+                    </a:p>
+                  </a:txBody>
+                  <a:tcPr>
+                    <a:solidFill>
+                      <a:srgbClr val="143D2F"/>
+                    </a:solidFill>
+                  </a:tcPr>
+                </a:tc>
+              </a:tr>
+              <a:tr h="291465">
+                <a:tc>
+                  <a:txBody>
+                    <a:bodyPr lIns="54864" rIns="54864" tIns="18288" bIns="18288" wrap="square" anchor="ctr"/>
+                    <a:lstStyle/>
+                    <a:p>
+                      <a:pPr algn="l"/>
+                      <a:r>
+                        <a:rPr sz="1000" b="0">
+                          <a:solidFill>
+                            <a:srgbClr val="000000"/>
+                          </a:solidFill>
+                          <a:latin typeface="Calibri"/>
+                        </a:rPr>
+                        <a:t>V6a · S7</a:t>
+                      </a:r>
+                    </a:p>
+                  </a:txBody>
+                  <a:tcPr/>
+                </a:tc>
+                <a:tc>
+                  <a:txBody>
+                    <a:bodyPr lIns="54864" rIns="54864" tIns="18288" bIns="18288" wrap="square" anchor="ctr"/>
+                    <a:lstStyle/>
+                    <a:p>
+                      <a:pPr algn="l"/>
+                      <a:r>
+                        <a:rPr sz="1000" b="0">
+                          <a:solidFill>
+                            <a:srgbClr val="000000"/>
+                          </a:solidFill>
+                          <a:latin typeface="Calibri"/>
+                        </a:rPr>
+                        <a:t>47.82</a:t>
+                      </a:r>
+                    </a:p>
+                  </a:txBody>
+                  <a:tcPr/>
+                </a:tc>
+                <a:tc>
+                  <a:txBody>
+                    <a:bodyPr lIns="54864" rIns="54864" tIns="18288" bIns="18288" wrap="square" anchor="ctr"/>
+                    <a:lstStyle/>
+                    <a:p>
+                      <a:pPr algn="l"/>
+                      <a:r>
+                        <a:rPr sz="1000" b="0">
+                          <a:solidFill>
+                            <a:srgbClr val="000000"/>
+                          </a:solidFill>
+                          <a:latin typeface="Calibri"/>
+                        </a:rPr>
+                        <a:t>47.80</a:t>
+                      </a:r>
+                    </a:p>
+                  </a:txBody>
+                  <a:tcPr/>
+                </a:tc>
+                <a:tc>
+                  <a:txBody>
+                    <a:bodyPr lIns="54864" rIns="54864" tIns="18288" bIns="18288" wrap="square" anchor="ctr"/>
+                    <a:lstStyle/>
+                    <a:p>
+                      <a:pPr algn="l"/>
+                      <a:r>
+                        <a:rPr sz="1000" b="0">
+                          <a:solidFill>
+                            <a:srgbClr val="000000"/>
+                          </a:solidFill>
+                          <a:latin typeface="Calibri"/>
+                        </a:rPr>
+                        <a:t>2.41</a:t>
+                      </a:r>
+                    </a:p>
+                  </a:txBody>
+                  <a:tcPr/>
+                </a:tc>
+                <a:tc>
+                  <a:txBody>
+                    <a:bodyPr lIns="54864" rIns="54864" tIns="18288" bIns="18288" wrap="square" anchor="ctr"/>
+                    <a:lstStyle/>
+                    <a:p>
+                      <a:pPr algn="l"/>
+                      <a:r>
+                        <a:rPr sz="1000" b="0">
+                          <a:solidFill>
+                            <a:srgbClr val="000000"/>
+                          </a:solidFill>
+                          <a:latin typeface="Calibri"/>
+                        </a:rPr>
+                        <a:t>0.030</a:t>
+                      </a:r>
+                    </a:p>
+                  </a:txBody>
+                  <a:tcPr/>
+                </a:tc>
+              </a:tr>
+              <a:tr h="291465">
+                <a:tc>
+                  <a:txBody>
+                    <a:bodyPr lIns="54864" rIns="54864" tIns="18288" bIns="18288" wrap="square" anchor="ctr"/>
+                    <a:lstStyle/>
+                    <a:p>
+                      <a:pPr algn="l"/>
+                      <a:r>
+                        <a:rPr sz="1000" b="0">
+                          <a:solidFill>
+                            <a:srgbClr val="000000"/>
+                          </a:solidFill>
+                          <a:latin typeface="Calibri"/>
+                        </a:rPr>
+                        <a:t>V6b · S8</a:t>
+                      </a:r>
+                    </a:p>
+                  </a:txBody>
+                  <a:tcPr/>
+                </a:tc>
+                <a:tc>
+                  <a:txBody>
+                    <a:bodyPr lIns="54864" rIns="54864" tIns="18288" bIns="18288" wrap="square" anchor="ctr"/>
+                    <a:lstStyle/>
+                    <a:p>
+                      <a:pPr algn="l"/>
+                      <a:r>
+                        <a:rPr sz="1000" b="0">
+                          <a:solidFill>
+                            <a:srgbClr val="000000"/>
+                          </a:solidFill>
+                          <a:latin typeface="Calibri"/>
+                        </a:rPr>
+                        <a:t>44.83</a:t>
+                      </a:r>
+                    </a:p>
+                  </a:txBody>
+                  <a:tcPr/>
+                </a:tc>
+                <a:tc>
+                  <a:txBody>
+                    <a:bodyPr lIns="54864" rIns="54864" tIns="18288" bIns="18288" wrap="square" anchor="ctr"/>
+                    <a:lstStyle/>
+                    <a:p>
+                      <a:pPr algn="l"/>
+                      <a:r>
+                        <a:rPr sz="1000" b="0">
+                          <a:solidFill>
+                            <a:srgbClr val="000000"/>
+                          </a:solidFill>
+                          <a:latin typeface="Calibri"/>
+                        </a:rPr>
+                        <a:t>43.24</a:t>
+                      </a:r>
+                    </a:p>
+                  </a:txBody>
+                  <a:tcPr/>
+                </a:tc>
+                <a:tc>
+                  <a:txBody>
+                    <a:bodyPr lIns="54864" rIns="54864" tIns="18288" bIns="18288" wrap="square" anchor="ctr"/>
+                    <a:lstStyle/>
+                    <a:p>
+                      <a:pPr algn="l"/>
+                      <a:r>
+                        <a:rPr sz="1000" b="0">
+                          <a:solidFill>
+                            <a:srgbClr val="000000"/>
+                          </a:solidFill>
+                          <a:latin typeface="Calibri"/>
+                        </a:rPr>
+                        <a:t>2.63</a:t>
+                      </a:r>
+                    </a:p>
+                  </a:txBody>
+                  <a:tcPr/>
+                </a:tc>
+                <a:tc>
+                  <a:txBody>
+                    <a:bodyPr lIns="54864" rIns="54864" tIns="18288" bIns="18288" wrap="square" anchor="ctr"/>
+                    <a:lstStyle/>
+                    <a:p>
+                      <a:pPr algn="l"/>
+                      <a:r>
+                        <a:rPr sz="1000" b="0">
+                          <a:solidFill>
+                            <a:srgbClr val="000000"/>
+                          </a:solidFill>
+                          <a:latin typeface="Calibri"/>
+                        </a:rPr>
+                        <a:t>0.052</a:t>
+                      </a:r>
+                    </a:p>
+                  </a:txBody>
+                  <a:tcPr/>
+                </a:tc>
+              </a:tr>
+              <a:tr h="291465">
+                <a:tc>
+                  <a:txBody>
+                    <a:bodyPr lIns="54864" rIns="54864" tIns="18288" bIns="18288" wrap="square" anchor="ctr"/>
+                    <a:lstStyle/>
+                    <a:p>
+                      <a:pPr algn="l"/>
+                      <a:r>
+                        <a:rPr sz="1000" b="0">
+                          <a:solidFill>
+                            <a:srgbClr val="000000"/>
+                          </a:solidFill>
+                          <a:latin typeface="Calibri"/>
+                        </a:rPr>
+                        <a:t>V6c · S10</a:t>
+                      </a:r>
+                    </a:p>
+                  </a:txBody>
+                  <a:tcPr/>
+                </a:tc>
+                <a:tc>
+                  <a:txBody>
+                    <a:bodyPr lIns="54864" rIns="54864" tIns="18288" bIns="18288" wrap="square" anchor="ctr"/>
+                    <a:lstStyle/>
+                    <a:p>
+                      <a:pPr algn="l"/>
+                      <a:r>
+                        <a:rPr sz="1000" b="0">
+                          <a:solidFill>
+                            <a:srgbClr val="000000"/>
+                          </a:solidFill>
+                          <a:latin typeface="Calibri"/>
+                        </a:rPr>
+                        <a:t>46.82</a:t>
+                      </a:r>
+                    </a:p>
+                  </a:txBody>
+                  <a:tcPr/>
+                </a:tc>
+                <a:tc>
+                  <a:txBody>
+                    <a:bodyPr lIns="54864" rIns="54864" tIns="18288" bIns="18288" wrap="square" anchor="ctr"/>
+                    <a:lstStyle/>
+                    <a:p>
+                      <a:pPr algn="l"/>
+                      <a:r>
+                        <a:rPr sz="1000" b="0">
+                          <a:solidFill>
+                            <a:srgbClr val="000000"/>
+                          </a:solidFill>
+                          <a:latin typeface="Calibri"/>
+                        </a:rPr>
+                        <a:t>45.09</a:t>
+                      </a:r>
+                    </a:p>
+                  </a:txBody>
+                  <a:tcPr/>
+                </a:tc>
+                <a:tc>
+                  <a:txBody>
+                    <a:bodyPr lIns="54864" rIns="54864" tIns="18288" bIns="18288" wrap="square" anchor="ctr"/>
+                    <a:lstStyle/>
+                    <a:p>
+                      <a:pPr algn="l"/>
+                      <a:r>
+                        <a:rPr sz="1000" b="0">
+                          <a:solidFill>
+                            <a:srgbClr val="000000"/>
+                          </a:solidFill>
+                          <a:latin typeface="Calibri"/>
+                        </a:rPr>
+                        <a:t>2.72</a:t>
+                      </a:r>
+                    </a:p>
+                  </a:txBody>
+                  <a:tcPr/>
+                </a:tc>
+                <a:tc>
+                  <a:txBody>
+                    <a:bodyPr lIns="54864" rIns="54864" tIns="18288" bIns="18288" wrap="square" anchor="ctr"/>
+                    <a:lstStyle/>
+                    <a:p>
+                      <a:pPr algn="l"/>
+                      <a:r>
+                        <a:rPr sz="1000" b="0">
+                          <a:solidFill>
+                            <a:srgbClr val="000000"/>
+                          </a:solidFill>
+                          <a:latin typeface="Calibri"/>
+                        </a:rPr>
+                        <a:t>0.073</a:t>
+                      </a:r>
+                    </a:p>
+                  </a:txBody>
+                  <a:tcPr/>
+                </a:tc>
+              </a:tr>
+              <a:tr h="291465">
+                <a:tc>
+                  <a:txBody>
+                    <a:bodyPr lIns="54864" rIns="54864" tIns="18288" bIns="18288" wrap="square" anchor="ctr"/>
+                    <a:lstStyle/>
+                    <a:p>
+                      <a:pPr algn="l"/>
+                      <a:r>
+                        <a:rPr sz="1000" b="0">
+                          <a:solidFill>
+                            <a:srgbClr val="000000"/>
+                          </a:solidFill>
+                          <a:latin typeface="Calibri"/>
+                        </a:rPr>
+                        <a:t>V6d · S11</a:t>
+                      </a:r>
+                    </a:p>
+                  </a:txBody>
+                  <a:tcPr/>
+                </a:tc>
+                <a:tc>
+                  <a:txBody>
+                    <a:bodyPr lIns="54864" rIns="54864" tIns="18288" bIns="18288" wrap="square" anchor="ctr"/>
+                    <a:lstStyle/>
+                    <a:p>
+                      <a:pPr algn="l"/>
+                      <a:r>
+                        <a:rPr sz="1000" b="0">
+                          <a:solidFill>
+                            <a:srgbClr val="000000"/>
+                          </a:solidFill>
+                          <a:latin typeface="Calibri"/>
+                        </a:rPr>
+                        <a:t>46.10</a:t>
+                      </a:r>
+                    </a:p>
+                  </a:txBody>
+                  <a:tcPr/>
+                </a:tc>
+                <a:tc>
+                  <a:txBody>
+                    <a:bodyPr lIns="54864" rIns="54864" tIns="18288" bIns="18288" wrap="square" anchor="ctr"/>
+                    <a:lstStyle/>
+                    <a:p>
+                      <a:pPr algn="l"/>
+                      <a:r>
+                        <a:rPr sz="1000" b="0">
+                          <a:solidFill>
+                            <a:srgbClr val="000000"/>
+                          </a:solidFill>
+                          <a:latin typeface="Calibri"/>
+                        </a:rPr>
+                        <a:t>44.73</a:t>
+                      </a:r>
+                    </a:p>
+                  </a:txBody>
+                  <a:tcPr/>
+                </a:tc>
+                <a:tc>
+                  <a:txBody>
+                    <a:bodyPr lIns="54864" rIns="54864" tIns="18288" bIns="18288" wrap="square" anchor="ctr"/>
+                    <a:lstStyle/>
+                    <a:p>
+                      <a:pPr algn="l"/>
+                      <a:r>
+                        <a:rPr sz="1000" b="0">
+                          <a:solidFill>
+                            <a:srgbClr val="000000"/>
+                          </a:solidFill>
+                          <a:latin typeface="Calibri"/>
+                        </a:rPr>
+                        <a:t>2.63</a:t>
+                      </a:r>
+                    </a:p>
+                  </a:txBody>
+                  <a:tcPr/>
+                </a:tc>
+                <a:tc>
+                  <a:txBody>
+                    <a:bodyPr lIns="54864" rIns="54864" tIns="18288" bIns="18288" wrap="square" anchor="ctr"/>
+                    <a:lstStyle/>
+                    <a:p>
+                      <a:pPr algn="l"/>
+                      <a:r>
+                        <a:rPr sz="1000" b="0">
+                          <a:solidFill>
+                            <a:srgbClr val="000000"/>
+                          </a:solidFill>
+                          <a:latin typeface="Calibri"/>
+                        </a:rPr>
+                        <a:t>0.050</a:t>
+                      </a:r>
+                    </a:p>
+                  </a:txBody>
+                  <a:tcPr/>
+                </a:tc>
+              </a:tr>
+              <a:tr h="291465">
+                <a:tc>
+                  <a:txBody>
+                    <a:bodyPr lIns="54864" rIns="54864" tIns="18288" bIns="18288" wrap="square" anchor="ctr"/>
+                    <a:lstStyle/>
+                    <a:p>
+                      <a:pPr algn="l"/>
+                      <a:r>
+                        <a:rPr sz="1000" b="0">
+                          <a:solidFill>
+                            <a:srgbClr val="000000"/>
+                          </a:solidFill>
+                          <a:latin typeface="Calibri"/>
+                        </a:rPr>
+                        <a:t>V6e · S9</a:t>
+                      </a:r>
+                    </a:p>
+                  </a:txBody>
+                  <a:tcPr/>
+                </a:tc>
+                <a:tc>
+                  <a:txBody>
+                    <a:bodyPr lIns="54864" rIns="54864" tIns="18288" bIns="18288" wrap="square" anchor="ctr"/>
+                    <a:lstStyle/>
+                    <a:p>
+                      <a:pPr algn="l"/>
+                      <a:r>
+                        <a:rPr sz="1000" b="0">
+                          <a:solidFill>
+                            <a:srgbClr val="000000"/>
+                          </a:solidFill>
+                          <a:latin typeface="Calibri"/>
+                        </a:rPr>
+                        <a:t>45.47</a:t>
+                      </a:r>
+                    </a:p>
+                  </a:txBody>
+                  <a:tcPr/>
+                </a:tc>
+                <a:tc>
+                  <a:txBody>
+                    <a:bodyPr lIns="54864" rIns="54864" tIns="18288" bIns="18288" wrap="square" anchor="ctr"/>
+                    <a:lstStyle/>
+                    <a:p>
+                      <a:pPr algn="l"/>
+                      <a:r>
+                        <a:rPr sz="1000" b="0">
+                          <a:solidFill>
+                            <a:srgbClr val="000000"/>
+                          </a:solidFill>
+                          <a:latin typeface="Calibri"/>
+                        </a:rPr>
+                        <a:t>44.03</a:t>
+                      </a:r>
+                    </a:p>
+                  </a:txBody>
+                  <a:tcPr/>
+                </a:tc>
+                <a:tc>
+                  <a:txBody>
+                    <a:bodyPr lIns="54864" rIns="54864" tIns="18288" bIns="18288" wrap="square" anchor="ctr"/>
+                    <a:lstStyle/>
+                    <a:p>
+                      <a:pPr algn="l"/>
+                      <a:r>
+                        <a:rPr sz="1000" b="0">
+                          <a:solidFill>
+                            <a:srgbClr val="000000"/>
+                          </a:solidFill>
+                          <a:latin typeface="Calibri"/>
+                        </a:rPr>
+                        <a:t>2.59</a:t>
+                      </a:r>
+                    </a:p>
+                  </a:txBody>
+                  <a:tcPr/>
+                </a:tc>
+                <a:tc>
+                  <a:txBody>
+                    <a:bodyPr lIns="54864" rIns="54864" tIns="18288" bIns="18288" wrap="square" anchor="ctr"/>
+                    <a:lstStyle/>
+                    <a:p>
+                      <a:pPr algn="l"/>
+                      <a:r>
+                        <a:rPr sz="1000" b="0">
+                          <a:solidFill>
+                            <a:srgbClr val="000000"/>
+                          </a:solidFill>
+                          <a:latin typeface="Calibri"/>
+                        </a:rPr>
+                        <a:t>0.074</a:t>
+                      </a:r>
+                    </a:p>
+                  </a:txBody>
+                  <a:tcPr/>
+                </a:tc>
+              </a:tr>
+              <a:tr h="291465">
+                <a:tc>
+                  <a:txBody>
+                    <a:bodyPr lIns="54864" rIns="54864" tIns="18288" bIns="18288" wrap="square" anchor="ctr"/>
+                    <a:lstStyle/>
+                    <a:p>
+                      <a:pPr algn="l"/>
+                      <a:r>
+                        <a:rPr sz="1000" b="1">
+                          <a:solidFill>
+                            <a:srgbClr val="000000"/>
+                          </a:solidFill>
+                          <a:latin typeface="Calibri"/>
+                        </a:rPr>
+                        <a:t>mean</a:t>
+                      </a:r>
+                    </a:p>
+                  </a:txBody>
+                  <a:tcPr>
+                    <a:solidFill>
+                      <a:srgbClr val="E7F1F8"/>
+                    </a:solidFill>
+                  </a:tcPr>
+                </a:tc>
+                <a:tc>
+                  <a:txBody>
+                    <a:bodyPr lIns="54864" rIns="54864" tIns="18288" bIns="18288" wrap="square" anchor="ctr"/>
+                    <a:lstStyle/>
+                    <a:p>
+                      <a:pPr algn="l"/>
+                      <a:r>
+                        <a:rPr sz="1000" b="1">
+                          <a:solidFill>
+                            <a:srgbClr val="000000"/>
+                          </a:solidFill>
+                          <a:latin typeface="Calibri"/>
+                        </a:rPr>
+                        <a:t>46.2</a:t>
+                      </a:r>
+                    </a:p>
+                  </a:txBody>
+                  <a:tcPr>
+                    <a:solidFill>
+                      <a:srgbClr val="E7F1F8"/>
+                    </a:solidFill>
+                  </a:tcPr>
+                </a:tc>
+                <a:tc>
+                  <a:txBody>
+                    <a:bodyPr lIns="54864" rIns="54864" tIns="18288" bIns="18288" wrap="square" anchor="ctr"/>
+                    <a:lstStyle/>
+                    <a:p>
+                      <a:pPr algn="l"/>
+                      <a:r>
+                        <a:rPr sz="1000" b="1">
+                          <a:solidFill>
+                            <a:srgbClr val="000000"/>
+                          </a:solidFill>
+                          <a:latin typeface="Calibri"/>
+                        </a:rPr>
+                        <a:t>45.0</a:t>
+                      </a:r>
+                    </a:p>
+                  </a:txBody>
+                  <a:tcPr>
+                    <a:solidFill>
+                      <a:srgbClr val="E7F1F8"/>
+                    </a:solidFill>
+                  </a:tcPr>
+                </a:tc>
+                <a:tc>
+                  <a:txBody>
+                    <a:bodyPr lIns="54864" rIns="54864" tIns="18288" bIns="18288" wrap="square" anchor="ctr"/>
+                    <a:lstStyle/>
+                    <a:p>
+                      <a:pPr algn="l"/>
+                      <a:r>
+                        <a:rPr sz="1000" b="1">
+                          <a:solidFill>
+                            <a:srgbClr val="000000"/>
+                          </a:solidFill>
+                          <a:latin typeface="Calibri"/>
+                        </a:rPr>
+                        <a:t>2.60</a:t>
+                      </a:r>
+                    </a:p>
+                  </a:txBody>
+                  <a:tcPr>
+                    <a:solidFill>
+                      <a:srgbClr val="E7F1F8"/>
+                    </a:solidFill>
+                  </a:tcPr>
+                </a:tc>
+                <a:tc>
+                  <a:txBody>
+                    <a:bodyPr lIns="54864" rIns="54864" tIns="18288" bIns="18288" wrap="square" anchor="ctr"/>
+                    <a:lstStyle/>
+                    <a:p>
+                      <a:pPr algn="l"/>
+                      <a:r>
+                        <a:rPr sz="1000" b="1">
+                          <a:solidFill>
+                            <a:srgbClr val="000000"/>
+                          </a:solidFill>
+                          <a:latin typeface="Calibri"/>
+                        </a:rPr>
+                        <a:t>0.056</a:t>
+                      </a:r>
+                    </a:p>
+                  </a:txBody>
+                  <a:tcPr>
+                    <a:solidFill>
+                      <a:srgbClr val="E7F1F8"/>
+                    </a:solidFill>
+                  </a:tcPr>
+                </a:tc>
+              </a:tr>
+              <a:tr h="291465">
+                <a:tc>
+                  <a:txBody>
+                    <a:bodyPr lIns="54864" rIns="54864" tIns="18288" bIns="18288" wrap="square" anchor="ctr"/>
+                    <a:lstStyle/>
+                    <a:p>
+                      <a:pPr algn="l"/>
+                      <a:r>
+                        <a:rPr sz="1000" b="1">
+                          <a:solidFill>
+                            <a:srgbClr val="000000"/>
+                          </a:solidFill>
+                          <a:latin typeface="Calibri"/>
+                        </a:rPr>
+                        <a:t>CV %</a:t>
+                      </a:r>
+                    </a:p>
+                  </a:txBody>
+                  <a:tcPr>
+                    <a:solidFill>
+                      <a:srgbClr val="E7F1F8"/>
+                    </a:solidFill>
+                  </a:tcPr>
+                </a:tc>
+                <a:tc>
+                  <a:txBody>
+                    <a:bodyPr lIns="54864" rIns="54864" tIns="18288" bIns="18288" wrap="square" anchor="ctr"/>
+                    <a:lstStyle/>
+                    <a:p>
+                      <a:pPr algn="l"/>
+                      <a:r>
+                        <a:rPr sz="1000" b="1">
+                          <a:solidFill>
+                            <a:srgbClr val="000000"/>
+                          </a:solidFill>
+                          <a:latin typeface="Calibri"/>
+                        </a:rPr>
+                        <a:t>2.5</a:t>
+                      </a:r>
+                    </a:p>
+                  </a:txBody>
+                  <a:tcPr>
+                    <a:solidFill>
+                      <a:srgbClr val="E7F1F8"/>
+                    </a:solidFill>
+                  </a:tcPr>
+                </a:tc>
+                <a:tc>
+                  <a:txBody>
+                    <a:bodyPr lIns="54864" rIns="54864" tIns="18288" bIns="18288" wrap="square" anchor="ctr"/>
+                    <a:lstStyle/>
+                    <a:p>
+                      <a:pPr algn="l"/>
+                      <a:r>
+                        <a:rPr sz="1000" b="1">
+                          <a:solidFill>
+                            <a:srgbClr val="000000"/>
+                          </a:solidFill>
+                          <a:latin typeface="Calibri"/>
+                        </a:rPr>
+                        <a:t>3.8</a:t>
+                      </a:r>
+                    </a:p>
+                  </a:txBody>
+                  <a:tcPr>
+                    <a:solidFill>
+                      <a:srgbClr val="E7F1F8"/>
+                    </a:solidFill>
+                  </a:tcPr>
+                </a:tc>
+                <a:tc>
+                  <a:txBody>
+                    <a:bodyPr lIns="54864" rIns="54864" tIns="18288" bIns="18288" wrap="square" anchor="ctr"/>
+                    <a:lstStyle/>
+                    <a:p>
+                      <a:pPr algn="l"/>
+                      <a:r>
+                        <a:rPr sz="1000" b="1">
+                          <a:solidFill>
+                            <a:srgbClr val="000000"/>
+                          </a:solidFill>
+                          <a:latin typeface="Calibri"/>
+                        </a:rPr>
+                        <a:t>4.4</a:t>
+                      </a:r>
+                    </a:p>
+                  </a:txBody>
+                  <a:tcPr>
+                    <a:solidFill>
+                      <a:srgbClr val="E7F1F8"/>
+                    </a:solidFill>
+                  </a:tcPr>
+                </a:tc>
+                <a:tc>
+                  <a:txBody>
+                    <a:bodyPr lIns="54864" rIns="54864" tIns="18288" bIns="18288" wrap="square" anchor="ctr"/>
+                    <a:lstStyle/>
+                    <a:p>
+                      <a:pPr algn="l"/>
+                      <a:r>
+                        <a:rPr sz="1000" b="1">
+                          <a:solidFill>
+                            <a:srgbClr val="000000"/>
+                          </a:solidFill>
+                          <a:latin typeface="Calibri"/>
+                        </a:rPr>
+                        <a:t>33</a:t>
+                      </a:r>
+                    </a:p>
+                  </a:txBody>
+                  <a:tcPr>
+                    <a:solidFill>
+                      <a:srgbClr val="E7F1F8"/>
+                    </a:solidFill>
+                  </a:tcPr>
+                </a:tc>
+              </a:tr>
+            </a:tbl>
+          </a:graphicData>
+        </a:graphic>
+      </p:graphicFrame>
+      <p:sp>
+        <p:nvSpPr>
+          <p:cNvPr id="8" name="Rounded Rectangle 7"/>
+          <p:cNvSpPr/>
+          <p:nvPr/>
+        </p:nvSpPr>
+        <p:spPr>
+          <a:xfrm>
+            <a:off x="6400800" y="4023360"/>
+            <a:ext cx="1298448" cy="731520"/>
+          </a:xfrm>
+          <a:prstGeom prst="roundRect">
+            <a:avLst/>
+          </a:prstGeom>
+          <a:solidFill>
+            <a:srgbClr val="C8E6C9"/>
+          </a:solidFill>
+          <a:ln>
+            <a:noFill/>
+          </a:ln>
+        </p:spPr>
+        <p:style>
+          <a:lnRef idx="1">
+            <a:schemeClr val="accent1"/>
+          </a:lnRef>
+          <a:fillRef idx="3">
+            <a:schemeClr val="accent1"/>
+          </a:fillRef>
+          <a:effectRef idx="2">
+            <a:schemeClr val="accent1"/>
+          </a:effectRef>
+          <a:fontRef idx="minor">
+            <a:schemeClr val="lt1"/>
+          </a:fontRef>
+        </p:style>
+        <p:txBody>
+          <a:bodyPr rtlCol="0" anchor="ctr" lIns="54864" rIns="54864" bIns="27432" wrap="square"/>
+          <a:lstStyle/>
+          <a:p>
+            <a:pPr algn="ctr"/>
+            <a:r>
+              <a:rPr sz="1600" b="1">
+                <a:solidFill>
+                  <a:srgbClr val="1F3F2F"/>
+                </a:solidFill>
+                <a:latin typeface="Calibri"/>
+              </a:rPr>
+              <a:t>2.5 %</a:t>
+            </a:r>
+          </a:p>
+          <a:p>
+            <a:pPr algn="ctr"/>
+            <a:r>
+              <a:rPr sz="950">
+                <a:solidFill>
+                  <a:srgbClr val="000000"/>
+                </a:solidFill>
+                <a:latin typeface="Calibri"/>
+              </a:rPr>
+              <a:t>UTS CV</a:t>
+            </a:r>
+          </a:p>
+        </p:txBody>
+      </p:sp>
+      <p:sp>
+        <p:nvSpPr>
+          <p:cNvPr id="9" name="Rounded Rectangle 8"/>
+          <p:cNvSpPr/>
+          <p:nvPr/>
+        </p:nvSpPr>
+        <p:spPr>
+          <a:xfrm>
+            <a:off x="7790688" y="4023360"/>
+            <a:ext cx="1298448" cy="731520"/>
+          </a:xfrm>
+          <a:prstGeom prst="roundRect">
+            <a:avLst/>
+          </a:prstGeom>
+          <a:solidFill>
+            <a:srgbClr val="C8E6C9"/>
+          </a:solidFill>
+          <a:ln>
+            <a:noFill/>
+          </a:ln>
+        </p:spPr>
+        <p:style>
+          <a:lnRef idx="1">
+            <a:schemeClr val="accent1"/>
+          </a:lnRef>
+          <a:fillRef idx="3">
+            <a:schemeClr val="accent1"/>
+          </a:fillRef>
+          <a:effectRef idx="2">
+            <a:schemeClr val="accent1"/>
+          </a:effectRef>
+          <a:fontRef idx="minor">
+            <a:schemeClr val="lt1"/>
+          </a:fontRef>
+        </p:style>
+        <p:txBody>
+          <a:bodyPr rtlCol="0" anchor="ctr" lIns="54864" rIns="54864" bIns="27432" wrap="square"/>
+          <a:lstStyle/>
+          <a:p>
+            <a:pPr algn="ctr"/>
+            <a:r>
+              <a:rPr sz="1600" b="1">
+                <a:solidFill>
+                  <a:srgbClr val="1F3F2F"/>
+                </a:solidFill>
+                <a:latin typeface="Calibri"/>
+              </a:rPr>
+              <a:t>3.8 %</a:t>
+            </a:r>
+          </a:p>
+          <a:p>
+            <a:pPr algn="ctr"/>
+            <a:r>
+              <a:rPr sz="950">
+                <a:solidFill>
+                  <a:srgbClr val="000000"/>
+                </a:solidFill>
+                <a:latin typeface="Calibri"/>
+              </a:rPr>
+              <a:t>σ_y CV</a:t>
+            </a:r>
+          </a:p>
+        </p:txBody>
+      </p:sp>
+      <p:sp>
+        <p:nvSpPr>
+          <p:cNvPr id="10" name="Rounded Rectangle 9"/>
+          <p:cNvSpPr/>
+          <p:nvPr/>
+        </p:nvSpPr>
+        <p:spPr>
+          <a:xfrm>
+            <a:off x="9180576" y="4023360"/>
+            <a:ext cx="1298448" cy="731520"/>
+          </a:xfrm>
+          <a:prstGeom prst="roundRect">
+            <a:avLst/>
+          </a:prstGeom>
+          <a:solidFill>
+            <a:srgbClr val="C8E6C9"/>
+          </a:solidFill>
+          <a:ln>
+            <a:noFill/>
+          </a:ln>
+        </p:spPr>
+        <p:style>
+          <a:lnRef idx="1">
+            <a:schemeClr val="accent1"/>
+          </a:lnRef>
+          <a:fillRef idx="3">
+            <a:schemeClr val="accent1"/>
+          </a:fillRef>
+          <a:effectRef idx="2">
+            <a:schemeClr val="accent1"/>
+          </a:effectRef>
+          <a:fontRef idx="minor">
+            <a:schemeClr val="lt1"/>
+          </a:fontRef>
+        </p:style>
+        <p:txBody>
+          <a:bodyPr rtlCol="0" anchor="ctr" lIns="54864" rIns="54864" bIns="27432" wrap="square"/>
+          <a:lstStyle/>
+          <a:p>
+            <a:pPr algn="ctr"/>
+            <a:r>
+              <a:rPr sz="1600" b="1">
+                <a:solidFill>
+                  <a:srgbClr val="1F3F2F"/>
+                </a:solidFill>
+                <a:latin typeface="Calibri"/>
+              </a:rPr>
+              <a:t>4.4 %</a:t>
+            </a:r>
+          </a:p>
+          <a:p>
+            <a:pPr algn="ctr"/>
+            <a:r>
+              <a:rPr sz="950">
+                <a:solidFill>
+                  <a:srgbClr val="000000"/>
+                </a:solidFill>
+                <a:latin typeface="Calibri"/>
+              </a:rPr>
+              <a:t>E CV</a:t>
+            </a:r>
+          </a:p>
+        </p:txBody>
+      </p:sp>
+      <p:sp>
+        <p:nvSpPr>
+          <p:cNvPr id="11" name="Rounded Rectangle 10"/>
+          <p:cNvSpPr/>
+          <p:nvPr/>
+        </p:nvSpPr>
+        <p:spPr>
+          <a:xfrm>
+            <a:off x="10570464" y="4023360"/>
+            <a:ext cx="1298448" cy="731520"/>
+          </a:xfrm>
+          <a:prstGeom prst="roundRect">
+            <a:avLst/>
+          </a:prstGeom>
+          <a:solidFill>
+            <a:srgbClr val="FFF3CD"/>
+          </a:solidFill>
+          <a:ln>
+            <a:noFill/>
+          </a:ln>
+        </p:spPr>
+        <p:style>
+          <a:lnRef idx="1">
+            <a:schemeClr val="accent1"/>
+          </a:lnRef>
+          <a:fillRef idx="3">
+            <a:schemeClr val="accent1"/>
+          </a:fillRef>
+          <a:effectRef idx="2">
+            <a:schemeClr val="accent1"/>
+          </a:effectRef>
+          <a:fontRef idx="minor">
+            <a:schemeClr val="lt1"/>
+          </a:fontRef>
+        </p:style>
+        <p:txBody>
+          <a:bodyPr rtlCol="0" anchor="ctr" lIns="54864" rIns="54864" bIns="27432" wrap="square"/>
+          <a:lstStyle/>
+          <a:p>
+            <a:pPr algn="ctr"/>
+            <a:r>
+              <a:rPr sz="1600" b="1">
+                <a:solidFill>
+                  <a:srgbClr val="1F3F2F"/>
+                </a:solidFill>
+                <a:latin typeface="Calibri"/>
+              </a:rPr>
+              <a:t>33 %</a:t>
+            </a:r>
+          </a:p>
+          <a:p>
+            <a:pPr algn="ctr"/>
+            <a:r>
+              <a:rPr sz="950">
+                <a:solidFill>
+                  <a:srgbClr val="000000"/>
+                </a:solidFill>
+                <a:latin typeface="Calibri"/>
+              </a:rPr>
+              <a:t>ε_f CV</a:t>
+            </a:r>
+          </a:p>
+        </p:txBody>
+      </p:sp>
+      <p:sp>
+        <p:nvSpPr>
+          <p:cNvPr id="12" name="Rounded Rectangle 11"/>
+          <p:cNvSpPr/>
+          <p:nvPr/>
+        </p:nvSpPr>
+        <p:spPr>
+          <a:xfrm>
+            <a:off x="6400800" y="4846320"/>
+            <a:ext cx="5486400" cy="960120"/>
+          </a:xfrm>
+          <a:prstGeom prst="roundRect">
+            <a:avLst/>
+          </a:prstGeom>
+          <a:solidFill>
+            <a:srgbClr val="FFF3CD"/>
+          </a:solidFill>
+          <a:ln w="15240">
+            <a:solidFill>
+              <a:srgbClr val="E0A814"/>
+            </a:solidFill>
+          </a:ln>
+        </p:spPr>
+        <p:style>
+          <a:lnRef idx="1">
+            <a:schemeClr val="accent1"/>
+          </a:lnRef>
+          <a:fillRef idx="3">
+            <a:schemeClr val="accent1"/>
+          </a:fillRef>
+          <a:effectRef idx="2">
+            <a:schemeClr val="accent1"/>
+          </a:effectRef>
+          <a:fontRef idx="minor">
+            <a:schemeClr val="lt1"/>
+          </a:fontRef>
+        </p:style>
+        <p:txBody>
+          <a:bodyPr rtlCol="0" anchor="ctr" lIns="54864" rIns="54864" tIns="27432" bIns="27432" wrap="square"/>
+          <a:lstStyle/>
+          <a:p>
+            <a:pPr algn="ctr"/>
+            <a:r>
+              <a:rPr sz="950" b="0">
+                <a:solidFill>
+                  <a:srgbClr val="000000"/>
+                </a:solidFill>
+                <a:latin typeface="Calibri"/>
+              </a:rPr>
+              <a:t>⚠ V6a (S7) = pilot, run 8 days before the b–e batch → the strength/modulus EDGE point (σ_y +4.3σ, E −4.2σ, most brittle). Matched b–e batch alone: UTS 1.9 % · σ_y 1.8 % · E 2.1 % CV. Kept in n = 5 (conservative) — verdict unchanged.</a:t>
+            </a:r>
+          </a:p>
+        </p:txBody>
+      </p:sp>
+      <p:sp>
+        <p:nvSpPr>
+          <p:cNvPr id="13" name="Rectangle 12"/>
+          <p:cNvSpPr/>
+          <p:nvPr/>
+        </p:nvSpPr>
+        <p:spPr>
+          <a:xfrm>
+            <a:off x="292608" y="5943600"/>
+            <a:ext cx="11612880" cy="411480"/>
+          </a:xfrm>
+          <a:prstGeom prst="rect">
+            <a:avLst/>
+          </a:prstGeom>
+          <a:solidFill>
+            <a:srgbClr val="C8E6C9"/>
+          </a:solidFill>
+          <a:ln>
+            <a:noFill/>
+          </a:ln>
+        </p:spPr>
+        <p:style>
+          <a:lnRef idx="1">
+            <a:schemeClr val="accent1"/>
+          </a:lnRef>
+          <a:fillRef idx="3">
+            <a:schemeClr val="accent1"/>
+          </a:fillRef>
+          <a:effectRef idx="2">
+            <a:schemeClr val="accent1"/>
+          </a:effectRef>
+          <a:fontRef idx="minor">
+            <a:schemeClr val="lt1"/>
+          </a:fontRef>
+        </p:style>
+        <p:txBody>
+          <a:bodyPr rtlCol="0" anchor="ctr" wrap="square" lIns="109728" rIns="109728"/>
+          <a:lstStyle/>
+          <a:p>
+            <a:pPr algn="ctr"/>
+            <a:r>
+              <a:rPr sz="1300" b="1">
+                <a:solidFill>
+                  <a:srgbClr val="1F3F2F"/>
+                </a:solidFill>
+                <a:latin typeface="Calibri"/>
+              </a:rPr>
+              <a:t>Strength REPEATABLE — UTS/σ_y/E all CV ≤ 4.4 % (n = 5; matched b–e batch &lt; 2.1 %). Ductility ε_f scatters 33 % → report as a range.</a:t>
+            </a:r>
+          </a:p>
+        </p:txBody>
+      </p:sp>
+      <p:sp>
+        <p:nvSpPr>
+          <p:cNvPr id="14" name="TextBox 13"/>
+          <p:cNvSpPr txBox="1"/>
+          <p:nvPr/>
+        </p:nvSpPr>
+        <p:spPr>
+          <a:xfrm>
+            <a:off x="457200" y="6446520"/>
+            <a:ext cx="640080" cy="274320"/>
+          </a:xfrm>
+          <a:prstGeom prst="rect">
+            <a:avLst/>
+          </a:prstGeom>
+          <a:noFill/>
+        </p:spPr>
+        <p:txBody>
+          <a:bodyPr wrap="square" lIns="45720" rIns="45720" tIns="18288" bIns="18288" anchor="t">
+            <a:spAutoFit/>
+          </a:bodyPr>
+          <a:lstStyle/>
+          <a:p>
+            <a:pPr algn="l"/>
+            <a:r>
+              <a:rPr sz="1000" b="0" i="0">
+                <a:solidFill>
+                  <a:srgbClr val="707070"/>
+                </a:solidFill>
+                <a:latin typeface="Calibri"/>
+              </a:rPr>
+              <a:t>157</a:t>
+            </a:r>
+          </a:p>
+        </p:txBody>
+      </p:sp>
+    </p:spTree>
+  </p:cSld>
+  <p:clrMapOvr>
+    <a:masterClrMapping/>
+  </p:clrMapOvr>
+</p:sld>
+</file>
+
+<file path=ppt/slides/slide18.xml><?xml version="1.0" encoding="utf-8"?>
+<p:sld xmlns:a="http://schemas.openxmlformats.org/drawingml/2006/main" xmlns:p="http://schemas.openxmlformats.org/presentationml/2006/main" xmlns:r="http://schemas.openxmlformats.org/officeDocument/2006/relationships">
+  <p:cSld>
+    <p:spTree>
+      <p:nvGrpSpPr>
+        <p:cNvPr id="1" name=""/>
+        <p:cNvGrpSpPr/>
+        <p:nvPr/>
+      </p:nvGrpSpPr>
+      <p:grpSpPr/>
+      <p:sp>
+        <p:nvSpPr>
+          <p:cNvPr id="2" name="TextBox 1"/>
+          <p:cNvSpPr txBox="1"/>
+          <p:nvPr/>
+        </p:nvSpPr>
+        <p:spPr>
+          <a:xfrm>
+            <a:off x="11155680" y="274320"/>
+            <a:ext cx="914400" cy="274320"/>
+          </a:xfrm>
+          <a:prstGeom prst="rect">
+            <a:avLst/>
+          </a:prstGeom>
+          <a:noFill/>
+        </p:spPr>
+        <p:txBody>
+          <a:bodyPr wrap="square" lIns="45720" rIns="45720" tIns="18288" bIns="18288" anchor="t">
+            <a:spAutoFit/>
+          </a:bodyPr>
+          <a:lstStyle/>
+          <a:p>
+            <a:pPr algn="r"/>
+            <a:r>
+              <a:rPr sz="800" b="1" i="0">
+                <a:solidFill>
+                  <a:srgbClr val="707070"/>
+                </a:solidFill>
+                <a:latin typeface="Calibri"/>
+              </a:rPr>
+              <a:t>JÖNKÖPING UNIVERSITY</a:t>
+            </a:r>
+          </a:p>
+        </p:txBody>
+      </p:sp>
+      <p:sp>
+        <p:nvSpPr>
+          <p:cNvPr id="3" name="Rectangle 2"/>
+          <p:cNvSpPr/>
+          <p:nvPr/>
+        </p:nvSpPr>
+        <p:spPr>
+          <a:xfrm>
+            <a:off x="457200" y="411480"/>
+            <a:ext cx="457200" cy="73152"/>
+          </a:xfrm>
+          <a:prstGeom prst="rect">
+            <a:avLst/>
+          </a:prstGeom>
+          <a:solidFill>
+            <a:srgbClr val="A9D6EF"/>
+          </a:solidFill>
+          <a:ln>
+            <a:noFill/>
+          </a:ln>
+        </p:spPr>
+        <p:style>
+          <a:lnRef idx="1">
+            <a:schemeClr val="accent1"/>
+          </a:lnRef>
+          <a:fillRef idx="3">
+            <a:schemeClr val="accent1"/>
+          </a:fillRef>
+          <a:effectRef idx="2">
+            <a:schemeClr val="accent1"/>
+          </a:effectRef>
+          <a:fontRef idx="minor">
+            <a:schemeClr val="lt1"/>
+          </a:fontRef>
+        </p:style>
+        <p:txBody>
+          <a:bodyPr rtlCol="0" anchor="ctr"/>
+          <a:lstStyle/>
+          <a:p>
+            <a:pPr algn="ctr"/>
+          </a:p>
+        </p:txBody>
+      </p:sp>
+      <p:sp>
+        <p:nvSpPr>
+          <p:cNvPr id="4" name="TextBox 3"/>
+          <p:cNvSpPr txBox="1"/>
+          <p:nvPr/>
+        </p:nvSpPr>
+        <p:spPr>
+          <a:xfrm>
+            <a:off x="457200" y="502920"/>
+            <a:ext cx="11430000" cy="822960"/>
+          </a:xfrm>
+          <a:prstGeom prst="rect">
+            <a:avLst/>
+          </a:prstGeom>
+          <a:noFill/>
+        </p:spPr>
+        <p:txBody>
+          <a:bodyPr wrap="square" lIns="45720" rIns="45720" tIns="18288" bIns="18288" anchor="t">
+            <a:spAutoFit/>
+          </a:bodyPr>
+          <a:lstStyle/>
+          <a:p>
+            <a:pPr algn="l"/>
+            <a:r>
+              <a:rPr sz="3000" b="0" i="0">
+                <a:solidFill>
+                  <a:srgbClr val="000000"/>
+                </a:solidFill>
+                <a:latin typeface="Calibri Light"/>
+              </a:rPr>
+              <a:t>PHASE 8.6.20 V6: STRENGTH — REPEATABLE &amp; IN LITERATURE</a:t>
+            </a:r>
+          </a:p>
+        </p:txBody>
+      </p:sp>
+      <p:pic>
+        <p:nvPicPr>
+          <p:cNvPr id="5" name="Picture 4" descr="V6_strength_repeat.png"/>
+          <p:cNvPicPr>
+            <a:picLocks noChangeAspect="1"/>
+          </p:cNvPicPr>
+          <p:nvPr/>
+        </p:nvPicPr>
+        <p:blipFill>
+          <a:blip r:embed="rId2"/>
+          <a:stretch>
+            <a:fillRect/>
+          </a:stretch>
+        </p:blipFill>
+        <p:spPr>
+          <a:xfrm>
+            <a:off x="292608" y="1463040"/>
+            <a:ext cx="6126480" cy="4217273"/>
+          </a:xfrm>
+          <a:prstGeom prst="rect">
+            <a:avLst/>
+          </a:prstGeom>
+        </p:spPr>
+      </p:pic>
+      <p:sp>
+        <p:nvSpPr>
+          <p:cNvPr id="6" name="TextBox 5"/>
+          <p:cNvSpPr txBox="1"/>
+          <p:nvPr/>
+        </p:nvSpPr>
+        <p:spPr>
+          <a:xfrm>
+            <a:off x="6583680" y="1207008"/>
+            <a:ext cx="5394960" cy="365760"/>
+          </a:xfrm>
+          <a:prstGeom prst="rect">
+            <a:avLst/>
+          </a:prstGeom>
+          <a:noFill/>
+        </p:spPr>
+        <p:txBody>
+          <a:bodyPr wrap="square" lIns="45720" rIns="45720" tIns="18288" bIns="18288" anchor="t">
+            <a:spAutoFit/>
+          </a:bodyPr>
+          <a:lstStyle/>
+          <a:p>
+            <a:pPr algn="l"/>
+            <a:r>
+              <a:rPr sz="1600" b="0" i="0">
+                <a:solidFill>
+                  <a:srgbClr val="707070"/>
+                </a:solidFill>
+                <a:latin typeface="Calibri"/>
+              </a:rPr>
+              <a:t>Strength vs both references</a:t>
+            </a:r>
+          </a:p>
+        </p:txBody>
+      </p:sp>
+      <p:graphicFrame>
+        <p:nvGraphicFramePr>
+          <p:cNvPr id="7" name="Table 6"/>
+          <p:cNvGraphicFramePr>
+            <a:graphicFrameLocks noGrp="1"/>
+          </p:cNvGraphicFramePr>
+          <p:nvPr/>
+        </p:nvGraphicFramePr>
+        <p:xfrm>
+          <a:off x="6583680" y="1627632"/>
+          <a:ext cx="5394960" cy="1554480"/>
+        </p:xfrm>
+        <a:graphic>
+          <a:graphicData uri="http://schemas.openxmlformats.org/drawingml/2006/table">
+            <a:tbl>
+              <a:tblPr firstRow="1" bandRow="1">
+                <a:tableStyleId>{5C22544A-7EE6-4342-B048-85BDC9FD1C3A}</a:tableStyleId>
+              </a:tblPr>
+              <a:tblGrid>
+                <a:gridCol w="1168908"/>
+                <a:gridCol w="1438656"/>
+                <a:gridCol w="1528572"/>
+                <a:gridCol w="1258824"/>
+              </a:tblGrid>
+              <a:tr h="388620">
+                <a:tc>
+                  <a:txBody>
+                    <a:bodyPr lIns="54864" rIns="54864" tIns="18288" bIns="18288" wrap="square" anchor="ctr"/>
+                    <a:lstStyle/>
+                    <a:p>
+                      <a:pPr algn="l"/>
+                      <a:r>
+                        <a:rPr sz="1100" b="1">
+                          <a:solidFill>
+                            <a:srgbClr val="FFFFFF"/>
+                          </a:solidFill>
+                          <a:latin typeface="Calibri"/>
+                        </a:rPr>
+                        <a:t>Quantity</a:t>
+                      </a:r>
+                    </a:p>
+                  </a:txBody>
+                  <a:tcPr>
+                    <a:solidFill>
+                      <a:srgbClr val="143D2F"/>
+                    </a:solidFill>
+                  </a:tcPr>
+                </a:tc>
+                <a:tc>
+                  <a:txBody>
+                    <a:bodyPr lIns="54864" rIns="54864" tIns="18288" bIns="18288" wrap="square" anchor="ctr"/>
+                    <a:lstStyle/>
+                    <a:p>
+                      <a:pPr algn="l"/>
+                      <a:r>
+                        <a:rPr sz="1100" b="1">
+                          <a:solidFill>
+                            <a:srgbClr val="FFFFFF"/>
+                          </a:solidFill>
+                          <a:latin typeface="Calibri"/>
+                        </a:rPr>
+                        <a:t>V6 (n=5)</a:t>
+                      </a:r>
+                    </a:p>
+                  </a:txBody>
+                  <a:tcPr>
+                    <a:solidFill>
+                      <a:srgbClr val="143D2F"/>
+                    </a:solidFill>
+                  </a:tcPr>
+                </a:tc>
+                <a:tc>
+                  <a:txBody>
+                    <a:bodyPr lIns="54864" rIns="54864" tIns="18288" bIns="18288" wrap="square" anchor="ctr"/>
+                    <a:lstStyle/>
+                    <a:p>
+                      <a:pPr algn="l"/>
+                      <a:r>
+                        <a:rPr sz="1100" b="1">
+                          <a:solidFill>
+                            <a:srgbClr val="FFFFFF"/>
+                          </a:solidFill>
+                          <a:latin typeface="Calibri"/>
+                        </a:rPr>
+                        <a:t>vs Chacón</a:t>
+                      </a:r>
+                    </a:p>
+                  </a:txBody>
+                  <a:tcPr>
+                    <a:solidFill>
+                      <a:srgbClr val="143D2F"/>
+                    </a:solidFill>
+                  </a:tcPr>
+                </a:tc>
+                <a:tc>
+                  <a:txBody>
+                    <a:bodyPr lIns="54864" rIns="54864" tIns="18288" bIns="18288" wrap="square" anchor="ctr"/>
+                    <a:lstStyle/>
+                    <a:p>
+                      <a:pPr algn="l"/>
+                      <a:r>
+                        <a:rPr sz="1100" b="1">
+                          <a:solidFill>
+                            <a:srgbClr val="FFFFFF"/>
+                          </a:solidFill>
+                          <a:latin typeface="Calibri"/>
+                        </a:rPr>
+                        <a:t>vs E-PLA</a:t>
+                      </a:r>
+                    </a:p>
+                  </a:txBody>
+                  <a:tcPr>
+                    <a:solidFill>
+                      <a:srgbClr val="143D2F"/>
+                    </a:solidFill>
+                  </a:tcPr>
+                </a:tc>
+              </a:tr>
+              <a:tr h="388620">
+                <a:tc>
+                  <a:txBody>
+                    <a:bodyPr lIns="54864" rIns="54864" tIns="18288" bIns="18288" wrap="square" anchor="ctr"/>
+                    <a:lstStyle/>
+                    <a:p>
+                      <a:pPr algn="l"/>
+                      <a:r>
+                        <a:rPr sz="1100" b="0">
+                          <a:solidFill>
+                            <a:srgbClr val="000000"/>
+                          </a:solidFill>
+                          <a:latin typeface="Calibri"/>
+                        </a:rPr>
+                        <a:t>UTS</a:t>
+                      </a:r>
+                    </a:p>
+                  </a:txBody>
+                  <a:tcPr/>
+                </a:tc>
+                <a:tc>
+                  <a:txBody>
+                    <a:bodyPr lIns="54864" rIns="54864" tIns="18288" bIns="18288" wrap="square" anchor="ctr"/>
+                    <a:lstStyle/>
+                    <a:p>
+                      <a:pPr algn="l"/>
+                      <a:r>
+                        <a:rPr sz="1100" b="0">
+                          <a:solidFill>
+                            <a:srgbClr val="000000"/>
+                          </a:solidFill>
+                          <a:latin typeface="Calibri"/>
+                        </a:rPr>
+                        <a:t>46.2 ± 1.2 MPa</a:t>
+                      </a:r>
+                    </a:p>
+                  </a:txBody>
+                  <a:tcPr/>
+                </a:tc>
+                <a:tc>
+                  <a:txBody>
+                    <a:bodyPr lIns="54864" rIns="54864" tIns="18288" bIns="18288" wrap="square" anchor="ctr"/>
+                    <a:lstStyle/>
+                    <a:p>
+                      <a:pPr algn="l"/>
+                      <a:r>
+                        <a:rPr sz="1100" b="1">
+                          <a:solidFill>
+                            <a:srgbClr val="000000"/>
+                          </a:solidFill>
+                          <a:latin typeface="Calibri"/>
+                        </a:rPr>
+                        <a:t>inside 32–60 ✓</a:t>
+                      </a:r>
+                    </a:p>
+                  </a:txBody>
+                  <a:tcPr>
+                    <a:solidFill>
+                      <a:srgbClr val="C8E6C9"/>
+                    </a:solidFill>
+                  </a:tcPr>
+                </a:tc>
+                <a:tc>
+                  <a:txBody>
+                    <a:bodyPr lIns="54864" rIns="54864" tIns="18288" bIns="18288" wrap="square" anchor="ctr"/>
+                    <a:lstStyle/>
+                    <a:p>
+                      <a:pPr algn="l"/>
+                      <a:r>
+                        <a:rPr sz="1100" b="0">
+                          <a:solidFill>
+                            <a:srgbClr val="000000"/>
+                          </a:solidFill>
+                          <a:latin typeface="Calibri"/>
+                        </a:rPr>
+                        <a:t>80 % (k 1.26)</a:t>
+                      </a:r>
+                    </a:p>
+                  </a:txBody>
+                  <a:tcPr>
+                    <a:solidFill>
+                      <a:srgbClr val="C8E6C9"/>
+                    </a:solidFill>
+                  </a:tcPr>
+                </a:tc>
+              </a:tr>
+              <a:tr h="388620">
+                <a:tc>
+                  <a:txBody>
+                    <a:bodyPr lIns="54864" rIns="54864" tIns="18288" bIns="18288" wrap="square" anchor="ctr"/>
+                    <a:lstStyle/>
+                    <a:p>
+                      <a:pPr algn="l"/>
+                      <a:r>
+                        <a:rPr sz="1100" b="0">
+                          <a:solidFill>
+                            <a:srgbClr val="000000"/>
+                          </a:solidFill>
+                          <a:latin typeface="Calibri"/>
+                        </a:rPr>
+                        <a:t>σ_y (0.2 %)</a:t>
+                      </a:r>
+                    </a:p>
+                  </a:txBody>
+                  <a:tcPr/>
+                </a:tc>
+                <a:tc>
+                  <a:txBody>
+                    <a:bodyPr lIns="54864" rIns="54864" tIns="18288" bIns="18288" wrap="square" anchor="ctr"/>
+                    <a:lstStyle/>
+                    <a:p>
+                      <a:pPr algn="l"/>
+                      <a:r>
+                        <a:rPr sz="1100" b="0">
+                          <a:solidFill>
+                            <a:srgbClr val="000000"/>
+                          </a:solidFill>
+                          <a:latin typeface="Calibri"/>
+                        </a:rPr>
+                        <a:t>45.0 MPa</a:t>
+                      </a:r>
+                    </a:p>
+                  </a:txBody>
+                  <a:tcPr/>
+                </a:tc>
+                <a:tc>
+                  <a:txBody>
+                    <a:bodyPr lIns="54864" rIns="54864" tIns="18288" bIns="18288" wrap="square" anchor="ctr"/>
+                    <a:lstStyle/>
+                    <a:p>
+                      <a:pPr algn="l"/>
+                      <a:r>
+                        <a:rPr sz="1100" b="1">
+                          <a:solidFill>
+                            <a:srgbClr val="000000"/>
+                          </a:solidFill>
+                          <a:latin typeface="Calibri"/>
+                        </a:rPr>
+                        <a:t>inside 30–50 ✓</a:t>
+                      </a:r>
+                    </a:p>
+                  </a:txBody>
+                  <a:tcPr>
+                    <a:solidFill>
+                      <a:srgbClr val="C8E6C9"/>
+                    </a:solidFill>
+                  </a:tcPr>
+                </a:tc>
+                <a:tc>
+                  <a:txBody>
+                    <a:bodyPr lIns="54864" rIns="54864" tIns="18288" bIns="18288" wrap="square" anchor="ctr"/>
+                    <a:lstStyle/>
+                    <a:p>
+                      <a:pPr algn="l"/>
+                      <a:r>
+                        <a:rPr sz="1100" b="0">
+                          <a:solidFill>
+                            <a:srgbClr val="000000"/>
+                          </a:solidFill>
+                          <a:latin typeface="Calibri"/>
+                        </a:rPr>
+                        <a:t>78 %</a:t>
+                      </a:r>
+                    </a:p>
+                  </a:txBody>
+                  <a:tcPr/>
+                </a:tc>
+              </a:tr>
+              <a:tr h="388620">
+                <a:tc>
+                  <a:txBody>
+                    <a:bodyPr lIns="54864" rIns="54864" tIns="18288" bIns="18288" wrap="square" anchor="ctr"/>
+                    <a:lstStyle/>
+                    <a:p>
+                      <a:pPr algn="l"/>
+                      <a:r>
+                        <a:rPr sz="1100" b="0">
+                          <a:solidFill>
+                            <a:srgbClr val="000000"/>
+                          </a:solidFill>
+                          <a:latin typeface="Calibri"/>
+                        </a:rPr>
+                        <a:t>E</a:t>
+                      </a:r>
+                    </a:p>
+                  </a:txBody>
+                  <a:tcPr/>
+                </a:tc>
+                <a:tc>
+                  <a:txBody>
+                    <a:bodyPr lIns="54864" rIns="54864" tIns="18288" bIns="18288" wrap="square" anchor="ctr"/>
+                    <a:lstStyle/>
+                    <a:p>
+                      <a:pPr algn="l"/>
+                      <a:r>
+                        <a:rPr sz="1100" b="0">
+                          <a:solidFill>
+                            <a:srgbClr val="000000"/>
+                          </a:solidFill>
+                          <a:latin typeface="Calibri"/>
+                        </a:rPr>
+                        <a:t>2.60 GPa</a:t>
+                      </a:r>
+                    </a:p>
+                  </a:txBody>
+                  <a:tcPr/>
+                </a:tc>
+                <a:tc>
+                  <a:txBody>
+                    <a:bodyPr lIns="54864" rIns="54864" tIns="18288" bIns="18288" wrap="square" anchor="ctr"/>
+                    <a:lstStyle/>
+                    <a:p>
+                      <a:pPr algn="l"/>
+                      <a:r>
+                        <a:rPr sz="1100" b="1">
+                          <a:solidFill>
+                            <a:srgbClr val="000000"/>
+                          </a:solidFill>
+                          <a:latin typeface="Calibri"/>
+                        </a:rPr>
+                        <a:t>13 % below 3.0 ⚠</a:t>
+                      </a:r>
+                    </a:p>
+                  </a:txBody>
+                  <a:tcPr>
+                    <a:solidFill>
+                      <a:srgbClr val="FFF3CD"/>
+                    </a:solidFill>
+                  </a:tcPr>
+                </a:tc>
+                <a:tc>
+                  <a:txBody>
+                    <a:bodyPr lIns="54864" rIns="54864" tIns="18288" bIns="18288" wrap="square" anchor="ctr"/>
+                    <a:lstStyle/>
+                    <a:p>
+                      <a:pPr algn="l"/>
+                      <a:r>
+                        <a:rPr sz="1100" b="0">
+                          <a:solidFill>
+                            <a:srgbClr val="000000"/>
+                          </a:solidFill>
+                          <a:latin typeface="Calibri"/>
+                        </a:rPr>
+                        <a:t>91 % (k 1.11)</a:t>
+                      </a:r>
+                    </a:p>
+                  </a:txBody>
+                  <a:tcPr>
+                    <a:solidFill>
+                      <a:srgbClr val="C8E6C9"/>
+                    </a:solidFill>
+                  </a:tcPr>
+                </a:tc>
+              </a:tr>
+            </a:tbl>
+          </a:graphicData>
+        </a:graphic>
+      </p:graphicFrame>
+      <p:sp>
+        <p:nvSpPr>
+          <p:cNvPr id="8" name="TextBox 7"/>
+          <p:cNvSpPr txBox="1"/>
+          <p:nvPr/>
+        </p:nvSpPr>
+        <p:spPr>
+          <a:xfrm>
+            <a:off x="6583680" y="3337560"/>
+            <a:ext cx="5394960" cy="1554480"/>
+          </a:xfrm>
+          <a:prstGeom prst="rect">
+            <a:avLst/>
+          </a:prstGeom>
+          <a:noFill/>
+        </p:spPr>
+        <p:txBody>
+          <a:bodyPr wrap="square" lIns="45720" rIns="45720" tIns="18288" bIns="18288" anchor="t">
+            <a:spAutoFit/>
+          </a:bodyPr>
+          <a:lstStyle/>
+          <a:p>
+            <a:pPr algn="l"/>
+            <a:r>
+              <a:rPr sz="1200" b="0" i="0">
+                <a:solidFill>
+                  <a:srgbClr val="000000"/>
+                </a:solidFill>
+                <a:latin typeface="Calibri"/>
+              </a:rPr>
+              <a:t>• UTS = 46.2 ± 1.2 MPa (CV 2.5 %, 95 % CI ±1.4) — converged as n grew.
+• All 5 land INSIDE the Chacón range → k ≈ 1 (no knock-down), confirming the 50 % offset (k≈2.4) was purely the infill effect.
+• vs add:north E-PLA datasheet: 80 % of rated strength, 91 % of stiffness — coherent FFF knock-down.</a:t>
+            </a:r>
+          </a:p>
+        </p:txBody>
+      </p:sp>
+      <p:sp>
+        <p:nvSpPr>
+          <p:cNvPr id="9" name="Rectangle 8"/>
+          <p:cNvSpPr/>
+          <p:nvPr/>
+        </p:nvSpPr>
+        <p:spPr>
+          <a:xfrm>
+            <a:off x="6583680" y="5074920"/>
+            <a:ext cx="5394960" cy="914400"/>
+          </a:xfrm>
+          <a:prstGeom prst="rect">
+            <a:avLst/>
+          </a:prstGeom>
+          <a:solidFill>
+            <a:srgbClr val="C8E6C9"/>
+          </a:solidFill>
+          <a:ln>
+            <a:noFill/>
+          </a:ln>
+        </p:spPr>
+        <p:style>
+          <a:lnRef idx="1">
+            <a:schemeClr val="accent1"/>
+          </a:lnRef>
+          <a:fillRef idx="3">
+            <a:schemeClr val="accent1"/>
+          </a:fillRef>
+          <a:effectRef idx="2">
+            <a:schemeClr val="accent1"/>
+          </a:effectRef>
+          <a:fontRef idx="minor">
+            <a:schemeClr val="lt1"/>
+          </a:fontRef>
+        </p:style>
+        <p:txBody>
+          <a:bodyPr rtlCol="0" anchor="ctr" wrap="square" lIns="109728" rIns="109728"/>
+          <a:lstStyle/>
+          <a:p>
+            <a:pPr algn="ctr"/>
+            <a:r>
+              <a:rPr sz="1250" b="1">
+                <a:solidFill>
+                  <a:srgbClr val="1F3F2F"/>
+                </a:solidFill>
+                <a:latin typeface="Calibri"/>
+              </a:rPr>
+              <a:t>STRENGTH PASS — repeatable (CV 2.5 %), inside the journal range, and a sensible ~80–90 % of the manufacturer's rated solid material.</a:t>
+            </a:r>
+          </a:p>
+        </p:txBody>
+      </p:sp>
+      <p:sp>
+        <p:nvSpPr>
+          <p:cNvPr id="10" name="TextBox 9"/>
+          <p:cNvSpPr txBox="1"/>
+          <p:nvPr/>
+        </p:nvSpPr>
+        <p:spPr>
+          <a:xfrm>
+            <a:off x="457200" y="6446520"/>
+            <a:ext cx="640080" cy="274320"/>
+          </a:xfrm>
+          <a:prstGeom prst="rect">
+            <a:avLst/>
+          </a:prstGeom>
+          <a:noFill/>
+        </p:spPr>
+        <p:txBody>
+          <a:bodyPr wrap="square" lIns="45720" rIns="45720" tIns="18288" bIns="18288" anchor="t">
+            <a:spAutoFit/>
+          </a:bodyPr>
+          <a:lstStyle/>
+          <a:p>
+            <a:pPr algn="l"/>
+            <a:r>
+              <a:rPr sz="1000" b="0" i="0">
+                <a:solidFill>
+                  <a:srgbClr val="707070"/>
+                </a:solidFill>
+                <a:latin typeface="Calibri"/>
+              </a:rPr>
+              <a:t>158</a:t>
+            </a:r>
+          </a:p>
+        </p:txBody>
+      </p:sp>
+    </p:spTree>
+  </p:cSld>
+  <p:clrMapOvr>
+    <a:masterClrMapping/>
+  </p:clrMapOvr>
+</p:sld>
+</file>
+
+<file path=ppt/slides/slide19.xml><?xml version="1.0" encoding="utf-8"?>
+<p:sld xmlns:a="http://schemas.openxmlformats.org/drawingml/2006/main" xmlns:p="http://schemas.openxmlformats.org/presentationml/2006/main" xmlns:r="http://schemas.openxmlformats.org/officeDocument/2006/relationships">
+  <p:cSld>
+    <p:spTree>
+      <p:nvGrpSpPr>
+        <p:cNvPr id="1" name=""/>
+        <p:cNvGrpSpPr/>
+        <p:nvPr/>
+      </p:nvGrpSpPr>
+      <p:grpSpPr/>
+      <p:sp>
+        <p:nvSpPr>
+          <p:cNvPr id="2" name="TextBox 1"/>
+          <p:cNvSpPr txBox="1"/>
+          <p:nvPr/>
+        </p:nvSpPr>
+        <p:spPr>
+          <a:xfrm>
+            <a:off x="11155680" y="274320"/>
+            <a:ext cx="914400" cy="274320"/>
+          </a:xfrm>
+          <a:prstGeom prst="rect">
+            <a:avLst/>
+          </a:prstGeom>
+          <a:noFill/>
+        </p:spPr>
+        <p:txBody>
+          <a:bodyPr wrap="square" lIns="45720" rIns="45720" tIns="18288" bIns="18288" anchor="t">
+            <a:spAutoFit/>
+          </a:bodyPr>
+          <a:lstStyle/>
+          <a:p>
+            <a:pPr algn="r"/>
+            <a:r>
+              <a:rPr sz="800" b="1" i="0">
+                <a:solidFill>
+                  <a:srgbClr val="707070"/>
+                </a:solidFill>
+                <a:latin typeface="Calibri"/>
+              </a:rPr>
+              <a:t>JÖNKÖPING UNIVERSITY</a:t>
+            </a:r>
+          </a:p>
+        </p:txBody>
+      </p:sp>
+      <p:sp>
+        <p:nvSpPr>
+          <p:cNvPr id="3" name="Rectangle 2"/>
+          <p:cNvSpPr/>
+          <p:nvPr/>
+        </p:nvSpPr>
+        <p:spPr>
+          <a:xfrm>
+            <a:off x="457200" y="411480"/>
+            <a:ext cx="457200" cy="73152"/>
+          </a:xfrm>
+          <a:prstGeom prst="rect">
+            <a:avLst/>
+          </a:prstGeom>
+          <a:solidFill>
+            <a:srgbClr val="A9D6EF"/>
+          </a:solidFill>
+          <a:ln>
+            <a:noFill/>
+          </a:ln>
+        </p:spPr>
+        <p:style>
+          <a:lnRef idx="1">
+            <a:schemeClr val="accent1"/>
+          </a:lnRef>
+          <a:fillRef idx="3">
+            <a:schemeClr val="accent1"/>
+          </a:fillRef>
+          <a:effectRef idx="2">
+            <a:schemeClr val="accent1"/>
+          </a:effectRef>
+          <a:fontRef idx="minor">
+            <a:schemeClr val="lt1"/>
+          </a:fontRef>
+        </p:style>
+        <p:txBody>
+          <a:bodyPr rtlCol="0" anchor="ctr"/>
+          <a:lstStyle/>
+          <a:p>
+            <a:pPr algn="ctr"/>
+          </a:p>
+        </p:txBody>
+      </p:sp>
+      <p:sp>
+        <p:nvSpPr>
+          <p:cNvPr id="4" name="TextBox 3"/>
+          <p:cNvSpPr txBox="1"/>
+          <p:nvPr/>
+        </p:nvSpPr>
+        <p:spPr>
+          <a:xfrm>
+            <a:off x="457200" y="502920"/>
+            <a:ext cx="11430000" cy="822960"/>
+          </a:xfrm>
+          <a:prstGeom prst="rect">
+            <a:avLst/>
+          </a:prstGeom>
+          <a:noFill/>
+        </p:spPr>
+        <p:txBody>
+          <a:bodyPr wrap="square" lIns="45720" rIns="45720" tIns="18288" bIns="18288" anchor="t">
+            <a:spAutoFit/>
+          </a:bodyPr>
+          <a:lstStyle/>
+          <a:p>
+            <a:pPr algn="l"/>
+            <a:r>
+              <a:rPr sz="3000" b="0" i="0">
+                <a:solidFill>
+                  <a:srgbClr val="000000"/>
+                </a:solidFill>
+                <a:latin typeface="Calibri Light"/>
+              </a:rPr>
+              <a:t>PHASE 8.6.20 V6: DUCTILITY — REPORT AS A RANGE</a:t>
+            </a:r>
+          </a:p>
+        </p:txBody>
+      </p:sp>
+      <p:pic>
+        <p:nvPicPr>
+          <p:cNvPr id="5" name="Picture 4" descr="V6_ductility.png"/>
+          <p:cNvPicPr>
+            <a:picLocks noChangeAspect="1"/>
+          </p:cNvPicPr>
+          <p:nvPr/>
+        </p:nvPicPr>
+        <p:blipFill>
+          <a:blip r:embed="rId2"/>
+          <a:stretch>
+            <a:fillRect/>
+          </a:stretch>
+        </p:blipFill>
+        <p:spPr>
+          <a:xfrm>
+            <a:off x="292608" y="1463040"/>
+            <a:ext cx="6126480" cy="4217273"/>
+          </a:xfrm>
+          <a:prstGeom prst="rect">
+            <a:avLst/>
+          </a:prstGeom>
+        </p:spPr>
+      </p:pic>
+      <p:sp>
+        <p:nvSpPr>
+          <p:cNvPr id="6" name="TextBox 5"/>
+          <p:cNvSpPr txBox="1"/>
+          <p:nvPr/>
+        </p:nvSpPr>
+        <p:spPr>
+          <a:xfrm>
+            <a:off x="6583680" y="1207008"/>
+            <a:ext cx="5394960" cy="365760"/>
+          </a:xfrm>
+          <a:prstGeom prst="rect">
+            <a:avLst/>
+          </a:prstGeom>
+          <a:noFill/>
+        </p:spPr>
+        <p:txBody>
+          <a:bodyPr wrap="square" lIns="45720" rIns="45720" tIns="18288" bIns="18288" anchor="t">
+            <a:spAutoFit/>
+          </a:bodyPr>
+          <a:lstStyle/>
+          <a:p>
+            <a:pPr algn="l"/>
+            <a:r>
+              <a:rPr sz="1600" b="0" i="0">
+                <a:solidFill>
+                  <a:srgbClr val="707070"/>
+                </a:solidFill>
+                <a:latin typeface="Calibri"/>
+              </a:rPr>
+              <a:t>Failure strain &amp; toughness</a:t>
+            </a:r>
+          </a:p>
+        </p:txBody>
+      </p:sp>
+      <p:sp>
+        <p:nvSpPr>
+          <p:cNvPr id="7" name="Rounded Rectangle 6"/>
+          <p:cNvSpPr/>
+          <p:nvPr/>
+        </p:nvSpPr>
+        <p:spPr>
+          <a:xfrm>
+            <a:off x="6583680" y="1627632"/>
+            <a:ext cx="1737360" cy="914400"/>
+          </a:xfrm>
+          <a:prstGeom prst="roundRect">
+            <a:avLst/>
+          </a:prstGeom>
+          <a:solidFill>
+            <a:srgbClr val="FFF3CD"/>
+          </a:solidFill>
+          <a:ln>
+            <a:noFill/>
+          </a:ln>
+        </p:spPr>
+        <p:style>
+          <a:lnRef idx="1">
+            <a:schemeClr val="accent1"/>
+          </a:lnRef>
+          <a:fillRef idx="3">
+            <a:schemeClr val="accent1"/>
+          </a:fillRef>
+          <a:effectRef idx="2">
+            <a:schemeClr val="accent1"/>
+          </a:effectRef>
+          <a:fontRef idx="minor">
+            <a:schemeClr val="lt1"/>
+          </a:fontRef>
+        </p:style>
+        <p:txBody>
+          <a:bodyPr rtlCol="0" anchor="ctr" lIns="54864" rIns="54864" bIns="27432" wrap="square"/>
+          <a:lstStyle/>
+          <a:p>
+            <a:pPr algn="ctr"/>
+            <a:r>
+              <a:rPr sz="1800" b="1">
+                <a:solidFill>
+                  <a:srgbClr val="1F3F2F"/>
+                </a:solidFill>
+                <a:latin typeface="Calibri"/>
+              </a:rPr>
+              <a:t>3.0–7.4 %</a:t>
+            </a:r>
+          </a:p>
+          <a:p>
+            <a:pPr algn="ctr"/>
+            <a:r>
+              <a:rPr sz="950">
+                <a:solidFill>
+                  <a:srgbClr val="000000"/>
+                </a:solidFill>
+                <a:latin typeface="Calibri"/>
+              </a:rPr>
+              <a:t>ε_f range</a:t>
+            </a:r>
+          </a:p>
+        </p:txBody>
+      </p:sp>
+      <p:sp>
+        <p:nvSpPr>
+          <p:cNvPr id="8" name="Rounded Rectangle 7"/>
+          <p:cNvSpPr/>
+          <p:nvPr/>
+        </p:nvSpPr>
+        <p:spPr>
+          <a:xfrm>
+            <a:off x="8458200" y="1627632"/>
+            <a:ext cx="1737360" cy="914400"/>
+          </a:xfrm>
+          <a:prstGeom prst="roundRect">
+            <a:avLst/>
+          </a:prstGeom>
+          <a:solidFill>
+            <a:srgbClr val="FFF3CD"/>
+          </a:solidFill>
+          <a:ln>
+            <a:noFill/>
+          </a:ln>
+        </p:spPr>
+        <p:style>
+          <a:lnRef idx="1">
+            <a:schemeClr val="accent1"/>
+          </a:lnRef>
+          <a:fillRef idx="3">
+            <a:schemeClr val="accent1"/>
+          </a:fillRef>
+          <a:effectRef idx="2">
+            <a:schemeClr val="accent1"/>
+          </a:effectRef>
+          <a:fontRef idx="minor">
+            <a:schemeClr val="lt1"/>
+          </a:fontRef>
+        </p:style>
+        <p:txBody>
+          <a:bodyPr rtlCol="0" anchor="ctr" lIns="54864" rIns="54864" bIns="27432" wrap="square"/>
+          <a:lstStyle/>
+          <a:p>
+            <a:pPr algn="ctr"/>
+            <a:r>
+              <a:rPr sz="1800" b="1">
+                <a:solidFill>
+                  <a:srgbClr val="1F3F2F"/>
+                </a:solidFill>
+                <a:latin typeface="Calibri"/>
+              </a:rPr>
+              <a:t>33 %</a:t>
+            </a:r>
+          </a:p>
+          <a:p>
+            <a:pPr algn="ctr"/>
+            <a:r>
+              <a:rPr sz="950">
+                <a:solidFill>
+                  <a:srgbClr val="000000"/>
+                </a:solidFill>
+                <a:latin typeface="Calibri"/>
+              </a:rPr>
+              <a:t>ε_f CV</a:t>
+            </a:r>
+          </a:p>
+        </p:txBody>
+      </p:sp>
+      <p:sp>
+        <p:nvSpPr>
+          <p:cNvPr id="9" name="Rounded Rectangle 8"/>
+          <p:cNvSpPr/>
+          <p:nvPr/>
+        </p:nvSpPr>
+        <p:spPr>
+          <a:xfrm>
+            <a:off x="10332720" y="1627632"/>
+            <a:ext cx="1645920" cy="914400"/>
+          </a:xfrm>
+          <a:prstGeom prst="roundRect">
+            <a:avLst/>
+          </a:prstGeom>
+          <a:solidFill>
+            <a:srgbClr val="E7F1F8"/>
+          </a:solidFill>
+          <a:ln>
+            <a:noFill/>
+          </a:ln>
+        </p:spPr>
+        <p:style>
+          <a:lnRef idx="1">
+            <a:schemeClr val="accent1"/>
+          </a:lnRef>
+          <a:fillRef idx="3">
+            <a:schemeClr val="accent1"/>
+          </a:fillRef>
+          <a:effectRef idx="2">
+            <a:schemeClr val="accent1"/>
+          </a:effectRef>
+          <a:fontRef idx="minor">
+            <a:schemeClr val="lt1"/>
+          </a:fontRef>
+        </p:style>
+        <p:txBody>
+          <a:bodyPr rtlCol="0" anchor="ctr" lIns="54864" rIns="54864" bIns="27432" wrap="square"/>
+          <a:lstStyle/>
+          <a:p>
+            <a:pPr algn="ctr"/>
+            <a:r>
+              <a:rPr sz="1400" b="1">
+                <a:solidFill>
+                  <a:srgbClr val="1F3F2F"/>
+                </a:solidFill>
+                <a:latin typeface="Calibri"/>
+              </a:rPr>
+              <a:t>2315 kJ/m³</a:t>
+            </a:r>
+          </a:p>
+          <a:p>
+            <a:pPr algn="ctr"/>
+            <a:r>
+              <a:rPr sz="950">
+                <a:solidFill>
+                  <a:srgbClr val="000000"/>
+                </a:solidFill>
+                <a:latin typeface="Calibri"/>
+              </a:rPr>
+              <a:t>toughness</a:t>
+            </a:r>
+          </a:p>
+        </p:txBody>
+      </p:sp>
+      <p:sp>
+        <p:nvSpPr>
+          <p:cNvPr id="10" name="TextBox 9"/>
+          <p:cNvSpPr txBox="1"/>
+          <p:nvPr/>
+        </p:nvSpPr>
+        <p:spPr>
+          <a:xfrm>
+            <a:off x="6583680" y="2743200"/>
+            <a:ext cx="5394960" cy="2103120"/>
+          </a:xfrm>
+          <a:prstGeom prst="rect">
+            <a:avLst/>
+          </a:prstGeom>
+          <a:noFill/>
+        </p:spPr>
+        <p:txBody>
+          <a:bodyPr wrap="square" lIns="45720" rIns="45720" tIns="18288" bIns="18288" anchor="t">
+            <a:spAutoFit/>
+          </a:bodyPr>
+          <a:lstStyle/>
+          <a:p>
+            <a:pPr algn="l"/>
+            <a:r>
+              <a:rPr sz="1200" b="0" i="0">
+                <a:solidFill>
+                  <a:srgbClr val="000000"/>
+                </a:solidFill>
+                <a:latin typeface="Calibri"/>
+              </a:rPr>
+              <a:t>Failure strain is NOT reproducible (CV 33 %) and looks bimodal:
+• tough-skin cluster A/B/D ≈ 3.0–5.2 %
+• ductile cluster C/E ≈ 7.3–7.4 % (nearly the 8 % datasheet value)
+FDM crack-initiation lottery — a void / weak layer decides where the crack starts, so elongation varies far more than strength. Toughness follows ε_f (1310–3053 kJ/m³).</a:t>
+            </a:r>
+          </a:p>
+        </p:txBody>
+      </p:sp>
+      <p:sp>
+        <p:nvSpPr>
+          <p:cNvPr id="11" name="Rectangle 10"/>
+          <p:cNvSpPr/>
+          <p:nvPr/>
+        </p:nvSpPr>
+        <p:spPr>
+          <a:xfrm>
+            <a:off x="6583680" y="5029200"/>
+            <a:ext cx="5394960" cy="960120"/>
+          </a:xfrm>
+          <a:prstGeom prst="rect">
+            <a:avLst/>
+          </a:prstGeom>
+          <a:solidFill>
+            <a:srgbClr val="FFF3CD"/>
+          </a:solidFill>
+          <a:ln>
+            <a:noFill/>
+          </a:ln>
+        </p:spPr>
+        <p:style>
+          <a:lnRef idx="1">
+            <a:schemeClr val="accent1"/>
+          </a:lnRef>
+          <a:fillRef idx="3">
+            <a:schemeClr val="accent1"/>
+          </a:fillRef>
+          <a:effectRef idx="2">
+            <a:schemeClr val="accent1"/>
+          </a:effectRef>
+          <a:fontRef idx="minor">
+            <a:schemeClr val="lt1"/>
+          </a:fontRef>
+        </p:style>
+        <p:txBody>
+          <a:bodyPr rtlCol="0" anchor="ctr" wrap="square" lIns="109728" rIns="109728"/>
+          <a:lstStyle/>
+          <a:p>
+            <a:pPr algn="ctr"/>
+            <a:r>
+              <a:rPr sz="1250" b="1">
+                <a:solidFill>
+                  <a:srgbClr val="000000"/>
+                </a:solidFill>
+                <a:latin typeface="Calibri"/>
+              </a:rPr>
+              <a:t>Quote ductility as a RANGE (ε_f = 3–7 %), never a single number. Strength is the reproducible engineering value; ductility is specimen-dependent.</a:t>
+            </a:r>
+          </a:p>
+        </p:txBody>
+      </p:sp>
+      <p:sp>
+        <p:nvSpPr>
+          <p:cNvPr id="12" name="TextBox 11"/>
+          <p:cNvSpPr txBox="1"/>
+          <p:nvPr/>
+        </p:nvSpPr>
+        <p:spPr>
+          <a:xfrm>
+            <a:off x="457200" y="6446520"/>
+            <a:ext cx="640080" cy="274320"/>
+          </a:xfrm>
+          <a:prstGeom prst="rect">
+            <a:avLst/>
+          </a:prstGeom>
+          <a:noFill/>
+        </p:spPr>
+        <p:txBody>
+          <a:bodyPr wrap="square" lIns="45720" rIns="45720" tIns="18288" bIns="18288" anchor="t">
+            <a:spAutoFit/>
+          </a:bodyPr>
+          <a:lstStyle/>
+          <a:p>
+            <a:pPr algn="l"/>
+            <a:r>
+              <a:rPr sz="1000" b="0" i="0">
+                <a:solidFill>
+                  <a:srgbClr val="707070"/>
+                </a:solidFill>
+                <a:latin typeface="Calibri"/>
+              </a:rPr>
+              <a:t>159</a:t>
             </a:r>
           </a:p>
         </p:txBody>
@@ -10365,6 +13054,2324 @@
                 <a:latin typeface="Calibri"/>
               </a:rPr>
               <a:t>142</a:t>
+            </a:r>
+          </a:p>
+        </p:txBody>
+      </p:sp>
+    </p:spTree>
+  </p:cSld>
+  <p:clrMapOvr>
+    <a:masterClrMapping/>
+  </p:clrMapOvr>
+</p:sld>
+</file>
+
+<file path=ppt/slides/slide20.xml><?xml version="1.0" encoding="utf-8"?>
+<p:sld xmlns:a="http://schemas.openxmlformats.org/drawingml/2006/main" xmlns:p="http://schemas.openxmlformats.org/presentationml/2006/main" xmlns:r="http://schemas.openxmlformats.org/officeDocument/2006/relationships">
+  <p:cSld>
+    <p:spTree>
+      <p:nvGrpSpPr>
+        <p:cNvPr id="1" name=""/>
+        <p:cNvGrpSpPr/>
+        <p:nvPr/>
+      </p:nvGrpSpPr>
+      <p:grpSpPr/>
+      <p:sp>
+        <p:nvSpPr>
+          <p:cNvPr id="2" name="TextBox 1"/>
+          <p:cNvSpPr txBox="1"/>
+          <p:nvPr/>
+        </p:nvSpPr>
+        <p:spPr>
+          <a:xfrm>
+            <a:off x="11155680" y="274320"/>
+            <a:ext cx="914400" cy="274320"/>
+          </a:xfrm>
+          <a:prstGeom prst="rect">
+            <a:avLst/>
+          </a:prstGeom>
+          <a:noFill/>
+        </p:spPr>
+        <p:txBody>
+          <a:bodyPr wrap="square" lIns="45720" rIns="45720" tIns="18288" bIns="18288" anchor="t">
+            <a:spAutoFit/>
+          </a:bodyPr>
+          <a:lstStyle/>
+          <a:p>
+            <a:pPr algn="r"/>
+            <a:r>
+              <a:rPr sz="800" b="1" i="0">
+                <a:solidFill>
+                  <a:srgbClr val="707070"/>
+                </a:solidFill>
+                <a:latin typeface="Calibri"/>
+              </a:rPr>
+              <a:t>JÖNKÖPING UNIVERSITY</a:t>
+            </a:r>
+          </a:p>
+        </p:txBody>
+      </p:sp>
+      <p:sp>
+        <p:nvSpPr>
+          <p:cNvPr id="3" name="Rectangle 2"/>
+          <p:cNvSpPr/>
+          <p:nvPr/>
+        </p:nvSpPr>
+        <p:spPr>
+          <a:xfrm>
+            <a:off x="457200" y="411480"/>
+            <a:ext cx="457200" cy="73152"/>
+          </a:xfrm>
+          <a:prstGeom prst="rect">
+            <a:avLst/>
+          </a:prstGeom>
+          <a:solidFill>
+            <a:srgbClr val="A9D6EF"/>
+          </a:solidFill>
+          <a:ln>
+            <a:noFill/>
+          </a:ln>
+        </p:spPr>
+        <p:style>
+          <a:lnRef idx="1">
+            <a:schemeClr val="accent1"/>
+          </a:lnRef>
+          <a:fillRef idx="3">
+            <a:schemeClr val="accent1"/>
+          </a:fillRef>
+          <a:effectRef idx="2">
+            <a:schemeClr val="accent1"/>
+          </a:effectRef>
+          <a:fontRef idx="minor">
+            <a:schemeClr val="lt1"/>
+          </a:fontRef>
+        </p:style>
+        <p:txBody>
+          <a:bodyPr rtlCol="0" anchor="ctr"/>
+          <a:lstStyle/>
+          <a:p>
+            <a:pPr algn="ctr"/>
+          </a:p>
+        </p:txBody>
+      </p:sp>
+      <p:sp>
+        <p:nvSpPr>
+          <p:cNvPr id="4" name="TextBox 3"/>
+          <p:cNvSpPr txBox="1"/>
+          <p:nvPr/>
+        </p:nvSpPr>
+        <p:spPr>
+          <a:xfrm>
+            <a:off x="457200" y="502920"/>
+            <a:ext cx="11430000" cy="822960"/>
+          </a:xfrm>
+          <a:prstGeom prst="rect">
+            <a:avLst/>
+          </a:prstGeom>
+          <a:noFill/>
+        </p:spPr>
+        <p:txBody>
+          <a:bodyPr wrap="square" lIns="45720" rIns="45720" tIns="18288" bIns="18288" anchor="t">
+            <a:spAutoFit/>
+          </a:bodyPr>
+          <a:lstStyle/>
+          <a:p>
+            <a:pPr algn="l"/>
+            <a:r>
+              <a:rPr sz="3000" b="0" i="0">
+                <a:solidFill>
+                  <a:srgbClr val="000000"/>
+                </a:solidFill>
+                <a:latin typeface="Calibri Light"/>
+              </a:rPr>
+              <a:t>PHASE 8.6.20 V6: VALIDATION SUMMARY — JOURNAL &amp; MANUFACTURER</a:t>
+            </a:r>
+          </a:p>
+        </p:txBody>
+      </p:sp>
+      <p:sp>
+        <p:nvSpPr>
+          <p:cNvPr id="5" name="TextBox 4"/>
+          <p:cNvSpPr txBox="1"/>
+          <p:nvPr/>
+        </p:nvSpPr>
+        <p:spPr>
+          <a:xfrm>
+            <a:off x="365760" y="1188720"/>
+            <a:ext cx="7315200" cy="365760"/>
+          </a:xfrm>
+          <a:prstGeom prst="rect">
+            <a:avLst/>
+          </a:prstGeom>
+          <a:noFill/>
+        </p:spPr>
+        <p:txBody>
+          <a:bodyPr wrap="square" lIns="45720" rIns="45720" tIns="18288" bIns="18288" anchor="t">
+            <a:spAutoFit/>
+          </a:bodyPr>
+          <a:lstStyle/>
+          <a:p>
+            <a:pPr algn="l"/>
+            <a:r>
+              <a:rPr sz="1600" b="0" i="0">
+                <a:solidFill>
+                  <a:srgbClr val="707070"/>
+                </a:solidFill>
+                <a:latin typeface="Calibri"/>
+              </a:rPr>
+              <a:t>Pass / fail vs both references  (n = 5, 100 % infill)</a:t>
+            </a:r>
+          </a:p>
+        </p:txBody>
+      </p:sp>
+      <p:graphicFrame>
+        <p:nvGraphicFramePr>
+          <p:cNvPr id="6" name="Table 5"/>
+          <p:cNvGraphicFramePr>
+            <a:graphicFrameLocks noGrp="1"/>
+          </p:cNvGraphicFramePr>
+          <p:nvPr/>
+        </p:nvGraphicFramePr>
+        <p:xfrm>
+          <a:off x="365760" y="1600200"/>
+          <a:ext cx="7315198" cy="2148840"/>
+        </p:xfrm>
+        <a:graphic>
+          <a:graphicData uri="http://schemas.openxmlformats.org/drawingml/2006/table">
+            <a:tbl>
+              <a:tblPr firstRow="1" bandRow="1">
+                <a:tableStyleId>{5C22544A-7EE6-4342-B048-85BDC9FD1C3A}</a:tableStyleId>
+              </a:tblPr>
+              <a:tblGrid>
+                <a:gridCol w="848139"/>
+                <a:gridCol w="1166191"/>
+                <a:gridCol w="1378226"/>
+                <a:gridCol w="1272208"/>
+                <a:gridCol w="1166191"/>
+                <a:gridCol w="1484243"/>
+              </a:tblGrid>
+              <a:tr h="429768">
+                <a:tc>
+                  <a:txBody>
+                    <a:bodyPr lIns="54864" rIns="54864" tIns="18288" bIns="18288" wrap="square" anchor="ctr"/>
+                    <a:lstStyle/>
+                    <a:p>
+                      <a:pPr algn="l"/>
+                      <a:r>
+                        <a:rPr sz="1050" b="1">
+                          <a:solidFill>
+                            <a:srgbClr val="FFFFFF"/>
+                          </a:solidFill>
+                          <a:latin typeface="Calibri"/>
+                        </a:rPr>
+                        <a:t>Property</a:t>
+                      </a:r>
+                    </a:p>
+                  </a:txBody>
+                  <a:tcPr>
+                    <a:solidFill>
+                      <a:srgbClr val="143D2F"/>
+                    </a:solidFill>
+                  </a:tcPr>
+                </a:tc>
+                <a:tc>
+                  <a:txBody>
+                    <a:bodyPr lIns="54864" rIns="54864" tIns="18288" bIns="18288" wrap="square" anchor="ctr"/>
+                    <a:lstStyle/>
+                    <a:p>
+                      <a:pPr algn="l"/>
+                      <a:r>
+                        <a:rPr sz="1050" b="1">
+                          <a:solidFill>
+                            <a:srgbClr val="FFFFFF"/>
+                          </a:solidFill>
+                          <a:latin typeface="Calibri"/>
+                        </a:rPr>
+                        <a:t>V6 mean</a:t>
+                      </a:r>
+                    </a:p>
+                  </a:txBody>
+                  <a:tcPr>
+                    <a:solidFill>
+                      <a:srgbClr val="143D2F"/>
+                    </a:solidFill>
+                  </a:tcPr>
+                </a:tc>
+                <a:tc>
+                  <a:txBody>
+                    <a:bodyPr lIns="54864" rIns="54864" tIns="18288" bIns="18288" wrap="square" anchor="ctr"/>
+                    <a:lstStyle/>
+                    <a:p>
+                      <a:pPr algn="l"/>
+                      <a:r>
+                        <a:rPr sz="1050" b="1">
+                          <a:solidFill>
+                            <a:srgbClr val="FFFFFF"/>
+                          </a:solidFill>
+                          <a:latin typeface="Calibri"/>
+                        </a:rPr>
+                        <a:t>Chacón range</a:t>
+                      </a:r>
+                    </a:p>
+                  </a:txBody>
+                  <a:tcPr>
+                    <a:solidFill>
+                      <a:srgbClr val="143D2F"/>
+                    </a:solidFill>
+                  </a:tcPr>
+                </a:tc>
+                <a:tc>
+                  <a:txBody>
+                    <a:bodyPr lIns="54864" rIns="54864" tIns="18288" bIns="18288" wrap="square" anchor="ctr"/>
+                    <a:lstStyle/>
+                    <a:p>
+                      <a:pPr algn="l"/>
+                      <a:r>
+                        <a:rPr sz="1050" b="1">
+                          <a:solidFill>
+                            <a:srgbClr val="FFFFFF"/>
+                          </a:solidFill>
+                          <a:latin typeface="Calibri"/>
+                        </a:rPr>
+                        <a:t>vs journal</a:t>
+                      </a:r>
+                    </a:p>
+                  </a:txBody>
+                  <a:tcPr>
+                    <a:solidFill>
+                      <a:srgbClr val="143D2F"/>
+                    </a:solidFill>
+                  </a:tcPr>
+                </a:tc>
+                <a:tc>
+                  <a:txBody>
+                    <a:bodyPr lIns="54864" rIns="54864" tIns="18288" bIns="18288" wrap="square" anchor="ctr"/>
+                    <a:lstStyle/>
+                    <a:p>
+                      <a:pPr algn="l"/>
+                      <a:r>
+                        <a:rPr sz="1050" b="1">
+                          <a:solidFill>
+                            <a:srgbClr val="FFFFFF"/>
+                          </a:solidFill>
+                          <a:latin typeface="Calibri"/>
+                        </a:rPr>
+                        <a:t>E-PLA spec</a:t>
+                      </a:r>
+                    </a:p>
+                  </a:txBody>
+                  <a:tcPr>
+                    <a:solidFill>
+                      <a:srgbClr val="143D2F"/>
+                    </a:solidFill>
+                  </a:tcPr>
+                </a:tc>
+                <a:tc>
+                  <a:txBody>
+                    <a:bodyPr lIns="54864" rIns="54864" tIns="18288" bIns="18288" wrap="square" anchor="ctr"/>
+                    <a:lstStyle/>
+                    <a:p>
+                      <a:pPr algn="l"/>
+                      <a:r>
+                        <a:rPr sz="1050" b="1">
+                          <a:solidFill>
+                            <a:srgbClr val="FFFFFF"/>
+                          </a:solidFill>
+                          <a:latin typeface="Calibri"/>
+                        </a:rPr>
+                        <a:t>vs datasheet</a:t>
+                      </a:r>
+                    </a:p>
+                  </a:txBody>
+                  <a:tcPr>
+                    <a:solidFill>
+                      <a:srgbClr val="143D2F"/>
+                    </a:solidFill>
+                  </a:tcPr>
+                </a:tc>
+              </a:tr>
+              <a:tr h="429768">
+                <a:tc>
+                  <a:txBody>
+                    <a:bodyPr lIns="54864" rIns="54864" tIns="18288" bIns="18288" wrap="square" anchor="ctr"/>
+                    <a:lstStyle/>
+                    <a:p>
+                      <a:pPr algn="l"/>
+                      <a:r>
+                        <a:rPr sz="1100" b="1">
+                          <a:solidFill>
+                            <a:srgbClr val="000000"/>
+                          </a:solidFill>
+                          <a:latin typeface="Calibri"/>
+                        </a:rPr>
+                        <a:t>UTS</a:t>
+                      </a:r>
+                    </a:p>
+                  </a:txBody>
+                  <a:tcPr>
+                    <a:solidFill>
+                      <a:srgbClr val="C8E6C9"/>
+                    </a:solidFill>
+                  </a:tcPr>
+                </a:tc>
+                <a:tc>
+                  <a:txBody>
+                    <a:bodyPr lIns="54864" rIns="54864" tIns="18288" bIns="18288" wrap="square" anchor="ctr"/>
+                    <a:lstStyle/>
+                    <a:p>
+                      <a:pPr algn="l"/>
+                      <a:r>
+                        <a:rPr sz="1100" b="0">
+                          <a:solidFill>
+                            <a:srgbClr val="000000"/>
+                          </a:solidFill>
+                          <a:latin typeface="Calibri"/>
+                        </a:rPr>
+                        <a:t>46.2 MPa</a:t>
+                      </a:r>
+                    </a:p>
+                  </a:txBody>
+                  <a:tcPr>
+                    <a:solidFill>
+                      <a:srgbClr val="C8E6C9"/>
+                    </a:solidFill>
+                  </a:tcPr>
+                </a:tc>
+                <a:tc>
+                  <a:txBody>
+                    <a:bodyPr lIns="54864" rIns="54864" tIns="18288" bIns="18288" wrap="square" anchor="ctr"/>
+                    <a:lstStyle/>
+                    <a:p>
+                      <a:pPr algn="l"/>
+                      <a:r>
+                        <a:rPr sz="1100" b="0">
+                          <a:solidFill>
+                            <a:srgbClr val="000000"/>
+                          </a:solidFill>
+                          <a:latin typeface="Calibri"/>
+                        </a:rPr>
+                        <a:t>32–60 MPa</a:t>
+                      </a:r>
+                    </a:p>
+                  </a:txBody>
+                  <a:tcPr>
+                    <a:solidFill>
+                      <a:srgbClr val="C8E6C9"/>
+                    </a:solidFill>
+                  </a:tcPr>
+                </a:tc>
+                <a:tc>
+                  <a:txBody>
+                    <a:bodyPr lIns="54864" rIns="54864" tIns="18288" bIns="18288" wrap="square" anchor="ctr"/>
+                    <a:lstStyle/>
+                    <a:p>
+                      <a:pPr algn="l"/>
+                      <a:r>
+                        <a:rPr sz="1100" b="1">
+                          <a:solidFill>
+                            <a:srgbClr val="000000"/>
+                          </a:solidFill>
+                          <a:latin typeface="Calibri"/>
+                        </a:rPr>
+                        <a:t>✓ PASS</a:t>
+                      </a:r>
+                    </a:p>
+                  </a:txBody>
+                  <a:tcPr>
+                    <a:solidFill>
+                      <a:srgbClr val="C8E6C9"/>
+                    </a:solidFill>
+                  </a:tcPr>
+                </a:tc>
+                <a:tc>
+                  <a:txBody>
+                    <a:bodyPr lIns="54864" rIns="54864" tIns="18288" bIns="18288" wrap="square" anchor="ctr"/>
+                    <a:lstStyle/>
+                    <a:p>
+                      <a:pPr algn="l"/>
+                      <a:r>
+                        <a:rPr sz="1100" b="0">
+                          <a:solidFill>
+                            <a:srgbClr val="000000"/>
+                          </a:solidFill>
+                          <a:latin typeface="Calibri"/>
+                        </a:rPr>
+                        <a:t>58 MPa</a:t>
+                      </a:r>
+                    </a:p>
+                  </a:txBody>
+                  <a:tcPr>
+                    <a:solidFill>
+                      <a:srgbClr val="C8E6C9"/>
+                    </a:solidFill>
+                  </a:tcPr>
+                </a:tc>
+                <a:tc>
+                  <a:txBody>
+                    <a:bodyPr lIns="54864" rIns="54864" tIns="18288" bIns="18288" wrap="square" anchor="ctr"/>
+                    <a:lstStyle/>
+                    <a:p>
+                      <a:pPr algn="l"/>
+                      <a:r>
+                        <a:rPr sz="1100" b="0">
+                          <a:solidFill>
+                            <a:srgbClr val="000000"/>
+                          </a:solidFill>
+                          <a:latin typeface="Calibri"/>
+                        </a:rPr>
+                        <a:t>80 % (k1.26)</a:t>
+                      </a:r>
+                    </a:p>
+                  </a:txBody>
+                  <a:tcPr>
+                    <a:solidFill>
+                      <a:srgbClr val="C8E6C9"/>
+                    </a:solidFill>
+                  </a:tcPr>
+                </a:tc>
+              </a:tr>
+              <a:tr h="429768">
+                <a:tc>
+                  <a:txBody>
+                    <a:bodyPr lIns="54864" rIns="54864" tIns="18288" bIns="18288" wrap="square" anchor="ctr"/>
+                    <a:lstStyle/>
+                    <a:p>
+                      <a:pPr algn="l"/>
+                      <a:r>
+                        <a:rPr sz="1100" b="1">
+                          <a:solidFill>
+                            <a:srgbClr val="000000"/>
+                          </a:solidFill>
+                          <a:latin typeface="Calibri"/>
+                        </a:rPr>
+                        <a:t>σ_y</a:t>
+                      </a:r>
+                    </a:p>
+                  </a:txBody>
+                  <a:tcPr>
+                    <a:solidFill>
+                      <a:srgbClr val="C8E6C9"/>
+                    </a:solidFill>
+                  </a:tcPr>
+                </a:tc>
+                <a:tc>
+                  <a:txBody>
+                    <a:bodyPr lIns="54864" rIns="54864" tIns="18288" bIns="18288" wrap="square" anchor="ctr"/>
+                    <a:lstStyle/>
+                    <a:p>
+                      <a:pPr algn="l"/>
+                      <a:r>
+                        <a:rPr sz="1100" b="0">
+                          <a:solidFill>
+                            <a:srgbClr val="000000"/>
+                          </a:solidFill>
+                          <a:latin typeface="Calibri"/>
+                        </a:rPr>
+                        <a:t>45.0 MPa</a:t>
+                      </a:r>
+                    </a:p>
+                  </a:txBody>
+                  <a:tcPr>
+                    <a:solidFill>
+                      <a:srgbClr val="C8E6C9"/>
+                    </a:solidFill>
+                  </a:tcPr>
+                </a:tc>
+                <a:tc>
+                  <a:txBody>
+                    <a:bodyPr lIns="54864" rIns="54864" tIns="18288" bIns="18288" wrap="square" anchor="ctr"/>
+                    <a:lstStyle/>
+                    <a:p>
+                      <a:pPr algn="l"/>
+                      <a:r>
+                        <a:rPr sz="1100" b="0">
+                          <a:solidFill>
+                            <a:srgbClr val="000000"/>
+                          </a:solidFill>
+                          <a:latin typeface="Calibri"/>
+                        </a:rPr>
+                        <a:t>30–50 MPa</a:t>
+                      </a:r>
+                    </a:p>
+                  </a:txBody>
+                  <a:tcPr>
+                    <a:solidFill>
+                      <a:srgbClr val="C8E6C9"/>
+                    </a:solidFill>
+                  </a:tcPr>
+                </a:tc>
+                <a:tc>
+                  <a:txBody>
+                    <a:bodyPr lIns="54864" rIns="54864" tIns="18288" bIns="18288" wrap="square" anchor="ctr"/>
+                    <a:lstStyle/>
+                    <a:p>
+                      <a:pPr algn="l"/>
+                      <a:r>
+                        <a:rPr sz="1100" b="1">
+                          <a:solidFill>
+                            <a:srgbClr val="000000"/>
+                          </a:solidFill>
+                          <a:latin typeface="Calibri"/>
+                        </a:rPr>
+                        <a:t>✓ PASS</a:t>
+                      </a:r>
+                    </a:p>
+                  </a:txBody>
+                  <a:tcPr>
+                    <a:solidFill>
+                      <a:srgbClr val="C8E6C9"/>
+                    </a:solidFill>
+                  </a:tcPr>
+                </a:tc>
+                <a:tc>
+                  <a:txBody>
+                    <a:bodyPr lIns="54864" rIns="54864" tIns="18288" bIns="18288" wrap="square" anchor="ctr"/>
+                    <a:lstStyle/>
+                    <a:p>
+                      <a:pPr algn="l"/>
+                      <a:r>
+                        <a:rPr sz="1100" b="0">
+                          <a:solidFill>
+                            <a:srgbClr val="000000"/>
+                          </a:solidFill>
+                          <a:latin typeface="Calibri"/>
+                        </a:rPr>
+                        <a:t>58 MPa †</a:t>
+                      </a:r>
+                    </a:p>
+                  </a:txBody>
+                  <a:tcPr>
+                    <a:solidFill>
+                      <a:srgbClr val="C8E6C9"/>
+                    </a:solidFill>
+                  </a:tcPr>
+                </a:tc>
+                <a:tc>
+                  <a:txBody>
+                    <a:bodyPr lIns="54864" rIns="54864" tIns="18288" bIns="18288" wrap="square" anchor="ctr"/>
+                    <a:lstStyle/>
+                    <a:p>
+                      <a:pPr algn="l"/>
+                      <a:r>
+                        <a:rPr sz="1100" b="0">
+                          <a:solidFill>
+                            <a:srgbClr val="000000"/>
+                          </a:solidFill>
+                          <a:latin typeface="Calibri"/>
+                        </a:rPr>
+                        <a:t>78 %</a:t>
+                      </a:r>
+                    </a:p>
+                  </a:txBody>
+                  <a:tcPr>
+                    <a:solidFill>
+                      <a:srgbClr val="C8E6C9"/>
+                    </a:solidFill>
+                  </a:tcPr>
+                </a:tc>
+              </a:tr>
+              <a:tr h="429768">
+                <a:tc>
+                  <a:txBody>
+                    <a:bodyPr lIns="54864" rIns="54864" tIns="18288" bIns="18288" wrap="square" anchor="ctr"/>
+                    <a:lstStyle/>
+                    <a:p>
+                      <a:pPr algn="l"/>
+                      <a:r>
+                        <a:rPr sz="1100" b="1">
+                          <a:solidFill>
+                            <a:srgbClr val="000000"/>
+                          </a:solidFill>
+                          <a:latin typeface="Calibri"/>
+                        </a:rPr>
+                        <a:t>E</a:t>
+                      </a:r>
+                    </a:p>
+                  </a:txBody>
+                  <a:tcPr>
+                    <a:solidFill>
+                      <a:srgbClr val="FFF3CD"/>
+                    </a:solidFill>
+                  </a:tcPr>
+                </a:tc>
+                <a:tc>
+                  <a:txBody>
+                    <a:bodyPr lIns="54864" rIns="54864" tIns="18288" bIns="18288" wrap="square" anchor="ctr"/>
+                    <a:lstStyle/>
+                    <a:p>
+                      <a:pPr algn="l"/>
+                      <a:r>
+                        <a:rPr sz="1100" b="0">
+                          <a:solidFill>
+                            <a:srgbClr val="000000"/>
+                          </a:solidFill>
+                          <a:latin typeface="Calibri"/>
+                        </a:rPr>
+                        <a:t>2.60 GPa</a:t>
+                      </a:r>
+                    </a:p>
+                  </a:txBody>
+                  <a:tcPr>
+                    <a:solidFill>
+                      <a:srgbClr val="FFF3CD"/>
+                    </a:solidFill>
+                  </a:tcPr>
+                </a:tc>
+                <a:tc>
+                  <a:txBody>
+                    <a:bodyPr lIns="54864" rIns="54864" tIns="18288" bIns="18288" wrap="square" anchor="ctr"/>
+                    <a:lstStyle/>
+                    <a:p>
+                      <a:pPr algn="l"/>
+                      <a:r>
+                        <a:rPr sz="1100" b="0">
+                          <a:solidFill>
+                            <a:srgbClr val="000000"/>
+                          </a:solidFill>
+                          <a:latin typeface="Calibri"/>
+                        </a:rPr>
+                        <a:t>3.0–5.5 GPa</a:t>
+                      </a:r>
+                    </a:p>
+                  </a:txBody>
+                  <a:tcPr>
+                    <a:solidFill>
+                      <a:srgbClr val="FFF3CD"/>
+                    </a:solidFill>
+                  </a:tcPr>
+                </a:tc>
+                <a:tc>
+                  <a:txBody>
+                    <a:bodyPr lIns="54864" rIns="54864" tIns="18288" bIns="18288" wrap="square" anchor="ctr"/>
+                    <a:lstStyle/>
+                    <a:p>
+                      <a:pPr algn="l"/>
+                      <a:r>
+                        <a:rPr sz="1100" b="1">
+                          <a:solidFill>
+                            <a:srgbClr val="000000"/>
+                          </a:solidFill>
+                          <a:latin typeface="Calibri"/>
+                        </a:rPr>
+                        <a:t>⚠ 13 % low</a:t>
+                      </a:r>
+                    </a:p>
+                  </a:txBody>
+                  <a:tcPr>
+                    <a:solidFill>
+                      <a:srgbClr val="FFF3CD"/>
+                    </a:solidFill>
+                  </a:tcPr>
+                </a:tc>
+                <a:tc>
+                  <a:txBody>
+                    <a:bodyPr lIns="54864" rIns="54864" tIns="18288" bIns="18288" wrap="square" anchor="ctr"/>
+                    <a:lstStyle/>
+                    <a:p>
+                      <a:pPr algn="l"/>
+                      <a:r>
+                        <a:rPr sz="1100" b="0">
+                          <a:solidFill>
+                            <a:srgbClr val="000000"/>
+                          </a:solidFill>
+                          <a:latin typeface="Calibri"/>
+                        </a:rPr>
+                        <a:t>2.87 GPa</a:t>
+                      </a:r>
+                    </a:p>
+                  </a:txBody>
+                  <a:tcPr>
+                    <a:solidFill>
+                      <a:srgbClr val="FFF3CD"/>
+                    </a:solidFill>
+                  </a:tcPr>
+                </a:tc>
+                <a:tc>
+                  <a:txBody>
+                    <a:bodyPr lIns="54864" rIns="54864" tIns="18288" bIns="18288" wrap="square" anchor="ctr"/>
+                    <a:lstStyle/>
+                    <a:p>
+                      <a:pPr algn="l"/>
+                      <a:r>
+                        <a:rPr sz="1100" b="0">
+                          <a:solidFill>
+                            <a:srgbClr val="000000"/>
+                          </a:solidFill>
+                          <a:latin typeface="Calibri"/>
+                        </a:rPr>
+                        <a:t>91 % (k1.11)</a:t>
+                      </a:r>
+                    </a:p>
+                  </a:txBody>
+                  <a:tcPr>
+                    <a:solidFill>
+                      <a:srgbClr val="FFF3CD"/>
+                    </a:solidFill>
+                  </a:tcPr>
+                </a:tc>
+              </a:tr>
+              <a:tr h="429768">
+                <a:tc>
+                  <a:txBody>
+                    <a:bodyPr lIns="54864" rIns="54864" tIns="18288" bIns="18288" wrap="square" anchor="ctr"/>
+                    <a:lstStyle/>
+                    <a:p>
+                      <a:pPr algn="l"/>
+                      <a:r>
+                        <a:rPr sz="1100" b="0">
+                          <a:solidFill>
+                            <a:srgbClr val="000000"/>
+                          </a:solidFill>
+                          <a:latin typeface="Calibri"/>
+                        </a:rPr>
+                        <a:t>ε_f</a:t>
+                      </a:r>
+                    </a:p>
+                  </a:txBody>
+                  <a:tcPr/>
+                </a:tc>
+                <a:tc>
+                  <a:txBody>
+                    <a:bodyPr lIns="54864" rIns="54864" tIns="18288" bIns="18288" wrap="square" anchor="ctr"/>
+                    <a:lstStyle/>
+                    <a:p>
+                      <a:pPr algn="l"/>
+                      <a:r>
+                        <a:rPr sz="1100" b="0">
+                          <a:solidFill>
+                            <a:srgbClr val="000000"/>
+                          </a:solidFill>
+                          <a:latin typeface="Calibri"/>
+                        </a:rPr>
+                        <a:t>3.0–7.4 %</a:t>
+                      </a:r>
+                    </a:p>
+                  </a:txBody>
+                  <a:tcPr/>
+                </a:tc>
+                <a:tc>
+                  <a:txBody>
+                    <a:bodyPr lIns="54864" rIns="54864" tIns="18288" bIns="18288" wrap="square" anchor="ctr"/>
+                    <a:lstStyle/>
+                    <a:p>
+                      <a:pPr algn="l"/>
+                      <a:r>
+                        <a:rPr sz="1100" b="0">
+                          <a:solidFill>
+                            <a:srgbClr val="000000"/>
+                          </a:solidFill>
+                          <a:latin typeface="Calibri"/>
+                        </a:rPr>
+                        <a:t>—</a:t>
+                      </a:r>
+                    </a:p>
+                  </a:txBody>
+                  <a:tcPr/>
+                </a:tc>
+                <a:tc>
+                  <a:txBody>
+                    <a:bodyPr lIns="54864" rIns="54864" tIns="18288" bIns="18288" wrap="square" anchor="ctr"/>
+                    <a:lstStyle/>
+                    <a:p>
+                      <a:pPr algn="l"/>
+                      <a:r>
+                        <a:rPr sz="1100" b="0">
+                          <a:solidFill>
+                            <a:srgbClr val="000000"/>
+                          </a:solidFill>
+                          <a:latin typeface="Calibri"/>
+                        </a:rPr>
+                        <a:t>—</a:t>
+                      </a:r>
+                    </a:p>
+                  </a:txBody>
+                  <a:tcPr/>
+                </a:tc>
+                <a:tc>
+                  <a:txBody>
+                    <a:bodyPr lIns="54864" rIns="54864" tIns="18288" bIns="18288" wrap="square" anchor="ctr"/>
+                    <a:lstStyle/>
+                    <a:p>
+                      <a:pPr algn="l"/>
+                      <a:r>
+                        <a:rPr sz="1100" b="0">
+                          <a:solidFill>
+                            <a:srgbClr val="000000"/>
+                          </a:solidFill>
+                          <a:latin typeface="Calibri"/>
+                        </a:rPr>
+                        <a:t>8 %</a:t>
+                      </a:r>
+                    </a:p>
+                  </a:txBody>
+                  <a:tcPr/>
+                </a:tc>
+                <a:tc>
+                  <a:txBody>
+                    <a:bodyPr lIns="54864" rIns="54864" tIns="18288" bIns="18288" wrap="square" anchor="ctr"/>
+                    <a:lstStyle/>
+                    <a:p>
+                      <a:pPr algn="l"/>
+                      <a:r>
+                        <a:rPr sz="1100" b="0">
+                          <a:solidFill>
+                            <a:srgbClr val="000000"/>
+                          </a:solidFill>
+                          <a:latin typeface="Calibri"/>
+                        </a:rPr>
+                        <a:t>37–93 % range</a:t>
+                      </a:r>
+                    </a:p>
+                  </a:txBody>
+                  <a:tcPr/>
+                </a:tc>
+              </a:tr>
+            </a:tbl>
+          </a:graphicData>
+        </a:graphic>
+      </p:graphicFrame>
+      <p:pic>
+        <p:nvPicPr>
+          <p:cNvPr id="7" name="Picture 6" descr="V6_offset_k.png"/>
+          <p:cNvPicPr>
+            <a:picLocks noChangeAspect="1"/>
+          </p:cNvPicPr>
+          <p:nvPr/>
+        </p:nvPicPr>
+        <p:blipFill>
+          <a:blip r:embed="rId2"/>
+          <a:stretch>
+            <a:fillRect/>
+          </a:stretch>
+        </p:blipFill>
+        <p:spPr>
+          <a:xfrm>
+            <a:off x="7863840" y="1371600"/>
+            <a:ext cx="4023360" cy="3367701"/>
+          </a:xfrm>
+          <a:prstGeom prst="rect">
+            <a:avLst/>
+          </a:prstGeom>
+        </p:spPr>
+      </p:pic>
+      <p:sp>
+        <p:nvSpPr>
+          <p:cNvPr id="8" name="Rectangle 7"/>
+          <p:cNvSpPr/>
+          <p:nvPr/>
+        </p:nvSpPr>
+        <p:spPr>
+          <a:xfrm>
+            <a:off x="365760" y="4023360"/>
+            <a:ext cx="7315200" cy="914400"/>
+          </a:xfrm>
+          <a:prstGeom prst="rect">
+            <a:avLst/>
+          </a:prstGeom>
+          <a:solidFill>
+            <a:srgbClr val="C8E6C9"/>
+          </a:solidFill>
+          <a:ln>
+            <a:noFill/>
+          </a:ln>
+        </p:spPr>
+        <p:style>
+          <a:lnRef idx="1">
+            <a:schemeClr val="accent1"/>
+          </a:lnRef>
+          <a:fillRef idx="3">
+            <a:schemeClr val="accent1"/>
+          </a:fillRef>
+          <a:effectRef idx="2">
+            <a:schemeClr val="accent1"/>
+          </a:effectRef>
+          <a:fontRef idx="minor">
+            <a:schemeClr val="lt1"/>
+          </a:fontRef>
+        </p:style>
+        <p:txBody>
+          <a:bodyPr rtlCol="0" anchor="ctr" wrap="square" lIns="109728" rIns="109728"/>
+          <a:lstStyle/>
+          <a:p>
+            <a:pPr algn="ctr"/>
+            <a:r>
+              <a:rPr sz="1250" b="1">
+                <a:solidFill>
+                  <a:srgbClr val="1F3F2F"/>
+                </a:solidFill>
+                <a:latin typeface="Calibri"/>
+              </a:rPr>
+              <a:t>PASS — strength lands inside the journal (k ≈ 1) AND sits at a coherent k ≈ 1.2 vs the add:north E-PLA datasheet (80 % strength / 91 % stiffness), repeatable at CV 2.5 % across 5 specimens.</a:t>
+            </a:r>
+          </a:p>
+        </p:txBody>
+      </p:sp>
+      <p:sp>
+        <p:nvSpPr>
+          <p:cNvPr id="9" name="Rectangle 8"/>
+          <p:cNvSpPr/>
+          <p:nvPr/>
+        </p:nvSpPr>
+        <p:spPr>
+          <a:xfrm>
+            <a:off x="365760" y="5074920"/>
+            <a:ext cx="7315200" cy="777240"/>
+          </a:xfrm>
+          <a:prstGeom prst="rect">
+            <a:avLst/>
+          </a:prstGeom>
+          <a:solidFill>
+            <a:srgbClr val="FFF3CD"/>
+          </a:solidFill>
+          <a:ln>
+            <a:noFill/>
+          </a:ln>
+        </p:spPr>
+        <p:style>
+          <a:lnRef idx="1">
+            <a:schemeClr val="accent1"/>
+          </a:lnRef>
+          <a:fillRef idx="3">
+            <a:schemeClr val="accent1"/>
+          </a:fillRef>
+          <a:effectRef idx="2">
+            <a:schemeClr val="accent1"/>
+          </a:effectRef>
+          <a:fontRef idx="minor">
+            <a:schemeClr val="lt1"/>
+          </a:fontRef>
+        </p:style>
+        <p:txBody>
+          <a:bodyPr rtlCol="0" anchor="ctr" wrap="square" lIns="109728" rIns="109728"/>
+          <a:lstStyle/>
+          <a:p>
+            <a:pPr algn="ctr"/>
+            <a:r>
+              <a:rPr sz="1200" b="1">
+                <a:solidFill>
+                  <a:srgbClr val="000000"/>
+                </a:solidFill>
+                <a:latin typeface="Calibri"/>
+              </a:rPr>
+              <a:t>Caveat: elastic modulus is ~13 % below the journal floor (but meets the datasheet at 91 %); ε_f is reported as a 3–7 % range, not a single value.</a:t>
+            </a:r>
+          </a:p>
+        </p:txBody>
+      </p:sp>
+      <p:sp>
+        <p:nvSpPr>
+          <p:cNvPr id="10" name="TextBox 9"/>
+          <p:cNvSpPr txBox="1"/>
+          <p:nvPr/>
+        </p:nvSpPr>
+        <p:spPr>
+          <a:xfrm>
+            <a:off x="7863840" y="5577840"/>
+            <a:ext cx="4023360" cy="274320"/>
+          </a:xfrm>
+          <a:prstGeom prst="rect">
+            <a:avLst/>
+          </a:prstGeom>
+          <a:noFill/>
+        </p:spPr>
+        <p:txBody>
+          <a:bodyPr wrap="square">
+            <a:spAutoFit/>
+          </a:bodyPr>
+          <a:lstStyle/>
+          <a:p>
+            <a:r>
+              <a:rPr sz="1100" u="sng">
+                <a:solidFill>
+                  <a:srgbClr val="1A5FB4"/>
+                </a:solidFill>
+                <a:latin typeface="Calibri"/>
+                <a:hlinkClick r:id="rId3"/>
+              </a:rPr>
+              <a:t>add:north E-PLA TDS (ISO 527 / 178)</a:t>
+            </a:r>
+          </a:p>
+        </p:txBody>
+      </p:sp>
+      <p:sp>
+        <p:nvSpPr>
+          <p:cNvPr id="11" name="TextBox 10"/>
+          <p:cNvSpPr txBox="1"/>
+          <p:nvPr/>
+        </p:nvSpPr>
+        <p:spPr>
+          <a:xfrm>
+            <a:off x="548640" y="6400800"/>
+            <a:ext cx="11064240" cy="365760"/>
+          </a:xfrm>
+          <a:prstGeom prst="rect">
+            <a:avLst/>
+          </a:prstGeom>
+          <a:noFill/>
+        </p:spPr>
+        <p:txBody>
+          <a:bodyPr wrap="square" lIns="45720" rIns="45720" tIns="18288" bIns="18288" anchor="t">
+            <a:spAutoFit/>
+          </a:bodyPr>
+          <a:lstStyle/>
+          <a:p>
+            <a:pPr algn="l"/>
+            <a:r>
+              <a:rPr sz="1200" b="0" i="1">
+                <a:solidFill>
+                  <a:srgbClr val="707070"/>
+                </a:solidFill>
+                <a:latin typeface="Calibri"/>
+              </a:rPr>
+              <a:t>Writeup: 100 % PLA validated vs literature for strength (k≈1 vs Chacón); characterised at k≈1.2 vs add:north E-PLA datasheet; modulus meets datasheet, marginally below journal; ε_f = 3–7 % range.</a:t>
+            </a:r>
+          </a:p>
+        </p:txBody>
+      </p:sp>
+      <p:sp>
+        <p:nvSpPr>
+          <p:cNvPr id="12" name="TextBox 11"/>
+          <p:cNvSpPr txBox="1"/>
+          <p:nvPr/>
+        </p:nvSpPr>
+        <p:spPr>
+          <a:xfrm>
+            <a:off x="457200" y="6446520"/>
+            <a:ext cx="640080" cy="274320"/>
+          </a:xfrm>
+          <a:prstGeom prst="rect">
+            <a:avLst/>
+          </a:prstGeom>
+          <a:noFill/>
+        </p:spPr>
+        <p:txBody>
+          <a:bodyPr wrap="square" lIns="45720" rIns="45720" tIns="18288" bIns="18288" anchor="t">
+            <a:spAutoFit/>
+          </a:bodyPr>
+          <a:lstStyle/>
+          <a:p>
+            <a:pPr algn="l"/>
+            <a:r>
+              <a:rPr sz="1000" b="0" i="0">
+                <a:solidFill>
+                  <a:srgbClr val="707070"/>
+                </a:solidFill>
+                <a:latin typeface="Calibri"/>
+              </a:rPr>
+              <a:t>160</a:t>
+            </a:r>
+          </a:p>
+        </p:txBody>
+      </p:sp>
+    </p:spTree>
+  </p:cSld>
+  <p:clrMapOvr>
+    <a:masterClrMapping/>
+  </p:clrMapOvr>
+</p:sld>
+</file>
+
+<file path=ppt/slides/slide21.xml><?xml version="1.0" encoding="utf-8"?>
+<p:sld xmlns:a="http://schemas.openxmlformats.org/drawingml/2006/main" xmlns:p="http://schemas.openxmlformats.org/presentationml/2006/main" xmlns:r="http://schemas.openxmlformats.org/officeDocument/2006/relationships">
+  <p:cSld>
+    <p:spTree>
+      <p:nvGrpSpPr>
+        <p:cNvPr id="1" name=""/>
+        <p:cNvGrpSpPr/>
+        <p:nvPr/>
+      </p:nvGrpSpPr>
+      <p:grpSpPr/>
+      <p:sp>
+        <p:nvSpPr>
+          <p:cNvPr id="2" name="TextBox 1"/>
+          <p:cNvSpPr txBox="1"/>
+          <p:nvPr/>
+        </p:nvSpPr>
+        <p:spPr>
+          <a:xfrm>
+            <a:off x="11155680" y="274320"/>
+            <a:ext cx="914400" cy="274320"/>
+          </a:xfrm>
+          <a:prstGeom prst="rect">
+            <a:avLst/>
+          </a:prstGeom>
+          <a:noFill/>
+        </p:spPr>
+        <p:txBody>
+          <a:bodyPr wrap="square" lIns="45720" rIns="45720" tIns="18288" bIns="18288" anchor="t">
+            <a:spAutoFit/>
+          </a:bodyPr>
+          <a:lstStyle/>
+          <a:p>
+            <a:pPr algn="r"/>
+            <a:r>
+              <a:rPr sz="800" b="1" i="0">
+                <a:solidFill>
+                  <a:srgbClr val="707070"/>
+                </a:solidFill>
+                <a:latin typeface="Calibri"/>
+              </a:rPr>
+              <a:t>JÖNKÖPING UNIVERSITY</a:t>
+            </a:r>
+          </a:p>
+        </p:txBody>
+      </p:sp>
+      <p:sp>
+        <p:nvSpPr>
+          <p:cNvPr id="3" name="Rectangle 2"/>
+          <p:cNvSpPr/>
+          <p:nvPr/>
+        </p:nvSpPr>
+        <p:spPr>
+          <a:xfrm>
+            <a:off x="457200" y="411480"/>
+            <a:ext cx="457200" cy="73152"/>
+          </a:xfrm>
+          <a:prstGeom prst="rect">
+            <a:avLst/>
+          </a:prstGeom>
+          <a:solidFill>
+            <a:srgbClr val="A9D6EF"/>
+          </a:solidFill>
+          <a:ln>
+            <a:noFill/>
+          </a:ln>
+        </p:spPr>
+        <p:style>
+          <a:lnRef idx="1">
+            <a:schemeClr val="accent1"/>
+          </a:lnRef>
+          <a:fillRef idx="3">
+            <a:schemeClr val="accent1"/>
+          </a:fillRef>
+          <a:effectRef idx="2">
+            <a:schemeClr val="accent1"/>
+          </a:effectRef>
+          <a:fontRef idx="minor">
+            <a:schemeClr val="lt1"/>
+          </a:fontRef>
+        </p:style>
+        <p:txBody>
+          <a:bodyPr rtlCol="0" anchor="ctr"/>
+          <a:lstStyle/>
+          <a:p>
+            <a:pPr algn="ctr"/>
+          </a:p>
+        </p:txBody>
+      </p:sp>
+      <p:sp>
+        <p:nvSpPr>
+          <p:cNvPr id="4" name="TextBox 3"/>
+          <p:cNvSpPr txBox="1"/>
+          <p:nvPr/>
+        </p:nvSpPr>
+        <p:spPr>
+          <a:xfrm>
+            <a:off x="457200" y="502920"/>
+            <a:ext cx="11430000" cy="822960"/>
+          </a:xfrm>
+          <a:prstGeom prst="rect">
+            <a:avLst/>
+          </a:prstGeom>
+          <a:noFill/>
+        </p:spPr>
+        <p:txBody>
+          <a:bodyPr wrap="square" lIns="45720" rIns="45720" tIns="18288" bIns="18288" anchor="t">
+            <a:spAutoFit/>
+          </a:bodyPr>
+          <a:lstStyle/>
+          <a:p>
+            <a:pPr algn="l"/>
+            <a:r>
+              <a:rPr sz="3000" b="0" i="0">
+                <a:solidFill>
+                  <a:srgbClr val="000000"/>
+                </a:solidFill>
+                <a:latin typeface="Calibri Light"/>
+              </a:rPr>
+              <a:t>PHASE 8.6.20: FRACTURE PATTERNS — 50 % vs 100 % INFILL (V5 &amp; V6)</a:t>
+            </a:r>
+          </a:p>
+        </p:txBody>
+      </p:sp>
+      <p:sp>
+        <p:nvSpPr>
+          <p:cNvPr id="5" name="TextBox 4"/>
+          <p:cNvSpPr txBox="1"/>
+          <p:nvPr/>
+        </p:nvSpPr>
+        <p:spPr>
+          <a:xfrm>
+            <a:off x="411480" y="1444752"/>
+            <a:ext cx="2651760" cy="292608"/>
+          </a:xfrm>
+          <a:prstGeom prst="rect">
+            <a:avLst/>
+          </a:prstGeom>
+          <a:noFill/>
+        </p:spPr>
+        <p:txBody>
+          <a:bodyPr wrap="square" lIns="45720" rIns="45720" tIns="18288" bIns="18288" anchor="t">
+            <a:spAutoFit/>
+          </a:bodyPr>
+          <a:lstStyle/>
+          <a:p>
+            <a:pPr algn="l"/>
+            <a:r>
+              <a:rPr sz="1200" b="1" i="0">
+                <a:solidFill>
+                  <a:srgbClr val="1F3F2F"/>
+                </a:solidFill>
+                <a:latin typeface="Calibri"/>
+              </a:rPr>
+              <a:t>FRACTURE — KEY FINDING</a:t>
+            </a:r>
+          </a:p>
+        </p:txBody>
+      </p:sp>
+      <p:sp>
+        <p:nvSpPr>
+          <p:cNvPr id="6" name="TextBox 5"/>
+          <p:cNvSpPr txBox="1"/>
+          <p:nvPr/>
+        </p:nvSpPr>
+        <p:spPr>
+          <a:xfrm>
+            <a:off x="411480" y="1810512"/>
+            <a:ext cx="2651760" cy="1554480"/>
+          </a:xfrm>
+          <a:prstGeom prst="rect">
+            <a:avLst/>
+          </a:prstGeom>
+          <a:noFill/>
+        </p:spPr>
+        <p:txBody>
+          <a:bodyPr wrap="square" lIns="45720" rIns="45720" tIns="18288" bIns="18288" anchor="t">
+            <a:spAutoFit/>
+          </a:bodyPr>
+          <a:lstStyle/>
+          <a:p>
+            <a:pPr algn="l"/>
+            <a:r>
+              <a:rPr sz="1100" b="0" i="0">
+                <a:solidFill>
+                  <a:srgbClr val="000000"/>
+                </a:solidFill>
+                <a:latin typeface="Calibri"/>
+              </a:rPr>
+              <a:t>All 8 specimens failed the SAME way — a flat, transverse break at the lower gauge–fillet (a stress concentration), with no necking = brittle FDM failure.
+Infill sets STRENGTH &amp; stiffness, NOT the failure mode.</a:t>
+            </a:r>
+          </a:p>
+        </p:txBody>
+      </p:sp>
+      <p:sp>
+        <p:nvSpPr>
+          <p:cNvPr id="7" name="TextBox 6"/>
+          <p:cNvSpPr txBox="1"/>
+          <p:nvPr/>
+        </p:nvSpPr>
+        <p:spPr>
+          <a:xfrm>
+            <a:off x="9098280" y="1444752"/>
+            <a:ext cx="2743200" cy="292608"/>
+          </a:xfrm>
+          <a:prstGeom prst="rect">
+            <a:avLst/>
+          </a:prstGeom>
+          <a:noFill/>
+        </p:spPr>
+        <p:txBody>
+          <a:bodyPr wrap="square" lIns="45720" rIns="45720" tIns="18288" bIns="18288" anchor="t">
+            <a:spAutoFit/>
+          </a:bodyPr>
+          <a:lstStyle/>
+          <a:p>
+            <a:pPr algn="l"/>
+            <a:r>
+              <a:rPr sz="1200" b="1" i="0">
+                <a:solidFill>
+                  <a:srgbClr val="1F3F2F"/>
+                </a:solidFill>
+                <a:latin typeface="Calibri"/>
+              </a:rPr>
+              <a:t>HOW TO READ</a:t>
+            </a:r>
+          </a:p>
+        </p:txBody>
+      </p:sp>
+      <p:sp>
+        <p:nvSpPr>
+          <p:cNvPr id="8" name="TextBox 7"/>
+          <p:cNvSpPr txBox="1"/>
+          <p:nvPr/>
+        </p:nvSpPr>
+        <p:spPr>
+          <a:xfrm>
+            <a:off x="9098280" y="1810512"/>
+            <a:ext cx="2743200" cy="1554480"/>
+          </a:xfrm>
+          <a:prstGeom prst="rect">
+            <a:avLst/>
+          </a:prstGeom>
+          <a:noFill/>
+        </p:spPr>
+        <p:txBody>
+          <a:bodyPr wrap="square" lIns="45720" rIns="45720" tIns="18288" bIns="18288" anchor="t">
+            <a:spAutoFit/>
+          </a:bodyPr>
+          <a:lstStyle/>
+          <a:p>
+            <a:pPr algn="l"/>
+            <a:r>
+              <a:rPr sz="1100" b="0" i="0">
+                <a:solidFill>
+                  <a:srgbClr val="000000"/>
+                </a:solidFill>
+                <a:latin typeface="Calibri"/>
+              </a:rPr>
+              <a:t>• 50 % faces expose the sparse infill ribs; 100 % faces are fully dense.
+• V6a = pilot (batch edge). V6c / V6e = ductile cluster (ε_f ≈ 7 %); the others ≈ 3–5 %.</a:t>
+            </a:r>
+          </a:p>
+        </p:txBody>
+      </p:sp>
+      <p:sp>
+        <p:nvSpPr>
+          <p:cNvPr id="9" name="TextBox 8"/>
+          <p:cNvSpPr txBox="1"/>
+          <p:nvPr/>
+        </p:nvSpPr>
+        <p:spPr>
+          <a:xfrm>
+            <a:off x="3242462" y="1417320"/>
+            <a:ext cx="5486400" cy="274320"/>
+          </a:xfrm>
+          <a:prstGeom prst="rect">
+            <a:avLst/>
+          </a:prstGeom>
+          <a:noFill/>
+        </p:spPr>
+        <p:txBody>
+          <a:bodyPr wrap="square" lIns="45720" rIns="45720" tIns="18288" bIns="18288" anchor="t">
+            <a:spAutoFit/>
+          </a:bodyPr>
+          <a:lstStyle/>
+          <a:p>
+            <a:pPr algn="l"/>
+            <a:r>
+              <a:rPr sz="1400" b="1" i="0">
+                <a:solidFill>
+                  <a:srgbClr val="1F5FA0"/>
+                </a:solidFill>
+                <a:latin typeface="Calibri"/>
+              </a:rPr>
+              <a:t>50 % INFILL — V5 group (LED off)</a:t>
+            </a:r>
+          </a:p>
+        </p:txBody>
+      </p:sp>
+      <p:pic>
+        <p:nvPicPr>
+          <p:cNvPr id="10" name="Picture 9" descr="S4.jpg"/>
+          <p:cNvPicPr>
+            <a:picLocks noChangeAspect="1"/>
+          </p:cNvPicPr>
+          <p:nvPr/>
+        </p:nvPicPr>
+        <p:blipFill>
+          <a:blip r:embed="rId2"/>
+          <a:srcRect t="38925" b="2000"/>
+          <a:stretch>
+            <a:fillRect/>
+          </a:stretch>
+        </p:blipFill>
+        <p:spPr>
+          <a:xfrm>
+            <a:off x="3242462" y="1691640"/>
+            <a:ext cx="1645920" cy="1728216"/>
+          </a:xfrm>
+          <a:prstGeom prst="rect">
+            <a:avLst/>
+          </a:prstGeom>
+          <a:ln w="15875">
+            <a:solidFill>
+              <a:srgbClr val="1F5FA0"/>
+            </a:solidFill>
+          </a:ln>
+        </p:spPr>
+      </p:pic>
+      <p:sp>
+        <p:nvSpPr>
+          <p:cNvPr id="11" name="TextBox 10"/>
+          <p:cNvSpPr txBox="1"/>
+          <p:nvPr/>
+        </p:nvSpPr>
+        <p:spPr>
+          <a:xfrm>
+            <a:off x="2968142" y="3429000"/>
+            <a:ext cx="2194560" cy="182880"/>
+          </a:xfrm>
+          <a:prstGeom prst="rect">
+            <a:avLst/>
+          </a:prstGeom>
+          <a:noFill/>
+        </p:spPr>
+        <p:txBody>
+          <a:bodyPr wrap="square" lIns="45720" rIns="45720" tIns="18288" bIns="18288" anchor="t">
+            <a:spAutoFit/>
+          </a:bodyPr>
+          <a:lstStyle/>
+          <a:p>
+            <a:pPr algn="ctr"/>
+            <a:r>
+              <a:rPr sz="1050" b="1" i="0">
+                <a:solidFill>
+                  <a:srgbClr val="1F5FA0"/>
+                </a:solidFill>
+                <a:latin typeface="Calibri"/>
+              </a:rPr>
+              <a:t>V5 · S4</a:t>
+            </a:r>
+          </a:p>
+        </p:txBody>
+      </p:sp>
+      <p:sp>
+        <p:nvSpPr>
+          <p:cNvPr id="12" name="TextBox 11"/>
+          <p:cNvSpPr txBox="1"/>
+          <p:nvPr/>
+        </p:nvSpPr>
+        <p:spPr>
+          <a:xfrm>
+            <a:off x="2968142" y="3611880"/>
+            <a:ext cx="2194560" cy="182880"/>
+          </a:xfrm>
+          <a:prstGeom prst="rect">
+            <a:avLst/>
+          </a:prstGeom>
+          <a:noFill/>
+        </p:spPr>
+        <p:txBody>
+          <a:bodyPr wrap="square" lIns="45720" rIns="45720" tIns="18288" bIns="18288" anchor="t">
+            <a:spAutoFit/>
+          </a:bodyPr>
+          <a:lstStyle/>
+          <a:p>
+            <a:pPr algn="ctr"/>
+            <a:r>
+              <a:rPr sz="950" b="0" i="0">
+                <a:solidFill>
+                  <a:srgbClr val="000000"/>
+                </a:solidFill>
+                <a:latin typeface="Calibri"/>
+              </a:rPr>
+              <a:t>22.1 MPa · ε_f 2.5 %</a:t>
+            </a:r>
+          </a:p>
+        </p:txBody>
+      </p:sp>
+      <p:pic>
+        <p:nvPicPr>
+          <p:cNvPr id="13" name="Picture 12" descr="S3(1).jpg"/>
+          <p:cNvPicPr>
+            <a:picLocks noChangeAspect="1"/>
+          </p:cNvPicPr>
+          <p:nvPr/>
+        </p:nvPicPr>
+        <p:blipFill>
+          <a:blip r:embed="rId3"/>
+          <a:srcRect t="38937" b="2000"/>
+          <a:stretch>
+            <a:fillRect/>
+          </a:stretch>
+        </p:blipFill>
+        <p:spPr>
+          <a:xfrm>
+            <a:off x="5272430" y="1691640"/>
+            <a:ext cx="1645920" cy="1728216"/>
+          </a:xfrm>
+          <a:prstGeom prst="rect">
+            <a:avLst/>
+          </a:prstGeom>
+          <a:ln w="15875">
+            <a:solidFill>
+              <a:srgbClr val="1F5FA0"/>
+            </a:solidFill>
+          </a:ln>
+        </p:spPr>
+      </p:pic>
+      <p:sp>
+        <p:nvSpPr>
+          <p:cNvPr id="14" name="TextBox 13"/>
+          <p:cNvSpPr txBox="1"/>
+          <p:nvPr/>
+        </p:nvSpPr>
+        <p:spPr>
+          <a:xfrm>
+            <a:off x="4998110" y="3429000"/>
+            <a:ext cx="2194560" cy="182880"/>
+          </a:xfrm>
+          <a:prstGeom prst="rect">
+            <a:avLst/>
+          </a:prstGeom>
+          <a:noFill/>
+        </p:spPr>
+        <p:txBody>
+          <a:bodyPr wrap="square" lIns="45720" rIns="45720" tIns="18288" bIns="18288" anchor="t">
+            <a:spAutoFit/>
+          </a:bodyPr>
+          <a:lstStyle/>
+          <a:p>
+            <a:pPr algn="ctr"/>
+            <a:r>
+              <a:rPr sz="1050" b="1" i="0">
+                <a:solidFill>
+                  <a:srgbClr val="1F5FA0"/>
+                </a:solidFill>
+                <a:latin typeface="Calibri"/>
+              </a:rPr>
+              <a:t>V5b · S3</a:t>
+            </a:r>
+          </a:p>
+        </p:txBody>
+      </p:sp>
+      <p:sp>
+        <p:nvSpPr>
+          <p:cNvPr id="15" name="TextBox 14"/>
+          <p:cNvSpPr txBox="1"/>
+          <p:nvPr/>
+        </p:nvSpPr>
+        <p:spPr>
+          <a:xfrm>
+            <a:off x="4998110" y="3611880"/>
+            <a:ext cx="2194560" cy="182880"/>
+          </a:xfrm>
+          <a:prstGeom prst="rect">
+            <a:avLst/>
+          </a:prstGeom>
+          <a:noFill/>
+        </p:spPr>
+        <p:txBody>
+          <a:bodyPr wrap="square" lIns="45720" rIns="45720" tIns="18288" bIns="18288" anchor="t">
+            <a:spAutoFit/>
+          </a:bodyPr>
+          <a:lstStyle/>
+          <a:p>
+            <a:pPr algn="ctr"/>
+            <a:r>
+              <a:rPr sz="950" b="0" i="0">
+                <a:solidFill>
+                  <a:srgbClr val="000000"/>
+                </a:solidFill>
+                <a:latin typeface="Calibri"/>
+              </a:rPr>
+              <a:t>22.0 MPa · ε_f 2.6 %</a:t>
+            </a:r>
+          </a:p>
+        </p:txBody>
+      </p:sp>
+      <p:pic>
+        <p:nvPicPr>
+          <p:cNvPr id="16" name="Picture 15" descr="S2_2 (1).jpg"/>
+          <p:cNvPicPr>
+            <a:picLocks noChangeAspect="1"/>
+          </p:cNvPicPr>
+          <p:nvPr/>
+        </p:nvPicPr>
+        <p:blipFill>
+          <a:blip r:embed="rId4"/>
+          <a:srcRect t="38937" b="2000"/>
+          <a:stretch>
+            <a:fillRect/>
+          </a:stretch>
+        </p:blipFill>
+        <p:spPr>
+          <a:xfrm>
+            <a:off x="7302398" y="1691640"/>
+            <a:ext cx="1645920" cy="1728216"/>
+          </a:xfrm>
+          <a:prstGeom prst="rect">
+            <a:avLst/>
+          </a:prstGeom>
+          <a:ln w="15875">
+            <a:solidFill>
+              <a:srgbClr val="1F5FA0"/>
+            </a:solidFill>
+          </a:ln>
+        </p:spPr>
+      </p:pic>
+      <p:sp>
+        <p:nvSpPr>
+          <p:cNvPr id="17" name="TextBox 16"/>
+          <p:cNvSpPr txBox="1"/>
+          <p:nvPr/>
+        </p:nvSpPr>
+        <p:spPr>
+          <a:xfrm>
+            <a:off x="7028078" y="3429000"/>
+            <a:ext cx="2194560" cy="182880"/>
+          </a:xfrm>
+          <a:prstGeom prst="rect">
+            <a:avLst/>
+          </a:prstGeom>
+          <a:noFill/>
+        </p:spPr>
+        <p:txBody>
+          <a:bodyPr wrap="square" lIns="45720" rIns="45720" tIns="18288" bIns="18288" anchor="t">
+            <a:spAutoFit/>
+          </a:bodyPr>
+          <a:lstStyle/>
+          <a:p>
+            <a:pPr algn="ctr"/>
+            <a:r>
+              <a:rPr sz="1050" b="1" i="0">
+                <a:solidFill>
+                  <a:srgbClr val="1F5FA0"/>
+                </a:solidFill>
+                <a:latin typeface="Calibri"/>
+              </a:rPr>
+              <a:t>V5c · S2</a:t>
+            </a:r>
+          </a:p>
+        </p:txBody>
+      </p:sp>
+      <p:sp>
+        <p:nvSpPr>
+          <p:cNvPr id="18" name="TextBox 17"/>
+          <p:cNvSpPr txBox="1"/>
+          <p:nvPr/>
+        </p:nvSpPr>
+        <p:spPr>
+          <a:xfrm>
+            <a:off x="7028078" y="3611880"/>
+            <a:ext cx="2194560" cy="182880"/>
+          </a:xfrm>
+          <a:prstGeom prst="rect">
+            <a:avLst/>
+          </a:prstGeom>
+          <a:noFill/>
+        </p:spPr>
+        <p:txBody>
+          <a:bodyPr wrap="square" lIns="45720" rIns="45720" tIns="18288" bIns="18288" anchor="t">
+            <a:spAutoFit/>
+          </a:bodyPr>
+          <a:lstStyle/>
+          <a:p>
+            <a:pPr algn="ctr"/>
+            <a:r>
+              <a:rPr sz="950" b="0" i="0">
+                <a:solidFill>
+                  <a:srgbClr val="000000"/>
+                </a:solidFill>
+                <a:latin typeface="Calibri"/>
+              </a:rPr>
+              <a:t>22.0 MPa · ε_f 3.1 %</a:t>
+            </a:r>
+          </a:p>
+        </p:txBody>
+      </p:sp>
+      <p:sp>
+        <p:nvSpPr>
+          <p:cNvPr id="19" name="TextBox 18"/>
+          <p:cNvSpPr txBox="1"/>
+          <p:nvPr/>
+        </p:nvSpPr>
+        <p:spPr>
+          <a:xfrm>
+            <a:off x="914400" y="3840480"/>
+            <a:ext cx="7315200" cy="274320"/>
+          </a:xfrm>
+          <a:prstGeom prst="rect">
+            <a:avLst/>
+          </a:prstGeom>
+          <a:noFill/>
+        </p:spPr>
+        <p:txBody>
+          <a:bodyPr wrap="square" lIns="45720" rIns="45720" tIns="18288" bIns="18288" anchor="t">
+            <a:spAutoFit/>
+          </a:bodyPr>
+          <a:lstStyle/>
+          <a:p>
+            <a:pPr algn="l"/>
+            <a:r>
+              <a:rPr sz="1400" b="1" i="0">
+                <a:solidFill>
+                  <a:srgbClr val="C00000"/>
+                </a:solidFill>
+                <a:latin typeface="Calibri"/>
+              </a:rPr>
+              <a:t>100 % INFILL — V6 quintet (LED on)</a:t>
+            </a:r>
+          </a:p>
+        </p:txBody>
+      </p:sp>
+      <p:pic>
+        <p:nvPicPr>
+          <p:cNvPr id="20" name="Picture 19" descr="S7(1).jpg"/>
+          <p:cNvPicPr>
+            <a:picLocks noChangeAspect="1"/>
+          </p:cNvPicPr>
+          <p:nvPr/>
+        </p:nvPicPr>
+        <p:blipFill>
+          <a:blip r:embed="rId5"/>
+          <a:srcRect t="38925" b="2000"/>
+          <a:stretch>
+            <a:fillRect/>
+          </a:stretch>
+        </p:blipFill>
+        <p:spPr>
+          <a:xfrm>
+            <a:off x="1212494" y="4133087"/>
+            <a:ext cx="1645920" cy="1728216"/>
+          </a:xfrm>
+          <a:prstGeom prst="rect">
+            <a:avLst/>
+          </a:prstGeom>
+          <a:ln w="15875">
+            <a:solidFill>
+              <a:srgbClr val="C00000"/>
+            </a:solidFill>
+          </a:ln>
+        </p:spPr>
+      </p:pic>
+      <p:sp>
+        <p:nvSpPr>
+          <p:cNvPr id="21" name="TextBox 20"/>
+          <p:cNvSpPr txBox="1"/>
+          <p:nvPr/>
+        </p:nvSpPr>
+        <p:spPr>
+          <a:xfrm>
+            <a:off x="938174" y="5870448"/>
+            <a:ext cx="2194560" cy="182880"/>
+          </a:xfrm>
+          <a:prstGeom prst="rect">
+            <a:avLst/>
+          </a:prstGeom>
+          <a:noFill/>
+        </p:spPr>
+        <p:txBody>
+          <a:bodyPr wrap="square" lIns="45720" rIns="45720" tIns="18288" bIns="18288" anchor="t">
+            <a:spAutoFit/>
+          </a:bodyPr>
+          <a:lstStyle/>
+          <a:p>
+            <a:pPr algn="ctr"/>
+            <a:r>
+              <a:rPr sz="1050" b="1" i="0">
+                <a:solidFill>
+                  <a:srgbClr val="C00000"/>
+                </a:solidFill>
+                <a:latin typeface="Calibri"/>
+              </a:rPr>
+              <a:t>V6a · S7  (pilot)</a:t>
+            </a:r>
+          </a:p>
+        </p:txBody>
+      </p:sp>
+      <p:sp>
+        <p:nvSpPr>
+          <p:cNvPr id="22" name="TextBox 21"/>
+          <p:cNvSpPr txBox="1"/>
+          <p:nvPr/>
+        </p:nvSpPr>
+        <p:spPr>
+          <a:xfrm>
+            <a:off x="938174" y="6053328"/>
+            <a:ext cx="2194560" cy="182880"/>
+          </a:xfrm>
+          <a:prstGeom prst="rect">
+            <a:avLst/>
+          </a:prstGeom>
+          <a:noFill/>
+        </p:spPr>
+        <p:txBody>
+          <a:bodyPr wrap="square" lIns="45720" rIns="45720" tIns="18288" bIns="18288" anchor="t">
+            <a:spAutoFit/>
+          </a:bodyPr>
+          <a:lstStyle/>
+          <a:p>
+            <a:pPr algn="ctr"/>
+            <a:r>
+              <a:rPr sz="950" b="0" i="0">
+                <a:solidFill>
+                  <a:srgbClr val="000000"/>
+                </a:solidFill>
+                <a:latin typeface="Calibri"/>
+              </a:rPr>
+              <a:t>47.8 MPa · ε_f 3.0 %</a:t>
+            </a:r>
+          </a:p>
+        </p:txBody>
+      </p:sp>
+      <p:pic>
+        <p:nvPicPr>
+          <p:cNvPr id="23" name="Picture 22" descr="S8 (1).jpg"/>
+          <p:cNvPicPr>
+            <a:picLocks noChangeAspect="1"/>
+          </p:cNvPicPr>
+          <p:nvPr/>
+        </p:nvPicPr>
+        <p:blipFill>
+          <a:blip r:embed="rId6"/>
+          <a:srcRect t="39780" b="2000"/>
+          <a:stretch>
+            <a:fillRect/>
+          </a:stretch>
+        </p:blipFill>
+        <p:spPr>
+          <a:xfrm>
+            <a:off x="3242462" y="4133087"/>
+            <a:ext cx="1645920" cy="1728216"/>
+          </a:xfrm>
+          <a:prstGeom prst="rect">
+            <a:avLst/>
+          </a:prstGeom>
+          <a:ln w="15875">
+            <a:solidFill>
+              <a:srgbClr val="C00000"/>
+            </a:solidFill>
+          </a:ln>
+        </p:spPr>
+      </p:pic>
+      <p:sp>
+        <p:nvSpPr>
+          <p:cNvPr id="24" name="TextBox 23"/>
+          <p:cNvSpPr txBox="1"/>
+          <p:nvPr/>
+        </p:nvSpPr>
+        <p:spPr>
+          <a:xfrm>
+            <a:off x="2968142" y="5870448"/>
+            <a:ext cx="2194560" cy="182880"/>
+          </a:xfrm>
+          <a:prstGeom prst="rect">
+            <a:avLst/>
+          </a:prstGeom>
+          <a:noFill/>
+        </p:spPr>
+        <p:txBody>
+          <a:bodyPr wrap="square" lIns="45720" rIns="45720" tIns="18288" bIns="18288" anchor="t">
+            <a:spAutoFit/>
+          </a:bodyPr>
+          <a:lstStyle/>
+          <a:p>
+            <a:pPr algn="ctr"/>
+            <a:r>
+              <a:rPr sz="1050" b="1" i="0">
+                <a:solidFill>
+                  <a:srgbClr val="C00000"/>
+                </a:solidFill>
+                <a:latin typeface="Calibri"/>
+              </a:rPr>
+              <a:t>V6b · S8</a:t>
+            </a:r>
+          </a:p>
+        </p:txBody>
+      </p:sp>
+      <p:sp>
+        <p:nvSpPr>
+          <p:cNvPr id="25" name="TextBox 24"/>
+          <p:cNvSpPr txBox="1"/>
+          <p:nvPr/>
+        </p:nvSpPr>
+        <p:spPr>
+          <a:xfrm>
+            <a:off x="2968142" y="6053328"/>
+            <a:ext cx="2194560" cy="182880"/>
+          </a:xfrm>
+          <a:prstGeom prst="rect">
+            <a:avLst/>
+          </a:prstGeom>
+          <a:noFill/>
+        </p:spPr>
+        <p:txBody>
+          <a:bodyPr wrap="square" lIns="45720" rIns="45720" tIns="18288" bIns="18288" anchor="t">
+            <a:spAutoFit/>
+          </a:bodyPr>
+          <a:lstStyle/>
+          <a:p>
+            <a:pPr algn="ctr"/>
+            <a:r>
+              <a:rPr sz="950" b="0" i="0">
+                <a:solidFill>
+                  <a:srgbClr val="000000"/>
+                </a:solidFill>
+                <a:latin typeface="Calibri"/>
+              </a:rPr>
+              <a:t>44.8 MPa · ε_f 5.2 %</a:t>
+            </a:r>
+          </a:p>
+        </p:txBody>
+      </p:sp>
+      <p:pic>
+        <p:nvPicPr>
+          <p:cNvPr id="26" name="Picture 25" descr="S10 (1).jpg"/>
+          <p:cNvPicPr>
+            <a:picLocks noChangeAspect="1"/>
+          </p:cNvPicPr>
+          <p:nvPr/>
+        </p:nvPicPr>
+        <p:blipFill>
+          <a:blip r:embed="rId7"/>
+          <a:srcRect t="35346" b="2000"/>
+          <a:stretch>
+            <a:fillRect/>
+          </a:stretch>
+        </p:blipFill>
+        <p:spPr>
+          <a:xfrm>
+            <a:off x="5272430" y="4133087"/>
+            <a:ext cx="1645920" cy="1728216"/>
+          </a:xfrm>
+          <a:prstGeom prst="rect">
+            <a:avLst/>
+          </a:prstGeom>
+          <a:ln w="15875">
+            <a:solidFill>
+              <a:srgbClr val="C00000"/>
+            </a:solidFill>
+          </a:ln>
+        </p:spPr>
+      </p:pic>
+      <p:sp>
+        <p:nvSpPr>
+          <p:cNvPr id="27" name="TextBox 26"/>
+          <p:cNvSpPr txBox="1"/>
+          <p:nvPr/>
+        </p:nvSpPr>
+        <p:spPr>
+          <a:xfrm>
+            <a:off x="4998110" y="5870448"/>
+            <a:ext cx="2194560" cy="182880"/>
+          </a:xfrm>
+          <a:prstGeom prst="rect">
+            <a:avLst/>
+          </a:prstGeom>
+          <a:noFill/>
+        </p:spPr>
+        <p:txBody>
+          <a:bodyPr wrap="square" lIns="45720" rIns="45720" tIns="18288" bIns="18288" anchor="t">
+            <a:spAutoFit/>
+          </a:bodyPr>
+          <a:lstStyle/>
+          <a:p>
+            <a:pPr algn="ctr"/>
+            <a:r>
+              <a:rPr sz="1050" b="1" i="0">
+                <a:solidFill>
+                  <a:srgbClr val="C00000"/>
+                </a:solidFill>
+                <a:latin typeface="Calibri"/>
+              </a:rPr>
+              <a:t>V6c · S10  (ductile)</a:t>
+            </a:r>
+          </a:p>
+        </p:txBody>
+      </p:sp>
+      <p:sp>
+        <p:nvSpPr>
+          <p:cNvPr id="28" name="TextBox 27"/>
+          <p:cNvSpPr txBox="1"/>
+          <p:nvPr/>
+        </p:nvSpPr>
+        <p:spPr>
+          <a:xfrm>
+            <a:off x="4998110" y="6053328"/>
+            <a:ext cx="2194560" cy="182880"/>
+          </a:xfrm>
+          <a:prstGeom prst="rect">
+            <a:avLst/>
+          </a:prstGeom>
+          <a:noFill/>
+        </p:spPr>
+        <p:txBody>
+          <a:bodyPr wrap="square" lIns="45720" rIns="45720" tIns="18288" bIns="18288" anchor="t">
+            <a:spAutoFit/>
+          </a:bodyPr>
+          <a:lstStyle/>
+          <a:p>
+            <a:pPr algn="ctr"/>
+            <a:r>
+              <a:rPr sz="950" b="0" i="0">
+                <a:solidFill>
+                  <a:srgbClr val="000000"/>
+                </a:solidFill>
+                <a:latin typeface="Calibri"/>
+              </a:rPr>
+              <a:t>46.8 MPa · ε_f 7.3 %</a:t>
+            </a:r>
+          </a:p>
+        </p:txBody>
+      </p:sp>
+      <p:pic>
+        <p:nvPicPr>
+          <p:cNvPr id="29" name="Picture 28" descr="S11 (1).jpg"/>
+          <p:cNvPicPr>
+            <a:picLocks noChangeAspect="1"/>
+          </p:cNvPicPr>
+          <p:nvPr/>
+        </p:nvPicPr>
+        <p:blipFill>
+          <a:blip r:embed="rId8"/>
+          <a:srcRect t="31023" b="2000"/>
+          <a:stretch>
+            <a:fillRect/>
+          </a:stretch>
+        </p:blipFill>
+        <p:spPr>
+          <a:xfrm>
+            <a:off x="7302398" y="4133087"/>
+            <a:ext cx="1645920" cy="1728216"/>
+          </a:xfrm>
+          <a:prstGeom prst="rect">
+            <a:avLst/>
+          </a:prstGeom>
+          <a:ln w="15875">
+            <a:solidFill>
+              <a:srgbClr val="C00000"/>
+            </a:solidFill>
+          </a:ln>
+        </p:spPr>
+      </p:pic>
+      <p:sp>
+        <p:nvSpPr>
+          <p:cNvPr id="30" name="TextBox 29"/>
+          <p:cNvSpPr txBox="1"/>
+          <p:nvPr/>
+        </p:nvSpPr>
+        <p:spPr>
+          <a:xfrm>
+            <a:off x="7028078" y="5870448"/>
+            <a:ext cx="2194560" cy="182880"/>
+          </a:xfrm>
+          <a:prstGeom prst="rect">
+            <a:avLst/>
+          </a:prstGeom>
+          <a:noFill/>
+        </p:spPr>
+        <p:txBody>
+          <a:bodyPr wrap="square" lIns="45720" rIns="45720" tIns="18288" bIns="18288" anchor="t">
+            <a:spAutoFit/>
+          </a:bodyPr>
+          <a:lstStyle/>
+          <a:p>
+            <a:pPr algn="ctr"/>
+            <a:r>
+              <a:rPr sz="1050" b="1" i="0">
+                <a:solidFill>
+                  <a:srgbClr val="C00000"/>
+                </a:solidFill>
+                <a:latin typeface="Calibri"/>
+              </a:rPr>
+              <a:t>V6d · S11</a:t>
+            </a:r>
+          </a:p>
+        </p:txBody>
+      </p:sp>
+      <p:sp>
+        <p:nvSpPr>
+          <p:cNvPr id="31" name="TextBox 30"/>
+          <p:cNvSpPr txBox="1"/>
+          <p:nvPr/>
+        </p:nvSpPr>
+        <p:spPr>
+          <a:xfrm>
+            <a:off x="7028078" y="6053328"/>
+            <a:ext cx="2194560" cy="182880"/>
+          </a:xfrm>
+          <a:prstGeom prst="rect">
+            <a:avLst/>
+          </a:prstGeom>
+          <a:noFill/>
+        </p:spPr>
+        <p:txBody>
+          <a:bodyPr wrap="square" lIns="45720" rIns="45720" tIns="18288" bIns="18288" anchor="t">
+            <a:spAutoFit/>
+          </a:bodyPr>
+          <a:lstStyle/>
+          <a:p>
+            <a:pPr algn="ctr"/>
+            <a:r>
+              <a:rPr sz="950" b="0" i="0">
+                <a:solidFill>
+                  <a:srgbClr val="000000"/>
+                </a:solidFill>
+                <a:latin typeface="Calibri"/>
+              </a:rPr>
+              <a:t>46.1 MPa · ε_f 5.0 %</a:t>
+            </a:r>
+          </a:p>
+        </p:txBody>
+      </p:sp>
+      <p:pic>
+        <p:nvPicPr>
+          <p:cNvPr id="32" name="Picture 31" descr="S9 (1).jpg"/>
+          <p:cNvPicPr>
+            <a:picLocks noChangeAspect="1"/>
+          </p:cNvPicPr>
+          <p:nvPr/>
+        </p:nvPicPr>
+        <p:blipFill>
+          <a:blip r:embed="rId9"/>
+          <a:srcRect t="31084" b="2000"/>
+          <a:stretch>
+            <a:fillRect/>
+          </a:stretch>
+        </p:blipFill>
+        <p:spPr>
+          <a:xfrm>
+            <a:off x="9332366" y="4133087"/>
+            <a:ext cx="1645920" cy="1728216"/>
+          </a:xfrm>
+          <a:prstGeom prst="rect">
+            <a:avLst/>
+          </a:prstGeom>
+          <a:ln w="15875">
+            <a:solidFill>
+              <a:srgbClr val="C00000"/>
+            </a:solidFill>
+          </a:ln>
+        </p:spPr>
+      </p:pic>
+      <p:sp>
+        <p:nvSpPr>
+          <p:cNvPr id="33" name="TextBox 32"/>
+          <p:cNvSpPr txBox="1"/>
+          <p:nvPr/>
+        </p:nvSpPr>
+        <p:spPr>
+          <a:xfrm>
+            <a:off x="9058046" y="5870448"/>
+            <a:ext cx="2194560" cy="182880"/>
+          </a:xfrm>
+          <a:prstGeom prst="rect">
+            <a:avLst/>
+          </a:prstGeom>
+          <a:noFill/>
+        </p:spPr>
+        <p:txBody>
+          <a:bodyPr wrap="square" lIns="45720" rIns="45720" tIns="18288" bIns="18288" anchor="t">
+            <a:spAutoFit/>
+          </a:bodyPr>
+          <a:lstStyle/>
+          <a:p>
+            <a:pPr algn="ctr"/>
+            <a:r>
+              <a:rPr sz="1050" b="1" i="0">
+                <a:solidFill>
+                  <a:srgbClr val="C00000"/>
+                </a:solidFill>
+                <a:latin typeface="Calibri"/>
+              </a:rPr>
+              <a:t>V6e · S9  (ductile)</a:t>
+            </a:r>
+          </a:p>
+        </p:txBody>
+      </p:sp>
+      <p:sp>
+        <p:nvSpPr>
+          <p:cNvPr id="34" name="TextBox 33"/>
+          <p:cNvSpPr txBox="1"/>
+          <p:nvPr/>
+        </p:nvSpPr>
+        <p:spPr>
+          <a:xfrm>
+            <a:off x="9058046" y="6053328"/>
+            <a:ext cx="2194560" cy="182880"/>
+          </a:xfrm>
+          <a:prstGeom prst="rect">
+            <a:avLst/>
+          </a:prstGeom>
+          <a:noFill/>
+        </p:spPr>
+        <p:txBody>
+          <a:bodyPr wrap="square" lIns="45720" rIns="45720" tIns="18288" bIns="18288" anchor="t">
+            <a:spAutoFit/>
+          </a:bodyPr>
+          <a:lstStyle/>
+          <a:p>
+            <a:pPr algn="ctr"/>
+            <a:r>
+              <a:rPr sz="950" b="0" i="0">
+                <a:solidFill>
+                  <a:srgbClr val="000000"/>
+                </a:solidFill>
+                <a:latin typeface="Calibri"/>
+              </a:rPr>
+              <a:t>45.5 MPa · ε_f 7.4 %</a:t>
+            </a:r>
+          </a:p>
+        </p:txBody>
+      </p:sp>
+      <p:sp>
+        <p:nvSpPr>
+          <p:cNvPr id="35" name="TextBox 34"/>
+          <p:cNvSpPr txBox="1"/>
+          <p:nvPr/>
+        </p:nvSpPr>
+        <p:spPr>
+          <a:xfrm>
+            <a:off x="548640" y="6400800"/>
+            <a:ext cx="11064240" cy="365760"/>
+          </a:xfrm>
+          <a:prstGeom prst="rect">
+            <a:avLst/>
+          </a:prstGeom>
+          <a:noFill/>
+        </p:spPr>
+        <p:txBody>
+          <a:bodyPr wrap="square" lIns="45720" rIns="45720" tIns="18288" bIns="18288" anchor="t">
+            <a:spAutoFit/>
+          </a:bodyPr>
+          <a:lstStyle/>
+          <a:p>
+            <a:pPr algn="l"/>
+            <a:r>
+              <a:rPr sz="1200" b="0" i="1">
+                <a:solidFill>
+                  <a:srgbClr val="707070"/>
+                </a:solidFill>
+                <a:latin typeface="Calibri"/>
+              </a:rPr>
+              <a:t>Each specimen photo is an individually placed, croppable picture (…/8.6.20 - Tensile test to Failure/Specimen_S*/). Labels = measured UTS · ε_f. Reset crop in PowerPoint to see the full specimen.</a:t>
+            </a:r>
+          </a:p>
+        </p:txBody>
+      </p:sp>
+      <p:sp>
+        <p:nvSpPr>
+          <p:cNvPr id="36" name="TextBox 35"/>
+          <p:cNvSpPr txBox="1"/>
+          <p:nvPr/>
+        </p:nvSpPr>
+        <p:spPr>
+          <a:xfrm>
+            <a:off x="457200" y="6446520"/>
+            <a:ext cx="640080" cy="274320"/>
+          </a:xfrm>
+          <a:prstGeom prst="rect">
+            <a:avLst/>
+          </a:prstGeom>
+          <a:noFill/>
+        </p:spPr>
+        <p:txBody>
+          <a:bodyPr wrap="square" lIns="45720" rIns="45720" tIns="18288" bIns="18288" anchor="t">
+            <a:spAutoFit/>
+          </a:bodyPr>
+          <a:lstStyle/>
+          <a:p>
+            <a:pPr algn="l"/>
+            <a:r>
+              <a:rPr sz="1000" b="0" i="0">
+                <a:solidFill>
+                  <a:srgbClr val="707070"/>
+                </a:solidFill>
+                <a:latin typeface="Calibri"/>
+              </a:rPr>
+              <a:t>161</a:t>
             </a:r>
           </a:p>
         </p:txBody>
@@ -12535,7 +17542,7 @@
                 </a:solidFill>
                 <a:latin typeface="Calibri"/>
               </a:rPr>
-              <a:t>Journal reference (Chacón 2017). Also validated against the add:north E-PLA datasheet — see the 'add:north PLA reference' slide (p. 156).</a:t>
+              <a:t>Pilot V6a values (batch strength/modulus edge). Representative n = 5 validation on pp. 158 &amp; 160. Journal ref Chacón (2017); add:north datasheet on p. 156.</a:t>
             </a:r>
           </a:p>
         </p:txBody>

--- a/V6a_8_6_20_slides.pptx
+++ b/V6a_8_6_20_slides.pptx
@@ -26,6 +26,7 @@
     <p:sldId id="274" r:id="rId25"/>
     <p:sldId id="275" r:id="rId26"/>
     <p:sldId id="276" r:id="rId27"/>
+    <p:sldId id="277" r:id="rId28"/>
   </p:sldIdLst>
   <p:sldSz cx="12191695" cy="6858000" type="screen4x3"/>
   <p:notesSz cx="6858000" cy="9144000"/>
@@ -7598,7 +7599,7 @@
                 </a:solidFill>
                 <a:latin typeface="Calibri Light"/>
               </a:rPr>
-              <a:t>V6a: A SINGLE COMMON OFFSET FACTOR?</a:t>
+              <a:t>V6 (n = 5): A SINGLE COMMON OFFSET FACTOR?</a:t>
             </a:r>
           </a:p>
         </p:txBody>
@@ -7657,7 +7658,7 @@
                 </a:solidFill>
                 <a:latin typeface="Calibri"/>
               </a:rPr>
-              <a:t>Same interval method as V5</a:t>
+              <a:t>Same interval method as V5 · from n = 5 mean</a:t>
             </a:r>
           </a:p>
         </p:txBody>
@@ -7765,7 +7766,7 @@
                           </a:solidFill>
                           <a:latin typeface="Calibri"/>
                         </a:rPr>
-                        <a:t>[1.24, 2.28]</a:t>
+                        <a:t>[1.15, 2.12]</a:t>
                       </a:r>
                     </a:p>
                   </a:txBody>
@@ -7805,7 +7806,7 @@
                           </a:solidFill>
                           <a:latin typeface="Calibri"/>
                         </a:rPr>
-                        <a:t>[0.63, 1.05]</a:t>
+                        <a:t>[0.67, 1.11]</a:t>
                       </a:r>
                     </a:p>
                   </a:txBody>
@@ -7845,7 +7846,7 @@
                           </a:solidFill>
                           <a:latin typeface="Calibri"/>
                         </a:rPr>
-                        <a:t>[0.67, 1.25]</a:t>
+                        <a:t>[0.69, 1.30]</a:t>
                       </a:r>
                     </a:p>
                   </a:txBody>
@@ -7937,7 +7938,7 @@
                           </a:solidFill>
                           <a:latin typeface="Calibri"/>
                         </a:rPr>
-                        <a:t>[0.67, 1.05]</a:t>
+                        <a:t>[0.69, 1.11]</a:t>
                       </a:r>
                     </a:p>
                   </a:txBody>
@@ -8034,7 +8035,7 @@
                 </a:solidFill>
                 <a:latin typeface="Calibri"/>
               </a:rPr>
-              <a:t>STRENGTH: a single uniform factor works — k ∈ [0.67, 1.05] and k = 1 sits inside it ⇒ apply k = 1.0 (no knock-down) to σ_y and UTS at 100 % infill.</a:t>
+              <a:t>STRENGTH: a single uniform factor works — k ∈ [0.69, 1.11] and k = 1 sits inside it ⇒ apply k = 1.0 (no knock-down) to σ_y and UTS at 100 % infill.</a:t>
             </a:r>
           </a:p>
         </p:txBody>
@@ -8086,7 +8087,7 @@
                 </a:solidFill>
                 <a:latin typeface="Calibri"/>
               </a:rPr>
-              <a:t>No single ALL-property k: E reads low (needs ≥1.24 — rig-compliance-limited) while in-range σ_y caps k ≤ 1.05 → they pull opposite ways. Treat E separately.   (Contrast V5: a common k ≈ 2.4 existed.)</a:t>
+              <a:t>No single ALL-property k: E reads ~13 % low (needs k ≥ 1.15) while in-range σ_y caps k ≤ 1.11 → they pull opposite ways, but only by 0.04. Treat E separately.   (Contrast V5: a common k ≈ 2.4 existed.)</a:t>
             </a:r>
           </a:p>
         </p:txBody>
@@ -8252,7 +8253,7 @@
                 </a:solidFill>
                 <a:latin typeface="Calibri Light"/>
               </a:rPr>
-              <a:t>PHASE 8.6.20 V6a: VALIDATION — add:north PLA REFERENCE</a:t>
+              <a:t>PHASE 8.6.20 V6 (n = 5): VALIDATION — add:north PLA REFERENCE</a:t>
             </a:r>
           </a:p>
         </p:txBody>
@@ -8287,7 +8288,7 @@
                 </a:solidFill>
                 <a:latin typeface="Calibri"/>
               </a:rPr>
-              <a:t>add:north E-PLA datasheet (ISO 527 / 178) vs measured — k = spec / measured</a:t>
+              <a:t>add:north E-PLA datasheet (ISO 527 / 178) vs measured n = 5 mean — k = spec / measured</a:t>
             </a:r>
           </a:p>
         </p:txBody>
@@ -8401,7 +8402,7 @@
                           </a:solidFill>
                           <a:latin typeface="Calibri"/>
                         </a:rPr>
-                        <a:t>V6a 100 %</a:t>
+                        <a:t>V6 (n=5)</a:t>
                       </a:r>
                     </a:p>
                   </a:txBody>
@@ -8541,7 +8542,7 @@
                           </a:solidFill>
                           <a:latin typeface="Calibri"/>
                         </a:rPr>
-                        <a:t>47.8 MPa</a:t>
+                        <a:t>45.0 MPa</a:t>
                       </a:r>
                     </a:p>
                   </a:txBody>
@@ -8564,7 +8565,7 @@
                           </a:solidFill>
                           <a:latin typeface="Calibri"/>
                         </a:rPr>
-                        <a:t>1.21</a:t>
+                        <a:t>1.29</a:t>
                       </a:r>
                     </a:p>
                   </a:txBody>
@@ -8587,7 +8588,7 @@
                           </a:solidFill>
                           <a:latin typeface="Calibri"/>
                         </a:rPr>
-                        <a:t>82 %</a:t>
+                        <a:t>78 %</a:t>
                       </a:r>
                     </a:p>
                   </a:txBody>
@@ -8681,7 +8682,7 @@
                           </a:solidFill>
                           <a:latin typeface="Calibri"/>
                         </a:rPr>
-                        <a:t>47.8 MPa</a:t>
+                        <a:t>46.2 MPa</a:t>
                       </a:r>
                     </a:p>
                   </a:txBody>
@@ -8704,7 +8705,7 @@
                           </a:solidFill>
                           <a:latin typeface="Calibri"/>
                         </a:rPr>
-                        <a:t>1.21</a:t>
+                        <a:t>1.26</a:t>
                       </a:r>
                     </a:p>
                   </a:txBody>
@@ -8727,7 +8728,7 @@
                           </a:solidFill>
                           <a:latin typeface="Calibri"/>
                         </a:rPr>
-                        <a:t>82 %</a:t>
+                        <a:t>80 %</a:t>
                       </a:r>
                     </a:p>
                   </a:txBody>
@@ -8821,7 +8822,7 @@
                           </a:solidFill>
                           <a:latin typeface="Calibri"/>
                         </a:rPr>
-                        <a:t>2.41 GPa</a:t>
+                        <a:t>2.60 GPa</a:t>
                       </a:r>
                     </a:p>
                   </a:txBody>
@@ -8844,7 +8845,7 @@
                           </a:solidFill>
                           <a:latin typeface="Calibri"/>
                         </a:rPr>
-                        <a:t>1.19</a:t>
+                        <a:t>1.10</a:t>
                       </a:r>
                     </a:p>
                   </a:txBody>
@@ -8867,7 +8868,7 @@
                           </a:solidFill>
                           <a:latin typeface="Calibri"/>
                         </a:rPr>
-                        <a:t>84 %</a:t>
+                        <a:t>91 %</a:t>
                       </a:r>
                     </a:p>
                   </a:txBody>
@@ -8961,7 +8962,7 @@
                           </a:solidFill>
                           <a:latin typeface="Calibri"/>
                         </a:rPr>
-                        <a:t>3.0 %</a:t>
+                        <a:t>3–7 %</a:t>
                       </a:r>
                     </a:p>
                   </a:txBody>
@@ -8984,7 +8985,7 @@
                           </a:solidFill>
                           <a:latin typeface="Calibri"/>
                         </a:rPr>
-                        <a:t>2.68</a:t>
+                        <a:t>1.1–2.7</a:t>
                       </a:r>
                     </a:p>
                   </a:txBody>
@@ -9007,7 +9008,7 @@
                           </a:solidFill>
                           <a:latin typeface="Calibri"/>
                         </a:rPr>
-                        <a:t>37 %</a:t>
+                        <a:t>37–93 %</a:t>
                       </a:r>
                     </a:p>
                   </a:txBody>
@@ -9379,8 +9380,8 @@
                 <a:latin typeface="Calibri"/>
               </a:rPr>
               <a:t>Validated against TWO references:
-• Journal (Chacón 2017): V6a σ_y &amp; UTS land INSIDE the range (pass); modulus just below floor.
-• add:north E-PLA datasheet: σ_y, UTS and E share ONE factor k ≈ 1.20 → printed 100 % ≈ 83 % of solid-rated. Coherent and actionable.</a:t>
+• Journal (Chacón 2017): σ_y &amp; UTS land INSIDE the range (pass); modulus just below floor.
+• add:north E-PLA datasheet: strength ≈ 80 % of rated (k ≈ 1.26); stiffness ≈ 91 % (k ≈ 1.10, near spec) — E is CLOSER to spec than strength, so NOT one common factor. Repeatable at CV 2.5 % (n = 5).</a:t>
             </a:r>
           </a:p>
         </p:txBody>
@@ -9432,7 +9433,7 @@
                 </a:solidFill>
                 <a:latin typeface="Calibri"/>
               </a:rPr>
-              <a:t>Closest match = add:north E-PLA datasheet: one coherent FFF knock-down k ≈ 1.2 on strength &amp; stiffness. Predict printed strength ≈ spec ÷ 1.2.</a:t>
+              <a:t>Closest match = add:north E-PLA datasheet: strength k ≈ 1.26 (80 % of rated), stiffness k ≈ 1.10 (91 %, near spec). Predict printed strength ≈ spec ÷ 1.25.</a:t>
             </a:r>
           </a:p>
         </p:txBody>
@@ -9467,7 +9468,7 @@
                 </a:solidFill>
                 <a:latin typeface="Calibri"/>
               </a:rPr>
-              <a:t>Pilot V6a values (batch edge); representative n = 5 offset on p. 160. † E-PLA reports one tensile strength (at break), PLA σ_y ≈ UTS → both vs 58 MPa. E-PLA = closest add:north PLA; ISO 527 moulded vs printed.</a:t>
+              <a:t>† E-PLA reports one tensile strength (at break), PLA σ_y ≈ UTS → both vs 58 MPa. E-PLA = closest add:north PLA (no PLA Economy TDS); ISO 527 moulded vs printed 80 mm² bar; values = n = 5 mean.</a:t>
             </a:r>
           </a:p>
         </p:txBody>
@@ -15384,6 +15385,589 @@
 </p:sld>
 </file>
 
+<file path=ppt/slides/slide22.xml><?xml version="1.0" encoding="utf-8"?>
+<p:sld xmlns:a="http://schemas.openxmlformats.org/drawingml/2006/main" xmlns:p="http://schemas.openxmlformats.org/presentationml/2006/main" xmlns:r="http://schemas.openxmlformats.org/officeDocument/2006/relationships">
+  <p:cSld>
+    <p:spTree>
+      <p:nvGrpSpPr>
+        <p:cNvPr id="1" name=""/>
+        <p:cNvGrpSpPr/>
+        <p:nvPr/>
+      </p:nvGrpSpPr>
+      <p:grpSpPr/>
+      <p:sp>
+        <p:nvSpPr>
+          <p:cNvPr id="2" name="TextBox 1"/>
+          <p:cNvSpPr txBox="1"/>
+          <p:nvPr/>
+        </p:nvSpPr>
+        <p:spPr>
+          <a:xfrm>
+            <a:off x="11155680" y="274320"/>
+            <a:ext cx="914400" cy="274320"/>
+          </a:xfrm>
+          <a:prstGeom prst="rect">
+            <a:avLst/>
+          </a:prstGeom>
+          <a:noFill/>
+        </p:spPr>
+        <p:txBody>
+          <a:bodyPr wrap="square" lIns="45720" rIns="45720" tIns="18288" bIns="18288" anchor="t">
+            <a:spAutoFit/>
+          </a:bodyPr>
+          <a:lstStyle/>
+          <a:p>
+            <a:pPr algn="r"/>
+            <a:r>
+              <a:rPr sz="800" b="1" i="0">
+                <a:solidFill>
+                  <a:srgbClr val="707070"/>
+                </a:solidFill>
+                <a:latin typeface="Calibri"/>
+              </a:rPr>
+              <a:t>JÖNKÖPING UNIVERSITY</a:t>
+            </a:r>
+          </a:p>
+        </p:txBody>
+      </p:sp>
+      <p:sp>
+        <p:nvSpPr>
+          <p:cNvPr id="3" name="Rectangle 2"/>
+          <p:cNvSpPr/>
+          <p:nvPr/>
+        </p:nvSpPr>
+        <p:spPr>
+          <a:xfrm>
+            <a:off x="457200" y="411480"/>
+            <a:ext cx="457200" cy="73152"/>
+          </a:xfrm>
+          <a:prstGeom prst="rect">
+            <a:avLst/>
+          </a:prstGeom>
+          <a:solidFill>
+            <a:srgbClr val="A9D6EF"/>
+          </a:solidFill>
+          <a:ln>
+            <a:noFill/>
+          </a:ln>
+        </p:spPr>
+        <p:style>
+          <a:lnRef idx="1">
+            <a:schemeClr val="accent1"/>
+          </a:lnRef>
+          <a:fillRef idx="3">
+            <a:schemeClr val="accent1"/>
+          </a:fillRef>
+          <a:effectRef idx="2">
+            <a:schemeClr val="accent1"/>
+          </a:effectRef>
+          <a:fontRef idx="minor">
+            <a:schemeClr val="lt1"/>
+          </a:fontRef>
+        </p:style>
+        <p:txBody>
+          <a:bodyPr rtlCol="0" anchor="ctr"/>
+          <a:lstStyle/>
+          <a:p>
+            <a:pPr algn="ctr"/>
+          </a:p>
+        </p:txBody>
+      </p:sp>
+      <p:sp>
+        <p:nvSpPr>
+          <p:cNvPr id="4" name="TextBox 3"/>
+          <p:cNvSpPr txBox="1"/>
+          <p:nvPr/>
+        </p:nvSpPr>
+        <p:spPr>
+          <a:xfrm>
+            <a:off x="457200" y="502920"/>
+            <a:ext cx="11430000" cy="822960"/>
+          </a:xfrm>
+          <a:prstGeom prst="rect">
+            <a:avLst/>
+          </a:prstGeom>
+          <a:noFill/>
+        </p:spPr>
+        <p:txBody>
+          <a:bodyPr wrap="square" lIns="45720" rIns="45720" tIns="18288" bIns="18288" anchor="t">
+            <a:spAutoFit/>
+          </a:bodyPr>
+          <a:lstStyle/>
+          <a:p>
+            <a:pPr algn="l"/>
+            <a:r>
+              <a:rPr sz="3000" b="0" i="0">
+                <a:solidFill>
+                  <a:srgbClr val="000000"/>
+                </a:solidFill>
+                <a:latin typeface="Calibri Light"/>
+              </a:rPr>
+              <a:t>UTM SOFTWARE: AUTOMATIC PRELOAD (‘PRELOAD TENSION’)</a:t>
+            </a:r>
+          </a:p>
+        </p:txBody>
+      </p:sp>
+      <p:sp>
+        <p:nvSpPr>
+          <p:cNvPr id="5" name="TextBox 4"/>
+          <p:cNvSpPr txBox="1"/>
+          <p:nvPr/>
+        </p:nvSpPr>
+        <p:spPr>
+          <a:xfrm>
+            <a:off x="457200" y="1490472"/>
+            <a:ext cx="1097280" cy="320040"/>
+          </a:xfrm>
+          <a:prstGeom prst="rect">
+            <a:avLst/>
+          </a:prstGeom>
+          <a:noFill/>
+        </p:spPr>
+        <p:txBody>
+          <a:bodyPr wrap="square" lIns="45720" rIns="45720" tIns="18288" bIns="18288" anchor="t">
+            <a:spAutoFit/>
+          </a:bodyPr>
+          <a:lstStyle/>
+          <a:p>
+            <a:pPr algn="l"/>
+            <a:r>
+              <a:rPr sz="1400" b="0" i="0">
+                <a:solidFill>
+                  <a:srgbClr val="000000"/>
+                </a:solidFill>
+                <a:latin typeface="Calibri"/>
+              </a:rPr>
+              <a:t>Preload to:</a:t>
+            </a:r>
+          </a:p>
+        </p:txBody>
+      </p:sp>
+      <p:sp>
+        <p:nvSpPr>
+          <p:cNvPr id="6" name="Rounded Rectangle 5"/>
+          <p:cNvSpPr/>
+          <p:nvPr/>
+        </p:nvSpPr>
+        <p:spPr>
+          <a:xfrm>
+            <a:off x="1572768" y="1444752"/>
+            <a:ext cx="960120" cy="384048"/>
+          </a:xfrm>
+          <a:prstGeom prst="roundRect">
+            <a:avLst/>
+          </a:prstGeom>
+          <a:solidFill>
+            <a:srgbClr val="FFFFFF"/>
+          </a:solidFill>
+          <a:ln w="15240">
+            <a:solidFill>
+              <a:srgbClr val="A6A6A6"/>
+            </a:solidFill>
+          </a:ln>
+        </p:spPr>
+        <p:style>
+          <a:lnRef idx="1">
+            <a:schemeClr val="accent1"/>
+          </a:lnRef>
+          <a:fillRef idx="3">
+            <a:schemeClr val="accent1"/>
+          </a:fillRef>
+          <a:effectRef idx="2">
+            <a:schemeClr val="accent1"/>
+          </a:effectRef>
+          <a:fontRef idx="minor">
+            <a:schemeClr val="lt1"/>
+          </a:fontRef>
+        </p:style>
+        <p:txBody>
+          <a:bodyPr rtlCol="0" anchor="ctr" lIns="54864" rIns="54864" tIns="27432" bIns="27432" wrap="square"/>
+          <a:lstStyle/>
+          <a:p>
+            <a:pPr algn="ctr"/>
+            <a:r>
+              <a:rPr sz="1300" b="0">
+                <a:solidFill>
+                  <a:srgbClr val="000000"/>
+                </a:solidFill>
+                <a:latin typeface="Calibri"/>
+              </a:rPr>
+              <a:t>470 N</a:t>
+            </a:r>
+          </a:p>
+        </p:txBody>
+      </p:sp>
+      <p:sp>
+        <p:nvSpPr>
+          <p:cNvPr id="7" name="Rounded Rectangle 6"/>
+          <p:cNvSpPr/>
+          <p:nvPr/>
+        </p:nvSpPr>
+        <p:spPr>
+          <a:xfrm>
+            <a:off x="2551176" y="1444752"/>
+            <a:ext cx="292608" cy="384048"/>
+          </a:xfrm>
+          <a:prstGeom prst="roundRect">
+            <a:avLst/>
+          </a:prstGeom>
+          <a:solidFill>
+            <a:srgbClr val="F2F2F2"/>
+          </a:solidFill>
+          <a:ln w="15240">
+            <a:solidFill>
+              <a:srgbClr val="A6A6A6"/>
+            </a:solidFill>
+          </a:ln>
+        </p:spPr>
+        <p:style>
+          <a:lnRef idx="1">
+            <a:schemeClr val="accent1"/>
+          </a:lnRef>
+          <a:fillRef idx="3">
+            <a:schemeClr val="accent1"/>
+          </a:fillRef>
+          <a:effectRef idx="2">
+            <a:schemeClr val="accent1"/>
+          </a:effectRef>
+          <a:fontRef idx="minor">
+            <a:schemeClr val="lt1"/>
+          </a:fontRef>
+        </p:style>
+        <p:txBody>
+          <a:bodyPr rtlCol="0" anchor="ctr" lIns="54864" rIns="54864" tIns="27432" bIns="27432" wrap="square"/>
+          <a:lstStyle/>
+          <a:p>
+            <a:pPr algn="ctr"/>
+            <a:r>
+              <a:rPr sz="800" b="0">
+                <a:solidFill>
+                  <a:srgbClr val="707070"/>
+                </a:solidFill>
+                <a:latin typeface="Calibri"/>
+              </a:rPr>
+              <a:t>▴
+▾</a:t>
+            </a:r>
+          </a:p>
+        </p:txBody>
+      </p:sp>
+      <p:sp>
+        <p:nvSpPr>
+          <p:cNvPr id="8" name="Rounded Rectangle 7"/>
+          <p:cNvSpPr/>
+          <p:nvPr/>
+        </p:nvSpPr>
+        <p:spPr>
+          <a:xfrm>
+            <a:off x="2990088" y="1444752"/>
+            <a:ext cx="1600200" cy="384048"/>
+          </a:xfrm>
+          <a:prstGeom prst="roundRect">
+            <a:avLst/>
+          </a:prstGeom>
+          <a:solidFill>
+            <a:srgbClr val="ECECEC"/>
+          </a:solidFill>
+          <a:ln w="15240">
+            <a:solidFill>
+              <a:srgbClr val="A6A6A6"/>
+            </a:solidFill>
+          </a:ln>
+        </p:spPr>
+        <p:style>
+          <a:lnRef idx="1">
+            <a:schemeClr val="accent1"/>
+          </a:lnRef>
+          <a:fillRef idx="3">
+            <a:schemeClr val="accent1"/>
+          </a:fillRef>
+          <a:effectRef idx="2">
+            <a:schemeClr val="accent1"/>
+          </a:effectRef>
+          <a:fontRef idx="minor">
+            <a:schemeClr val="lt1"/>
+          </a:fontRef>
+        </p:style>
+        <p:txBody>
+          <a:bodyPr rtlCol="0" anchor="ctr" lIns="54864" rIns="54864" tIns="27432" bIns="27432" wrap="square"/>
+          <a:lstStyle/>
+          <a:p>
+            <a:pPr algn="ctr"/>
+            <a:r>
+              <a:rPr sz="1200" b="0">
+                <a:solidFill>
+                  <a:srgbClr val="555555"/>
+                </a:solidFill>
+                <a:latin typeface="Calibri"/>
+              </a:rPr>
+              <a:t>Preload tension</a:t>
+            </a:r>
+          </a:p>
+        </p:txBody>
+      </p:sp>
+      <p:sp>
+        <p:nvSpPr>
+          <p:cNvPr id="9" name="TextBox 8"/>
+          <p:cNvSpPr txBox="1"/>
+          <p:nvPr/>
+        </p:nvSpPr>
+        <p:spPr>
+          <a:xfrm>
+            <a:off x="457200" y="1938528"/>
+            <a:ext cx="4572000" cy="457200"/>
+          </a:xfrm>
+          <a:prstGeom prst="rect">
+            <a:avLst/>
+          </a:prstGeom>
+          <a:noFill/>
+        </p:spPr>
+        <p:txBody>
+          <a:bodyPr wrap="square" lIns="45720" rIns="45720" tIns="18288" bIns="18288" anchor="t">
+            <a:spAutoFit/>
+          </a:bodyPr>
+          <a:lstStyle/>
+          <a:p>
+            <a:pPr algn="l"/>
+            <a:r>
+              <a:rPr sz="1050" b="0" i="1">
+                <a:solidFill>
+                  <a:srgbClr val="707070"/>
+                </a:solidFill>
+                <a:latin typeface="Calibri"/>
+              </a:rPr>
+              <a:t>The operator control (screen recreation): type a target load, click once — the crosshead auto-tensions to it, hands-off.</a:t>
+            </a:r>
+          </a:p>
+        </p:txBody>
+      </p:sp>
+      <p:sp>
+        <p:nvSpPr>
+          <p:cNvPr id="10" name="TextBox 9"/>
+          <p:cNvSpPr txBox="1"/>
+          <p:nvPr/>
+        </p:nvSpPr>
+        <p:spPr>
+          <a:xfrm>
+            <a:off x="457200" y="2514600"/>
+            <a:ext cx="5486400" cy="365760"/>
+          </a:xfrm>
+          <a:prstGeom prst="rect">
+            <a:avLst/>
+          </a:prstGeom>
+          <a:noFill/>
+        </p:spPr>
+        <p:txBody>
+          <a:bodyPr wrap="square" lIns="45720" rIns="45720" tIns="18288" bIns="18288" anchor="t">
+            <a:spAutoFit/>
+          </a:bodyPr>
+          <a:lstStyle/>
+          <a:p>
+            <a:pPr algn="l"/>
+            <a:r>
+              <a:rPr sz="1600" b="0" i="0">
+                <a:solidFill>
+                  <a:srgbClr val="707070"/>
+                </a:solidFill>
+                <a:latin typeface="Calibri"/>
+              </a:rPr>
+              <a:t>How it works — one click, hands-off</a:t>
+            </a:r>
+          </a:p>
+        </p:txBody>
+      </p:sp>
+      <p:sp>
+        <p:nvSpPr>
+          <p:cNvPr id="11" name="TextBox 10"/>
+          <p:cNvSpPr txBox="1"/>
+          <p:nvPr/>
+        </p:nvSpPr>
+        <p:spPr>
+          <a:xfrm>
+            <a:off x="457200" y="2880360"/>
+            <a:ext cx="5577840" cy="2743200"/>
+          </a:xfrm>
+          <a:prstGeom prst="rect">
+            <a:avLst/>
+          </a:prstGeom>
+          <a:noFill/>
+        </p:spPr>
+        <p:txBody>
+          <a:bodyPr wrap="square" lIns="45720" rIns="45720" tIns="18288" bIns="18288" anchor="t">
+            <a:spAutoFit/>
+          </a:bodyPr>
+          <a:lstStyle/>
+          <a:p>
+            <a:pPr algn="l"/>
+            <a:r>
+              <a:rPr sz="1200" b="0" i="0">
+                <a:solidFill>
+                  <a:srgbClr val="000000"/>
+                </a:solidFill>
+                <a:latin typeface="Calibri"/>
+              </a:rPr>
+              <a:t>1.  Enter the target preload (e.g. 470 N) and press Preload tension.
+2.  The crosshead tensions at a LOAD-scheduled speed: 0.20 mm/s up to ~15 % of target, 0.10 mm/s to 50 %, then ramps to a gentle 0.02 mm/s as it nears the target.
+3.  It stops at 1.03× the target — a deliberate ~3 % overshoot.
+4.  PLA stress-relaxes ~2 % while held → the load settles AT / just above the target.</a:t>
+            </a:r>
+          </a:p>
+        </p:txBody>
+      </p:sp>
+      <p:pic>
+        <p:nvPicPr>
+          <p:cNvPr id="12" name="Picture 11" descr="preload_schedule.png"/>
+          <p:cNvPicPr>
+            <a:picLocks noChangeAspect="1"/>
+          </p:cNvPicPr>
+          <p:nvPr/>
+        </p:nvPicPr>
+        <p:blipFill>
+          <a:blip r:embed="rId2"/>
+          <a:stretch>
+            <a:fillRect/>
+          </a:stretch>
+        </p:blipFill>
+        <p:spPr>
+          <a:xfrm>
+            <a:off x="6172200" y="1508760"/>
+            <a:ext cx="5669280" cy="3556891"/>
+          </a:xfrm>
+          <a:prstGeom prst="rect">
+            <a:avLst/>
+          </a:prstGeom>
+        </p:spPr>
+      </p:pic>
+      <p:sp>
+        <p:nvSpPr>
+          <p:cNvPr id="13" name="Rectangle 12"/>
+          <p:cNvSpPr/>
+          <p:nvPr/>
+        </p:nvSpPr>
+        <p:spPr>
+          <a:xfrm>
+            <a:off x="365760" y="5715000"/>
+            <a:ext cx="11430000" cy="658368"/>
+          </a:xfrm>
+          <a:prstGeom prst="rect">
+            <a:avLst/>
+          </a:prstGeom>
+          <a:solidFill>
+            <a:srgbClr val="E7F1F8"/>
+          </a:solidFill>
+          <a:ln>
+            <a:noFill/>
+          </a:ln>
+        </p:spPr>
+        <p:style>
+          <a:lnRef idx="1">
+            <a:schemeClr val="accent1"/>
+          </a:lnRef>
+          <a:fillRef idx="3">
+            <a:schemeClr val="accent1"/>
+          </a:fillRef>
+          <a:effectRef idx="2">
+            <a:schemeClr val="accent1"/>
+          </a:effectRef>
+          <a:fontRef idx="minor">
+            <a:schemeClr val="lt1"/>
+          </a:fontRef>
+        </p:style>
+        <p:txBody>
+          <a:bodyPr rtlCol="0" anchor="ctr" wrap="square" lIns="109728" rIns="109728"/>
+          <a:lstStyle/>
+          <a:p>
+            <a:pPr algn="ctr"/>
+            <a:r>
+              <a:rPr sz="1150" b="1">
+                <a:solidFill>
+                  <a:srgbClr val="000000"/>
+                </a:solidFill>
+                <a:latin typeface="Calibri"/>
+              </a:rPr>
+              <a:t>Why: manual jogging is slow and overshoots, and PLA relaxes after you stop (you would undershoot). Auto-preload lands consistently at target (+3 % set − ~2 % relaxation ≈ target). Safety: hard cap 1.25× target, 180 s timeout, live speed-only control (no Stop→restart re-latch).</a:t>
+            </a:r>
+          </a:p>
+        </p:txBody>
+      </p:sp>
+      <p:sp>
+        <p:nvSpPr>
+          <p:cNvPr id="14" name="TextBox 13"/>
+          <p:cNvSpPr txBox="1"/>
+          <p:nvPr/>
+        </p:nvSpPr>
+        <p:spPr>
+          <a:xfrm>
+            <a:off x="548640" y="6400800"/>
+            <a:ext cx="11064240" cy="365760"/>
+          </a:xfrm>
+          <a:prstGeom prst="rect">
+            <a:avLst/>
+          </a:prstGeom>
+          <a:noFill/>
+        </p:spPr>
+        <p:txBody>
+          <a:bodyPr wrap="square" lIns="45720" rIns="45720" tIns="18288" bIns="18288" anchor="t">
+            <a:spAutoFit/>
+          </a:bodyPr>
+          <a:lstStyle/>
+          <a:p>
+            <a:pPr algn="l"/>
+            <a:r>
+              <a:rPr sz="1200" b="0" i="1">
+                <a:solidFill>
+                  <a:srgbClr val="707070"/>
+                </a:solidFill>
+                <a:latin typeface="Calibri"/>
+              </a:rPr>
+              <a:t>Feature in Software/UTM_PyQt6/main.py — PRELOAD_SPEED_KNOTS · TARGET_FACTOR 1.03 · OVERSHOOT_CAP 1.25 · TIMEOUT 180 s. Used to set the ~470 N preload before every V5 / V6 pull.</a:t>
+            </a:r>
+          </a:p>
+        </p:txBody>
+      </p:sp>
+      <p:sp>
+        <p:nvSpPr>
+          <p:cNvPr id="15" name="TextBox 14"/>
+          <p:cNvSpPr txBox="1"/>
+          <p:nvPr/>
+        </p:nvSpPr>
+        <p:spPr>
+          <a:xfrm>
+            <a:off x="457200" y="6446520"/>
+            <a:ext cx="640080" cy="274320"/>
+          </a:xfrm>
+          <a:prstGeom prst="rect">
+            <a:avLst/>
+          </a:prstGeom>
+          <a:noFill/>
+        </p:spPr>
+        <p:txBody>
+          <a:bodyPr wrap="square" lIns="45720" rIns="45720" tIns="18288" bIns="18288" anchor="t">
+            <a:spAutoFit/>
+          </a:bodyPr>
+          <a:lstStyle/>
+          <a:p>
+            <a:pPr algn="l"/>
+            <a:r>
+              <a:rPr sz="1000" b="0" i="0">
+                <a:solidFill>
+                  <a:srgbClr val="707070"/>
+                </a:solidFill>
+                <a:latin typeface="Calibri"/>
+              </a:rPr>
+              <a:t>162</a:t>
+            </a:r>
+          </a:p>
+        </p:txBody>
+      </p:sp>
+    </p:spTree>
+  </p:cSld>
+  <p:clrMapOvr>
+    <a:masterClrMapping/>
+  </p:clrMapOvr>
+</p:sld>
+</file>
+
 <file path=ppt/slides/slide3.xml><?xml version="1.0" encoding="utf-8"?>
 <p:sld xmlns:a="http://schemas.openxmlformats.org/drawingml/2006/main" xmlns:p="http://schemas.openxmlformats.org/presentationml/2006/main" xmlns:r="http://schemas.openxmlformats.org/officeDocument/2006/relationships">
   <p:cSld>
@@ -16627,7 +17211,7 @@
                 </a:solidFill>
                 <a:latin typeface="Calibri Light"/>
               </a:rPr>
-              <a:t>PHASE 8.6.20 V6a: VALIDATION — JOURNAL REFERENCE</a:t>
+              <a:t>PHASE 8.6.20 V6 (n = 5): VALIDATION — JOURNAL REFERENCE</a:t>
             </a:r>
           </a:p>
         </p:txBody>
@@ -16662,7 +17246,7 @@
                 </a:solidFill>
                 <a:latin typeface="Calibri"/>
               </a:rPr>
-              <a:t>Chacón (2017) journal — measured vs range, offset k = Chacón_min / measured</a:t>
+              <a:t>Chacón (2017) journal — n = 5 mean vs range, offset k = Chacón_min / measured</a:t>
             </a:r>
           </a:p>
         </p:txBody>
@@ -16752,7 +17336,7 @@
                           </a:solidFill>
                           <a:latin typeface="Calibri"/>
                         </a:rPr>
-                        <a:t>V6a k</a:t>
+                        <a:t>V6 k</a:t>
                       </a:r>
                     </a:p>
                   </a:txBody>
@@ -16775,7 +17359,7 @@
                           </a:solidFill>
                           <a:latin typeface="Calibri"/>
                         </a:rPr>
-                        <a:t>V6a measured</a:t>
+                        <a:t>V6 mean (n=5)</a:t>
                       </a:r>
                     </a:p>
                   </a:txBody>
@@ -16861,7 +17445,7 @@
                           </a:solidFill>
                           <a:latin typeface="Calibri"/>
                         </a:rPr>
-                        <a:t>×1.25</a:t>
+                        <a:t>×1.15</a:t>
                       </a:r>
                     </a:p>
                   </a:txBody>
@@ -16880,7 +17464,7 @@
                           </a:solidFill>
                           <a:latin typeface="Calibri"/>
                         </a:rPr>
-                        <a:t>2.41 GPa</a:t>
+                        <a:t>2.60 GPa</a:t>
                       </a:r>
                     </a:p>
                   </a:txBody>
@@ -16962,7 +17546,7 @@
                           </a:solidFill>
                           <a:latin typeface="Calibri"/>
                         </a:rPr>
-                        <a:t>×0.63</a:t>
+                        <a:t>×0.67</a:t>
                       </a:r>
                     </a:p>
                   </a:txBody>
@@ -16981,7 +17565,7 @@
                           </a:solidFill>
                           <a:latin typeface="Calibri"/>
                         </a:rPr>
-                        <a:t>47.8 MPa</a:t>
+                        <a:t>45.0 MPa</a:t>
                       </a:r>
                     </a:p>
                   </a:txBody>
@@ -17063,7 +17647,7 @@
                           </a:solidFill>
                           <a:latin typeface="Calibri"/>
                         </a:rPr>
-                        <a:t>×0.67</a:t>
+                        <a:t>×0.69</a:t>
                       </a:r>
                     </a:p>
                   </a:txBody>
@@ -17082,7 +17666,7 @@
                           </a:solidFill>
                           <a:latin typeface="Calibri"/>
                         </a:rPr>
-                        <a:t>47.8 MPa</a:t>
+                        <a:t>46.2 MPa</a:t>
                       </a:r>
                     </a:p>
                   </a:txBody>
@@ -17147,7 +17731,7 @@
                 <a:latin typeface="Calibri"/>
               </a:rPr>
               <a:t>Green = measured value lands INSIDE the Chacón range; yellow = just below.
-At 100 % infill the strength values land in literature directly: UTS 47.8 MPa and σ_y 47.8 MPa sit mid-range (k = 0.63–0.67 &lt; 1 ⇒ no knock-down needed). E (2.41 GPa, ×1.25) is just shy of the 3.0 GPa floor — held down by the rig-compliance-limited apparent modulus. Common-factor window ≈ [1.05, 1.25] → k ≈ 1.</a:t>
+At 100 % infill the strength values land in literature directly: UTS 46.2 MPa and σ_y 45.0 MPa sit mid-range (k = 0.67–0.69 &lt; 1 ⇒ no knock-down needed). E (2.60 GPa, ×1.15) is ~13 % below the 3.0 GPa floor — held down by the rig-compliance-limited apparent modulus. Strength common-factor window ≈ [0.69, 1.11] → k ≈ 1 (p. 155).</a:t>
             </a:r>
           </a:p>
         </p:txBody>
@@ -17199,7 +17783,7 @@
                 </a:solidFill>
                 <a:latin typeface="Calibri"/>
               </a:rPr>
-              <a:t>2.17×</a:t>
+              <a:t>2.09×</a:t>
             </a:r>
           </a:p>
           <a:p>
@@ -17263,7 +17847,7 @@
                 </a:solidFill>
                 <a:latin typeface="Calibri"/>
               </a:rPr>
-              <a:t>2.83×</a:t>
+              <a:t>5.0×</a:t>
             </a:r>
           </a:p>
           <a:p>
@@ -17327,7 +17911,7 @@
                 </a:solidFill>
                 <a:latin typeface="Calibri"/>
               </a:rPr>
-              <a:t>99.9 %</a:t>
+              <a:t>≥99 %</a:t>
             </a:r>
           </a:p>
           <a:p>
@@ -17507,7 +18091,7 @@
                 </a:solidFill>
                 <a:latin typeface="Calibri"/>
               </a:rPr>
-              <a:t>DIC validated under LED lighting (99.9 % tracking, clean baseline) — lighting is precision-only, as predicted.</a:t>
+              <a:t>DIC validated under LED lighting (clean ≥99 % tracking across all 5, stable baseline) — lighting is precision-only, as predicted.</a:t>
             </a:r>
           </a:p>
         </p:txBody>
@@ -17542,7 +18126,7 @@
                 </a:solidFill>
                 <a:latin typeface="Calibri"/>
               </a:rPr>
-              <a:t>Pilot V6a values (batch strength/modulus edge). Representative n = 5 validation on pp. 158 &amp; 160. Journal ref Chacón (2017); add:north datasheet on p. 156.</a:t>
+              <a:t>n = 5 mean vs Chacón (2017); per-specimen repeatability on p. 157, add:north datasheet on p. 156. Strength inside range (k ≈ 1); E ~13 % below the journal floor.</a:t>
             </a:r>
           </a:p>
         </p:txBody>

--- a/V6a_8_6_20_slides.pptx
+++ b/V6a_8_6_20_slides.pptx
@@ -27,6 +27,7 @@
     <p:sldId id="275" r:id="rId26"/>
     <p:sldId id="276" r:id="rId27"/>
     <p:sldId id="277" r:id="rId28"/>
+    <p:sldId id="278" r:id="rId29"/>
   </p:sldIdLst>
   <p:sldSz cx="12191695" cy="6858000" type="screen4x3"/>
   <p:notesSz cx="6858000" cy="9144000"/>
@@ -15956,6 +15957,749 @@
                 <a:latin typeface="Calibri"/>
               </a:rPr>
               <a:t>162</a:t>
+            </a:r>
+          </a:p>
+        </p:txBody>
+      </p:sp>
+    </p:spTree>
+  </p:cSld>
+  <p:clrMapOvr>
+    <a:masterClrMapping/>
+  </p:clrMapOvr>
+</p:sld>
+</file>
+
+<file path=ppt/slides/slide23.xml><?xml version="1.0" encoding="utf-8"?>
+<p:sld xmlns:a="http://schemas.openxmlformats.org/drawingml/2006/main" xmlns:p="http://schemas.openxmlformats.org/presentationml/2006/main" xmlns:r="http://schemas.openxmlformats.org/officeDocument/2006/relationships">
+  <p:cSld>
+    <p:spTree>
+      <p:nvGrpSpPr>
+        <p:cNvPr id="1" name=""/>
+        <p:cNvGrpSpPr/>
+        <p:nvPr/>
+      </p:nvGrpSpPr>
+      <p:grpSpPr/>
+      <p:sp>
+        <p:nvSpPr>
+          <p:cNvPr id="2" name="TextBox 1"/>
+          <p:cNvSpPr txBox="1"/>
+          <p:nvPr/>
+        </p:nvSpPr>
+        <p:spPr>
+          <a:xfrm>
+            <a:off x="11155680" y="274320"/>
+            <a:ext cx="914400" cy="274320"/>
+          </a:xfrm>
+          <a:prstGeom prst="rect">
+            <a:avLst/>
+          </a:prstGeom>
+          <a:noFill/>
+        </p:spPr>
+        <p:txBody>
+          <a:bodyPr wrap="square" lIns="45720" rIns="45720" tIns="18288" bIns="18288" anchor="t">
+            <a:spAutoFit/>
+          </a:bodyPr>
+          <a:lstStyle/>
+          <a:p>
+            <a:pPr algn="r"/>
+            <a:r>
+              <a:rPr sz="800" b="1" i="0">
+                <a:solidFill>
+                  <a:srgbClr val="707070"/>
+                </a:solidFill>
+                <a:latin typeface="Calibri"/>
+              </a:rPr>
+              <a:t>JÖNKÖPING UNIVERSITY</a:t>
+            </a:r>
+          </a:p>
+        </p:txBody>
+      </p:sp>
+      <p:sp>
+        <p:nvSpPr>
+          <p:cNvPr id="3" name="Rectangle 2"/>
+          <p:cNvSpPr/>
+          <p:nvPr/>
+        </p:nvSpPr>
+        <p:spPr>
+          <a:xfrm>
+            <a:off x="457200" y="411480"/>
+            <a:ext cx="457200" cy="73152"/>
+          </a:xfrm>
+          <a:prstGeom prst="rect">
+            <a:avLst/>
+          </a:prstGeom>
+          <a:solidFill>
+            <a:srgbClr val="A9D6EF"/>
+          </a:solidFill>
+          <a:ln>
+            <a:noFill/>
+          </a:ln>
+        </p:spPr>
+        <p:style>
+          <a:lnRef idx="1">
+            <a:schemeClr val="accent1"/>
+          </a:lnRef>
+          <a:fillRef idx="3">
+            <a:schemeClr val="accent1"/>
+          </a:fillRef>
+          <a:effectRef idx="2">
+            <a:schemeClr val="accent1"/>
+          </a:effectRef>
+          <a:fontRef idx="minor">
+            <a:schemeClr val="lt1"/>
+          </a:fontRef>
+        </p:style>
+        <p:txBody>
+          <a:bodyPr rtlCol="0" anchor="ctr"/>
+          <a:lstStyle/>
+          <a:p>
+            <a:pPr algn="ctr"/>
+          </a:p>
+        </p:txBody>
+      </p:sp>
+      <p:sp>
+        <p:nvSpPr>
+          <p:cNvPr id="4" name="TextBox 3"/>
+          <p:cNvSpPr txBox="1"/>
+          <p:nvPr/>
+        </p:nvSpPr>
+        <p:spPr>
+          <a:xfrm>
+            <a:off x="457200" y="502920"/>
+            <a:ext cx="11430000" cy="822960"/>
+          </a:xfrm>
+          <a:prstGeom prst="rect">
+            <a:avLst/>
+          </a:prstGeom>
+          <a:noFill/>
+        </p:spPr>
+        <p:txBody>
+          <a:bodyPr wrap="square" lIns="45720" rIns="45720" tIns="18288" bIns="18288" anchor="t">
+            <a:spAutoFit/>
+          </a:bodyPr>
+          <a:lstStyle/>
+          <a:p>
+            <a:pPr algn="l"/>
+            <a:r>
+              <a:rPr sz="3000" b="0" i="0">
+                <a:solidFill>
+                  <a:srgbClr val="000000"/>
+                </a:solidFill>
+                <a:latin typeface="Calibri Light"/>
+              </a:rPr>
+              <a:t>ENGINEERING vs TRUE (CAUCHY) STRESS — &amp; MEASURING THE AREA</a:t>
+            </a:r>
+          </a:p>
+        </p:txBody>
+      </p:sp>
+      <p:sp>
+        <p:nvSpPr>
+          <p:cNvPr id="5" name="TextBox 4"/>
+          <p:cNvSpPr txBox="1"/>
+          <p:nvPr/>
+        </p:nvSpPr>
+        <p:spPr>
+          <a:xfrm>
+            <a:off x="365760" y="1170432"/>
+            <a:ext cx="5577840" cy="365760"/>
+          </a:xfrm>
+          <a:prstGeom prst="rect">
+            <a:avLst/>
+          </a:prstGeom>
+          <a:noFill/>
+        </p:spPr>
+        <p:txBody>
+          <a:bodyPr wrap="square" lIns="45720" rIns="45720" tIns="18288" bIns="18288" anchor="t">
+            <a:spAutoFit/>
+          </a:bodyPr>
+          <a:lstStyle/>
+          <a:p>
+            <a:pPr algn="l"/>
+            <a:r>
+              <a:rPr sz="1600" b="0" i="0">
+                <a:solidFill>
+                  <a:srgbClr val="707070"/>
+                </a:solidFill>
+                <a:latin typeface="Calibri"/>
+              </a:rPr>
+              <a:t>Why the report &amp; plots use ENGINEERING stress</a:t>
+            </a:r>
+          </a:p>
+        </p:txBody>
+      </p:sp>
+      <p:sp>
+        <p:nvSpPr>
+          <p:cNvPr id="6" name="TextBox 5"/>
+          <p:cNvSpPr txBox="1"/>
+          <p:nvPr/>
+        </p:nvSpPr>
+        <p:spPr>
+          <a:xfrm>
+            <a:off x="365760" y="1554480"/>
+            <a:ext cx="5623560" cy="3383280"/>
+          </a:xfrm>
+          <a:prstGeom prst="rect">
+            <a:avLst/>
+          </a:prstGeom>
+          <a:noFill/>
+        </p:spPr>
+        <p:txBody>
+          <a:bodyPr wrap="square" lIns="45720" rIns="45720" tIns="18288" bIns="18288" anchor="t">
+            <a:spAutoFit/>
+          </a:bodyPr>
+          <a:lstStyle/>
+          <a:p>
+            <a:pPr algn="l"/>
+            <a:r>
+              <a:rPr sz="1150" b="0" i="0">
+                <a:solidFill>
+                  <a:srgbClr val="000000"/>
+                </a:solidFill>
+                <a:latin typeface="Calibri"/>
+              </a:rPr>
+              <a:t>σ_eng = F / A₀   (A₀ = 80 mm², fixed) — what we compute &amp; report.
+σ_true (Cauchy) = F / A_current — the real stress on the shrinking cross-section; NOT measured here (the deforming area is never tracked).
+Link (uniform, pre-neck):   σ_true = σ_eng·(1+ε),    ε_true = ln(1+ε).
+WHY engineering: ISO 527, Chacón (2017) and the add:north datasheet all report ENGINEERING stress — so it is the apples-to-apples basis for our k-factors / PASS–FAIL. True stress reads higher and would break that comparison.
+Gap for our PLA (small strains): ~2–3 % higher at UTS (46.2 → ~47 MPa), ~5 % near fracture; E and σ_y essentially unchanged.</a:t>
+            </a:r>
+          </a:p>
+        </p:txBody>
+      </p:sp>
+      <p:sp>
+        <p:nvSpPr>
+          <p:cNvPr id="7" name="TextBox 6"/>
+          <p:cNvSpPr txBox="1"/>
+          <p:nvPr/>
+        </p:nvSpPr>
+        <p:spPr>
+          <a:xfrm>
+            <a:off x="6172200" y="1170432"/>
+            <a:ext cx="5669280" cy="365760"/>
+          </a:xfrm>
+          <a:prstGeom prst="rect">
+            <a:avLst/>
+          </a:prstGeom>
+          <a:noFill/>
+        </p:spPr>
+        <p:txBody>
+          <a:bodyPr wrap="square" lIns="45720" rIns="45720" tIns="18288" bIns="18288" anchor="t">
+            <a:spAutoFit/>
+          </a:bodyPr>
+          <a:lstStyle/>
+          <a:p>
+            <a:pPr algn="l"/>
+            <a:r>
+              <a:rPr sz="1600" b="0" i="0">
+                <a:solidFill>
+                  <a:srgbClr val="707070"/>
+                </a:solidFill>
+                <a:latin typeface="Calibri"/>
+              </a:rPr>
+              <a:t>Measuring the CURRENT area → true stress (future)</a:t>
+            </a:r>
+          </a:p>
+        </p:txBody>
+      </p:sp>
+      <p:graphicFrame>
+        <p:nvGraphicFramePr>
+          <p:cNvPr id="8" name="Table 7"/>
+          <p:cNvGraphicFramePr>
+            <a:graphicFrameLocks noGrp="1"/>
+          </p:cNvGraphicFramePr>
+          <p:nvPr/>
+        </p:nvGraphicFramePr>
+        <p:xfrm>
+          <a:off x="6172200" y="1554480"/>
+          <a:ext cx="5714998" cy="2286000"/>
+        </p:xfrm>
+        <a:graphic>
+          <a:graphicData uri="http://schemas.openxmlformats.org/drawingml/2006/table">
+            <a:tbl>
+              <a:tblPr firstRow="1" bandRow="1">
+                <a:tableStyleId>{5C22544A-7EE6-4342-B048-85BDC9FD1C3A}</a:tableStyleId>
+              </a:tblPr>
+              <a:tblGrid>
+                <a:gridCol w="1365530"/>
+                <a:gridCol w="2731061"/>
+                <a:gridCol w="1618407"/>
+              </a:tblGrid>
+              <a:tr h="457200">
+                <a:tc>
+                  <a:txBody>
+                    <a:bodyPr lIns="54864" rIns="54864" tIns="18288" bIns="18288" wrap="square" anchor="ctr"/>
+                    <a:lstStyle/>
+                    <a:p>
+                      <a:pPr algn="l"/>
+                      <a:r>
+                        <a:rPr sz="1000" b="1">
+                          <a:solidFill>
+                            <a:srgbClr val="FFFFFF"/>
+                          </a:solidFill>
+                          <a:latin typeface="Calibri"/>
+                        </a:rPr>
+                        <a:t>Method</a:t>
+                      </a:r>
+                    </a:p>
+                  </a:txBody>
+                  <a:tcPr>
+                    <a:solidFill>
+                      <a:srgbClr val="143D2F"/>
+                    </a:solidFill>
+                  </a:tcPr>
+                </a:tc>
+                <a:tc>
+                  <a:txBody>
+                    <a:bodyPr lIns="54864" rIns="54864" tIns="18288" bIns="18288" wrap="square" anchor="ctr"/>
+                    <a:lstStyle/>
+                    <a:p>
+                      <a:pPr algn="l"/>
+                      <a:r>
+                        <a:rPr sz="1000" b="1">
+                          <a:solidFill>
+                            <a:srgbClr val="FFFFFF"/>
+                          </a:solidFill>
+                          <a:latin typeface="Calibri"/>
+                        </a:rPr>
+                        <a:t>How</a:t>
+                      </a:r>
+                    </a:p>
+                  </a:txBody>
+                  <a:tcPr>
+                    <a:solidFill>
+                      <a:srgbClr val="143D2F"/>
+                    </a:solidFill>
+                  </a:tcPr>
+                </a:tc>
+                <a:tc>
+                  <a:txBody>
+                    <a:bodyPr lIns="54864" rIns="54864" tIns="18288" bIns="18288" wrap="square" anchor="ctr"/>
+                    <a:lstStyle/>
+                    <a:p>
+                      <a:pPr algn="l"/>
+                      <a:r>
+                        <a:rPr sz="1000" b="1">
+                          <a:solidFill>
+                            <a:srgbClr val="FFFFFF"/>
+                          </a:solidFill>
+                          <a:latin typeface="Calibri"/>
+                        </a:rPr>
+                        <a:t>Note</a:t>
+                      </a:r>
+                    </a:p>
+                  </a:txBody>
+                  <a:tcPr>
+                    <a:solidFill>
+                      <a:srgbClr val="143D2F"/>
+                    </a:solidFill>
+                  </a:tcPr>
+                </a:tc>
+              </a:tr>
+              <a:tr h="457200">
+                <a:tc>
+                  <a:txBody>
+                    <a:bodyPr lIns="54864" rIns="54864" tIns="18288" bIns="18288" wrap="square" anchor="ctr"/>
+                    <a:lstStyle/>
+                    <a:p>
+                      <a:pPr algn="l"/>
+                      <a:r>
+                        <a:rPr sz="950" b="0">
+                          <a:solidFill>
+                            <a:srgbClr val="000000"/>
+                          </a:solidFill>
+                          <a:latin typeface="Calibri"/>
+                        </a:rPr>
+                        <a:t>Poisson estimate</a:t>
+                      </a:r>
+                    </a:p>
+                  </a:txBody>
+                  <a:tcPr/>
+                </a:tc>
+                <a:tc>
+                  <a:txBody>
+                    <a:bodyPr lIns="54864" rIns="54864" tIns="18288" bIns="18288" wrap="square" anchor="ctr"/>
+                    <a:lstStyle/>
+                    <a:p>
+                      <a:pPr algn="l"/>
+                      <a:r>
+                        <a:rPr sz="950" b="0">
+                          <a:solidFill>
+                            <a:srgbClr val="000000"/>
+                          </a:solidFill>
+                          <a:latin typeface="Calibri"/>
+                        </a:rPr>
+                        <a:t>A = A₀(1−ν·ε)²,  ν ≈ 0.35  (no hardware)</a:t>
+                      </a:r>
+                    </a:p>
+                  </a:txBody>
+                  <a:tcPr/>
+                </a:tc>
+                <a:tc>
+                  <a:txBody>
+                    <a:bodyPr lIns="54864" rIns="54864" tIns="18288" bIns="18288" wrap="square" anchor="ctr"/>
+                    <a:lstStyle/>
+                    <a:p>
+                      <a:pPr algn="l"/>
+                      <a:r>
+                        <a:rPr sz="950" b="0">
+                          <a:solidFill>
+                            <a:srgbClr val="000000"/>
+                          </a:solidFill>
+                          <a:latin typeface="Calibri"/>
+                        </a:rPr>
+                        <a:t>cheap; ν drifts in yield</a:t>
+                      </a:r>
+                    </a:p>
+                  </a:txBody>
+                  <a:tcPr/>
+                </a:tc>
+              </a:tr>
+              <a:tr h="457200">
+                <a:tc>
+                  <a:txBody>
+                    <a:bodyPr lIns="54864" rIns="54864" tIns="18288" bIns="18288" wrap="square" anchor="ctr"/>
+                    <a:lstStyle/>
+                    <a:p>
+                      <a:pPr algn="l"/>
+                      <a:r>
+                        <a:rPr sz="950" b="1">
+                          <a:solidFill>
+                            <a:srgbClr val="000000"/>
+                          </a:solidFill>
+                          <a:latin typeface="Calibri"/>
+                        </a:rPr>
+                        <a:t>Transverse markers</a:t>
+                      </a:r>
+                    </a:p>
+                  </a:txBody>
+                  <a:tcPr>
+                    <a:solidFill>
+                      <a:srgbClr val="C8E6C9"/>
+                    </a:solidFill>
+                  </a:tcPr>
+                </a:tc>
+                <a:tc>
+                  <a:txBody>
+                    <a:bodyPr lIns="54864" rIns="54864" tIns="18288" bIns="18288" wrap="square" anchor="ctr"/>
+                    <a:lstStyle/>
+                    <a:p>
+                      <a:pPr algn="l"/>
+                      <a:r>
+                        <a:rPr sz="950" b="0">
+                          <a:solidFill>
+                            <a:srgbClr val="000000"/>
+                          </a:solidFill>
+                          <a:latin typeface="Calibri"/>
+                        </a:rPr>
+                        <a:t>+2 dots across width → ε_w;  A ≈ A₀(1+ε_w)²</a:t>
+                      </a:r>
+                    </a:p>
+                  </a:txBody>
+                  <a:tcPr>
+                    <a:solidFill>
+                      <a:srgbClr val="C8E6C9"/>
+                    </a:solidFill>
+                  </a:tcPr>
+                </a:tc>
+                <a:tc>
+                  <a:txBody>
+                    <a:bodyPr lIns="54864" rIns="54864" tIns="18288" bIns="18288" wrap="square" anchor="ctr"/>
+                    <a:lstStyle/>
+                    <a:p>
+                      <a:pPr algn="l"/>
+                      <a:r>
+                        <a:rPr sz="950" b="0">
+                          <a:solidFill>
+                            <a:srgbClr val="000000"/>
+                          </a:solidFill>
+                          <a:latin typeface="Calibri"/>
+                        </a:rPr>
+                        <a:t>reuses blob-DIC; gives Poisson</a:t>
+                      </a:r>
+                    </a:p>
+                  </a:txBody>
+                  <a:tcPr>
+                    <a:solidFill>
+                      <a:srgbClr val="C8E6C9"/>
+                    </a:solidFill>
+                  </a:tcPr>
+                </a:tc>
+              </a:tr>
+              <a:tr h="457200">
+                <a:tc>
+                  <a:txBody>
+                    <a:bodyPr lIns="54864" rIns="54864" tIns="18288" bIns="18288" wrap="square" anchor="ctr"/>
+                    <a:lstStyle/>
+                    <a:p>
+                      <a:pPr algn="l"/>
+                      <a:r>
+                        <a:rPr sz="950" b="0">
+                          <a:solidFill>
+                            <a:srgbClr val="000000"/>
+                          </a:solidFill>
+                          <a:latin typeface="Calibri"/>
+                        </a:rPr>
+                        <a:t>+ edge camera</a:t>
+                      </a:r>
+                    </a:p>
+                  </a:txBody>
+                  <a:tcPr/>
+                </a:tc>
+                <a:tc>
+                  <a:txBody>
+                    <a:bodyPr lIns="54864" rIns="54864" tIns="18288" bIns="18288" wrap="square" anchor="ctr"/>
+                    <a:lstStyle/>
+                    <a:p>
+                      <a:pPr algn="l"/>
+                      <a:r>
+                        <a:rPr sz="950" b="0">
+                          <a:solidFill>
+                            <a:srgbClr val="000000"/>
+                          </a:solidFill>
+                          <a:latin typeface="Calibri"/>
+                        </a:rPr>
+                        <a:t>2nd view → thickness strain;  A = w·t</a:t>
+                      </a:r>
+                    </a:p>
+                  </a:txBody>
+                  <a:tcPr/>
+                </a:tc>
+                <a:tc>
+                  <a:txBody>
+                    <a:bodyPr lIns="54864" rIns="54864" tIns="18288" bIns="18288" wrap="square" anchor="ctr"/>
+                    <a:lstStyle/>
+                    <a:p>
+                      <a:pPr algn="l"/>
+                      <a:r>
+                        <a:rPr sz="950" b="0">
+                          <a:solidFill>
+                            <a:srgbClr val="000000"/>
+                          </a:solidFill>
+                          <a:latin typeface="Calibri"/>
+                        </a:rPr>
+                        <a:t>rigorous; FDM is orthotropic</a:t>
+                      </a:r>
+                    </a:p>
+                  </a:txBody>
+                  <a:tcPr/>
+                </a:tc>
+              </a:tr>
+              <a:tr h="457200">
+                <a:tc>
+                  <a:txBody>
+                    <a:bodyPr lIns="54864" rIns="54864" tIns="18288" bIns="18288" wrap="square" anchor="ctr"/>
+                    <a:lstStyle/>
+                    <a:p>
+                      <a:pPr algn="l"/>
+                      <a:r>
+                        <a:rPr sz="950" b="0">
+                          <a:solidFill>
+                            <a:srgbClr val="000000"/>
+                          </a:solidFill>
+                          <a:latin typeface="Calibri"/>
+                        </a:rPr>
+                        <a:t>Full-field speckle</a:t>
+                      </a:r>
+                    </a:p>
+                  </a:txBody>
+                  <a:tcPr/>
+                </a:tc>
+                <a:tc>
+                  <a:txBody>
+                    <a:bodyPr lIns="54864" rIns="54864" tIns="18288" bIns="18288" wrap="square" anchor="ctr"/>
+                    <a:lstStyle/>
+                    <a:p>
+                      <a:pPr algn="l"/>
+                      <a:r>
+                        <a:rPr sz="950" b="0">
+                          <a:solidFill>
+                            <a:srgbClr val="000000"/>
+                          </a:solidFill>
+                          <a:latin typeface="Calibri"/>
+                        </a:rPr>
+                        <a:t>fine random speckle + subset DIC</a:t>
+                      </a:r>
+                    </a:p>
+                  </a:txBody>
+                  <a:tcPr/>
+                </a:tc>
+                <a:tc>
+                  <a:txBody>
+                    <a:bodyPr lIns="54864" rIns="54864" tIns="18288" bIns="18288" wrap="square" anchor="ctr"/>
+                    <a:lstStyle/>
+                    <a:p>
+                      <a:pPr algn="l"/>
+                      <a:r>
+                        <a:rPr sz="950" b="0">
+                          <a:solidFill>
+                            <a:srgbClr val="000000"/>
+                          </a:solidFill>
+                          <a:latin typeface="Calibri"/>
+                        </a:rPr>
+                        <a:t>strain field + necking; new pipeline</a:t>
+                      </a:r>
+                    </a:p>
+                  </a:txBody>
+                  <a:tcPr/>
+                </a:tc>
+              </a:tr>
+            </a:tbl>
+          </a:graphicData>
+        </a:graphic>
+      </p:graphicFrame>
+      <p:sp>
+        <p:nvSpPr>
+          <p:cNvPr id="9" name="TextBox 8"/>
+          <p:cNvSpPr txBox="1"/>
+          <p:nvPr/>
+        </p:nvSpPr>
+        <p:spPr>
+          <a:xfrm>
+            <a:off x="6172200" y="3950208"/>
+            <a:ext cx="5715000" cy="960120"/>
+          </a:xfrm>
+          <a:prstGeom prst="rect">
+            <a:avLst/>
+          </a:prstGeom>
+          <a:noFill/>
+        </p:spPr>
+        <p:txBody>
+          <a:bodyPr wrap="square" lIns="45720" rIns="45720" tIns="18288" bIns="18288" anchor="t">
+            <a:spAutoFit/>
+          </a:bodyPr>
+          <a:lstStyle/>
+          <a:p>
+            <a:pPr algn="l"/>
+            <a:r>
+              <a:rPr sz="1050" b="0" i="1">
+                <a:solidFill>
+                  <a:srgbClr val="707070"/>
+                </a:solidFill>
+                <a:latin typeface="Calibri"/>
+              </a:rPr>
+              <a:t>Same speckle style (spray dots): just add a transverse dot pair — the current 2-marker tracker extends naturally (2 axial + 2 transverse). A finer random speckle enables full-field DIC (transverse field + necking) but needs a new analysis pipeline.</a:t>
+            </a:r>
+          </a:p>
+        </p:txBody>
+      </p:sp>
+      <p:sp>
+        <p:nvSpPr>
+          <p:cNvPr id="10" name="Rectangle 9"/>
+          <p:cNvSpPr/>
+          <p:nvPr/>
+        </p:nvSpPr>
+        <p:spPr>
+          <a:xfrm>
+            <a:off x="365760" y="5074920"/>
+            <a:ext cx="11521440" cy="932688"/>
+          </a:xfrm>
+          <a:prstGeom prst="rect">
+            <a:avLst/>
+          </a:prstGeom>
+          <a:solidFill>
+            <a:srgbClr val="E7F1F8"/>
+          </a:solidFill>
+          <a:ln>
+            <a:noFill/>
+          </a:ln>
+        </p:spPr>
+        <p:style>
+          <a:lnRef idx="1">
+            <a:schemeClr val="accent1"/>
+          </a:lnRef>
+          <a:fillRef idx="3">
+            <a:schemeClr val="accent1"/>
+          </a:fillRef>
+          <a:effectRef idx="2">
+            <a:schemeClr val="accent1"/>
+          </a:effectRef>
+          <a:fontRef idx="minor">
+            <a:schemeClr val="lt1"/>
+          </a:fontRef>
+        </p:style>
+        <p:txBody>
+          <a:bodyPr rtlCol="0" anchor="ctr" wrap="square" lIns="109728" rIns="109728"/>
+          <a:lstStyle/>
+          <a:p>
+            <a:pPr algn="ctr"/>
+            <a:r>
+              <a:rPr sz="1100" b="1">
+                <a:solidFill>
+                  <a:srgbClr val="000000"/>
+                </a:solidFill>
+                <a:latin typeface="Calibri"/>
+              </a:rPr>
+              <a:t>RECOMMENDED — add a TRANSVERSE marker pair (green row): measure width contraction ε_w with the existing DIC (bonus: Poisson's ratio). Then A(t) = A₀(1+ε_w)²,  σ_cauchy = F / A(t),  plotted vs true strain ln(1+ε). Keep ENGINEERING stress as the reported / validated value (datasheet &amp; journal basis); report Cauchy as the physically-accurate supplement. Add an edge camera for through-thickness if FDM orthotropy matters.</a:t>
+            </a:r>
+          </a:p>
+        </p:txBody>
+      </p:sp>
+      <p:sp>
+        <p:nvSpPr>
+          <p:cNvPr id="11" name="TextBox 10"/>
+          <p:cNvSpPr txBox="1"/>
+          <p:nvPr/>
+        </p:nvSpPr>
+        <p:spPr>
+          <a:xfrm>
+            <a:off x="548640" y="6400800"/>
+            <a:ext cx="11064240" cy="365760"/>
+          </a:xfrm>
+          <a:prstGeom prst="rect">
+            <a:avLst/>
+          </a:prstGeom>
+          <a:noFill/>
+        </p:spPr>
+        <p:txBody>
+          <a:bodyPr wrap="square" lIns="45720" rIns="45720" tIns="18288" bIns="18288" anchor="t">
+            <a:spAutoFit/>
+          </a:bodyPr>
+          <a:lstStyle/>
+          <a:p>
+            <a:pPr algn="l"/>
+            <a:r>
+              <a:rPr sz="1200" b="0" i="1">
+                <a:solidFill>
+                  <a:srgbClr val="707070"/>
+                </a:solidFill>
+                <a:latin typeface="Calibri"/>
+              </a:rPr>
+              <a:t>Current V6 report &amp; plots = engineering stress (nominal 80 mm²). True/Cauchy needs the deforming area; post-necking needs full-field DIC or markers at the neck.</a:t>
+            </a:r>
+          </a:p>
+        </p:txBody>
+      </p:sp>
+      <p:sp>
+        <p:nvSpPr>
+          <p:cNvPr id="12" name="TextBox 11"/>
+          <p:cNvSpPr txBox="1"/>
+          <p:nvPr/>
+        </p:nvSpPr>
+        <p:spPr>
+          <a:xfrm>
+            <a:off x="457200" y="6446520"/>
+            <a:ext cx="640080" cy="274320"/>
+          </a:xfrm>
+          <a:prstGeom prst="rect">
+            <a:avLst/>
+          </a:prstGeom>
+          <a:noFill/>
+        </p:spPr>
+        <p:txBody>
+          <a:bodyPr wrap="square" lIns="45720" rIns="45720" tIns="18288" bIns="18288" anchor="t">
+            <a:spAutoFit/>
+          </a:bodyPr>
+          <a:lstStyle/>
+          <a:p>
+            <a:pPr algn="l"/>
+            <a:r>
+              <a:rPr sz="1000" b="0" i="0">
+                <a:solidFill>
+                  <a:srgbClr val="707070"/>
+                </a:solidFill>
+                <a:latin typeface="Calibri"/>
+              </a:rPr>
+              <a:t>163</a:t>
             </a:r>
           </a:p>
         </p:txBody>

--- a/V6a_8_6_20_slides.pptx
+++ b/V6a_8_6_20_slides.pptx
@@ -28,6 +28,7 @@
     <p:sldId id="276" r:id="rId27"/>
     <p:sldId id="277" r:id="rId28"/>
     <p:sldId id="278" r:id="rId29"/>
+    <p:sldId id="279" r:id="rId30"/>
   </p:sldIdLst>
   <p:sldSz cx="12191695" cy="6858000" type="screen4x3"/>
   <p:notesSz cx="6858000" cy="9144000"/>
@@ -16700,6 +16701,694 @@
                 <a:latin typeface="Calibri"/>
               </a:rPr>
               <a:t>163</a:t>
+            </a:r>
+          </a:p>
+        </p:txBody>
+      </p:sp>
+    </p:spTree>
+  </p:cSld>
+  <p:clrMapOvr>
+    <a:masterClrMapping/>
+  </p:clrMapOvr>
+</p:sld>
+</file>
+
+<file path=ppt/slides/slide24.xml><?xml version="1.0" encoding="utf-8"?>
+<p:sld xmlns:a="http://schemas.openxmlformats.org/drawingml/2006/main" xmlns:p="http://schemas.openxmlformats.org/presentationml/2006/main" xmlns:r="http://schemas.openxmlformats.org/officeDocument/2006/relationships">
+  <p:cSld>
+    <p:spTree>
+      <p:nvGrpSpPr>
+        <p:cNvPr id="1" name=""/>
+        <p:cNvGrpSpPr/>
+        <p:nvPr/>
+      </p:nvGrpSpPr>
+      <p:grpSpPr/>
+      <p:sp>
+        <p:nvSpPr>
+          <p:cNvPr id="2" name="TextBox 1"/>
+          <p:cNvSpPr txBox="1"/>
+          <p:nvPr/>
+        </p:nvSpPr>
+        <p:spPr>
+          <a:xfrm>
+            <a:off x="11155680" y="274320"/>
+            <a:ext cx="914400" cy="274320"/>
+          </a:xfrm>
+          <a:prstGeom prst="rect">
+            <a:avLst/>
+          </a:prstGeom>
+          <a:noFill/>
+        </p:spPr>
+        <p:txBody>
+          <a:bodyPr wrap="square" lIns="45720" rIns="45720" tIns="18288" bIns="18288" anchor="t">
+            <a:spAutoFit/>
+          </a:bodyPr>
+          <a:lstStyle/>
+          <a:p>
+            <a:pPr algn="r"/>
+            <a:r>
+              <a:rPr sz="800" b="1" i="0">
+                <a:solidFill>
+                  <a:srgbClr val="707070"/>
+                </a:solidFill>
+                <a:latin typeface="Calibri"/>
+              </a:rPr>
+              <a:t>JÖNKÖPING UNIVERSITY</a:t>
+            </a:r>
+          </a:p>
+        </p:txBody>
+      </p:sp>
+      <p:sp>
+        <p:nvSpPr>
+          <p:cNvPr id="3" name="Rectangle 2"/>
+          <p:cNvSpPr/>
+          <p:nvPr/>
+        </p:nvSpPr>
+        <p:spPr>
+          <a:xfrm>
+            <a:off x="457200" y="411480"/>
+            <a:ext cx="457200" cy="73152"/>
+          </a:xfrm>
+          <a:prstGeom prst="rect">
+            <a:avLst/>
+          </a:prstGeom>
+          <a:solidFill>
+            <a:srgbClr val="A9D6EF"/>
+          </a:solidFill>
+          <a:ln>
+            <a:noFill/>
+          </a:ln>
+        </p:spPr>
+        <p:style>
+          <a:lnRef idx="1">
+            <a:schemeClr val="accent1"/>
+          </a:lnRef>
+          <a:fillRef idx="3">
+            <a:schemeClr val="accent1"/>
+          </a:fillRef>
+          <a:effectRef idx="2">
+            <a:schemeClr val="accent1"/>
+          </a:effectRef>
+          <a:fontRef idx="minor">
+            <a:schemeClr val="lt1"/>
+          </a:fontRef>
+        </p:style>
+        <p:txBody>
+          <a:bodyPr rtlCol="0" anchor="ctr"/>
+          <a:lstStyle/>
+          <a:p>
+            <a:pPr algn="ctr"/>
+          </a:p>
+        </p:txBody>
+      </p:sp>
+      <p:sp>
+        <p:nvSpPr>
+          <p:cNvPr id="4" name="TextBox 3"/>
+          <p:cNvSpPr txBox="1"/>
+          <p:nvPr/>
+        </p:nvSpPr>
+        <p:spPr>
+          <a:xfrm>
+            <a:off x="457200" y="502920"/>
+            <a:ext cx="11430000" cy="822960"/>
+          </a:xfrm>
+          <a:prstGeom prst="rect">
+            <a:avLst/>
+          </a:prstGeom>
+          <a:noFill/>
+        </p:spPr>
+        <p:txBody>
+          <a:bodyPr wrap="square" lIns="45720" rIns="45720" tIns="18288" bIns="18288" anchor="t">
+            <a:spAutoFit/>
+          </a:bodyPr>
+          <a:lstStyle/>
+          <a:p>
+            <a:pPr algn="l"/>
+            <a:r>
+              <a:rPr sz="3000" b="0" i="0">
+                <a:solidFill>
+                  <a:srgbClr val="000000"/>
+                </a:solidFill>
+                <a:latin typeface="Calibri Light"/>
+              </a:rPr>
+              <a:t>MEASURING POISSON'S RATIO &amp; TRUE STRESS — WITHOUT TRANSVERSE DOTS</a:t>
+            </a:r>
+          </a:p>
+        </p:txBody>
+      </p:sp>
+      <p:sp>
+        <p:nvSpPr>
+          <p:cNvPr id="5" name="TextBox 4"/>
+          <p:cNvSpPr txBox="1"/>
+          <p:nvPr/>
+        </p:nvSpPr>
+        <p:spPr>
+          <a:xfrm>
+            <a:off x="365760" y="1170432"/>
+            <a:ext cx="5532120" cy="365760"/>
+          </a:xfrm>
+          <a:prstGeom prst="rect">
+            <a:avLst/>
+          </a:prstGeom>
+          <a:noFill/>
+        </p:spPr>
+        <p:txBody>
+          <a:bodyPr wrap="square" lIns="45720" rIns="45720" tIns="18288" bIns="18288" anchor="t">
+            <a:spAutoFit/>
+          </a:bodyPr>
+          <a:lstStyle/>
+          <a:p>
+            <a:pPr algn="l"/>
+            <a:r>
+              <a:rPr sz="1600" b="0" i="0">
+                <a:solidFill>
+                  <a:srgbClr val="707070"/>
+                </a:solidFill>
+                <a:latin typeface="Calibri"/>
+              </a:rPr>
+              <a:t>Why not transverse dots — and the fix</a:t>
+            </a:r>
+          </a:p>
+        </p:txBody>
+      </p:sp>
+      <p:sp>
+        <p:nvSpPr>
+          <p:cNvPr id="6" name="TextBox 5"/>
+          <p:cNvSpPr txBox="1"/>
+          <p:nvPr/>
+        </p:nvSpPr>
+        <p:spPr>
+          <a:xfrm>
+            <a:off x="365760" y="1554480"/>
+            <a:ext cx="5532120" cy="3657600"/>
+          </a:xfrm>
+          <a:prstGeom prst="rect">
+            <a:avLst/>
+          </a:prstGeom>
+          <a:noFill/>
+        </p:spPr>
+        <p:txBody>
+          <a:bodyPr wrap="square" lIns="45720" rIns="45720" tIns="18288" bIns="18288" anchor="t">
+            <a:spAutoFit/>
+          </a:bodyPr>
+          <a:lstStyle/>
+          <a:p>
+            <a:pPr algn="l"/>
+            <a:r>
+              <a:rPr sz="1150" b="0" i="0">
+                <a:solidFill>
+                  <a:srgbClr val="000000"/>
+                </a:solidFill>
+                <a:latin typeface="Calibri"/>
+              </a:rPr>
+              <a:t>The mini-dogbone GAUGE is too NARROW to fit a transverse dot pair, and at ~20 px/mm the elastic width change is SUB-PIXEL for discrete dots — added markers cannot resolve it.
+The fix: don't add markers — measure the specimen's OWN EDGES. Track the left &amp; right silhouette edges across the gauge and average the width; as it necks, that width shrinks:
+    ε_w = (W₀ - W)/W₀,   ν = -ε_w/ε_axial,   A = W·t
+All three routes below return a MEASURED value (no assumed ν) — written to the CSV as real data, not an estimate.</a:t>
+            </a:r>
+          </a:p>
+        </p:txBody>
+      </p:sp>
+      <p:sp>
+        <p:nvSpPr>
+          <p:cNvPr id="7" name="TextBox 6"/>
+          <p:cNvSpPr txBox="1"/>
+          <p:nvPr/>
+        </p:nvSpPr>
+        <p:spPr>
+          <a:xfrm>
+            <a:off x="6035040" y="1170432"/>
+            <a:ext cx="5852160" cy="365760"/>
+          </a:xfrm>
+          <a:prstGeom prst="rect">
+            <a:avLst/>
+          </a:prstGeom>
+          <a:noFill/>
+        </p:spPr>
+        <p:txBody>
+          <a:bodyPr wrap="square" lIns="45720" rIns="45720" tIns="18288" bIns="18288" anchor="t">
+            <a:spAutoFit/>
+          </a:bodyPr>
+          <a:lstStyle/>
+          <a:p>
+            <a:pPr algn="l"/>
+            <a:r>
+              <a:rPr sz="1600" b="0" i="0">
+                <a:solidFill>
+                  <a:srgbClr val="707070"/>
+                </a:solidFill>
+                <a:latin typeface="Calibri"/>
+              </a:rPr>
+              <a:t>Three ways to MEASURE it (no transverse dots)</a:t>
+            </a:r>
+          </a:p>
+        </p:txBody>
+      </p:sp>
+      <p:graphicFrame>
+        <p:nvGraphicFramePr>
+          <p:cNvPr id="8" name="Table 7"/>
+          <p:cNvGraphicFramePr>
+            <a:graphicFrameLocks noGrp="1"/>
+          </p:cNvGraphicFramePr>
+          <p:nvPr/>
+        </p:nvGraphicFramePr>
+        <p:xfrm>
+          <a:off x="6035040" y="1554480"/>
+          <a:ext cx="5852160" cy="2468880"/>
+        </p:xfrm>
+        <a:graphic>
+          <a:graphicData uri="http://schemas.openxmlformats.org/drawingml/2006/table">
+            <a:tbl>
+              <a:tblPr firstRow="1" bandRow="1">
+                <a:tableStyleId>{5C22544A-7EE6-4342-B048-85BDC9FD1C3A}</a:tableStyleId>
+              </a:tblPr>
+              <a:tblGrid>
+                <a:gridCol w="1554480"/>
+                <a:gridCol w="2743200"/>
+                <a:gridCol w="1554480"/>
+              </a:tblGrid>
+              <a:tr h="617220">
+                <a:tc>
+                  <a:txBody>
+                    <a:bodyPr lIns="54864" rIns="54864" tIns="18288" bIns="18288" wrap="square" anchor="ctr"/>
+                    <a:lstStyle/>
+                    <a:p>
+                      <a:pPr algn="l"/>
+                      <a:r>
+                        <a:rPr sz="1000" b="1">
+                          <a:solidFill>
+                            <a:srgbClr val="FFFFFF"/>
+                          </a:solidFill>
+                          <a:latin typeface="Calibri"/>
+                        </a:rPr>
+                        <a:t>Route</a:t>
+                      </a:r>
+                    </a:p>
+                  </a:txBody>
+                  <a:tcPr>
+                    <a:solidFill>
+                      <a:srgbClr val="143D2F"/>
+                    </a:solidFill>
+                  </a:tcPr>
+                </a:tc>
+                <a:tc>
+                  <a:txBody>
+                    <a:bodyPr lIns="54864" rIns="54864" tIns="18288" bIns="18288" wrap="square" anchor="ctr"/>
+                    <a:lstStyle/>
+                    <a:p>
+                      <a:pPr algn="l"/>
+                      <a:r>
+                        <a:rPr sz="1000" b="1">
+                          <a:solidFill>
+                            <a:srgbClr val="FFFFFF"/>
+                          </a:solidFill>
+                          <a:latin typeface="Calibri"/>
+                        </a:rPr>
+                        <a:t>How it works</a:t>
+                      </a:r>
+                    </a:p>
+                  </a:txBody>
+                  <a:tcPr>
+                    <a:solidFill>
+                      <a:srgbClr val="143D2F"/>
+                    </a:solidFill>
+                  </a:tcPr>
+                </a:tc>
+                <a:tc>
+                  <a:txBody>
+                    <a:bodyPr lIns="54864" rIns="54864" tIns="18288" bIns="18288" wrap="square" anchor="ctr"/>
+                    <a:lstStyle/>
+                    <a:p>
+                      <a:pPr algn="l"/>
+                      <a:r>
+                        <a:rPr sz="1000" b="1">
+                          <a:solidFill>
+                            <a:srgbClr val="FFFFFF"/>
+                          </a:solidFill>
+                          <a:latin typeface="Calibri"/>
+                        </a:rPr>
+                        <a:t>Needs</a:t>
+                      </a:r>
+                    </a:p>
+                  </a:txBody>
+                  <a:tcPr>
+                    <a:solidFill>
+                      <a:srgbClr val="143D2F"/>
+                    </a:solidFill>
+                  </a:tcPr>
+                </a:tc>
+              </a:tr>
+              <a:tr h="617220">
+                <a:tc>
+                  <a:txBody>
+                    <a:bodyPr lIns="54864" rIns="54864" tIns="18288" bIns="18288" wrap="square" anchor="ctr"/>
+                    <a:lstStyle/>
+                    <a:p>
+                      <a:pPr algn="l"/>
+                      <a:r>
+                        <a:rPr sz="900" b="1">
+                          <a:solidFill>
+                            <a:srgbClr val="000000"/>
+                          </a:solidFill>
+                          <a:latin typeface="Calibri"/>
+                        </a:rPr>
+                        <a:t>1  Edge / silhouette
+    width tracking</a:t>
+                      </a:r>
+                    </a:p>
+                  </a:txBody>
+                  <a:tcPr>
+                    <a:solidFill>
+                      <a:srgbClr val="C8E6C9"/>
+                    </a:solidFill>
+                  </a:tcPr>
+                </a:tc>
+                <a:tc>
+                  <a:txBody>
+                    <a:bodyPr lIns="54864" rIns="54864" tIns="18288" bIns="18288" wrap="square" anchor="ctr"/>
+                    <a:lstStyle/>
+                    <a:p>
+                      <a:pPr algn="l"/>
+                      <a:r>
+                        <a:rPr sz="900" b="0">
+                          <a:solidFill>
+                            <a:srgbClr val="000000"/>
+                          </a:solidFill>
+                          <a:latin typeface="Calibri"/>
+                        </a:rPr>
+                        <a:t>find the specimen's L &amp; R edges across the gauge; average width over 100s of rows -&gt; ε_w each frame</a:t>
+                      </a:r>
+                    </a:p>
+                  </a:txBody>
+                  <a:tcPr>
+                    <a:solidFill>
+                      <a:srgbClr val="C8E6C9"/>
+                    </a:solidFill>
+                  </a:tcPr>
+                </a:tc>
+                <a:tc>
+                  <a:txBody>
+                    <a:bodyPr lIns="54864" rIns="54864" tIns="18288" bIns="18288" wrap="square" anchor="ctr"/>
+                    <a:lstStyle/>
+                    <a:p>
+                      <a:pPr algn="l"/>
+                      <a:r>
+                        <a:rPr sz="900" b="0">
+                          <a:solidFill>
+                            <a:srgbClr val="000000"/>
+                          </a:solidFill>
+                          <a:latin typeface="Calibri"/>
+                        </a:rPr>
+                        <a:t>matte-black backdrop;
+reuses THIS camera</a:t>
+                      </a:r>
+                    </a:p>
+                  </a:txBody>
+                  <a:tcPr>
+                    <a:solidFill>
+                      <a:srgbClr val="C8E6C9"/>
+                    </a:solidFill>
+                  </a:tcPr>
+                </a:tc>
+              </a:tr>
+              <a:tr h="617220">
+                <a:tc>
+                  <a:txBody>
+                    <a:bodyPr lIns="54864" rIns="54864" tIns="18288" bIns="18288" wrap="square" anchor="ctr"/>
+                    <a:lstStyle/>
+                    <a:p>
+                      <a:pPr algn="l"/>
+                      <a:r>
+                        <a:rPr sz="900" b="0">
+                          <a:solidFill>
+                            <a:srgbClr val="000000"/>
+                          </a:solidFill>
+                          <a:latin typeface="Calibri"/>
+                        </a:rPr>
+                        <a:t>2  Full-field
+    speckle DIC</a:t>
+                      </a:r>
+                    </a:p>
+                  </a:txBody>
+                  <a:tcPr/>
+                </a:tc>
+                <a:tc>
+                  <a:txBody>
+                    <a:bodyPr lIns="54864" rIns="54864" tIns="18288" bIns="18288" wrap="square" anchor="ctr"/>
+                    <a:lstStyle/>
+                    <a:p>
+                      <a:pPr algn="l"/>
+                      <a:r>
+                        <a:rPr sz="900" b="0">
+                          <a:solidFill>
+                            <a:srgbClr val="000000"/>
+                          </a:solidFill>
+                          <a:latin typeface="Calibri"/>
+                        </a:rPr>
+                        <a:t>fine random speckle + subset correlation (Ncorr / muDIC, offline) -&gt; full axial + transverse strain field</a:t>
+                      </a:r>
+                    </a:p>
+                  </a:txBody>
+                  <a:tcPr/>
+                </a:tc>
+                <a:tc>
+                  <a:txBody>
+                    <a:bodyPr lIns="54864" rIns="54864" tIns="18288" bIns="18288" wrap="square" anchor="ctr"/>
+                    <a:lstStyle/>
+                    <a:p>
+                      <a:pPr algn="l"/>
+                      <a:r>
+                        <a:rPr sz="900" b="0">
+                          <a:solidFill>
+                            <a:srgbClr val="000000"/>
+                          </a:solidFill>
+                          <a:latin typeface="Calibri"/>
+                        </a:rPr>
+                        <a:t>speckle + new
+analysis pipeline</a:t>
+                      </a:r>
+                    </a:p>
+                  </a:txBody>
+                  <a:tcPr/>
+                </a:tc>
+              </a:tr>
+              <a:tr h="617220">
+                <a:tc>
+                  <a:txBody>
+                    <a:bodyPr lIns="54864" rIns="54864" tIns="18288" bIns="18288" wrap="square" anchor="ctr"/>
+                    <a:lstStyle/>
+                    <a:p>
+                      <a:pPr algn="l"/>
+                      <a:r>
+                        <a:rPr sz="900" b="0">
+                          <a:solidFill>
+                            <a:srgbClr val="000000"/>
+                          </a:solidFill>
+                          <a:latin typeface="Calibri"/>
+                        </a:rPr>
+                        <a:t>3  Hardware probe</a:t>
+                      </a:r>
+                    </a:p>
+                  </a:txBody>
+                  <a:tcPr/>
+                </a:tc>
+                <a:tc>
+                  <a:txBody>
+                    <a:bodyPr lIns="54864" rIns="54864" tIns="18288" bIns="18288" wrap="square" anchor="ctr"/>
+                    <a:lstStyle/>
+                    <a:p>
+                      <a:pPr algn="l"/>
+                      <a:r>
+                        <a:rPr sz="900" b="0">
+                          <a:solidFill>
+                            <a:srgbClr val="000000"/>
+                          </a:solidFill>
+                          <a:latin typeface="Calibri"/>
+                        </a:rPr>
+                        <a:t>2nd side camera (thickness), laser micrometer, or clip-on transverse extensometer</a:t>
+                      </a:r>
+                    </a:p>
+                  </a:txBody>
+                  <a:tcPr/>
+                </a:tc>
+                <a:tc>
+                  <a:txBody>
+                    <a:bodyPr lIns="54864" rIns="54864" tIns="18288" bIns="18288" wrap="square" anchor="ctr"/>
+                    <a:lstStyle/>
+                    <a:p>
+                      <a:pPr algn="l"/>
+                      <a:r>
+                        <a:rPr sz="900" b="0">
+                          <a:solidFill>
+                            <a:srgbClr val="000000"/>
+                          </a:solidFill>
+                          <a:latin typeface="Calibri"/>
+                        </a:rPr>
+                        <a:t>extra hardware;
+lab-grade</a:t>
+                      </a:r>
+                    </a:p>
+                  </a:txBody>
+                  <a:tcPr/>
+                </a:tc>
+              </a:tr>
+            </a:tbl>
+          </a:graphicData>
+        </a:graphic>
+      </p:graphicFrame>
+      <p:sp>
+        <p:nvSpPr>
+          <p:cNvPr id="9" name="TextBox 8"/>
+          <p:cNvSpPr txBox="1"/>
+          <p:nvPr/>
+        </p:nvSpPr>
+        <p:spPr>
+          <a:xfrm>
+            <a:off x="6035040" y="4114800"/>
+            <a:ext cx="5852160" cy="914400"/>
+          </a:xfrm>
+          <a:prstGeom prst="rect">
+            <a:avLst/>
+          </a:prstGeom>
+          <a:noFill/>
+        </p:spPr>
+        <p:txBody>
+          <a:bodyPr wrap="square" lIns="45720" rIns="45720" tIns="18288" bIns="18288" anchor="t">
+            <a:spAutoFit/>
+          </a:bodyPr>
+          <a:lstStyle/>
+          <a:p>
+            <a:pPr algn="l"/>
+            <a:r>
+              <a:rPr sz="1050" b="0" i="1">
+                <a:solidFill>
+                  <a:srgbClr val="707070"/>
+                </a:solidFill>
+                <a:latin typeface="Calibri"/>
+              </a:rPr>
+              <a:t>Why #1 works at 20 px/mm: one edge is sub-pixel, but averaging the width along the whole gauge (100s of rows) cuts the noise ~10x to ~0.01 px — the ~0.5 px elastic width change is then well resolved. It only needs CRISP edges = a dark background behind the specimen.</a:t>
+            </a:r>
+          </a:p>
+        </p:txBody>
+      </p:sp>
+      <p:sp>
+        <p:nvSpPr>
+          <p:cNvPr id="10" name="Rectangle 9"/>
+          <p:cNvSpPr/>
+          <p:nvPr/>
+        </p:nvSpPr>
+        <p:spPr>
+          <a:xfrm>
+            <a:off x="365760" y="5120640"/>
+            <a:ext cx="11521440" cy="932688"/>
+          </a:xfrm>
+          <a:prstGeom prst="rect">
+            <a:avLst/>
+          </a:prstGeom>
+          <a:solidFill>
+            <a:srgbClr val="E7F1F8"/>
+          </a:solidFill>
+          <a:ln>
+            <a:noFill/>
+          </a:ln>
+        </p:spPr>
+        <p:style>
+          <a:lnRef idx="1">
+            <a:schemeClr val="accent1"/>
+          </a:lnRef>
+          <a:fillRef idx="3">
+            <a:schemeClr val="accent1"/>
+          </a:fillRef>
+          <a:effectRef idx="2">
+            <a:schemeClr val="accent1"/>
+          </a:effectRef>
+          <a:fontRef idx="minor">
+            <a:schemeClr val="lt1"/>
+          </a:fontRef>
+        </p:style>
+        <p:txBody>
+          <a:bodyPr rtlCol="0" anchor="ctr" wrap="square" lIns="109728" rIns="109728"/>
+          <a:lstStyle/>
+          <a:p>
+            <a:pPr algn="ctr"/>
+            <a:r>
+              <a:rPr sz="1100" b="1">
+                <a:solidFill>
+                  <a:srgbClr val="000000"/>
+                </a:solidFill>
+                <a:latin typeface="Calibri"/>
+              </a:rPr>
+              <a:t>RECOMMENDED — EDGE-WIDTH TRACKING + a matte-black backdrop (e.g. spray-painted MDF a few cm behind the gauge): the only route that MEASURES Poisson's ratio &amp; true Cauchy stress while reusing THIS camera and specimen. Matte finish avoids LED glare; the gap softens cast shadows. Keep ENGINEERING stress as the reported / validated basis — Cauchy as the measured supplement.</a:t>
+            </a:r>
+          </a:p>
+        </p:txBody>
+      </p:sp>
+      <p:sp>
+        <p:nvSpPr>
+          <p:cNvPr id="11" name="TextBox 10"/>
+          <p:cNvSpPr txBox="1"/>
+          <p:nvPr/>
+        </p:nvSpPr>
+        <p:spPr>
+          <a:xfrm>
+            <a:off x="548640" y="6400800"/>
+            <a:ext cx="11064240" cy="365760"/>
+          </a:xfrm>
+          <a:prstGeom prst="rect">
+            <a:avLst/>
+          </a:prstGeom>
+          <a:noFill/>
+        </p:spPr>
+        <p:txBody>
+          <a:bodyPr wrap="square" lIns="45720" rIns="45720" tIns="18288" bIns="18288" anchor="t">
+            <a:spAutoFit/>
+          </a:bodyPr>
+          <a:lstStyle/>
+          <a:p>
+            <a:pPr algn="l"/>
+            <a:r>
+              <a:rPr sz="1200" b="0" i="1">
+                <a:solidFill>
+                  <a:srgbClr val="707070"/>
+                </a:solidFill>
+                <a:latin typeface="Calibri"/>
+              </a:rPr>
+              <a:t>Supersedes the transverse-marker idea on the previous slide: the narrow gauge + camera resolution rule out a transverse dot pair. Measure the specimen's own edges (or full-field speckle) instead.</a:t>
+            </a:r>
+          </a:p>
+        </p:txBody>
+      </p:sp>
+      <p:sp>
+        <p:nvSpPr>
+          <p:cNvPr id="12" name="TextBox 11"/>
+          <p:cNvSpPr txBox="1"/>
+          <p:nvPr/>
+        </p:nvSpPr>
+        <p:spPr>
+          <a:xfrm>
+            <a:off x="457200" y="6446520"/>
+            <a:ext cx="640080" cy="274320"/>
+          </a:xfrm>
+          <a:prstGeom prst="rect">
+            <a:avLst/>
+          </a:prstGeom>
+          <a:noFill/>
+        </p:spPr>
+        <p:txBody>
+          <a:bodyPr wrap="square" lIns="45720" rIns="45720" tIns="18288" bIns="18288" anchor="t">
+            <a:spAutoFit/>
+          </a:bodyPr>
+          <a:lstStyle/>
+          <a:p>
+            <a:pPr algn="l"/>
+            <a:r>
+              <a:rPr sz="1000" b="0" i="0">
+                <a:solidFill>
+                  <a:srgbClr val="707070"/>
+                </a:solidFill>
+                <a:latin typeface="Calibri"/>
+              </a:rPr>
+              <a:t>164</a:t>
             </a:r>
           </a:p>
         </p:txBody>

--- a/V6a_8_6_20_slides.pptx
+++ b/V6a_8_6_20_slides.pptx
@@ -29,6 +29,10 @@
     <p:sldId id="277" r:id="rId28"/>
     <p:sldId id="278" r:id="rId29"/>
     <p:sldId id="279" r:id="rId30"/>
+    <p:sldId id="280" r:id="rId31"/>
+    <p:sldId id="281" r:id="rId32"/>
+    <p:sldId id="282" r:id="rId33"/>
+    <p:sldId id="283" r:id="rId34"/>
   </p:sldIdLst>
   <p:sldSz cx="12191695" cy="6858000" type="screen4x3"/>
   <p:notesSz cx="6858000" cy="9144000"/>
@@ -17389,6 +17393,3034 @@
                 <a:latin typeface="Calibri"/>
               </a:rPr>
               <a:t>164</a:t>
+            </a:r>
+          </a:p>
+        </p:txBody>
+      </p:sp>
+    </p:spTree>
+  </p:cSld>
+  <p:clrMapOvr>
+    <a:masterClrMapping/>
+  </p:clrMapOvr>
+</p:sld>
+</file>
+
+<file path=ppt/slides/slide25.xml><?xml version="1.0" encoding="utf-8"?>
+<p:sld xmlns:a="http://schemas.openxmlformats.org/drawingml/2006/main" xmlns:p="http://schemas.openxmlformats.org/presentationml/2006/main" xmlns:r="http://schemas.openxmlformats.org/officeDocument/2006/relationships">
+  <p:cSld>
+    <p:spTree>
+      <p:nvGrpSpPr>
+        <p:cNvPr id="1" name=""/>
+        <p:cNvGrpSpPr/>
+        <p:nvPr/>
+      </p:nvGrpSpPr>
+      <p:grpSpPr/>
+      <p:sp>
+        <p:nvSpPr>
+          <p:cNvPr id="2" name="TextBox 1"/>
+          <p:cNvSpPr txBox="1"/>
+          <p:nvPr/>
+        </p:nvSpPr>
+        <p:spPr>
+          <a:xfrm>
+            <a:off x="11155680" y="274320"/>
+            <a:ext cx="914400" cy="274320"/>
+          </a:xfrm>
+          <a:prstGeom prst="rect">
+            <a:avLst/>
+          </a:prstGeom>
+          <a:noFill/>
+        </p:spPr>
+        <p:txBody>
+          <a:bodyPr wrap="square" lIns="45720" rIns="45720" tIns="18288" bIns="18288" anchor="t">
+            <a:spAutoFit/>
+          </a:bodyPr>
+          <a:lstStyle/>
+          <a:p>
+            <a:pPr algn="r"/>
+            <a:r>
+              <a:rPr sz="800" b="1" i="0">
+                <a:solidFill>
+                  <a:srgbClr val="707070"/>
+                </a:solidFill>
+                <a:latin typeface="Calibri"/>
+              </a:rPr>
+              <a:t>JÖNKÖPING UNIVERSITY</a:t>
+            </a:r>
+          </a:p>
+        </p:txBody>
+      </p:sp>
+      <p:sp>
+        <p:nvSpPr>
+          <p:cNvPr id="3" name="Rectangle 2"/>
+          <p:cNvSpPr/>
+          <p:nvPr/>
+        </p:nvSpPr>
+        <p:spPr>
+          <a:xfrm>
+            <a:off x="457200" y="411480"/>
+            <a:ext cx="457200" cy="73152"/>
+          </a:xfrm>
+          <a:prstGeom prst="rect">
+            <a:avLst/>
+          </a:prstGeom>
+          <a:solidFill>
+            <a:srgbClr val="A9D6EF"/>
+          </a:solidFill>
+          <a:ln>
+            <a:noFill/>
+          </a:ln>
+        </p:spPr>
+        <p:style>
+          <a:lnRef idx="1">
+            <a:schemeClr val="accent1"/>
+          </a:lnRef>
+          <a:fillRef idx="3">
+            <a:schemeClr val="accent1"/>
+          </a:fillRef>
+          <a:effectRef idx="2">
+            <a:schemeClr val="accent1"/>
+          </a:effectRef>
+          <a:fontRef idx="minor">
+            <a:schemeClr val="lt1"/>
+          </a:fontRef>
+        </p:style>
+        <p:txBody>
+          <a:bodyPr rtlCol="0" anchor="ctr"/>
+          <a:lstStyle/>
+          <a:p>
+            <a:pPr algn="ctr"/>
+          </a:p>
+        </p:txBody>
+      </p:sp>
+      <p:sp>
+        <p:nvSpPr>
+          <p:cNvPr id="4" name="TextBox 3"/>
+          <p:cNvSpPr txBox="1"/>
+          <p:nvPr/>
+        </p:nvSpPr>
+        <p:spPr>
+          <a:xfrm>
+            <a:off x="457200" y="502920"/>
+            <a:ext cx="11430000" cy="822960"/>
+          </a:xfrm>
+          <a:prstGeom prst="rect">
+            <a:avLst/>
+          </a:prstGeom>
+          <a:noFill/>
+        </p:spPr>
+        <p:txBody>
+          <a:bodyPr wrap="square" lIns="45720" rIns="45720" tIns="18288" bIns="18288" anchor="t">
+            <a:spAutoFit/>
+          </a:bodyPr>
+          <a:lstStyle/>
+          <a:p>
+            <a:pPr algn="l"/>
+            <a:r>
+              <a:rPr sz="3000" b="0" i="0">
+                <a:solidFill>
+                  <a:srgbClr val="000000"/>
+                </a:solidFill>
+                <a:latin typeface="Calibri Light"/>
+              </a:rPr>
+              <a:t>SOFTWARE ROADMAP — ADVANCED FEATURES &amp; EASE OF USE: STATUS</a:t>
+            </a:r>
+          </a:p>
+        </p:txBody>
+      </p:sp>
+      <p:sp>
+        <p:nvSpPr>
+          <p:cNvPr id="5" name="TextBox 4"/>
+          <p:cNvSpPr txBox="1"/>
+          <p:nvPr/>
+        </p:nvSpPr>
+        <p:spPr>
+          <a:xfrm>
+            <a:off x="365760" y="1170432"/>
+            <a:ext cx="11475720" cy="566928"/>
+          </a:xfrm>
+          <a:prstGeom prst="rect">
+            <a:avLst/>
+          </a:prstGeom>
+          <a:noFill/>
+        </p:spPr>
+        <p:txBody>
+          <a:bodyPr wrap="square" lIns="45720" rIns="45720" tIns="18288" bIns="18288" anchor="t">
+            <a:spAutoFit/>
+          </a:bodyPr>
+          <a:lstStyle/>
+          <a:p>
+            <a:pPr algn="l"/>
+            <a:r>
+              <a:rPr sz="1200" b="0" i="0">
+                <a:solidFill>
+                  <a:srgbClr val="000000"/>
+                </a:solidFill>
+                <a:latin typeface="Calibri"/>
+              </a:rPr>
+              <a:t>The rig automated only ONE thing (auto-preload). A phased roadmap adds automated test modes, smart DIC and one-click analysis — each piece shippable on its own. Where it stands today:</a:t>
+            </a:r>
+          </a:p>
+        </p:txBody>
+      </p:sp>
+      <p:graphicFrame>
+        <p:nvGraphicFramePr>
+          <p:cNvPr id="6" name="Table 5"/>
+          <p:cNvGraphicFramePr>
+            <a:graphicFrameLocks noGrp="1"/>
+          </p:cNvGraphicFramePr>
+          <p:nvPr/>
+        </p:nvGraphicFramePr>
+        <p:xfrm>
+          <a:off x="365760" y="1847088"/>
+          <a:ext cx="11475720" cy="2514600"/>
+        </p:xfrm>
+        <a:graphic>
+          <a:graphicData uri="http://schemas.openxmlformats.org/drawingml/2006/table">
+            <a:tbl>
+              <a:tblPr firstRow="1" bandRow="1">
+                <a:tableStyleId>{5C22544A-7EE6-4342-B048-85BDC9FD1C3A}</a:tableStyleId>
+              </a:tblPr>
+              <a:tblGrid>
+                <a:gridCol w="2377440"/>
+                <a:gridCol w="6172200"/>
+                <a:gridCol w="2926080"/>
+              </a:tblGrid>
+              <a:tr h="419100">
+                <a:tc>
+                  <a:txBody>
+                    <a:bodyPr lIns="54864" rIns="54864" tIns="18288" bIns="18288" wrap="square" anchor="ctr"/>
+                    <a:lstStyle/>
+                    <a:p>
+                      <a:pPr algn="l"/>
+                      <a:r>
+                        <a:rPr sz="1100" b="1">
+                          <a:solidFill>
+                            <a:srgbClr val="FFFFFF"/>
+                          </a:solidFill>
+                          <a:latin typeface="Calibri"/>
+                        </a:rPr>
+                        <a:t>Phase</a:t>
+                      </a:r>
+                    </a:p>
+                  </a:txBody>
+                  <a:tcPr>
+                    <a:solidFill>
+                      <a:srgbClr val="143D2F"/>
+                    </a:solidFill>
+                  </a:tcPr>
+                </a:tc>
+                <a:tc>
+                  <a:txBody>
+                    <a:bodyPr lIns="54864" rIns="54864" tIns="18288" bIns="18288" wrap="square" anchor="ctr"/>
+                    <a:lstStyle/>
+                    <a:p>
+                      <a:pPr algn="l"/>
+                      <a:r>
+                        <a:rPr sz="1100" b="1">
+                          <a:solidFill>
+                            <a:srgbClr val="FFFFFF"/>
+                          </a:solidFill>
+                          <a:latin typeface="Calibri"/>
+                        </a:rPr>
+                        <a:t>Focus</a:t>
+                      </a:r>
+                    </a:p>
+                  </a:txBody>
+                  <a:tcPr>
+                    <a:solidFill>
+                      <a:srgbClr val="143D2F"/>
+                    </a:solidFill>
+                  </a:tcPr>
+                </a:tc>
+                <a:tc>
+                  <a:txBody>
+                    <a:bodyPr lIns="54864" rIns="54864" tIns="18288" bIns="18288" wrap="square" anchor="ctr"/>
+                    <a:lstStyle/>
+                    <a:p>
+                      <a:pPr algn="l"/>
+                      <a:r>
+                        <a:rPr sz="1100" b="1">
+                          <a:solidFill>
+                            <a:srgbClr val="FFFFFF"/>
+                          </a:solidFill>
+                          <a:latin typeface="Calibri"/>
+                        </a:rPr>
+                        <a:t>Status</a:t>
+                      </a:r>
+                    </a:p>
+                  </a:txBody>
+                  <a:tcPr>
+                    <a:solidFill>
+                      <a:srgbClr val="143D2F"/>
+                    </a:solidFill>
+                  </a:tcPr>
+                </a:tc>
+              </a:tr>
+              <a:tr h="419100">
+                <a:tc>
+                  <a:txBody>
+                    <a:bodyPr lIns="54864" rIns="54864" tIns="18288" bIns="18288" wrap="square" anchor="ctr"/>
+                    <a:lstStyle/>
+                    <a:p>
+                      <a:pPr algn="l"/>
+                      <a:r>
+                        <a:rPr sz="1050" b="0">
+                          <a:solidFill>
+                            <a:srgbClr val="000000"/>
+                          </a:solidFill>
+                          <a:latin typeface="Calibri"/>
+                        </a:rPr>
+                        <a:t>0 · Foundations</a:t>
+                      </a:r>
+                    </a:p>
+                  </a:txBody>
+                  <a:tcPr/>
+                </a:tc>
+                <a:tc>
+                  <a:txBody>
+                    <a:bodyPr lIns="54864" rIns="54864" tIns="18288" bIns="18288" wrap="square" anchor="ctr"/>
+                    <a:lstStyle/>
+                    <a:p>
+                      <a:pPr algn="l"/>
+                      <a:r>
+                        <a:rPr sz="1050" b="0">
+                          <a:solidFill>
+                            <a:srgbClr val="000000"/>
+                          </a:solidFill>
+                          <a:latin typeface="Calibri"/>
+                        </a:rPr>
+                        <a:t>shared analysis library · control engine · recipes</a:t>
+                      </a:r>
+                    </a:p>
+                  </a:txBody>
+                  <a:tcPr/>
+                </a:tc>
+                <a:tc>
+                  <a:txBody>
+                    <a:bodyPr lIns="54864" rIns="54864" tIns="18288" bIns="18288" wrap="square" anchor="ctr"/>
+                    <a:lstStyle/>
+                    <a:p>
+                      <a:pPr algn="l"/>
+                      <a:r>
+                        <a:rPr sz="1050" b="1">
+                          <a:solidFill>
+                            <a:srgbClr val="000000"/>
+                          </a:solidFill>
+                          <a:latin typeface="Calibri"/>
+                        </a:rPr>
+                        <a:t>DONE</a:t>
+                      </a:r>
+                    </a:p>
+                  </a:txBody>
+                  <a:tcPr>
+                    <a:solidFill>
+                      <a:srgbClr val="C8E6C9"/>
+                    </a:solidFill>
+                  </a:tcPr>
+                </a:tc>
+              </a:tr>
+              <a:tr h="419100">
+                <a:tc>
+                  <a:txBody>
+                    <a:bodyPr lIns="54864" rIns="54864" tIns="18288" bIns="18288" wrap="square" anchor="ctr"/>
+                    <a:lstStyle/>
+                    <a:p>
+                      <a:pPr algn="l"/>
+                      <a:r>
+                        <a:rPr sz="1050" b="0">
+                          <a:solidFill>
+                            <a:srgbClr val="000000"/>
+                          </a:solidFill>
+                          <a:latin typeface="Calibri"/>
+                        </a:rPr>
+                        <a:t>A · One-click workflow</a:t>
+                      </a:r>
+                    </a:p>
+                  </a:txBody>
+                  <a:tcPr/>
+                </a:tc>
+                <a:tc>
+                  <a:txBody>
+                    <a:bodyPr lIns="54864" rIns="54864" tIns="18288" bIns="18288" wrap="square" anchor="ctr"/>
+                    <a:lstStyle/>
+                    <a:p>
+                      <a:pPr algn="l"/>
+                      <a:r>
+                        <a:rPr sz="1050" b="0">
+                          <a:solidFill>
+                            <a:srgbClr val="000000"/>
+                          </a:solidFill>
+                          <a:latin typeface="Calibri"/>
+                        </a:rPr>
+                        <a:t>per-test report · test registry · prepare-specimen · auto-stop</a:t>
+                      </a:r>
+                    </a:p>
+                  </a:txBody>
+                  <a:tcPr/>
+                </a:tc>
+                <a:tc>
+                  <a:txBody>
+                    <a:bodyPr lIns="54864" rIns="54864" tIns="18288" bIns="18288" wrap="square" anchor="ctr"/>
+                    <a:lstStyle/>
+                    <a:p>
+                      <a:pPr algn="l"/>
+                      <a:r>
+                        <a:rPr sz="1050" b="1">
+                          <a:solidFill>
+                            <a:srgbClr val="000000"/>
+                          </a:solidFill>
+                          <a:latin typeface="Calibri"/>
+                        </a:rPr>
+                        <a:t>BUILT — rig-test</a:t>
+                      </a:r>
+                    </a:p>
+                  </a:txBody>
+                  <a:tcPr>
+                    <a:solidFill>
+                      <a:srgbClr val="FFF3CD"/>
+                    </a:solidFill>
+                  </a:tcPr>
+                </a:tc>
+              </a:tr>
+              <a:tr h="419100">
+                <a:tc>
+                  <a:txBody>
+                    <a:bodyPr lIns="54864" rIns="54864" tIns="18288" bIns="18288" wrap="square" anchor="ctr"/>
+                    <a:lstStyle/>
+                    <a:p>
+                      <a:pPr algn="l"/>
+                      <a:r>
+                        <a:rPr sz="1050" b="0">
+                          <a:solidFill>
+                            <a:srgbClr val="000000"/>
+                          </a:solidFill>
+                          <a:latin typeface="Calibri"/>
+                        </a:rPr>
+                        <a:t>B · Closed-loop modes</a:t>
+                      </a:r>
+                    </a:p>
+                  </a:txBody>
+                  <a:tcPr/>
+                </a:tc>
+                <a:tc>
+                  <a:txBody>
+                    <a:bodyPr lIns="54864" rIns="54864" tIns="18288" bIns="18288" wrap="square" anchor="ctr"/>
+                    <a:lstStyle/>
+                    <a:p>
+                      <a:pPr algn="l"/>
+                      <a:r>
+                        <a:rPr sz="1050" b="0">
+                          <a:solidFill>
+                            <a:srgbClr val="000000"/>
+                          </a:solidFill>
+                          <a:latin typeface="Calibri"/>
+                        </a:rPr>
+                        <a:t>strain-rate + cyclic / staircase / relaxation / creep</a:t>
+                      </a:r>
+                    </a:p>
+                  </a:txBody>
+                  <a:tcPr/>
+                </a:tc>
+                <a:tc>
+                  <a:txBody>
+                    <a:bodyPr lIns="54864" rIns="54864" tIns="18288" bIns="18288" wrap="square" anchor="ctr"/>
+                    <a:lstStyle/>
+                    <a:p>
+                      <a:pPr algn="l"/>
+                      <a:r>
+                        <a:rPr sz="1050" b="1">
+                          <a:solidFill>
+                            <a:srgbClr val="000000"/>
+                          </a:solidFill>
+                          <a:latin typeface="Calibri"/>
+                        </a:rPr>
+                        <a:t>1 of 5 wired</a:t>
+                      </a:r>
+                    </a:p>
+                  </a:txBody>
+                  <a:tcPr>
+                    <a:solidFill>
+                      <a:srgbClr val="FFF3CD"/>
+                    </a:solidFill>
+                  </a:tcPr>
+                </a:tc>
+              </a:tr>
+              <a:tr h="419100">
+                <a:tc>
+                  <a:txBody>
+                    <a:bodyPr lIns="54864" rIns="54864" tIns="18288" bIns="18288" wrap="square" anchor="ctr"/>
+                    <a:lstStyle/>
+                    <a:p>
+                      <a:pPr algn="l"/>
+                      <a:r>
+                        <a:rPr sz="1050" b="0">
+                          <a:solidFill>
+                            <a:srgbClr val="000000"/>
+                          </a:solidFill>
+                          <a:latin typeface="Calibri"/>
+                        </a:rPr>
+                        <a:t>C · Smart DIC</a:t>
+                      </a:r>
+                    </a:p>
+                  </a:txBody>
+                  <a:tcPr/>
+                </a:tc>
+                <a:tc>
+                  <a:txBody>
+                    <a:bodyPr lIns="54864" rIns="54864" tIns="18288" bIns="18288" wrap="square" anchor="ctr"/>
+                    <a:lstStyle/>
+                    <a:p>
+                      <a:pPr algn="l"/>
+                      <a:r>
+                        <a:rPr sz="1050" b="0">
+                          <a:solidFill>
+                            <a:srgbClr val="000000"/>
+                          </a:solidFill>
+                          <a:latin typeface="Calibri"/>
+                        </a:rPr>
+                        <a:t>live health HUD + measured Poisson / true Cauchy</a:t>
+                      </a:r>
+                    </a:p>
+                  </a:txBody>
+                  <a:tcPr/>
+                </a:tc>
+                <a:tc>
+                  <a:txBody>
+                    <a:bodyPr lIns="54864" rIns="54864" tIns="18288" bIns="18288" wrap="square" anchor="ctr"/>
+                    <a:lstStyle/>
+                    <a:p>
+                      <a:pPr algn="l"/>
+                      <a:r>
+                        <a:rPr sz="1050" b="1">
+                          <a:solidFill>
+                            <a:srgbClr val="000000"/>
+                          </a:solidFill>
+                          <a:latin typeface="Calibri"/>
+                        </a:rPr>
+                        <a:t>HUD done</a:t>
+                      </a:r>
+                    </a:p>
+                  </a:txBody>
+                  <a:tcPr>
+                    <a:solidFill>
+                      <a:srgbClr val="FFF3CD"/>
+                    </a:solidFill>
+                  </a:tcPr>
+                </a:tc>
+              </a:tr>
+              <a:tr h="419100">
+                <a:tc>
+                  <a:txBody>
+                    <a:bodyPr lIns="54864" rIns="54864" tIns="18288" bIns="18288" wrap="square" anchor="ctr"/>
+                    <a:lstStyle/>
+                    <a:p>
+                      <a:pPr algn="l"/>
+                      <a:r>
+                        <a:rPr sz="1050" b="0">
+                          <a:solidFill>
+                            <a:srgbClr val="000000"/>
+                          </a:solidFill>
+                          <a:latin typeface="Calibri"/>
+                        </a:rPr>
+                        <a:t>D · UX layer</a:t>
+                      </a:r>
+                    </a:p>
+                  </a:txBody>
+                  <a:tcPr/>
+                </a:tc>
+                <a:tc>
+                  <a:txBody>
+                    <a:bodyPr lIns="54864" rIns="54864" tIns="18288" bIns="18288" wrap="square" anchor="ctr"/>
+                    <a:lstStyle/>
+                    <a:p>
+                      <a:pPr algn="l"/>
+                      <a:r>
+                        <a:rPr sz="1050" b="0">
+                          <a:solidFill>
+                            <a:srgbClr val="000000"/>
+                          </a:solidFill>
+                          <a:latin typeface="Calibri"/>
+                        </a:rPr>
+                        <a:t>guided wizard · live overlay · dashboard</a:t>
+                      </a:r>
+                    </a:p>
+                  </a:txBody>
+                  <a:tcPr/>
+                </a:tc>
+                <a:tc>
+                  <a:txBody>
+                    <a:bodyPr lIns="54864" rIns="54864" tIns="18288" bIns="18288" wrap="square" anchor="ctr"/>
+                    <a:lstStyle/>
+                    <a:p>
+                      <a:pPr algn="l"/>
+                      <a:r>
+                        <a:rPr sz="1050" b="1">
+                          <a:solidFill>
+                            <a:srgbClr val="000000"/>
+                          </a:solidFill>
+                          <a:latin typeface="Calibri"/>
+                        </a:rPr>
+                        <a:t>PLANNED</a:t>
+                      </a:r>
+                    </a:p>
+                  </a:txBody>
+                  <a:tcPr>
+                    <a:solidFill>
+                      <a:srgbClr val="E8E8E8"/>
+                    </a:solidFill>
+                  </a:tcPr>
+                </a:tc>
+              </a:tr>
+            </a:tbl>
+          </a:graphicData>
+        </a:graphic>
+      </p:graphicFrame>
+      <p:sp>
+        <p:nvSpPr>
+          <p:cNvPr id="7" name="Rounded Rectangle 6"/>
+          <p:cNvSpPr/>
+          <p:nvPr/>
+        </p:nvSpPr>
+        <p:spPr>
+          <a:xfrm>
+            <a:off x="365760" y="4590288"/>
+            <a:ext cx="2697480" cy="896112"/>
+          </a:xfrm>
+          <a:prstGeom prst="roundRect">
+            <a:avLst/>
+          </a:prstGeom>
+          <a:solidFill>
+            <a:srgbClr val="E7F1F8"/>
+          </a:solidFill>
+          <a:ln>
+            <a:noFill/>
+          </a:ln>
+        </p:spPr>
+        <p:style>
+          <a:lnRef idx="1">
+            <a:schemeClr val="accent1"/>
+          </a:lnRef>
+          <a:fillRef idx="3">
+            <a:schemeClr val="accent1"/>
+          </a:fillRef>
+          <a:effectRef idx="2">
+            <a:schemeClr val="accent1"/>
+          </a:effectRef>
+          <a:fontRef idx="minor">
+            <a:schemeClr val="lt1"/>
+          </a:fontRef>
+        </p:style>
+        <p:txBody>
+          <a:bodyPr rtlCol="0" anchor="ctr" lIns="54864" rIns="54864" bIns="27432" wrap="square"/>
+          <a:lstStyle/>
+          <a:p>
+            <a:pPr algn="ctr"/>
+            <a:r>
+              <a:rPr sz="1800" b="1">
+                <a:solidFill>
+                  <a:srgbClr val="1F3F2F"/>
+                </a:solidFill>
+                <a:latin typeface="Calibri"/>
+              </a:rPr>
+              <a:t>7</a:t>
+            </a:r>
+          </a:p>
+          <a:p>
+            <a:pPr algn="ctr"/>
+            <a:r>
+              <a:rPr sz="950">
+                <a:solidFill>
+                  <a:srgbClr val="000000"/>
+                </a:solidFill>
+                <a:latin typeface="Calibri"/>
+              </a:rPr>
+              <a:t>MODULES (in git)</a:t>
+            </a:r>
+          </a:p>
+        </p:txBody>
+      </p:sp>
+      <p:sp>
+        <p:nvSpPr>
+          <p:cNvPr id="8" name="Rounded Rectangle 7"/>
+          <p:cNvSpPr/>
+          <p:nvPr/>
+        </p:nvSpPr>
+        <p:spPr>
+          <a:xfrm>
+            <a:off x="3310128" y="4590288"/>
+            <a:ext cx="2697480" cy="896112"/>
+          </a:xfrm>
+          <a:prstGeom prst="roundRect">
+            <a:avLst/>
+          </a:prstGeom>
+          <a:solidFill>
+            <a:srgbClr val="E7F1F8"/>
+          </a:solidFill>
+          <a:ln>
+            <a:noFill/>
+          </a:ln>
+        </p:spPr>
+        <p:style>
+          <a:lnRef idx="1">
+            <a:schemeClr val="accent1"/>
+          </a:lnRef>
+          <a:fillRef idx="3">
+            <a:schemeClr val="accent1"/>
+          </a:fillRef>
+          <a:effectRef idx="2">
+            <a:schemeClr val="accent1"/>
+          </a:effectRef>
+          <a:fontRef idx="minor">
+            <a:schemeClr val="lt1"/>
+          </a:fontRef>
+        </p:style>
+        <p:txBody>
+          <a:bodyPr rtlCol="0" anchor="ctr" lIns="54864" rIns="54864" bIns="27432" wrap="square"/>
+          <a:lstStyle/>
+          <a:p>
+            <a:pPr algn="ctr"/>
+            <a:r>
+              <a:rPr sz="1800" b="1">
+                <a:solidFill>
+                  <a:srgbClr val="1F3F2F"/>
+                </a:solidFill>
+                <a:latin typeface="Calibri"/>
+              </a:rPr>
+              <a:t>6</a:t>
+            </a:r>
+          </a:p>
+          <a:p>
+            <a:pPr algn="ctr"/>
+            <a:r>
+              <a:rPr sz="950">
+                <a:solidFill>
+                  <a:srgbClr val="000000"/>
+                </a:solidFill>
+                <a:latin typeface="Calibri"/>
+              </a:rPr>
+              <a:t>APP FEATURES</a:t>
+            </a:r>
+          </a:p>
+        </p:txBody>
+      </p:sp>
+      <p:sp>
+        <p:nvSpPr>
+          <p:cNvPr id="9" name="Rounded Rectangle 8"/>
+          <p:cNvSpPr/>
+          <p:nvPr/>
+        </p:nvSpPr>
+        <p:spPr>
+          <a:xfrm>
+            <a:off x="6254496" y="4590288"/>
+            <a:ext cx="2697480" cy="896112"/>
+          </a:xfrm>
+          <a:prstGeom prst="roundRect">
+            <a:avLst/>
+          </a:prstGeom>
+          <a:solidFill>
+            <a:srgbClr val="E7F1F8"/>
+          </a:solidFill>
+          <a:ln>
+            <a:noFill/>
+          </a:ln>
+        </p:spPr>
+        <p:style>
+          <a:lnRef idx="1">
+            <a:schemeClr val="accent1"/>
+          </a:lnRef>
+          <a:fillRef idx="3">
+            <a:schemeClr val="accent1"/>
+          </a:fillRef>
+          <a:effectRef idx="2">
+            <a:schemeClr val="accent1"/>
+          </a:effectRef>
+          <a:fontRef idx="minor">
+            <a:schemeClr val="lt1"/>
+          </a:fontRef>
+        </p:style>
+        <p:txBody>
+          <a:bodyPr rtlCol="0" anchor="ctr" lIns="54864" rIns="54864" bIns="27432" wrap="square"/>
+          <a:lstStyle/>
+          <a:p>
+            <a:pPr algn="ctr"/>
+            <a:r>
+              <a:rPr sz="1800" b="1">
+                <a:solidFill>
+                  <a:srgbClr val="1F3F2F"/>
+                </a:solidFill>
+                <a:latin typeface="Calibri"/>
+              </a:rPr>
+              <a:t>9 / 9</a:t>
+            </a:r>
+          </a:p>
+          <a:p>
+            <a:pPr algn="ctr"/>
+            <a:r>
+              <a:rPr sz="950">
+                <a:solidFill>
+                  <a:srgbClr val="000000"/>
+                </a:solidFill>
+                <a:latin typeface="Calibri"/>
+              </a:rPr>
+              <a:t>SIM CHECKS PASSED</a:t>
+            </a:r>
+          </a:p>
+        </p:txBody>
+      </p:sp>
+      <p:sp>
+        <p:nvSpPr>
+          <p:cNvPr id="10" name="Rounded Rectangle 9"/>
+          <p:cNvSpPr/>
+          <p:nvPr/>
+        </p:nvSpPr>
+        <p:spPr>
+          <a:xfrm>
+            <a:off x="9198864" y="4590288"/>
+            <a:ext cx="2642616" cy="896112"/>
+          </a:xfrm>
+          <a:prstGeom prst="roundRect">
+            <a:avLst/>
+          </a:prstGeom>
+          <a:solidFill>
+            <a:srgbClr val="E7F1F8"/>
+          </a:solidFill>
+          <a:ln>
+            <a:noFill/>
+          </a:ln>
+        </p:spPr>
+        <p:style>
+          <a:lnRef idx="1">
+            <a:schemeClr val="accent1"/>
+          </a:lnRef>
+          <a:fillRef idx="3">
+            <a:schemeClr val="accent1"/>
+          </a:fillRef>
+          <a:effectRef idx="2">
+            <a:schemeClr val="accent1"/>
+          </a:effectRef>
+          <a:fontRef idx="minor">
+            <a:schemeClr val="lt1"/>
+          </a:fontRef>
+        </p:style>
+        <p:txBody>
+          <a:bodyPr rtlCol="0" anchor="ctr" lIns="54864" rIns="54864" bIns="27432" wrap="square"/>
+          <a:lstStyle/>
+          <a:p>
+            <a:pPr algn="ctr"/>
+            <a:r>
+              <a:rPr sz="1800" b="1">
+                <a:solidFill>
+                  <a:srgbClr val="1F3F2F"/>
+                </a:solidFill>
+                <a:latin typeface="Calibri"/>
+              </a:rPr>
+              <a:t>6</a:t>
+            </a:r>
+          </a:p>
+          <a:p>
+            <a:pPr algn="ctr"/>
+            <a:r>
+              <a:rPr sz="950">
+                <a:solidFill>
+                  <a:srgbClr val="000000"/>
+                </a:solidFill>
+                <a:latin typeface="Calibri"/>
+              </a:rPr>
+              <a:t>TO RIG-TEST</a:t>
+            </a:r>
+          </a:p>
+        </p:txBody>
+      </p:sp>
+      <p:sp>
+        <p:nvSpPr>
+          <p:cNvPr id="11" name="Rectangle 10"/>
+          <p:cNvSpPr/>
+          <p:nvPr/>
+        </p:nvSpPr>
+        <p:spPr>
+          <a:xfrm>
+            <a:off x="365760" y="5650992"/>
+            <a:ext cx="11475720" cy="841248"/>
+          </a:xfrm>
+          <a:prstGeom prst="rect">
+            <a:avLst/>
+          </a:prstGeom>
+          <a:solidFill>
+            <a:srgbClr val="E7F1F8"/>
+          </a:solidFill>
+          <a:ln>
+            <a:noFill/>
+          </a:ln>
+        </p:spPr>
+        <p:style>
+          <a:lnRef idx="1">
+            <a:schemeClr val="accent1"/>
+          </a:lnRef>
+          <a:fillRef idx="3">
+            <a:schemeClr val="accent1"/>
+          </a:fillRef>
+          <a:effectRef idx="2">
+            <a:schemeClr val="accent1"/>
+          </a:effectRef>
+          <a:fontRef idx="minor">
+            <a:schemeClr val="lt1"/>
+          </a:fontRef>
+        </p:style>
+        <p:txBody>
+          <a:bodyPr rtlCol="0" anchor="ctr" wrap="square" lIns="109728" rIns="109728"/>
+          <a:lstStyle/>
+          <a:p>
+            <a:pPr algn="ctr"/>
+            <a:r>
+              <a:rPr sz="1100" b="1">
+                <a:solidFill>
+                  <a:srgbClr val="000000"/>
+                </a:solidFill>
+                <a:latin typeface="Calibri"/>
+              </a:rPr>
+              <a:t>LEGEND — DONE (green) · BUILT, awaiting rig test (amber) · PLANNED (grey).  Foundations + the one-click workflow have shipped; closed-loop modes and smart-DIC are partly in; the UX layer is next.</a:t>
+            </a:r>
+          </a:p>
+        </p:txBody>
+      </p:sp>
+      <p:sp>
+        <p:nvSpPr>
+          <p:cNvPr id="12" name="TextBox 11"/>
+          <p:cNvSpPr txBox="1"/>
+          <p:nvPr/>
+        </p:nvSpPr>
+        <p:spPr>
+          <a:xfrm>
+            <a:off x="548640" y="6400800"/>
+            <a:ext cx="11064240" cy="365760"/>
+          </a:xfrm>
+          <a:prstGeom prst="rect">
+            <a:avLst/>
+          </a:prstGeom>
+          <a:noFill/>
+        </p:spPr>
+        <p:txBody>
+          <a:bodyPr wrap="square" lIns="45720" rIns="45720" tIns="18288" bIns="18288" anchor="t">
+            <a:spAutoFit/>
+          </a:bodyPr>
+          <a:lstStyle/>
+          <a:p>
+            <a:pPr algn="l"/>
+            <a:r>
+              <a:rPr sz="1200" b="0" i="1">
+                <a:solidFill>
+                  <a:srgbClr val="707070"/>
+                </a:solidFill>
+                <a:latin typeface="Calibri"/>
+              </a:rPr>
+              <a:t>All analysis logic is unit-tested / sim-validated offline; app features live in the (unversioned) main.py and follow the proven auto-preload safety discipline.</a:t>
+            </a:r>
+          </a:p>
+        </p:txBody>
+      </p:sp>
+      <p:sp>
+        <p:nvSpPr>
+          <p:cNvPr id="13" name="TextBox 12"/>
+          <p:cNvSpPr txBox="1"/>
+          <p:nvPr/>
+        </p:nvSpPr>
+        <p:spPr>
+          <a:xfrm>
+            <a:off x="457200" y="6446520"/>
+            <a:ext cx="640080" cy="274320"/>
+          </a:xfrm>
+          <a:prstGeom prst="rect">
+            <a:avLst/>
+          </a:prstGeom>
+          <a:noFill/>
+        </p:spPr>
+        <p:txBody>
+          <a:bodyPr wrap="square" lIns="45720" rIns="45720" tIns="18288" bIns="18288" anchor="t">
+            <a:spAutoFit/>
+          </a:bodyPr>
+          <a:lstStyle/>
+          <a:p>
+            <a:pPr algn="l"/>
+            <a:r>
+              <a:rPr sz="1000" b="0" i="0">
+                <a:solidFill>
+                  <a:srgbClr val="707070"/>
+                </a:solidFill>
+                <a:latin typeface="Calibri"/>
+              </a:rPr>
+              <a:t>165</a:t>
+            </a:r>
+          </a:p>
+        </p:txBody>
+      </p:sp>
+    </p:spTree>
+  </p:cSld>
+  <p:clrMapOvr>
+    <a:masterClrMapping/>
+  </p:clrMapOvr>
+</p:sld>
+</file>
+
+<file path=ppt/slides/slide26.xml><?xml version="1.0" encoding="utf-8"?>
+<p:sld xmlns:a="http://schemas.openxmlformats.org/drawingml/2006/main" xmlns:p="http://schemas.openxmlformats.org/presentationml/2006/main" xmlns:r="http://schemas.openxmlformats.org/officeDocument/2006/relationships">
+  <p:cSld>
+    <p:spTree>
+      <p:nvGrpSpPr>
+        <p:cNvPr id="1" name=""/>
+        <p:cNvGrpSpPr/>
+        <p:nvPr/>
+      </p:nvGrpSpPr>
+      <p:grpSpPr/>
+      <p:sp>
+        <p:nvSpPr>
+          <p:cNvPr id="2" name="TextBox 1"/>
+          <p:cNvSpPr txBox="1"/>
+          <p:nvPr/>
+        </p:nvSpPr>
+        <p:spPr>
+          <a:xfrm>
+            <a:off x="11155680" y="274320"/>
+            <a:ext cx="914400" cy="274320"/>
+          </a:xfrm>
+          <a:prstGeom prst="rect">
+            <a:avLst/>
+          </a:prstGeom>
+          <a:noFill/>
+        </p:spPr>
+        <p:txBody>
+          <a:bodyPr wrap="square" lIns="45720" rIns="45720" tIns="18288" bIns="18288" anchor="t">
+            <a:spAutoFit/>
+          </a:bodyPr>
+          <a:lstStyle/>
+          <a:p>
+            <a:pPr algn="r"/>
+            <a:r>
+              <a:rPr sz="800" b="1" i="0">
+                <a:solidFill>
+                  <a:srgbClr val="707070"/>
+                </a:solidFill>
+                <a:latin typeface="Calibri"/>
+              </a:rPr>
+              <a:t>JÖNKÖPING UNIVERSITY</a:t>
+            </a:r>
+          </a:p>
+        </p:txBody>
+      </p:sp>
+      <p:sp>
+        <p:nvSpPr>
+          <p:cNvPr id="3" name="Rectangle 2"/>
+          <p:cNvSpPr/>
+          <p:nvPr/>
+        </p:nvSpPr>
+        <p:spPr>
+          <a:xfrm>
+            <a:off x="457200" y="411480"/>
+            <a:ext cx="457200" cy="73152"/>
+          </a:xfrm>
+          <a:prstGeom prst="rect">
+            <a:avLst/>
+          </a:prstGeom>
+          <a:solidFill>
+            <a:srgbClr val="A9D6EF"/>
+          </a:solidFill>
+          <a:ln>
+            <a:noFill/>
+          </a:ln>
+        </p:spPr>
+        <p:style>
+          <a:lnRef idx="1">
+            <a:schemeClr val="accent1"/>
+          </a:lnRef>
+          <a:fillRef idx="3">
+            <a:schemeClr val="accent1"/>
+          </a:fillRef>
+          <a:effectRef idx="2">
+            <a:schemeClr val="accent1"/>
+          </a:effectRef>
+          <a:fontRef idx="minor">
+            <a:schemeClr val="lt1"/>
+          </a:fontRef>
+        </p:style>
+        <p:txBody>
+          <a:bodyPr rtlCol="0" anchor="ctr"/>
+          <a:lstStyle/>
+          <a:p>
+            <a:pPr algn="ctr"/>
+          </a:p>
+        </p:txBody>
+      </p:sp>
+      <p:sp>
+        <p:nvSpPr>
+          <p:cNvPr id="4" name="TextBox 3"/>
+          <p:cNvSpPr txBox="1"/>
+          <p:nvPr/>
+        </p:nvSpPr>
+        <p:spPr>
+          <a:xfrm>
+            <a:off x="457200" y="502920"/>
+            <a:ext cx="11430000" cy="822960"/>
+          </a:xfrm>
+          <a:prstGeom prst="rect">
+            <a:avLst/>
+          </a:prstGeom>
+          <a:noFill/>
+        </p:spPr>
+        <p:txBody>
+          <a:bodyPr wrap="square" lIns="45720" rIns="45720" tIns="18288" bIns="18288" anchor="t">
+            <a:spAutoFit/>
+          </a:bodyPr>
+          <a:lstStyle/>
+          <a:p>
+            <a:pPr algn="l"/>
+            <a:r>
+              <a:rPr sz="3000" b="0" i="0">
+                <a:solidFill>
+                  <a:srgbClr val="000000"/>
+                </a:solidFill>
+                <a:latin typeface="Calibri Light"/>
+              </a:rPr>
+              <a:t>DONE — BUILT, VERIFIED &amp; COMMITTED</a:t>
+            </a:r>
+          </a:p>
+        </p:txBody>
+      </p:sp>
+      <p:sp>
+        <p:nvSpPr>
+          <p:cNvPr id="5" name="TextBox 4"/>
+          <p:cNvSpPr txBox="1"/>
+          <p:nvPr/>
+        </p:nvSpPr>
+        <p:spPr>
+          <a:xfrm>
+            <a:off x="365760" y="1170432"/>
+            <a:ext cx="5623560" cy="365760"/>
+          </a:xfrm>
+          <a:prstGeom prst="rect">
+            <a:avLst/>
+          </a:prstGeom>
+          <a:noFill/>
+        </p:spPr>
+        <p:txBody>
+          <a:bodyPr wrap="square" lIns="45720" rIns="45720" tIns="18288" bIns="18288" anchor="t">
+            <a:spAutoFit/>
+          </a:bodyPr>
+          <a:lstStyle/>
+          <a:p>
+            <a:pPr algn="l"/>
+            <a:r>
+              <a:rPr sz="1600" b="0" i="0">
+                <a:solidFill>
+                  <a:srgbClr val="707070"/>
+                </a:solidFill>
+                <a:latin typeface="Calibri"/>
+              </a:rPr>
+              <a:t>Analysis &amp; workflow tooling (offline-verified, in git)</a:t>
+            </a:r>
+          </a:p>
+        </p:txBody>
+      </p:sp>
+      <p:graphicFrame>
+        <p:nvGraphicFramePr>
+          <p:cNvPr id="6" name="Table 5"/>
+          <p:cNvGraphicFramePr>
+            <a:graphicFrameLocks noGrp="1"/>
+          </p:cNvGraphicFramePr>
+          <p:nvPr/>
+        </p:nvGraphicFramePr>
+        <p:xfrm>
+          <a:off x="365760" y="1554480"/>
+          <a:ext cx="5623559" cy="2834640"/>
+        </p:xfrm>
+        <a:graphic>
+          <a:graphicData uri="http://schemas.openxmlformats.org/drawingml/2006/table">
+            <a:tbl>
+              <a:tblPr firstRow="1" bandRow="1">
+                <a:tableStyleId>{5C22544A-7EE6-4342-B048-85BDC9FD1C3A}</a:tableStyleId>
+              </a:tblPr>
+              <a:tblGrid>
+                <a:gridCol w="2057400"/>
+                <a:gridCol w="3566159"/>
+              </a:tblGrid>
+              <a:tr h="404948">
+                <a:tc>
+                  <a:txBody>
+                    <a:bodyPr lIns="54864" rIns="54864" tIns="18288" bIns="18288" wrap="square" anchor="ctr"/>
+                    <a:lstStyle/>
+                    <a:p>
+                      <a:pPr algn="l"/>
+                      <a:r>
+                        <a:rPr sz="1000" b="1">
+                          <a:solidFill>
+                            <a:srgbClr val="FFFFFF"/>
+                          </a:solidFill>
+                          <a:latin typeface="Calibri"/>
+                        </a:rPr>
+                        <a:t>Module</a:t>
+                      </a:r>
+                    </a:p>
+                  </a:txBody>
+                  <a:tcPr>
+                    <a:solidFill>
+                      <a:srgbClr val="143D2F"/>
+                    </a:solidFill>
+                  </a:tcPr>
+                </a:tc>
+                <a:tc>
+                  <a:txBody>
+                    <a:bodyPr lIns="54864" rIns="54864" tIns="18288" bIns="18288" wrap="square" anchor="ctr"/>
+                    <a:lstStyle/>
+                    <a:p>
+                      <a:pPr algn="l"/>
+                      <a:r>
+                        <a:rPr sz="1000" b="1">
+                          <a:solidFill>
+                            <a:srgbClr val="FFFFFF"/>
+                          </a:solidFill>
+                          <a:latin typeface="Calibri"/>
+                        </a:rPr>
+                        <a:t>What it gives you</a:t>
+                      </a:r>
+                    </a:p>
+                  </a:txBody>
+                  <a:tcPr>
+                    <a:solidFill>
+                      <a:srgbClr val="143D2F"/>
+                    </a:solidFill>
+                  </a:tcPr>
+                </a:tc>
+              </a:tr>
+              <a:tr h="404948">
+                <a:tc>
+                  <a:txBody>
+                    <a:bodyPr lIns="54864" rIns="54864" tIns="18288" bIns="18288" wrap="square" anchor="ctr"/>
+                    <a:lstStyle/>
+                    <a:p>
+                      <a:pPr algn="l"/>
+                      <a:r>
+                        <a:rPr sz="950" b="0">
+                          <a:solidFill>
+                            <a:srgbClr val="000000"/>
+                          </a:solidFill>
+                          <a:latin typeface="Calibri"/>
+                        </a:rPr>
+                        <a:t>utm_analysis.py</a:t>
+                      </a:r>
+                    </a:p>
+                  </a:txBody>
+                  <a:tcPr/>
+                </a:tc>
+                <a:tc>
+                  <a:txBody>
+                    <a:bodyPr lIns="54864" rIns="54864" tIns="18288" bIns="18288" wrap="square" anchor="ctr"/>
+                    <a:lstStyle/>
+                    <a:p>
+                      <a:pPr algn="l"/>
+                      <a:r>
+                        <a:rPr sz="950" b="0">
+                          <a:solidFill>
+                            <a:srgbClr val="000000"/>
+                          </a:solidFill>
+                          <a:latin typeface="Calibri"/>
+                        </a:rPr>
+                        <a:t>ONE fracture detector + E / σy / UTS / εf / anchor</a:t>
+                      </a:r>
+                    </a:p>
+                  </a:txBody>
+                  <a:tcPr/>
+                </a:tc>
+              </a:tr>
+              <a:tr h="404948">
+                <a:tc>
+                  <a:txBody>
+                    <a:bodyPr lIns="54864" rIns="54864" tIns="18288" bIns="18288" wrap="square" anchor="ctr"/>
+                    <a:lstStyle/>
+                    <a:p>
+                      <a:pPr algn="l"/>
+                      <a:r>
+                        <a:rPr sz="950" b="0">
+                          <a:solidFill>
+                            <a:srgbClr val="000000"/>
+                          </a:solidFill>
+                          <a:latin typeface="Calibri"/>
+                        </a:rPr>
+                        <a:t>utm_report.py</a:t>
+                      </a:r>
+                    </a:p>
+                  </a:txBody>
+                  <a:tcPr/>
+                </a:tc>
+                <a:tc>
+                  <a:txBody>
+                    <a:bodyPr lIns="54864" rIns="54864" tIns="18288" bIns="18288" wrap="square" anchor="ctr"/>
+                    <a:lstStyle/>
+                    <a:p>
+                      <a:pPr algn="l"/>
+                      <a:r>
+                        <a:rPr sz="950" b="0">
+                          <a:solidFill>
+                            <a:srgbClr val="000000"/>
+                          </a:solidFill>
+                          <a:latin typeface="Calibri"/>
+                        </a:rPr>
+                        <a:t>one-click per-test PDF + PNG report</a:t>
+                      </a:r>
+                    </a:p>
+                  </a:txBody>
+                  <a:tcPr/>
+                </a:tc>
+              </a:tr>
+              <a:tr h="404948">
+                <a:tc>
+                  <a:txBody>
+                    <a:bodyPr lIns="54864" rIns="54864" tIns="18288" bIns="18288" wrap="square" anchor="ctr"/>
+                    <a:lstStyle/>
+                    <a:p>
+                      <a:pPr algn="l"/>
+                      <a:r>
+                        <a:rPr sz="950" b="0">
+                          <a:solidFill>
+                            <a:srgbClr val="000000"/>
+                          </a:solidFill>
+                          <a:latin typeface="Calibri"/>
+                        </a:rPr>
+                        <a:t>utm_registry.py</a:t>
+                      </a:r>
+                    </a:p>
+                  </a:txBody>
+                  <a:tcPr/>
+                </a:tc>
+                <a:tc>
+                  <a:txBody>
+                    <a:bodyPr lIns="54864" rIns="54864" tIns="18288" bIns="18288" wrap="square" anchor="ctr"/>
+                    <a:lstStyle/>
+                    <a:p>
+                      <a:pPr algn="l"/>
+                      <a:r>
+                        <a:rPr sz="950" b="0">
+                          <a:solidFill>
+                            <a:srgbClr val="000000"/>
+                          </a:solidFill>
+                          <a:latin typeface="Calibri"/>
+                        </a:rPr>
+                        <a:t>one table of EVERY test (props + anchor)</a:t>
+                      </a:r>
+                    </a:p>
+                  </a:txBody>
+                  <a:tcPr/>
+                </a:tc>
+              </a:tr>
+              <a:tr h="404948">
+                <a:tc>
+                  <a:txBody>
+                    <a:bodyPr lIns="54864" rIns="54864" tIns="18288" bIns="18288" wrap="square" anchor="ctr"/>
+                    <a:lstStyle/>
+                    <a:p>
+                      <a:pPr algn="l"/>
+                      <a:r>
+                        <a:rPr sz="950" b="0">
+                          <a:solidFill>
+                            <a:srgbClr val="000000"/>
+                          </a:solidFill>
+                          <a:latin typeface="Calibri"/>
+                        </a:rPr>
+                        <a:t>utm_recipes.py</a:t>
+                      </a:r>
+                    </a:p>
+                  </a:txBody>
+                  <a:tcPr/>
+                </a:tc>
+                <a:tc>
+                  <a:txBody>
+                    <a:bodyPr lIns="54864" rIns="54864" tIns="18288" bIns="18288" wrap="square" anchor="ctr"/>
+                    <a:lstStyle/>
+                    <a:p>
+                      <a:pPr algn="l"/>
+                      <a:r>
+                        <a:rPr sz="950" b="0">
+                          <a:solidFill>
+                            <a:srgbClr val="000000"/>
+                          </a:solidFill>
+                          <a:latin typeface="Calibri"/>
+                        </a:rPr>
+                        <a:t>save / load a full test setup</a:t>
+                      </a:r>
+                    </a:p>
+                  </a:txBody>
+                  <a:tcPr/>
+                </a:tc>
+              </a:tr>
+              <a:tr h="404948">
+                <a:tc>
+                  <a:txBody>
+                    <a:bodyPr lIns="54864" rIns="54864" tIns="18288" bIns="18288" wrap="square" anchor="ctr"/>
+                    <a:lstStyle/>
+                    <a:p>
+                      <a:pPr algn="l"/>
+                      <a:r>
+                        <a:rPr sz="950" b="0">
+                          <a:solidFill>
+                            <a:srgbClr val="000000"/>
+                          </a:solidFill>
+                          <a:latin typeface="Calibri"/>
+                        </a:rPr>
+                        <a:t>control_policies + _sim</a:t>
+                      </a:r>
+                    </a:p>
+                  </a:txBody>
+                  <a:tcPr/>
+                </a:tc>
+                <a:tc>
+                  <a:txBody>
+                    <a:bodyPr lIns="54864" rIns="54864" tIns="18288" bIns="18288" wrap="square" anchor="ctr"/>
+                    <a:lstStyle/>
+                    <a:p>
+                      <a:pPr algn="l"/>
+                      <a:r>
+                        <a:rPr sz="950" b="0">
+                          <a:solidFill>
+                            <a:srgbClr val="000000"/>
+                          </a:solidFill>
+                          <a:latin typeface="Calibri"/>
+                        </a:rPr>
+                        <a:t>closed-loop test-mode engine — 9/9 sim</a:t>
+                      </a:r>
+                    </a:p>
+                  </a:txBody>
+                  <a:tcPr/>
+                </a:tc>
+              </a:tr>
+              <a:tr h="404952">
+                <a:tc>
+                  <a:txBody>
+                    <a:bodyPr lIns="54864" rIns="54864" tIns="18288" bIns="18288" wrap="square" anchor="ctr"/>
+                    <a:lstStyle/>
+                    <a:p>
+                      <a:pPr algn="l"/>
+                      <a:r>
+                        <a:rPr sz="950" b="0">
+                          <a:solidFill>
+                            <a:srgbClr val="000000"/>
+                          </a:solidFill>
+                          <a:latin typeface="Calibri"/>
+                        </a:rPr>
+                        <a:t>utm_dic.py</a:t>
+                      </a:r>
+                    </a:p>
+                  </a:txBody>
+                  <a:tcPr/>
+                </a:tc>
+                <a:tc>
+                  <a:txBody>
+                    <a:bodyPr lIns="54864" rIns="54864" tIns="18288" bIns="18288" wrap="square" anchor="ctr"/>
+                    <a:lstStyle/>
+                    <a:p>
+                      <a:pPr algn="l"/>
+                      <a:r>
+                        <a:rPr sz="950" b="0">
+                          <a:solidFill>
+                            <a:srgbClr val="000000"/>
+                          </a:solidFill>
+                          <a:latin typeface="Calibri"/>
+                        </a:rPr>
+                        <a:t>live DIC health + Poisson / Cauchy maths</a:t>
+                      </a:r>
+                    </a:p>
+                  </a:txBody>
+                  <a:tcPr/>
+                </a:tc>
+              </a:tr>
+            </a:tbl>
+          </a:graphicData>
+        </a:graphic>
+      </p:graphicFrame>
+      <p:sp>
+        <p:nvSpPr>
+          <p:cNvPr id="7" name="TextBox 6"/>
+          <p:cNvSpPr txBox="1"/>
+          <p:nvPr/>
+        </p:nvSpPr>
+        <p:spPr>
+          <a:xfrm>
+            <a:off x="365760" y="4526280"/>
+            <a:ext cx="5623560" cy="1280160"/>
+          </a:xfrm>
+          <a:prstGeom prst="rect">
+            <a:avLst/>
+          </a:prstGeom>
+          <a:noFill/>
+        </p:spPr>
+        <p:txBody>
+          <a:bodyPr wrap="square" lIns="45720" rIns="45720" tIns="18288" bIns="18288" anchor="t">
+            <a:spAutoFit/>
+          </a:bodyPr>
+          <a:lstStyle/>
+          <a:p>
+            <a:pPr algn="l"/>
+            <a:r>
+              <a:rPr sz="1050" b="0" i="1">
+                <a:solidFill>
+                  <a:srgbClr val="707070"/>
+                </a:solidFill>
+                <a:latin typeface="Calibri"/>
+              </a:rPr>
+              <a:t>Kills the copy-paste-per-specimen analysis burden (the cause of the V6c / V5-S4 detector bugs): one tested analyser, reused everywhere. Reproduces the known V5 / V6 numbers exactly.</a:t>
+            </a:r>
+          </a:p>
+        </p:txBody>
+      </p:sp>
+      <p:sp>
+        <p:nvSpPr>
+          <p:cNvPr id="8" name="TextBox 7"/>
+          <p:cNvSpPr txBox="1"/>
+          <p:nvPr/>
+        </p:nvSpPr>
+        <p:spPr>
+          <a:xfrm>
+            <a:off x="6172200" y="1170432"/>
+            <a:ext cx="5669280" cy="365760"/>
+          </a:xfrm>
+          <a:prstGeom prst="rect">
+            <a:avLst/>
+          </a:prstGeom>
+          <a:noFill/>
+        </p:spPr>
+        <p:txBody>
+          <a:bodyPr wrap="square" lIns="45720" rIns="45720" tIns="18288" bIns="18288" anchor="t">
+            <a:spAutoFit/>
+          </a:bodyPr>
+          <a:lstStyle/>
+          <a:p>
+            <a:pPr algn="l"/>
+            <a:r>
+              <a:rPr sz="1600" b="0" i="0">
+                <a:solidFill>
+                  <a:srgbClr val="707070"/>
+                </a:solidFill>
+                <a:latin typeface="Calibri"/>
+              </a:rPr>
+              <a:t>In the UI (main.py — awaiting rig test)</a:t>
+            </a:r>
+          </a:p>
+        </p:txBody>
+      </p:sp>
+      <p:sp>
+        <p:nvSpPr>
+          <p:cNvPr id="9" name="TextBox 8"/>
+          <p:cNvSpPr txBox="1"/>
+          <p:nvPr/>
+        </p:nvSpPr>
+        <p:spPr>
+          <a:xfrm>
+            <a:off x="6172200" y="1572768"/>
+            <a:ext cx="5669280" cy="3566160"/>
+          </a:xfrm>
+          <a:prstGeom prst="rect">
+            <a:avLst/>
+          </a:prstGeom>
+          <a:noFill/>
+        </p:spPr>
+        <p:txBody>
+          <a:bodyPr wrap="square" lIns="45720" rIns="45720" tIns="18288" bIns="18288" anchor="t">
+            <a:spAutoFit/>
+          </a:bodyPr>
+          <a:lstStyle/>
+          <a:p>
+            <a:pPr algn="l"/>
+            <a:r>
+              <a:rPr sz="1200" b="0" i="0">
+                <a:solidFill>
+                  <a:srgbClr val="000000"/>
+                </a:solidFill>
+                <a:latin typeface="Calibri"/>
+              </a:rPr>
+              <a:t>•  Generate report  — one button → PDF + images
+•  Recipe dropdown  — Load / Save a test setup
+•  Prepare specimen  — 1-click tare (position + force + DIC)
+•  Auto-stop at fracture  — halts on load collapse
+•  Strain-rate mode (BETA)  — closed-loop dε/dt
+•  DIC health HUD  — live OK / WARN / BAD badge
+•  Safety net  — 10 kN force / 45 mm travel / 900 s cap</a:t>
+            </a:r>
+          </a:p>
+        </p:txBody>
+      </p:sp>
+      <p:sp>
+        <p:nvSpPr>
+          <p:cNvPr id="10" name="TextBox 9"/>
+          <p:cNvSpPr txBox="1"/>
+          <p:nvPr/>
+        </p:nvSpPr>
+        <p:spPr>
+          <a:xfrm>
+            <a:off x="548640" y="6400800"/>
+            <a:ext cx="11064240" cy="365760"/>
+          </a:xfrm>
+          <a:prstGeom prst="rect">
+            <a:avLst/>
+          </a:prstGeom>
+          <a:noFill/>
+        </p:spPr>
+        <p:txBody>
+          <a:bodyPr wrap="square" lIns="45720" rIns="45720" tIns="18288" bIns="18288" anchor="t">
+            <a:spAutoFit/>
+          </a:bodyPr>
+          <a:lstStyle/>
+          <a:p>
+            <a:pPr algn="l"/>
+            <a:r>
+              <a:rPr sz="1200" b="0" i="1">
+                <a:solidFill>
+                  <a:srgbClr val="707070"/>
+                </a:solidFill>
+                <a:latin typeface="Calibri"/>
+              </a:rPr>
+              <a:t>Modules committed &amp; regression-checked against the deck numbers; the UI wiring stays in the unversioned main.py and will be snapshot-committed once validated on the rig.</a:t>
+            </a:r>
+          </a:p>
+        </p:txBody>
+      </p:sp>
+      <p:sp>
+        <p:nvSpPr>
+          <p:cNvPr id="11" name="TextBox 10"/>
+          <p:cNvSpPr txBox="1"/>
+          <p:nvPr/>
+        </p:nvSpPr>
+        <p:spPr>
+          <a:xfrm>
+            <a:off x="457200" y="6446520"/>
+            <a:ext cx="640080" cy="274320"/>
+          </a:xfrm>
+          <a:prstGeom prst="rect">
+            <a:avLst/>
+          </a:prstGeom>
+          <a:noFill/>
+        </p:spPr>
+        <p:txBody>
+          <a:bodyPr wrap="square" lIns="45720" rIns="45720" tIns="18288" bIns="18288" anchor="t">
+            <a:spAutoFit/>
+          </a:bodyPr>
+          <a:lstStyle/>
+          <a:p>
+            <a:pPr algn="l"/>
+            <a:r>
+              <a:rPr sz="1000" b="0" i="0">
+                <a:solidFill>
+                  <a:srgbClr val="707070"/>
+                </a:solidFill>
+                <a:latin typeface="Calibri"/>
+              </a:rPr>
+              <a:t>166</a:t>
+            </a:r>
+          </a:p>
+        </p:txBody>
+      </p:sp>
+    </p:spTree>
+  </p:cSld>
+  <p:clrMapOvr>
+    <a:masterClrMapping/>
+  </p:clrMapOvr>
+</p:sld>
+</file>
+
+<file path=ppt/slides/slide27.xml><?xml version="1.0" encoding="utf-8"?>
+<p:sld xmlns:a="http://schemas.openxmlformats.org/drawingml/2006/main" xmlns:p="http://schemas.openxmlformats.org/presentationml/2006/main" xmlns:r="http://schemas.openxmlformats.org/officeDocument/2006/relationships">
+  <p:cSld>
+    <p:spTree>
+      <p:nvGrpSpPr>
+        <p:cNvPr id="1" name=""/>
+        <p:cNvGrpSpPr/>
+        <p:nvPr/>
+      </p:nvGrpSpPr>
+      <p:grpSpPr/>
+      <p:sp>
+        <p:nvSpPr>
+          <p:cNvPr id="2" name="TextBox 1"/>
+          <p:cNvSpPr txBox="1"/>
+          <p:nvPr/>
+        </p:nvSpPr>
+        <p:spPr>
+          <a:xfrm>
+            <a:off x="11155680" y="274320"/>
+            <a:ext cx="914400" cy="274320"/>
+          </a:xfrm>
+          <a:prstGeom prst="rect">
+            <a:avLst/>
+          </a:prstGeom>
+          <a:noFill/>
+        </p:spPr>
+        <p:txBody>
+          <a:bodyPr wrap="square" lIns="45720" rIns="45720" tIns="18288" bIns="18288" anchor="t">
+            <a:spAutoFit/>
+          </a:bodyPr>
+          <a:lstStyle/>
+          <a:p>
+            <a:pPr algn="r"/>
+            <a:r>
+              <a:rPr sz="800" b="1" i="0">
+                <a:solidFill>
+                  <a:srgbClr val="707070"/>
+                </a:solidFill>
+                <a:latin typeface="Calibri"/>
+              </a:rPr>
+              <a:t>JÖNKÖPING UNIVERSITY</a:t>
+            </a:r>
+          </a:p>
+        </p:txBody>
+      </p:sp>
+      <p:sp>
+        <p:nvSpPr>
+          <p:cNvPr id="3" name="Rectangle 2"/>
+          <p:cNvSpPr/>
+          <p:nvPr/>
+        </p:nvSpPr>
+        <p:spPr>
+          <a:xfrm>
+            <a:off x="457200" y="411480"/>
+            <a:ext cx="457200" cy="73152"/>
+          </a:xfrm>
+          <a:prstGeom prst="rect">
+            <a:avLst/>
+          </a:prstGeom>
+          <a:solidFill>
+            <a:srgbClr val="A9D6EF"/>
+          </a:solidFill>
+          <a:ln>
+            <a:noFill/>
+          </a:ln>
+        </p:spPr>
+        <p:style>
+          <a:lnRef idx="1">
+            <a:schemeClr val="accent1"/>
+          </a:lnRef>
+          <a:fillRef idx="3">
+            <a:schemeClr val="accent1"/>
+          </a:fillRef>
+          <a:effectRef idx="2">
+            <a:schemeClr val="accent1"/>
+          </a:effectRef>
+          <a:fontRef idx="minor">
+            <a:schemeClr val="lt1"/>
+          </a:fontRef>
+        </p:style>
+        <p:txBody>
+          <a:bodyPr rtlCol="0" anchor="ctr"/>
+          <a:lstStyle/>
+          <a:p>
+            <a:pPr algn="ctr"/>
+          </a:p>
+        </p:txBody>
+      </p:sp>
+      <p:sp>
+        <p:nvSpPr>
+          <p:cNvPr id="4" name="TextBox 3"/>
+          <p:cNvSpPr txBox="1"/>
+          <p:nvPr/>
+        </p:nvSpPr>
+        <p:spPr>
+          <a:xfrm>
+            <a:off x="457200" y="502920"/>
+            <a:ext cx="11430000" cy="822960"/>
+          </a:xfrm>
+          <a:prstGeom prst="rect">
+            <a:avLst/>
+          </a:prstGeom>
+          <a:noFill/>
+        </p:spPr>
+        <p:txBody>
+          <a:bodyPr wrap="square" lIns="45720" rIns="45720" tIns="18288" bIns="18288" anchor="t">
+            <a:spAutoFit/>
+          </a:bodyPr>
+          <a:lstStyle/>
+          <a:p>
+            <a:pPr algn="l"/>
+            <a:r>
+              <a:rPr sz="3000" b="0" i="0">
+                <a:solidFill>
+                  <a:srgbClr val="000000"/>
+                </a:solidFill>
+                <a:latin typeface="Calibri Light"/>
+              </a:rPr>
+              <a:t>TO BE TESTED — ON THE RIG / CAMERA</a:t>
+            </a:r>
+          </a:p>
+        </p:txBody>
+      </p:sp>
+      <p:sp>
+        <p:nvSpPr>
+          <p:cNvPr id="5" name="TextBox 4"/>
+          <p:cNvSpPr txBox="1"/>
+          <p:nvPr/>
+        </p:nvSpPr>
+        <p:spPr>
+          <a:xfrm>
+            <a:off x="365760" y="1170432"/>
+            <a:ext cx="6720840" cy="365760"/>
+          </a:xfrm>
+          <a:prstGeom prst="rect">
+            <a:avLst/>
+          </a:prstGeom>
+          <a:noFill/>
+        </p:spPr>
+        <p:txBody>
+          <a:bodyPr wrap="square" lIns="45720" rIns="45720" tIns="18288" bIns="18288" anchor="t">
+            <a:spAutoFit/>
+          </a:bodyPr>
+          <a:lstStyle/>
+          <a:p>
+            <a:pPr algn="l"/>
+            <a:r>
+              <a:rPr sz="1600" b="0" i="0">
+                <a:solidFill>
+                  <a:srgbClr val="707070"/>
+                </a:solidFill>
+                <a:latin typeface="Calibri"/>
+              </a:rPr>
+              <a:t>Feature checks (needs motor + camera)</a:t>
+            </a:r>
+          </a:p>
+        </p:txBody>
+      </p:sp>
+      <p:graphicFrame>
+        <p:nvGraphicFramePr>
+          <p:cNvPr id="6" name="Table 5"/>
+          <p:cNvGraphicFramePr>
+            <a:graphicFrameLocks noGrp="1"/>
+          </p:cNvGraphicFramePr>
+          <p:nvPr/>
+        </p:nvGraphicFramePr>
+        <p:xfrm>
+          <a:off x="365760" y="1554480"/>
+          <a:ext cx="6720840" cy="2788920"/>
+        </p:xfrm>
+        <a:graphic>
+          <a:graphicData uri="http://schemas.openxmlformats.org/drawingml/2006/table">
+            <a:tbl>
+              <a:tblPr firstRow="1" bandRow="1">
+                <a:tableStyleId>{5C22544A-7EE6-4342-B048-85BDC9FD1C3A}</a:tableStyleId>
+              </a:tblPr>
+              <a:tblGrid>
+                <a:gridCol w="2148840"/>
+                <a:gridCol w="4572000"/>
+              </a:tblGrid>
+              <a:tr h="398417">
+                <a:tc>
+                  <a:txBody>
+                    <a:bodyPr lIns="54864" rIns="54864" tIns="18288" bIns="18288" wrap="square" anchor="ctr"/>
+                    <a:lstStyle/>
+                    <a:p>
+                      <a:pPr algn="l"/>
+                      <a:r>
+                        <a:rPr sz="1000" b="1">
+                          <a:solidFill>
+                            <a:srgbClr val="FFFFFF"/>
+                          </a:solidFill>
+                          <a:latin typeface="Calibri"/>
+                        </a:rPr>
+                        <a:t>Feature</a:t>
+                      </a:r>
+                    </a:p>
+                  </a:txBody>
+                  <a:tcPr>
+                    <a:solidFill>
+                      <a:srgbClr val="143D2F"/>
+                    </a:solidFill>
+                  </a:tcPr>
+                </a:tc>
+                <a:tc>
+                  <a:txBody>
+                    <a:bodyPr lIns="54864" rIns="54864" tIns="18288" bIns="18288" wrap="square" anchor="ctr"/>
+                    <a:lstStyle/>
+                    <a:p>
+                      <a:pPr algn="l"/>
+                      <a:r>
+                        <a:rPr sz="1000" b="1">
+                          <a:solidFill>
+                            <a:srgbClr val="FFFFFF"/>
+                          </a:solidFill>
+                          <a:latin typeface="Calibri"/>
+                        </a:rPr>
+                        <a:t>Pass =</a:t>
+                      </a:r>
+                    </a:p>
+                  </a:txBody>
+                  <a:tcPr>
+                    <a:solidFill>
+                      <a:srgbClr val="143D2F"/>
+                    </a:solidFill>
+                  </a:tcPr>
+                </a:tc>
+              </a:tr>
+              <a:tr h="398417">
+                <a:tc>
+                  <a:txBody>
+                    <a:bodyPr lIns="54864" rIns="54864" tIns="18288" bIns="18288" wrap="square" anchor="ctr"/>
+                    <a:lstStyle/>
+                    <a:p>
+                      <a:pPr algn="l"/>
+                      <a:r>
+                        <a:rPr sz="950" b="0">
+                          <a:solidFill>
+                            <a:srgbClr val="000000"/>
+                          </a:solidFill>
+                          <a:latin typeface="Calibri"/>
+                        </a:rPr>
+                        <a:t>DIC health HUD</a:t>
+                      </a:r>
+                    </a:p>
+                  </a:txBody>
+                  <a:tcPr/>
+                </a:tc>
+                <a:tc>
+                  <a:txBody>
+                    <a:bodyPr lIns="54864" rIns="54864" tIns="18288" bIns="18288" wrap="square" anchor="ctr"/>
+                    <a:lstStyle/>
+                    <a:p>
+                      <a:pPr algn="l"/>
+                      <a:r>
+                        <a:rPr sz="950" b="0">
+                          <a:solidFill>
+                            <a:srgbClr val="000000"/>
+                          </a:solidFill>
+                          <a:latin typeface="Calibri"/>
+                        </a:rPr>
+                        <a:t>camera on → green 2/2; cover a dot → red BAD</a:t>
+                      </a:r>
+                    </a:p>
+                  </a:txBody>
+                  <a:tcPr/>
+                </a:tc>
+              </a:tr>
+              <a:tr h="398417">
+                <a:tc>
+                  <a:txBody>
+                    <a:bodyPr lIns="54864" rIns="54864" tIns="18288" bIns="18288" wrap="square" anchor="ctr"/>
+                    <a:lstStyle/>
+                    <a:p>
+                      <a:pPr algn="l"/>
+                      <a:r>
+                        <a:rPr sz="950" b="0">
+                          <a:solidFill>
+                            <a:srgbClr val="000000"/>
+                          </a:solidFill>
+                          <a:latin typeface="Calibri"/>
+                        </a:rPr>
+                        <a:t>Prepare specimen</a:t>
+                      </a:r>
+                    </a:p>
+                  </a:txBody>
+                  <a:tcPr/>
+                </a:tc>
+                <a:tc>
+                  <a:txBody>
+                    <a:bodyPr lIns="54864" rIns="54864" tIns="18288" bIns="18288" wrap="square" anchor="ctr"/>
+                    <a:lstStyle/>
+                    <a:p>
+                      <a:pPr algn="l"/>
+                      <a:r>
+                        <a:rPr sz="950" b="0">
+                          <a:solidFill>
+                            <a:srgbClr val="000000"/>
+                          </a:solidFill>
+                          <a:latin typeface="Calibri"/>
+                        </a:rPr>
+                        <a:t>one click → position + force + DIC all tared</a:t>
+                      </a:r>
+                    </a:p>
+                  </a:txBody>
+                  <a:tcPr/>
+                </a:tc>
+              </a:tr>
+              <a:tr h="398417">
+                <a:tc>
+                  <a:txBody>
+                    <a:bodyPr lIns="54864" rIns="54864" tIns="18288" bIns="18288" wrap="square" anchor="ctr"/>
+                    <a:lstStyle/>
+                    <a:p>
+                      <a:pPr algn="l"/>
+                      <a:r>
+                        <a:rPr sz="950" b="0">
+                          <a:solidFill>
+                            <a:srgbClr val="000000"/>
+                          </a:solidFill>
+                          <a:latin typeface="Calibri"/>
+                        </a:rPr>
+                        <a:t>Auto-stop at fracture</a:t>
+                      </a:r>
+                    </a:p>
+                  </a:txBody>
+                  <a:tcPr/>
+                </a:tc>
+                <a:tc>
+                  <a:txBody>
+                    <a:bodyPr lIns="54864" rIns="54864" tIns="18288" bIns="18288" wrap="square" anchor="ctr"/>
+                    <a:lstStyle/>
+                    <a:p>
+                      <a:pPr algn="l"/>
+                      <a:r>
+                        <a:rPr sz="950" b="0">
+                          <a:solidFill>
+                            <a:srgbClr val="000000"/>
+                          </a:solidFill>
+                          <a:latin typeface="Calibri"/>
+                        </a:rPr>
+                        <a:t>scrap pull → Stop right at the load collapse</a:t>
+                      </a:r>
+                    </a:p>
+                  </a:txBody>
+                  <a:tcPr/>
+                </a:tc>
+              </a:tr>
+              <a:tr h="398417">
+                <a:tc>
+                  <a:txBody>
+                    <a:bodyPr lIns="54864" rIns="54864" tIns="18288" bIns="18288" wrap="square" anchor="ctr"/>
+                    <a:lstStyle/>
+                    <a:p>
+                      <a:pPr algn="l"/>
+                      <a:r>
+                        <a:rPr sz="950" b="0">
+                          <a:solidFill>
+                            <a:srgbClr val="000000"/>
+                          </a:solidFill>
+                          <a:latin typeface="Calibri"/>
+                        </a:rPr>
+                        <a:t>Recipes</a:t>
+                      </a:r>
+                    </a:p>
+                  </a:txBody>
+                  <a:tcPr/>
+                </a:tc>
+                <a:tc>
+                  <a:txBody>
+                    <a:bodyPr lIns="54864" rIns="54864" tIns="18288" bIns="18288" wrap="square" anchor="ctr"/>
+                    <a:lstStyle/>
+                    <a:p>
+                      <a:pPr algn="l"/>
+                      <a:r>
+                        <a:rPr sz="950" b="0">
+                          <a:solidFill>
+                            <a:srgbClr val="000000"/>
+                          </a:solidFill>
+                          <a:latin typeface="Calibri"/>
+                        </a:rPr>
+                        <a:t>load a starter → inputs change; Save → in list</a:t>
+                      </a:r>
+                    </a:p>
+                  </a:txBody>
+                  <a:tcPr/>
+                </a:tc>
+              </a:tr>
+              <a:tr h="398417">
+                <a:tc>
+                  <a:txBody>
+                    <a:bodyPr lIns="54864" rIns="54864" tIns="18288" bIns="18288" wrap="square" anchor="ctr"/>
+                    <a:lstStyle/>
+                    <a:p>
+                      <a:pPr algn="l"/>
+                      <a:r>
+                        <a:rPr sz="950" b="0">
+                          <a:solidFill>
+                            <a:srgbClr val="000000"/>
+                          </a:solidFill>
+                          <a:latin typeface="Calibri"/>
+                        </a:rPr>
+                        <a:t>Generate report</a:t>
+                      </a:r>
+                    </a:p>
+                  </a:txBody>
+                  <a:tcPr/>
+                </a:tc>
+                <a:tc>
+                  <a:txBody>
+                    <a:bodyPr lIns="54864" rIns="54864" tIns="18288" bIns="18288" wrap="square" anchor="ctr"/>
+                    <a:lstStyle/>
+                    <a:p>
+                      <a:pPr algn="l"/>
+                      <a:r>
+                        <a:rPr sz="950" b="0">
+                          <a:solidFill>
+                            <a:srgbClr val="000000"/>
+                          </a:solidFill>
+                          <a:latin typeface="Calibri"/>
+                        </a:rPr>
+                        <a:t>after a test → PDF + PNG land in /reports</a:t>
+                      </a:r>
+                    </a:p>
+                  </a:txBody>
+                  <a:tcPr/>
+                </a:tc>
+              </a:tr>
+              <a:tr h="398418">
+                <a:tc>
+                  <a:txBody>
+                    <a:bodyPr lIns="54864" rIns="54864" tIns="18288" bIns="18288" wrap="square" anchor="ctr"/>
+                    <a:lstStyle/>
+                    <a:p>
+                      <a:pPr algn="l"/>
+                      <a:r>
+                        <a:rPr sz="950" b="0">
+                          <a:solidFill>
+                            <a:srgbClr val="000000"/>
+                          </a:solidFill>
+                          <a:latin typeface="Calibri"/>
+                        </a:rPr>
+                        <a:t>Strain-rate (BETA)</a:t>
+                      </a:r>
+                    </a:p>
+                  </a:txBody>
+                  <a:tcPr/>
+                </a:tc>
+                <a:tc>
+                  <a:txBody>
+                    <a:bodyPr lIns="54864" rIns="54864" tIns="18288" bIns="18288" wrap="square" anchor="ctr"/>
+                    <a:lstStyle/>
+                    <a:p>
+                      <a:pPr algn="l"/>
+                      <a:r>
+                        <a:rPr sz="950" b="0">
+                          <a:solidFill>
+                            <a:srgbClr val="000000"/>
+                          </a:solidFill>
+                          <a:latin typeface="Calibri"/>
+                        </a:rPr>
+                        <a:t>scrap pull → holds dε/dt; stops at target / break</a:t>
+                      </a:r>
+                    </a:p>
+                  </a:txBody>
+                  <a:tcPr/>
+                </a:tc>
+              </a:tr>
+            </a:tbl>
+          </a:graphicData>
+        </a:graphic>
+      </p:graphicFrame>
+      <p:sp>
+        <p:nvSpPr>
+          <p:cNvPr id="7" name="TextBox 6"/>
+          <p:cNvSpPr txBox="1"/>
+          <p:nvPr/>
+        </p:nvSpPr>
+        <p:spPr>
+          <a:xfrm>
+            <a:off x="7269480" y="1170432"/>
+            <a:ext cx="4572000" cy="365760"/>
+          </a:xfrm>
+          <a:prstGeom prst="rect">
+            <a:avLst/>
+          </a:prstGeom>
+          <a:noFill/>
+        </p:spPr>
+        <p:txBody>
+          <a:bodyPr wrap="square" lIns="45720" rIns="45720" tIns="18288" bIns="18288" anchor="t">
+            <a:spAutoFit/>
+          </a:bodyPr>
+          <a:lstStyle/>
+          <a:p>
+            <a:pPr algn="l"/>
+            <a:r>
+              <a:rPr sz="1600" b="0" i="0">
+                <a:solidFill>
+                  <a:srgbClr val="707070"/>
+                </a:solidFill>
+                <a:latin typeface="Calibri"/>
+              </a:rPr>
+              <a:t>Rig facts to report back</a:t>
+            </a:r>
+          </a:p>
+        </p:txBody>
+      </p:sp>
+      <p:sp>
+        <p:nvSpPr>
+          <p:cNvPr id="8" name="TextBox 7"/>
+          <p:cNvSpPr txBox="1"/>
+          <p:nvPr/>
+        </p:nvSpPr>
+        <p:spPr>
+          <a:xfrm>
+            <a:off x="7269480" y="1572768"/>
+            <a:ext cx="4572000" cy="2743200"/>
+          </a:xfrm>
+          <a:prstGeom prst="rect">
+            <a:avLst/>
+          </a:prstGeom>
+          <a:noFill/>
+        </p:spPr>
+        <p:txBody>
+          <a:bodyPr wrap="square" lIns="45720" rIns="45720" tIns="18288" bIns="18288" anchor="t">
+            <a:spAutoFit/>
+          </a:bodyPr>
+          <a:lstStyle/>
+          <a:p>
+            <a:pPr algn="l"/>
+            <a:r>
+              <a:rPr sz="1150" b="0" i="0">
+                <a:solidFill>
+                  <a:srgbClr val="000000"/>
+                </a:solidFill>
+                <a:latin typeface="Calibri"/>
+              </a:rPr>
+              <a:t>These unblock the other 4 test modes:
+1.  Does SetSpeed 0 HOLD the motor still?
+     (dwell — staircase / relaxation)
+2.  Clean reversal sequence — Stop → SetSpeed
+     → direction?  (cyclic / creep)
+3.  Usable crosshead stroke (mm)?
+     (finalise the 45 mm travel cap)</a:t>
+            </a:r>
+          </a:p>
+        </p:txBody>
+      </p:sp>
+      <p:sp>
+        <p:nvSpPr>
+          <p:cNvPr id="9" name="Rectangle 8"/>
+          <p:cNvSpPr/>
+          <p:nvPr/>
+        </p:nvSpPr>
+        <p:spPr>
+          <a:xfrm>
+            <a:off x="365760" y="5029200"/>
+            <a:ext cx="11475720" cy="960120"/>
+          </a:xfrm>
+          <a:prstGeom prst="rect">
+            <a:avLst/>
+          </a:prstGeom>
+          <a:solidFill>
+            <a:srgbClr val="FFF3CD"/>
+          </a:solidFill>
+          <a:ln>
+            <a:noFill/>
+          </a:ln>
+        </p:spPr>
+        <p:style>
+          <a:lnRef idx="1">
+            <a:schemeClr val="accent1"/>
+          </a:lnRef>
+          <a:fillRef idx="3">
+            <a:schemeClr val="accent1"/>
+          </a:fillRef>
+          <a:effectRef idx="2">
+            <a:schemeClr val="accent1"/>
+          </a:effectRef>
+          <a:fontRef idx="minor">
+            <a:schemeClr val="lt1"/>
+          </a:fontRef>
+        </p:style>
+        <p:txBody>
+          <a:bodyPr rtlCol="0" anchor="ctr" wrap="square" lIns="109728" rIns="109728"/>
+          <a:lstStyle/>
+          <a:p>
+            <a:pPr algn="ctr"/>
+            <a:r>
+              <a:rPr sz="1150" b="1">
+                <a:solidFill>
+                  <a:srgbClr val="000000"/>
+                </a:solidFill>
+                <a:latin typeface="Calibri"/>
+              </a:rPr>
+              <a:t>SAFETY — Auto-stop and Strain-rate drive the motor: run them first on a SCRAP specimen with a hand near E-Stop. Everything else is read-only. Full step-by-step list: Software/UTM_PyQt6/TESTING_TODO.md</a:t>
+            </a:r>
+          </a:p>
+        </p:txBody>
+      </p:sp>
+      <p:sp>
+        <p:nvSpPr>
+          <p:cNvPr id="10" name="TextBox 9"/>
+          <p:cNvSpPr txBox="1"/>
+          <p:nvPr/>
+        </p:nvSpPr>
+        <p:spPr>
+          <a:xfrm>
+            <a:off x="548640" y="6400800"/>
+            <a:ext cx="11064240" cy="365760"/>
+          </a:xfrm>
+          <a:prstGeom prst="rect">
+            <a:avLst/>
+          </a:prstGeom>
+          <a:noFill/>
+        </p:spPr>
+        <p:txBody>
+          <a:bodyPr wrap="square" lIns="45720" rIns="45720" tIns="18288" bIns="18288" anchor="t">
+            <a:spAutoFit/>
+          </a:bodyPr>
+          <a:lstStyle/>
+          <a:p>
+            <a:pPr algn="l"/>
+            <a:r>
+              <a:rPr sz="1200" b="0" i="1">
+                <a:solidFill>
+                  <a:srgbClr val="707070"/>
+                </a:solidFill>
+                <a:latin typeface="Calibri"/>
+              </a:rPr>
+              <a:t>Logic is already sim/offline-validated — these runs confirm behaviour on real hardware and set the tunable thresholds (fracture arm 30% / collapse 50%, travel cap).</a:t>
+            </a:r>
+          </a:p>
+        </p:txBody>
+      </p:sp>
+      <p:sp>
+        <p:nvSpPr>
+          <p:cNvPr id="11" name="TextBox 10"/>
+          <p:cNvSpPr txBox="1"/>
+          <p:nvPr/>
+        </p:nvSpPr>
+        <p:spPr>
+          <a:xfrm>
+            <a:off x="457200" y="6446520"/>
+            <a:ext cx="640080" cy="274320"/>
+          </a:xfrm>
+          <a:prstGeom prst="rect">
+            <a:avLst/>
+          </a:prstGeom>
+          <a:noFill/>
+        </p:spPr>
+        <p:txBody>
+          <a:bodyPr wrap="square" lIns="45720" rIns="45720" tIns="18288" bIns="18288" anchor="t">
+            <a:spAutoFit/>
+          </a:bodyPr>
+          <a:lstStyle/>
+          <a:p>
+            <a:pPr algn="l"/>
+            <a:r>
+              <a:rPr sz="1000" b="0" i="0">
+                <a:solidFill>
+                  <a:srgbClr val="707070"/>
+                </a:solidFill>
+                <a:latin typeface="Calibri"/>
+              </a:rPr>
+              <a:t>167</a:t>
+            </a:r>
+          </a:p>
+        </p:txBody>
+      </p:sp>
+    </p:spTree>
+  </p:cSld>
+  <p:clrMapOvr>
+    <a:masterClrMapping/>
+  </p:clrMapOvr>
+</p:sld>
+</file>
+
+<file path=ppt/slides/slide28.xml><?xml version="1.0" encoding="utf-8"?>
+<p:sld xmlns:a="http://schemas.openxmlformats.org/drawingml/2006/main" xmlns:p="http://schemas.openxmlformats.org/presentationml/2006/main" xmlns:r="http://schemas.openxmlformats.org/officeDocument/2006/relationships">
+  <p:cSld>
+    <p:spTree>
+      <p:nvGrpSpPr>
+        <p:cNvPr id="1" name=""/>
+        <p:cNvGrpSpPr/>
+        <p:nvPr/>
+      </p:nvGrpSpPr>
+      <p:grpSpPr/>
+      <p:sp>
+        <p:nvSpPr>
+          <p:cNvPr id="2" name="TextBox 1"/>
+          <p:cNvSpPr txBox="1"/>
+          <p:nvPr/>
+        </p:nvSpPr>
+        <p:spPr>
+          <a:xfrm>
+            <a:off x="11155680" y="274320"/>
+            <a:ext cx="914400" cy="274320"/>
+          </a:xfrm>
+          <a:prstGeom prst="rect">
+            <a:avLst/>
+          </a:prstGeom>
+          <a:noFill/>
+        </p:spPr>
+        <p:txBody>
+          <a:bodyPr wrap="square" lIns="45720" rIns="45720" tIns="18288" bIns="18288" anchor="t">
+            <a:spAutoFit/>
+          </a:bodyPr>
+          <a:lstStyle/>
+          <a:p>
+            <a:pPr algn="r"/>
+            <a:r>
+              <a:rPr sz="800" b="1" i="0">
+                <a:solidFill>
+                  <a:srgbClr val="707070"/>
+                </a:solidFill>
+                <a:latin typeface="Calibri"/>
+              </a:rPr>
+              <a:t>JÖNKÖPING UNIVERSITY</a:t>
+            </a:r>
+          </a:p>
+        </p:txBody>
+      </p:sp>
+      <p:sp>
+        <p:nvSpPr>
+          <p:cNvPr id="3" name="Rectangle 2"/>
+          <p:cNvSpPr/>
+          <p:nvPr/>
+        </p:nvSpPr>
+        <p:spPr>
+          <a:xfrm>
+            <a:off x="457200" y="411480"/>
+            <a:ext cx="457200" cy="73152"/>
+          </a:xfrm>
+          <a:prstGeom prst="rect">
+            <a:avLst/>
+          </a:prstGeom>
+          <a:solidFill>
+            <a:srgbClr val="A9D6EF"/>
+          </a:solidFill>
+          <a:ln>
+            <a:noFill/>
+          </a:ln>
+        </p:spPr>
+        <p:style>
+          <a:lnRef idx="1">
+            <a:schemeClr val="accent1"/>
+          </a:lnRef>
+          <a:fillRef idx="3">
+            <a:schemeClr val="accent1"/>
+          </a:fillRef>
+          <a:effectRef idx="2">
+            <a:schemeClr val="accent1"/>
+          </a:effectRef>
+          <a:fontRef idx="minor">
+            <a:schemeClr val="lt1"/>
+          </a:fontRef>
+        </p:style>
+        <p:txBody>
+          <a:bodyPr rtlCol="0" anchor="ctr"/>
+          <a:lstStyle/>
+          <a:p>
+            <a:pPr algn="ctr"/>
+          </a:p>
+        </p:txBody>
+      </p:sp>
+      <p:sp>
+        <p:nvSpPr>
+          <p:cNvPr id="4" name="TextBox 3"/>
+          <p:cNvSpPr txBox="1"/>
+          <p:nvPr/>
+        </p:nvSpPr>
+        <p:spPr>
+          <a:xfrm>
+            <a:off x="457200" y="502920"/>
+            <a:ext cx="11430000" cy="822960"/>
+          </a:xfrm>
+          <a:prstGeom prst="rect">
+            <a:avLst/>
+          </a:prstGeom>
+          <a:noFill/>
+        </p:spPr>
+        <p:txBody>
+          <a:bodyPr wrap="square" lIns="45720" rIns="45720" tIns="18288" bIns="18288" anchor="t">
+            <a:spAutoFit/>
+          </a:bodyPr>
+          <a:lstStyle/>
+          <a:p>
+            <a:pPr algn="l"/>
+            <a:r>
+              <a:rPr sz="3000" b="0" i="0">
+                <a:solidFill>
+                  <a:srgbClr val="000000"/>
+                </a:solidFill>
+                <a:latin typeface="Calibri Light"/>
+              </a:rPr>
+              <a:t>PLANNED NEXT — MEASURED POISSON (EDGE-WIDTH) + REMAINING AUTOMATION</a:t>
+            </a:r>
+          </a:p>
+        </p:txBody>
+      </p:sp>
+      <p:sp>
+        <p:nvSpPr>
+          <p:cNvPr id="5" name="TextBox 4"/>
+          <p:cNvSpPr txBox="1"/>
+          <p:nvPr/>
+        </p:nvSpPr>
+        <p:spPr>
+          <a:xfrm>
+            <a:off x="365760" y="1170432"/>
+            <a:ext cx="11475720" cy="365760"/>
+          </a:xfrm>
+          <a:prstGeom prst="rect">
+            <a:avLst/>
+          </a:prstGeom>
+          <a:noFill/>
+        </p:spPr>
+        <p:txBody>
+          <a:bodyPr wrap="square" lIns="45720" rIns="45720" tIns="18288" bIns="18288" anchor="t">
+            <a:spAutoFit/>
+          </a:bodyPr>
+          <a:lstStyle/>
+          <a:p>
+            <a:pPr algn="l"/>
+            <a:r>
+              <a:rPr sz="1600" b="0" i="0">
+                <a:solidFill>
+                  <a:srgbClr val="707070"/>
+                </a:solidFill>
+                <a:latin typeface="Calibri"/>
+              </a:rPr>
+              <a:t>Measured Poisson / true Cauchy — edge-width tracking  (next build, reuses THIS camera)</a:t>
+            </a:r>
+          </a:p>
+        </p:txBody>
+      </p:sp>
+      <p:sp>
+        <p:nvSpPr>
+          <p:cNvPr id="6" name="Rounded Rectangle 5"/>
+          <p:cNvSpPr/>
+          <p:nvPr/>
+        </p:nvSpPr>
+        <p:spPr>
+          <a:xfrm>
+            <a:off x="365760" y="1600200"/>
+            <a:ext cx="2514600" cy="868680"/>
+          </a:xfrm>
+          <a:prstGeom prst="roundRect">
+            <a:avLst/>
+          </a:prstGeom>
+          <a:solidFill>
+            <a:srgbClr val="333333"/>
+          </a:solidFill>
+          <a:ln w="15240">
+            <a:solidFill>
+              <a:srgbClr val="000000"/>
+            </a:solidFill>
+          </a:ln>
+        </p:spPr>
+        <p:style>
+          <a:lnRef idx="1">
+            <a:schemeClr val="accent1"/>
+          </a:lnRef>
+          <a:fillRef idx="3">
+            <a:schemeClr val="accent1"/>
+          </a:fillRef>
+          <a:effectRef idx="2">
+            <a:schemeClr val="accent1"/>
+          </a:effectRef>
+          <a:fontRef idx="minor">
+            <a:schemeClr val="lt1"/>
+          </a:fontRef>
+        </p:style>
+        <p:txBody>
+          <a:bodyPr rtlCol="0" anchor="ctr" lIns="54864" rIns="54864" tIns="27432" bIns="27432" wrap="square"/>
+          <a:lstStyle/>
+          <a:p>
+            <a:pPr algn="ctr"/>
+            <a:r>
+              <a:rPr sz="1050" b="1">
+                <a:solidFill>
+                  <a:srgbClr val="FFFFFF"/>
+                </a:solidFill>
+                <a:latin typeface="Calibri"/>
+              </a:rPr>
+              <a:t>Matte-black MDF
+backdrop
+(behind gauge)</a:t>
+            </a:r>
+          </a:p>
+        </p:txBody>
+      </p:sp>
+      <p:sp>
+        <p:nvSpPr>
+          <p:cNvPr id="7" name="Rounded Rectangle 6"/>
+          <p:cNvSpPr/>
+          <p:nvPr/>
+        </p:nvSpPr>
+        <p:spPr>
+          <a:xfrm>
+            <a:off x="3310128" y="1600200"/>
+            <a:ext cx="2514600" cy="868680"/>
+          </a:xfrm>
+          <a:prstGeom prst="roundRect">
+            <a:avLst/>
+          </a:prstGeom>
+          <a:solidFill>
+            <a:srgbClr val="FFFFFF"/>
+          </a:solidFill>
+          <a:ln w="15240">
+            <a:solidFill>
+              <a:srgbClr val="1F77B4"/>
+            </a:solidFill>
+          </a:ln>
+        </p:spPr>
+        <p:style>
+          <a:lnRef idx="1">
+            <a:schemeClr val="accent1"/>
+          </a:lnRef>
+          <a:fillRef idx="3">
+            <a:schemeClr val="accent1"/>
+          </a:fillRef>
+          <a:effectRef idx="2">
+            <a:schemeClr val="accent1"/>
+          </a:effectRef>
+          <a:fontRef idx="minor">
+            <a:schemeClr val="lt1"/>
+          </a:fontRef>
+        </p:style>
+        <p:txBody>
+          <a:bodyPr rtlCol="0" anchor="ctr" lIns="54864" rIns="54864" tIns="27432" bIns="27432" wrap="square"/>
+          <a:lstStyle/>
+          <a:p>
+            <a:pPr algn="ctr"/>
+            <a:r>
+              <a:rPr sz="1050" b="0">
+                <a:solidFill>
+                  <a:srgbClr val="000000"/>
+                </a:solidFill>
+                <a:latin typeface="Calibri"/>
+              </a:rPr>
+              <a:t>Camera detects
+L &amp; R specimen
+edges</a:t>
+            </a:r>
+          </a:p>
+        </p:txBody>
+      </p:sp>
+      <p:sp>
+        <p:nvSpPr>
+          <p:cNvPr id="8" name="Rounded Rectangle 7"/>
+          <p:cNvSpPr/>
+          <p:nvPr/>
+        </p:nvSpPr>
+        <p:spPr>
+          <a:xfrm>
+            <a:off x="6254496" y="1600200"/>
+            <a:ext cx="2514600" cy="868680"/>
+          </a:xfrm>
+          <a:prstGeom prst="roundRect">
+            <a:avLst/>
+          </a:prstGeom>
+          <a:solidFill>
+            <a:srgbClr val="FFFFFF"/>
+          </a:solidFill>
+          <a:ln w="15240">
+            <a:solidFill>
+              <a:srgbClr val="1F77B4"/>
+            </a:solidFill>
+          </a:ln>
+        </p:spPr>
+        <p:style>
+          <a:lnRef idx="1">
+            <a:schemeClr val="accent1"/>
+          </a:lnRef>
+          <a:fillRef idx="3">
+            <a:schemeClr val="accent1"/>
+          </a:fillRef>
+          <a:effectRef idx="2">
+            <a:schemeClr val="accent1"/>
+          </a:effectRef>
+          <a:fontRef idx="minor">
+            <a:schemeClr val="lt1"/>
+          </a:fontRef>
+        </p:style>
+        <p:txBody>
+          <a:bodyPr rtlCol="0" anchor="ctr" lIns="54864" rIns="54864" tIns="27432" bIns="27432" wrap="square"/>
+          <a:lstStyle/>
+          <a:p>
+            <a:pPr algn="ctr"/>
+            <a:r>
+              <a:rPr sz="1050" b="0">
+                <a:solidFill>
+                  <a:srgbClr val="000000"/>
+                </a:solidFill>
+                <a:latin typeface="Calibri"/>
+              </a:rPr>
+              <a:t>Average width
+over the gauge
+(100s of rows)</a:t>
+            </a:r>
+          </a:p>
+        </p:txBody>
+      </p:sp>
+      <p:sp>
+        <p:nvSpPr>
+          <p:cNvPr id="9" name="Rounded Rectangle 8"/>
+          <p:cNvSpPr/>
+          <p:nvPr/>
+        </p:nvSpPr>
+        <p:spPr>
+          <a:xfrm>
+            <a:off x="9198864" y="1600200"/>
+            <a:ext cx="2642616" cy="868680"/>
+          </a:xfrm>
+          <a:prstGeom prst="roundRect">
+            <a:avLst/>
+          </a:prstGeom>
+          <a:solidFill>
+            <a:srgbClr val="C8E6C9"/>
+          </a:solidFill>
+          <a:ln w="15240">
+            <a:solidFill>
+              <a:srgbClr val="1F3F2F"/>
+            </a:solidFill>
+          </a:ln>
+        </p:spPr>
+        <p:style>
+          <a:lnRef idx="1">
+            <a:schemeClr val="accent1"/>
+          </a:lnRef>
+          <a:fillRef idx="3">
+            <a:schemeClr val="accent1"/>
+          </a:fillRef>
+          <a:effectRef idx="2">
+            <a:schemeClr val="accent1"/>
+          </a:effectRef>
+          <a:fontRef idx="minor">
+            <a:schemeClr val="lt1"/>
+          </a:fontRef>
+        </p:style>
+        <p:txBody>
+          <a:bodyPr rtlCol="0" anchor="ctr" lIns="54864" rIns="54864" tIns="27432" bIns="27432" wrap="square"/>
+          <a:lstStyle/>
+          <a:p>
+            <a:pPr algn="ctr"/>
+            <a:r>
+              <a:rPr sz="1050" b="1">
+                <a:solidFill>
+                  <a:srgbClr val="1F3F2F"/>
+                </a:solidFill>
+                <a:latin typeface="Calibri"/>
+              </a:rPr>
+              <a:t>εw → ν  and
+true area →
+Cauchy stress</a:t>
+            </a:r>
+          </a:p>
+        </p:txBody>
+      </p:sp>
+      <p:cxnSp>
+        <p:nvCxnSpPr>
+          <p:cNvPr id="10" name="Connector 9"/>
+          <p:cNvCxnSpPr/>
+          <p:nvPr/>
+        </p:nvCxnSpPr>
+        <p:spPr>
+          <a:xfrm>
+            <a:off x="2898648" y="2039112"/>
+            <a:ext cx="393192" cy="0"/>
+          </a:xfrm>
+          <a:prstGeom prst="line">
+            <a:avLst/>
+          </a:prstGeom>
+          <a:ln w="19050">
+            <a:solidFill>
+              <a:srgbClr val="555555"/>
+            </a:solidFill>
+            <a:tailEnd type="triangle" w="med" len="med"/>
+          </a:ln>
+        </p:spPr>
+        <p:style>
+          <a:lnRef idx="2">
+            <a:schemeClr val="accent1"/>
+          </a:lnRef>
+          <a:fillRef idx="0">
+            <a:schemeClr val="accent1"/>
+          </a:fillRef>
+          <a:effectRef idx="1">
+            <a:schemeClr val="accent1"/>
+          </a:effectRef>
+          <a:fontRef idx="minor">
+            <a:schemeClr val="tx1"/>
+          </a:fontRef>
+        </p:style>
+      </p:cxnSp>
+      <p:cxnSp>
+        <p:nvCxnSpPr>
+          <p:cNvPr id="11" name="Connector 10"/>
+          <p:cNvCxnSpPr/>
+          <p:nvPr/>
+        </p:nvCxnSpPr>
+        <p:spPr>
+          <a:xfrm>
+            <a:off x="5843016" y="2039112"/>
+            <a:ext cx="393192" cy="0"/>
+          </a:xfrm>
+          <a:prstGeom prst="line">
+            <a:avLst/>
+          </a:prstGeom>
+          <a:ln w="19050">
+            <a:solidFill>
+              <a:srgbClr val="555555"/>
+            </a:solidFill>
+            <a:tailEnd type="triangle" w="med" len="med"/>
+          </a:ln>
+        </p:spPr>
+        <p:style>
+          <a:lnRef idx="2">
+            <a:schemeClr val="accent1"/>
+          </a:lnRef>
+          <a:fillRef idx="0">
+            <a:schemeClr val="accent1"/>
+          </a:fillRef>
+          <a:effectRef idx="1">
+            <a:schemeClr val="accent1"/>
+          </a:effectRef>
+          <a:fontRef idx="minor">
+            <a:schemeClr val="tx1"/>
+          </a:fontRef>
+        </p:style>
+      </p:cxnSp>
+      <p:cxnSp>
+        <p:nvCxnSpPr>
+          <p:cNvPr id="12" name="Connector 11"/>
+          <p:cNvCxnSpPr/>
+          <p:nvPr/>
+        </p:nvCxnSpPr>
+        <p:spPr>
+          <a:xfrm>
+            <a:off x="8787384" y="2039112"/>
+            <a:ext cx="393192" cy="0"/>
+          </a:xfrm>
+          <a:prstGeom prst="line">
+            <a:avLst/>
+          </a:prstGeom>
+          <a:ln w="19050">
+            <a:solidFill>
+              <a:srgbClr val="555555"/>
+            </a:solidFill>
+            <a:tailEnd type="triangle" w="med" len="med"/>
+          </a:ln>
+        </p:spPr>
+        <p:style>
+          <a:lnRef idx="2">
+            <a:schemeClr val="accent1"/>
+          </a:lnRef>
+          <a:fillRef idx="0">
+            <a:schemeClr val="accent1"/>
+          </a:fillRef>
+          <a:effectRef idx="1">
+            <a:schemeClr val="accent1"/>
+          </a:effectRef>
+          <a:fontRef idx="minor">
+            <a:schemeClr val="tx1"/>
+          </a:fontRef>
+        </p:style>
+      </p:cxnSp>
+      <p:sp>
+        <p:nvSpPr>
+          <p:cNvPr id="13" name="TextBox 12"/>
+          <p:cNvSpPr txBox="1"/>
+          <p:nvPr/>
+        </p:nvSpPr>
+        <p:spPr>
+          <a:xfrm>
+            <a:off x="365760" y="2606040"/>
+            <a:ext cx="11475720" cy="868680"/>
+          </a:xfrm>
+          <a:prstGeom prst="rect">
+            <a:avLst/>
+          </a:prstGeom>
+          <a:noFill/>
+        </p:spPr>
+        <p:txBody>
+          <a:bodyPr wrap="square" lIns="45720" rIns="45720" tIns="18288" bIns="18288" anchor="t">
+            <a:spAutoFit/>
+          </a:bodyPr>
+          <a:lstStyle/>
+          <a:p>
+            <a:pPr algn="l"/>
+            <a:r>
+              <a:rPr sz="1100" b="0" i="0">
+                <a:solidFill>
+                  <a:srgbClr val="000000"/>
+                </a:solidFill>
+                <a:latin typeface="Calibri"/>
+              </a:rPr>
+              <a:t>MEASURED (no assumed ν), reusing the current camera + specimen — matte finish avoids LED glare, a few-cm gap softens shadows. FIRST STEP: mount the board, grab ONE still frame → prototype the edge-detection to confirm contrast BEFORE building the live feature. (Transverse dots stay ruled out — see slide 164.)</a:t>
+            </a:r>
+          </a:p>
+        </p:txBody>
+      </p:sp>
+      <p:sp>
+        <p:nvSpPr>
+          <p:cNvPr id="14" name="TextBox 13"/>
+          <p:cNvSpPr txBox="1"/>
+          <p:nvPr/>
+        </p:nvSpPr>
+        <p:spPr>
+          <a:xfrm>
+            <a:off x="365760" y="3611880"/>
+            <a:ext cx="11475720" cy="365760"/>
+          </a:xfrm>
+          <a:prstGeom prst="rect">
+            <a:avLst/>
+          </a:prstGeom>
+          <a:noFill/>
+        </p:spPr>
+        <p:txBody>
+          <a:bodyPr wrap="square" lIns="45720" rIns="45720" tIns="18288" bIns="18288" anchor="t">
+            <a:spAutoFit/>
+          </a:bodyPr>
+          <a:lstStyle/>
+          <a:p>
+            <a:pPr algn="l"/>
+            <a:r>
+              <a:rPr sz="1600" b="0" i="0">
+                <a:solidFill>
+                  <a:srgbClr val="707070"/>
+                </a:solidFill>
+                <a:latin typeface="Calibri"/>
+              </a:rPr>
+              <a:t>Remaining automation &amp; ease-of-use</a:t>
+            </a:r>
+          </a:p>
+        </p:txBody>
+      </p:sp>
+      <p:sp>
+        <p:nvSpPr>
+          <p:cNvPr id="15" name="TextBox 14"/>
+          <p:cNvSpPr txBox="1"/>
+          <p:nvPr/>
+        </p:nvSpPr>
+        <p:spPr>
+          <a:xfrm>
+            <a:off x="365760" y="4005072"/>
+            <a:ext cx="5669280" cy="1828800"/>
+          </a:xfrm>
+          <a:prstGeom prst="rect">
+            <a:avLst/>
+          </a:prstGeom>
+          <a:noFill/>
+        </p:spPr>
+        <p:txBody>
+          <a:bodyPr wrap="square" lIns="45720" rIns="45720" tIns="18288" bIns="18288" anchor="t">
+            <a:spAutoFit/>
+          </a:bodyPr>
+          <a:lstStyle/>
+          <a:p>
+            <a:pPr algn="l"/>
+            <a:r>
+              <a:rPr sz="1150" b="0" i="0">
+                <a:solidFill>
+                  <a:srgbClr val="000000"/>
+                </a:solidFill>
+                <a:latin typeface="Calibri"/>
+              </a:rPr>
+              <a:t>•  Cyclic / staircase / relaxation / creep modes
+    (engine ready — needs the 3 rig facts)
+•  Full 'Run to fracture' — one button:
+    preload → pull → auto-halt → anchor → save
+•  Auto specimen metadata + folder from recipe</a:t>
+            </a:r>
+          </a:p>
+        </p:txBody>
+      </p:sp>
+      <p:sp>
+        <p:nvSpPr>
+          <p:cNvPr id="16" name="TextBox 15"/>
+          <p:cNvSpPr txBox="1"/>
+          <p:nvPr/>
+        </p:nvSpPr>
+        <p:spPr>
+          <a:xfrm>
+            <a:off x="6172200" y="4005072"/>
+            <a:ext cx="5669280" cy="1828800"/>
+          </a:xfrm>
+          <a:prstGeom prst="rect">
+            <a:avLst/>
+          </a:prstGeom>
+          <a:noFill/>
+        </p:spPr>
+        <p:txBody>
+          <a:bodyPr wrap="square" lIns="45720" rIns="45720" tIns="18288" bIns="18288" anchor="t">
+            <a:spAutoFit/>
+          </a:bodyPr>
+          <a:lstStyle/>
+          <a:p>
+            <a:pPr algn="l"/>
+            <a:r>
+              <a:rPr sz="1150" b="0" i="0">
+                <a:solidFill>
+                  <a:srgbClr val="000000"/>
+                </a:solidFill>
+                <a:latin typeface="Calibri"/>
+              </a:rPr>
+              <a:t>•  Guided wizard / checklist
+    (Connect → … → Prepare → Run → Save)
+•  Live stress-strain + elastic-modulus overlay
+•  Glanceable dashboard + fracture beep / banner</a:t>
+            </a:r>
+          </a:p>
+        </p:txBody>
+      </p:sp>
+      <p:sp>
+        <p:nvSpPr>
+          <p:cNvPr id="17" name="Rectangle 16"/>
+          <p:cNvSpPr/>
+          <p:nvPr/>
+        </p:nvSpPr>
+        <p:spPr>
+          <a:xfrm>
+            <a:off x="365760" y="5943600"/>
+            <a:ext cx="11475720" cy="658368"/>
+          </a:xfrm>
+          <a:prstGeom prst="rect">
+            <a:avLst/>
+          </a:prstGeom>
+          <a:solidFill>
+            <a:srgbClr val="E7F1F8"/>
+          </a:solidFill>
+          <a:ln>
+            <a:noFill/>
+          </a:ln>
+        </p:spPr>
+        <p:style>
+          <a:lnRef idx="1">
+            <a:schemeClr val="accent1"/>
+          </a:lnRef>
+          <a:fillRef idx="3">
+            <a:schemeClr val="accent1"/>
+          </a:fillRef>
+          <a:effectRef idx="2">
+            <a:schemeClr val="accent1"/>
+          </a:effectRef>
+          <a:fontRef idx="minor">
+            <a:schemeClr val="lt1"/>
+          </a:fontRef>
+        </p:style>
+        <p:txBody>
+          <a:bodyPr rtlCol="0" anchor="ctr" wrap="square" lIns="109728" rIns="109728"/>
+          <a:lstStyle/>
+          <a:p>
+            <a:pPr algn="ctr"/>
+            <a:r>
+              <a:rPr sz="1100" b="1">
+                <a:solidFill>
+                  <a:srgbClr val="000000"/>
+                </a:solidFill>
+                <a:latin typeface="Calibri"/>
+              </a:rPr>
+              <a:t>ORDER — rig-test what's built → confirm the 3 facts → wire the remaining modes → edge-width Poisson (after the backdrop) → UX layer.</a:t>
+            </a:r>
+          </a:p>
+        </p:txBody>
+      </p:sp>
+      <p:sp>
+        <p:nvSpPr>
+          <p:cNvPr id="18" name="TextBox 17"/>
+          <p:cNvSpPr txBox="1"/>
+          <p:nvPr/>
+        </p:nvSpPr>
+        <p:spPr>
+          <a:xfrm>
+            <a:off x="457200" y="6446520"/>
+            <a:ext cx="640080" cy="274320"/>
+          </a:xfrm>
+          <a:prstGeom prst="rect">
+            <a:avLst/>
+          </a:prstGeom>
+          <a:noFill/>
+        </p:spPr>
+        <p:txBody>
+          <a:bodyPr wrap="square" lIns="45720" rIns="45720" tIns="18288" bIns="18288" anchor="t">
+            <a:spAutoFit/>
+          </a:bodyPr>
+          <a:lstStyle/>
+          <a:p>
+            <a:pPr algn="l"/>
+            <a:r>
+              <a:rPr sz="1000" b="0" i="0">
+                <a:solidFill>
+                  <a:srgbClr val="707070"/>
+                </a:solidFill>
+                <a:latin typeface="Calibri"/>
+              </a:rPr>
+              <a:t>168</a:t>
             </a:r>
           </a:p>
         </p:txBody>

--- a/V6a_8_6_20_slides.pptx
+++ b/V6a_8_6_20_slides.pptx
@@ -17558,7 +17558,7 @@
                 </a:solidFill>
                 <a:latin typeface="Calibri"/>
               </a:rPr>
-              <a:t>The rig automated only ONE thing (auto-preload). A phased roadmap adds automated test modes, smart DIC and one-click analysis — each piece shippable on its own. Where it stands today:</a:t>
+              <a:t>The rig automated only ONE thing (auto-preload). A phased roadmap adds automated test modes, smart DIC and one-click analysis — each piece shippable on its own. After the full rig-test campaign:</a:t>
             </a:r>
           </a:p>
         </p:txBody>
@@ -17772,7 +17772,70 @@
                           </a:solidFill>
                           <a:latin typeface="Calibri"/>
                         </a:rPr>
-                        <a:t>BUILT — rig-test</a:t>
+                        <a:t>DONE — VALIDATED</a:t>
+                      </a:r>
+                    </a:p>
+                  </a:txBody>
+                  <a:tcPr>
+                    <a:solidFill>
+                      <a:srgbClr val="C8E6C9"/>
+                    </a:solidFill>
+                  </a:tcPr>
+                </a:tc>
+              </a:tr>
+              <a:tr h="419100">
+                <a:tc>
+                  <a:txBody>
+                    <a:bodyPr lIns="54864" rIns="54864" tIns="18288" bIns="18288" wrap="square" anchor="ctr"/>
+                    <a:lstStyle/>
+                    <a:p>
+                      <a:pPr algn="l"/>
+                      <a:r>
+                        <a:rPr sz="1050" b="0">
+                          <a:solidFill>
+                            <a:srgbClr val="000000"/>
+                          </a:solidFill>
+                          <a:latin typeface="Calibri"/>
+                        </a:rPr>
+                        <a:t>B · Closed-loop modes</a:t>
+                      </a:r>
+                    </a:p>
+                  </a:txBody>
+                  <a:tcPr/>
+                </a:tc>
+                <a:tc>
+                  <a:txBody>
+                    <a:bodyPr lIns="54864" rIns="54864" tIns="18288" bIns="18288" wrap="square" anchor="ctr"/>
+                    <a:lstStyle/>
+                    <a:p>
+                      <a:pPr algn="l"/>
+                      <a:r>
+                        <a:rPr sz="1050" b="0">
+                          <a:solidFill>
+                            <a:srgbClr val="000000"/>
+                          </a:solidFill>
+                          <a:latin typeface="Calibri"/>
+                        </a:rPr>
+                        <a:t>strain-rate + cyclic / staircase / relaxation / creep</a:t>
+                      </a:r>
+                    </a:p>
+                  </a:txBody>
+                  <a:tcPr/>
+                </a:tc>
+                <a:tc>
+                  <a:txBody>
+                    <a:bodyPr lIns="54864" rIns="54864" tIns="18288" bIns="18288" wrap="square" anchor="ctr"/>
+                    <a:lstStyle/>
+                    <a:p>
+                      <a:pPr algn="l"/>
+                      <a:r>
+                        <a:rPr sz="1050" b="1">
+                          <a:solidFill>
+                            <a:srgbClr val="000000"/>
+                          </a:solidFill>
+                          <a:latin typeface="Calibri"/>
+                        </a:rPr>
+                        <a:t>strain-rate DONE · 4 to wire</a:t>
                       </a:r>
                     </a:p>
                   </a:txBody>
@@ -17797,7 +17860,7 @@
                           </a:solidFill>
                           <a:latin typeface="Calibri"/>
                         </a:rPr>
-                        <a:t>B · Closed-loop modes</a:t>
+                        <a:t>C · Smart DIC</a:t>
                       </a:r>
                     </a:p>
                   </a:txBody>
@@ -17816,7 +17879,7 @@
                           </a:solidFill>
                           <a:latin typeface="Calibri"/>
                         </a:rPr>
-                        <a:t>strain-rate + cyclic / staircase / relaxation / creep</a:t>
+                        <a:t>live health HUD + measured Poisson / true Cauchy</a:t>
                       </a:r>
                     </a:p>
                   </a:txBody>
@@ -17835,70 +17898,7 @@
                           </a:solidFill>
                           <a:latin typeface="Calibri"/>
                         </a:rPr>
-                        <a:t>1 of 5 wired</a:t>
-                      </a:r>
-                    </a:p>
-                  </a:txBody>
-                  <a:tcPr>
-                    <a:solidFill>
-                      <a:srgbClr val="FFF3CD"/>
-                    </a:solidFill>
-                  </a:tcPr>
-                </a:tc>
-              </a:tr>
-              <a:tr h="419100">
-                <a:tc>
-                  <a:txBody>
-                    <a:bodyPr lIns="54864" rIns="54864" tIns="18288" bIns="18288" wrap="square" anchor="ctr"/>
-                    <a:lstStyle/>
-                    <a:p>
-                      <a:pPr algn="l"/>
-                      <a:r>
-                        <a:rPr sz="1050" b="0">
-                          <a:solidFill>
-                            <a:srgbClr val="000000"/>
-                          </a:solidFill>
-                          <a:latin typeface="Calibri"/>
-                        </a:rPr>
-                        <a:t>C · Smart DIC</a:t>
-                      </a:r>
-                    </a:p>
-                  </a:txBody>
-                  <a:tcPr/>
-                </a:tc>
-                <a:tc>
-                  <a:txBody>
-                    <a:bodyPr lIns="54864" rIns="54864" tIns="18288" bIns="18288" wrap="square" anchor="ctr"/>
-                    <a:lstStyle/>
-                    <a:p>
-                      <a:pPr algn="l"/>
-                      <a:r>
-                        <a:rPr sz="1050" b="0">
-                          <a:solidFill>
-                            <a:srgbClr val="000000"/>
-                          </a:solidFill>
-                          <a:latin typeface="Calibri"/>
-                        </a:rPr>
-                        <a:t>live health HUD + measured Poisson / true Cauchy</a:t>
-                      </a:r>
-                    </a:p>
-                  </a:txBody>
-                  <a:tcPr/>
-                </a:tc>
-                <a:tc>
-                  <a:txBody>
-                    <a:bodyPr lIns="54864" rIns="54864" tIns="18288" bIns="18288" wrap="square" anchor="ctr"/>
-                    <a:lstStyle/>
-                    <a:p>
-                      <a:pPr algn="l"/>
-                      <a:r>
-                        <a:rPr sz="1050" b="1">
-                          <a:solidFill>
-                            <a:srgbClr val="000000"/>
-                          </a:solidFill>
-                          <a:latin typeface="Calibri"/>
-                        </a:rPr>
-                        <a:t>HUD done</a:t>
+                        <a:t>HUD DONE · Poisson next</a:t>
                       </a:r>
                     </a:p>
                   </a:txBody>
@@ -18087,7 +18087,7 @@
                 </a:solidFill>
                 <a:latin typeface="Calibri"/>
               </a:rPr>
-              <a:t>6</a:t>
+              <a:t>9</a:t>
             </a:r>
           </a:p>
           <a:p>
@@ -18215,7 +18215,7 @@
                 </a:solidFill>
                 <a:latin typeface="Calibri"/>
               </a:rPr>
-              <a:t>6</a:t>
+              <a:t>6 / 6</a:t>
             </a:r>
           </a:p>
           <a:p>
@@ -18227,7 +18227,7 @@
                 </a:solidFill>
                 <a:latin typeface="Calibri"/>
               </a:rPr>
-              <a:t>TO RIG-TEST</a:t>
+              <a:t>RIG TESTS PASSED</a:t>
             </a:r>
           </a:p>
         </p:txBody>
@@ -18279,7 +18279,7 @@
                 </a:solidFill>
                 <a:latin typeface="Calibri"/>
               </a:rPr>
-              <a:t>LEGEND — DONE (green) · BUILT, awaiting rig test (amber) · PLANNED (grey).  Foundations + the one-click workflow have shipped; closed-loop modes and smart-DIC are partly in; the UX layer is next.</a:t>
+              <a:t>LEGEND — DONE + rig-validated (green) · partial, more to wire (amber) · PLANNED (grey).  Foundations, the one-click workflow and the strain-rate fracture test are validated on the rig; the remaining modes, measured Poisson and the UX layer are next.</a:t>
             </a:r>
           </a:p>
         </p:txBody>
@@ -18314,7 +18314,7 @@
                 </a:solidFill>
                 <a:latin typeface="Calibri"/>
               </a:rPr>
-              <a:t>All analysis logic is unit-tested / sim-validated offline; app features live in the (unversioned) main.py and follow the proven auto-preload safety discipline.</a:t>
+              <a:t>All analysis logic is unit-tested / sim-validated offline; the app feature set is now snapshot-committed (main.py a3b187f) after the full rig-test campaign — see ROADMAP.md / TESTING_TODO.md.</a:t>
             </a:r>
           </a:p>
         </p:txBody>
@@ -18899,7 +18899,7 @@
                 </a:solidFill>
                 <a:latin typeface="Calibri"/>
               </a:rPr>
-              <a:t>In the UI (main.py — awaiting rig test)</a:t>
+              <a:t>In the UI (main.py — RIG-VALIDATED · snapshot a3b187f)</a:t>
             </a:r>
           </a:p>
         </p:txBody>
@@ -18935,12 +18935,12 @@
                 <a:latin typeface="Calibri"/>
               </a:rPr>
               <a:t>•  Generate report  — one button → PDF + images
-•  Recipe dropdown  — Load / Save a test setup
+•  Settings  — Load / Save a setup (+ Default)
 •  Prepare specimen  — 1-click tare (position + force + DIC)
-•  Auto-stop at fracture  — halts on load collapse
-•  Strain-rate mode (BETA)  — closed-loop dε/dt
+•  Fracture test / Auto-stop  — halts on load collapse
+•  Strain-rate fracture test  — closed-loop dε/dt
 •  DIC health HUD  — live OK / WARN / BAD badge
-•  Safety net  — 10 kN force / 45 mm travel / 900 s cap</a:t>
+•  Safety net  — 10 kN / 30 mm / stall guard / dead-DIC</a:t>
             </a:r>
           </a:p>
         </p:txBody>
@@ -18975,7 +18975,7 @@
                 </a:solidFill>
                 <a:latin typeface="Calibri"/>
               </a:rPr>
-              <a:t>Modules committed &amp; regression-checked against the deck numbers; the UI wiring stays in the unversioned main.py and will be snapshot-committed once validated on the rig.</a:t>
+              <a:t>Modules committed &amp; regression-checked against the deck numbers; the UI feature set is now snapshot-committed (main.py a3b187f) after full rig validation.</a:t>
             </a:r>
           </a:p>
         </p:txBody>
@@ -19141,7 +19141,7 @@
                 </a:solidFill>
                 <a:latin typeface="Calibri Light"/>
               </a:rPr>
-              <a:t>TO BE TESTED — ON THE RIG / CAMERA</a:t>
+              <a:t>VALIDATED ON THE RIG  (2026-07-28 / 29)</a:t>
             </a:r>
           </a:p>
         </p:txBody>
@@ -19176,7 +19176,7 @@
                 </a:solidFill>
                 <a:latin typeface="Calibri"/>
               </a:rPr>
-              <a:t>Feature checks (needs motor + camera)</a:t>
+              <a:t>Feature checks — ALL PASSED</a:t>
             </a:r>
           </a:p>
         </p:txBody>
@@ -19240,7 +19240,7 @@
                           </a:solidFill>
                           <a:latin typeface="Calibri"/>
                         </a:rPr>
-                        <a:t>Pass =</a:t>
+                        <a:t>Result</a:t>
                       </a:r>
                     </a:p>
                   </a:txBody>
@@ -19284,7 +19284,7 @@
                           </a:solidFill>
                           <a:latin typeface="Calibri"/>
                         </a:rPr>
-                        <a:t>camera on → green 2/2; cover a dot → red BAD</a:t>
+                        <a:t>green 2/2 live; red BAD on dot cover  ✓</a:t>
                       </a:r>
                     </a:p>
                   </a:txBody>
@@ -19324,7 +19324,7 @@
                           </a:solidFill>
                           <a:latin typeface="Calibri"/>
                         </a:rPr>
-                        <a:t>one click → position + force + DIC all tared</a:t>
+                        <a:t>1 click → position + force + DIC tared  ✓</a:t>
                       </a:r>
                     </a:p>
                   </a:txBody>
@@ -19364,7 +19364,7 @@
                           </a:solidFill>
                           <a:latin typeface="Calibri"/>
                         </a:rPr>
-                        <a:t>scrap pull → Stop right at the load collapse</a:t>
+                        <a:t>caught S16 collapse 2992 → −417 N  ✓</a:t>
                       </a:r>
                     </a:p>
                   </a:txBody>
@@ -19385,7 +19385,7 @@
                           </a:solidFill>
                           <a:latin typeface="Calibri"/>
                         </a:rPr>
-                        <a:t>Recipes</a:t>
+                        <a:t>Settings</a:t>
                       </a:r>
                     </a:p>
                   </a:txBody>
@@ -19404,7 +19404,7 @@
                           </a:solidFill>
                           <a:latin typeface="Calibri"/>
                         </a:rPr>
-                        <a:t>load a starter → inputs change; Save → in list</a:t>
+                        <a:t>Default + Load / Save round-trip  ✓</a:t>
                       </a:r>
                     </a:p>
                   </a:txBody>
@@ -19444,7 +19444,7 @@
                           </a:solidFill>
                           <a:latin typeface="Calibri"/>
                         </a:rPr>
-                        <a:t>after a test → PDF + PNG land in /reports</a:t>
+                        <a:t>S16 report = CSV, every KPI  ✓</a:t>
                       </a:r>
                     </a:p>
                   </a:txBody>
@@ -19465,7 +19465,7 @@
                           </a:solidFill>
                           <a:latin typeface="Calibri"/>
                         </a:rPr>
-                        <a:t>Strain-rate (BETA)</a:t>
+                        <a:t>Strain-rate fracture</a:t>
                       </a:r>
                     </a:p>
                   </a:txBody>
@@ -19484,7 +19484,7 @@
                           </a:solidFill>
                           <a:latin typeface="Calibri"/>
                         </a:rPr>
-                        <a:t>scrap pull → holds dε/dt; stops at target / break</a:t>
+                        <a:t>held 0.0005/s → fracture, auto-stop  ✓</a:t>
                       </a:r>
                     </a:p>
                   </a:txBody>
@@ -19525,7 +19525,7 @@
                 </a:solidFill>
                 <a:latin typeface="Calibri"/>
               </a:rPr>
-              <a:t>Rig facts to report back</a:t>
+              <a:t>Rig facts — ALL RESOLVED</a:t>
             </a:r>
           </a:p>
         </p:txBody>
@@ -19561,12 +19561,13 @@
                 <a:latin typeface="Calibri"/>
               </a:rPr>
               <a:t>These unblock the other 4 test modes:
-1.  Does SetSpeed 0 HOLD the motor still?
-     (dwell — staircase / relaxation)
-2.  Clean reversal sequence — Stop → SetSpeed
-     → direction?  (cyclic / creep)
-3.  Usable crosshead stroke (mm)?
-     (finalise the 45 mm travel cap)</a:t>
+1.  Stop HOLDS position ✓
+     (zero drift over 5 / 10 / 15 s)
+2.  Direct reversal auto-decels ~1 s ✓
+     (no manual Stop needed)
+3.  Travel cap set to 30 mm ✓
+→  cyclic / staircase / relaxation / creep
+     are now UNBLOCKED to wire.</a:t>
             </a:r>
           </a:p>
         </p:txBody>
@@ -19586,7 +19587,7 @@
             <a:avLst/>
           </a:prstGeom>
           <a:solidFill>
-            <a:srgbClr val="FFF3CD"/>
+            <a:srgbClr val="C8E6C9"/>
           </a:solidFill>
           <a:ln>
             <a:noFill/>
@@ -19618,7 +19619,7 @@
                 </a:solidFill>
                 <a:latin typeface="Calibri"/>
               </a:rPr>
-              <a:t>SAFETY — Auto-stop and Strain-rate drive the motor: run them first on a SCRAP specimen with a hand near E-Stop. Everything else is read-only. Full step-by-step list: Software/UTM_PyQt6/TESTING_TODO.md</a:t>
+              <a:t>RESULT — every built feature passed on the rig; S16 = first 100% infill fracture (UTS 47.4 MPa, anchor-corrected). Strain-rate 6.2 held the target rate by adapting crosshead speed 0.10 → 0.05 mm/s. ONE hardware limit found — motor torque ceiling ~2.6 kN (next slide).</a:t>
             </a:r>
           </a:p>
         </p:txBody>
@@ -19653,7 +19654,7 @@
                 </a:solidFill>
                 <a:latin typeface="Calibri"/>
               </a:rPr>
-              <a:t>Logic is already sim/offline-validated — these runs confirm behaviour on real hardware and set the tunable thresholds (fracture arm 30% / collapse 50%, travel cap).</a:t>
+              <a:t>Full step-by-step results: Software/UTM_PyQt6/TESTING_TODO.md; thresholds confirmed (fracture arm 30% / collapse 50%, travel cap 30 mm, stall guard 0.05 mm / 6 s).</a:t>
             </a:r>
           </a:p>
         </p:txBody>
@@ -20292,10 +20293,10 @@
                 <a:latin typeface="Calibri"/>
               </a:rPr>
               <a:t>•  Cyclic / staircase / relaxation / creep modes
-    (engine ready — needs the 3 rig facts)
-•  Full 'Run to fracture' — one button:
-    preload → pull → auto-halt → anchor → save
-•  Auto specimen metadata + folder from recipe</a:t>
+    (engine ready — rig facts RESOLVED, ready to wire)
+•  Measured Poisson — 4-marker / edge-width
+    + auto specimen metadata + folder from recipe
+•  One-click per-specimen report deck</a:t>
             </a:r>
           </a:p>
         </p:txBody>
@@ -20353,7 +20354,7 @@
             <a:avLst/>
           </a:prstGeom>
           <a:solidFill>
-            <a:srgbClr val="E7F1F8"/>
+            <a:srgbClr val="FFF3CD"/>
           </a:solidFill>
           <a:ln>
             <a:noFill/>
@@ -20379,13 +20380,13 @@
           <a:p>
             <a:pPr algn="ctr"/>
             <a:r>
-              <a:rPr sz="1100" b="1">
+              <a:rPr sz="1050" b="1">
                 <a:solidFill>
                   <a:srgbClr val="000000"/>
                 </a:solidFill>
                 <a:latin typeface="Calibri"/>
               </a:rPr>
-              <a:t>ORDER — rig-test what's built → confirm the 3 facts → wire the remaining modes → edge-width Poisson (after the backdrop) → UX layer.</a:t>
+              <a:t>HARDWARE LIMIT — motor torque ceiling ~2.6 kN (variable; driver Vref / thermal / PSU) blocks 100% full-area fracture; use 50% / smaller specimens until resolved.   ORDER — wire remaining modes → edge-width Poisson → UX layer.</a:t>
             </a:r>
           </a:p>
         </p:txBody>
